--- a/docs/Сравнение с аналогами — презентация.pptx
+++ b/docs/Сравнение с аналогами — презентация.pptx
@@ -120,12 +120,12 @@
   <p:extLst>
     <p:ext uri="{521415D9-36F7-43E2-AB2F-B90AF26B5E84}">
       <p14:sectionLst xmlns:p14="http://schemas.microsoft.com/office/powerpoint/2010/main">
-        <p14:section name="Титул" id="{7f9d1e81-c86a-8df5-10bf-11ec4b3cca1d}">
+        <p14:section name="Титул" id="{837b8c70-ce80-6078-b436-97c593865be3}">
           <p14:sldIdLst>
             <p14:sldId id="256"/>
           </p14:sldIdLst>
         </p14:section>
-        <p14:section name="Основная часть" id="{1a10a969-4ed1-752e-3b04-cc9226c7d59c}">
+        <p14:section name="Основная часть" id="{fba78b94-6181-7677-3cf6-3a556b347371}">
           <p14:sldIdLst>
             <p14:sldId id="257"/>
             <p14:sldId id="258"/>
@@ -138,7 +138,7 @@
             <p14:sldId id="265"/>
           </p14:sldIdLst>
         </p14:section>
-        <p14:section name="Дополнительные слайды" id="{439f8b0b-9ee1-f555-e783-bfa876c00d98}">
+        <p14:section name="Дополнительные слайды" id="{a512b749-e04a-bb69-7662-169589be2ef7}">
           <p14:sldIdLst>
             <p14:sldId id="266"/>
             <p14:sldId id="267"/>
@@ -888,7 +888,7 @@
           <a:p>
             <a:r>
               <a:rPr lang="en-US" dirty="0"/>
-              <a:t>Тема и что сравнивается: три способа продавать чай и вести учёт — без системы, на готовой платформе и в собственной системе.</a:t>
+              <a:t>Сравниваю три способа продавать чай и вести учёт: без системы, на готовой платформе и в собственной системе.</a:t>
             </a:r>
             <a:endParaRPr lang="en-US" dirty="0"/>
           </a:p>
@@ -976,7 +976,7 @@
           <a:p>
             <a:r>
               <a:rPr lang="en-US" dirty="0"/>
-              <a:t>Последняя фраза: «Я не утверждаю, что система лучше всех. Она разумна для этой задачи, этих пользователей, требований и ограничений».</a:t>
+              <a:t>Система не лучше всех аналогов по сумме функций. Она подходит магазину, у которого ассортимент состоит из партий, и это главный довод в пользу разработки.</a:t>
             </a:r>
             <a:endParaRPr lang="en-US" dirty="0"/>
           </a:p>
@@ -1064,7 +1064,7 @@
           <a:p>
             <a:r>
               <a:rPr lang="en-US" dirty="0"/>
-              <a:t>Открывать по вопросу «почему такие баллы». Разобрать пример InSales по пунктам.</a:t>
+              <a:t>Показывать, если спросят, откуда баллы. Разобрать пример InSales по пунктам.</a:t>
             </a:r>
             <a:endParaRPr lang="en-US" dirty="0"/>
           </a:p>
@@ -1152,7 +1152,7 @@
           <a:p>
             <a:r>
               <a:rPr lang="en-US" dirty="0"/>
-              <a:t>Открывать по вопросам о производительности и падении сервера.</a:t>
+              <a:t>Показывать, если спросят о производительности или о падении сервера.</a:t>
             </a:r>
             <a:endParaRPr lang="en-US" dirty="0"/>
           </a:p>
@@ -1240,7 +1240,7 @@
           <a:p>
             <a:r>
               <a:rPr lang="en-US" dirty="0"/>
-              <a:t>Открывать по вопросу «как мерили». До замеров слайд пустой.</a:t>
+              <a:t>Показывать, если спросят, как проводились замеры.</a:t>
             </a:r>
             <a:endParaRPr lang="en-US" dirty="0"/>
           </a:p>
@@ -1328,7 +1328,7 @@
           <a:p>
             <a:r>
               <a:rPr lang="en-US" dirty="0"/>
-              <a:t>Открывать по вопросу «как работает резерв» и «где хранится партия». Таблица batches в модели пока отсутствует.</a:t>
+              <a:t>Показывать, если спросят, как работает резерв и где хранятся партии. Таблицы batches в модели пока нет.</a:t>
             </a:r>
             <a:endParaRPr lang="en-US" dirty="0"/>
           </a:p>
@@ -1416,7 +1416,7 @@
           <a:p>
             <a:r>
               <a:rPr lang="en-US" dirty="0"/>
-              <a:t>Сравниваю не стек, а способ, которым магазин решает эти пять проблем. Пользователи — покупатель и сотрудники магазина; основной сценарий — от каталога до статуса заказа.</a:t>
+              <a:t>Сейчас остатки ведутся в таблицах, а заказы приходят из разных каналов. Из-за этого бывает, что продают товар, которого уже нет, а подобрать чай по параметрам покупатель может только через продавца. Система должна закрыть эти пять проблем.</a:t>
             </a:r>
             <a:endParaRPr lang="en-US" dirty="0"/>
           </a:p>
@@ -1504,7 +1504,7 @@
           <a:p>
             <a:r>
               <a:rPr lang="en-US" dirty="0"/>
-              <a:t>Это нулевая точка: семь ручных операций на каждый заказ. При малом потоке заказов такого способа хватает — это честно говорю. Ломается на конфликте за последнюю пачку и на поиске по атрибутам.</a:t>
+              <a:t>Без системы на каждый заказ приходится семь ручных операций. Если заказов мало, этого хватает. Проблемы начинаются, когда двое покупателей претендуют на последнюю пачку и когда покупатель хочет подобрать чай сам.</a:t>
             </a:r>
             <a:endParaRPr lang="en-US" dirty="0"/>
           </a:p>
@@ -1592,7 +1592,7 @@
           <a:p>
             <a:r>
               <a:rPr lang="en-US" dirty="0"/>
-              <a:t>Рассмотрел шесть типов аналогов. Сильнейший по сумме функций — 1С-Битрикс; у него нет только партии. Дальше сравниваю с ним и с 1С:УТ — единственным, у кого партия есть.</a:t>
+              <a:t>Рассмотрено восемь вариантов шести типов. Больше всех баллов у 1С-Битрикс, ему не хватает только партий. Поэтому дальше сравниваю с ним и с 1С:УТ, где партии есть.</a:t>
             </a:r>
             <a:endParaRPr lang="en-US" dirty="0"/>
           </a:p>
@@ -1680,7 +1680,7 @@
           <a:p>
             <a:r>
               <a:rPr lang="en-US" dirty="0"/>
-              <a:t>Пять критериев, каждый связан с проблемой со слайда 1 и с требованием. Все способы проходят один и тот же сценарий на одних и тех же данных, пять повторов.</a:t>
+              <a:t>Критерии взяты из требований ВКР. Все варианты проходят один сценарий на одинаковых данных, по пять прогонов.</a:t>
             </a:r>
             <a:endParaRPr lang="en-US" dirty="0"/>
           </a:p>
@@ -1768,7 +1768,7 @@
           <a:p>
             <a:r>
               <a:rPr lang="en-US" dirty="0"/>
-              <a:t>Сначала задача и условие сравнения, затем строка вывода, затем ограничение. Таблицу не зачитывать. Заголовок выбрать по фактическим результатам замеров.</a:t>
+              <a:t>Здесь задача и условия сравнения, вывод и ограничение. Таблицу вслух не читать. Заголовок и вывод уточнить после замеров.</a:t>
             </a:r>
             <a:endParaRPr lang="en-US" dirty="0"/>
           </a:p>
@@ -1856,7 +1856,7 @@
           <a:p>
             <a:r>
               <a:rPr lang="en-US" dirty="0"/>
-              <a:t>Начать с того, в чём аналоги сильнее, потом объяснить, почему этого мало. Ответ на «почему не Битрикс»: партии нет, плюс лицензия и разработчик под Битрикс.</a:t>
+              <a:t>Если спросят, почему не Битрикс: у него нет партий, и нужны лицензия и разработчик под Битрикс.</a:t>
             </a:r>
             <a:endParaRPr lang="en-US" dirty="0"/>
           </a:p>
@@ -1944,7 +1944,7 @@
           <a:p>
             <a:r>
               <a:rPr lang="en-US" dirty="0"/>
-              <a:t>Две-три строки, начиная с «последней пачки» — это главный сценарий против работы без системы. Сказать вслух, что платформы в негативных сценариях не проверялись.</a:t>
+              <a:t>Главный пример — последняя пачка: без системы её продадут двоим, в системе остаток резервируется при оформлении. Готовые платформы в этих сценариях не проверялись.</a:t>
             </a:r>
             <a:endParaRPr lang="en-US" dirty="0"/>
           </a:p>
@@ -2032,7 +2032,7 @@
           <a:p>
             <a:r>
               <a:rPr lang="en-US" dirty="0"/>
-              <a:t>По сумме функций готовые решения сильнее, и я это показываю. Своя система закрывает сочетание, которого нет ни у одного из них. Остальные ограничения касаются интеграций, а их архитектура выносит за адаптеры.</a:t>
+              <a:t>Готовые решения в сумме сильнее. Собственная система нужна в одном случае: когда партии, поиск по атрибутам и резерв должны работать вместе.</a:t>
             </a:r>
             <a:endParaRPr lang="en-US" dirty="0"/>
           </a:p>
@@ -2130,7 +2130,7 @@
       </p:grpSpPr>
       <p:pic>
         <p:nvPicPr>
-          <p:cNvPr id="2" name="Image 0" descr="/home/user/vfirsov-vr22-vkr/docs/presentation/logo.png">    </p:cNvPr>
+          <p:cNvPr id="2" name="Image 0" descr="/tmp/claude-0/-home-user-vfirsov-vr22-vkr/1f51b8f7-b11a-5c34-a69a-b28d1e65b266/scratchpad/deck/logo.png">    </p:cNvPr>
           <p:cNvPicPr>
             <a:picLocks noChangeAspect="1"/>
           </p:cNvPicPr>
@@ -2186,7 +2186,7 @@
       </p:grpSpPr>
       <p:pic>
         <p:nvPicPr>
-          <p:cNvPr id="2" name="Image 0" descr="/home/user/vfirsov-vr22-vkr/docs/presentation/logo.png">    </p:cNvPr>
+          <p:cNvPr id="2" name="Image 0" descr="/tmp/claude-0/-home-user-vfirsov-vr22-vkr/1f51b8f7-b11a-5c34-a69a-b28d1e65b266/scratchpad/deck/logo.png">    </p:cNvPr>
           <p:cNvPicPr>
             <a:picLocks noChangeAspect="1"/>
           </p:cNvPicPr>
@@ -3039,7 +3039,7 @@
                   <a:schemeClr val="tx1"/>
                 </a:solidFill>
               </a:rPr>
-              <a:t>Фирсов Виктор Дмитриевич · руководитель — к. ф.-м. н., доцент Пономарёва Людмила Алексеевна</a:t>
+              <a:t>Фирсов Виктор Дмитриевич · руководитель к. ф.-м. н., доцент Пономарёва Людмила Алексеевна</a:t>
             </a:r>
             <a:endParaRPr lang="en-US" sz="1100" dirty="0"/>
           </a:p>
@@ -3212,7 +3212,7 @@
                   <a:schemeClr val="accent2"/>
                 </a:solidFill>
               </a:rPr>
-              <a:t>ВЫВОД</a:t>
+              <a:t>ВЫВОДЫ</a:t>
             </a:r>
             <a:endParaRPr lang="en-US" sz="950" dirty="0"/>
           </a:p>
@@ -3250,7 +3250,7 @@
                   <a:schemeClr val="tx1"/>
                 </a:solidFill>
               </a:rPr>
-              <a:t>Разумно для партионного ассортимента</a:t>
+              <a:t>Выводы и вклад автора</a:t>
             </a:r>
             <a:endParaRPr lang="en-US" sz="2700" dirty="0"/>
           </a:p>
@@ -3288,7 +3288,7 @@
                   <a:schemeClr val="accent3"/>
                 </a:solidFill>
               </a:rPr>
-              <a:t>Не «лучше всех», а обоснованный выбор для конкретной задачи и ограничений</a:t>
+              <a:t>По результатам сравнения с семью аналогами и работой без системы</a:t>
             </a:r>
             <a:endParaRPr lang="en-US" sz="1300" dirty="0"/>
           </a:p>
@@ -3334,7 +3334,7 @@
       </p:sp>
       <p:sp>
         <p:nvSpPr>
-          <p:cNvPr id="7" name="card-134"/>
+          <p:cNvPr id="7" name="card-135"/>
           <p:cNvSpPr/>
           <p:nvPr/>
         </p:nvSpPr>
@@ -3356,14 +3356,14 @@
       </p:sp>
       <p:sp>
         <p:nvSpPr>
-          <p:cNvPr id="8" name="text-135"/>
+          <p:cNvPr id="8" name="text-136"/>
           <p:cNvSpPr txBox="1"/>
           <p:nvPr/>
         </p:nvSpPr>
         <p:spPr>
           <a:xfrm>
-            <a:off x="787400" y="1955800"/>
-            <a:ext cx="10591800" cy="762000"/>
+            <a:off x="787400" y="1930400"/>
+            <a:ext cx="10591800" cy="812800"/>
           </a:xfrm>
           <a:prstGeom prst="rect">
             <a:avLst/>
@@ -3379,20 +3379,20 @@
               <a:buNone/>
             </a:pPr>
             <a:r>
-              <a:rPr lang="en-US" sz="1250" dirty="0">
+              <a:rPr lang="en-US" sz="1200" dirty="0">
                 <a:solidFill>
                   <a:schemeClr val="bg1"/>
                 </a:solidFill>
               </a:rPr>
-              <a:t>По сумме функций готовые решения сильнее. Своя система — единственный вариант, где партия, резерв при оформлении и поиск по атрибутам чая работают в одной модели. Это обоснованный выбор для магазина, где партия — основа ассортимента; в других условиях разумнее аналоги (слайд 8).</a:t>
-            </a:r>
-            <a:endParaRPr lang="en-US" sz="1250" dirty="0"/>
+              <a:t>Готовые решения в сумме набирают больше баллов. Но партию, резерв при оформлении и поиск по атрибутам чая в одной модели данных поддерживает только собственная система. Для магазина, у которого ассортимент состоит из партий, это оправдывает разработку. В других условиях выгоднее аналоги со слайда 8.</a:t>
+            </a:r>
+            <a:endParaRPr lang="en-US" sz="1200" dirty="0"/>
           </a:p>
         </p:txBody>
       </p:sp>
       <p:sp>
         <p:nvSpPr>
-          <p:cNvPr id="9" name="text-136"/>
+          <p:cNvPr id="9" name="text-137"/>
           <p:cNvSpPr txBox="1"/>
           <p:nvPr/>
         </p:nvSpPr>
@@ -3428,7 +3428,7 @@
       </p:sp>
       <p:sp>
         <p:nvSpPr>
-          <p:cNvPr id="10" name="card-137"/>
+          <p:cNvPr id="10" name="card-138"/>
           <p:cNvSpPr/>
           <p:nvPr/>
         </p:nvSpPr>
@@ -3450,7 +3450,7 @@
       </p:sp>
       <p:sp>
         <p:nvSpPr>
-          <p:cNvPr id="11" name="text-138"/>
+          <p:cNvPr id="11" name="text-139"/>
           <p:cNvSpPr txBox="1"/>
           <p:nvPr/>
         </p:nvSpPr>
@@ -3486,7 +3486,7 @@
       </p:sp>
       <p:sp>
         <p:nvSpPr>
-          <p:cNvPr id="12" name="text-139"/>
+          <p:cNvPr id="12" name="text-140"/>
           <p:cNvSpPr txBox="1"/>
           <p:nvPr/>
         </p:nvSpPr>
@@ -3514,7 +3514,7 @@
                   <a:schemeClr val="tx1"/>
                 </a:solidFill>
               </a:rPr>
-              <a:t>Процесс «как есть», 17 функциональных и 13 нефункциональных требований</a:t>
+              <a:t>Текущий процесс, 17 функциональных и 13 нефункциональных требований</a:t>
             </a:r>
             <a:endParaRPr lang="en-US" sz="1100" dirty="0"/>
           </a:p>
@@ -3522,7 +3522,7 @@
       </p:sp>
       <p:sp>
         <p:nvSpPr>
-          <p:cNvPr id="13" name="card-140"/>
+          <p:cNvPr id="13" name="card-141"/>
           <p:cNvSpPr/>
           <p:nvPr/>
         </p:nvSpPr>
@@ -3544,7 +3544,7 @@
       </p:sp>
       <p:sp>
         <p:nvSpPr>
-          <p:cNvPr id="14" name="text-141"/>
+          <p:cNvPr id="14" name="text-142"/>
           <p:cNvSpPr txBox="1"/>
           <p:nvPr/>
         </p:nvSpPr>
@@ -3580,7 +3580,7 @@
       </p:sp>
       <p:sp>
         <p:nvSpPr>
-          <p:cNvPr id="15" name="text-142"/>
+          <p:cNvPr id="15" name="text-143"/>
           <p:cNvSpPr txBox="1"/>
           <p:nvPr/>
         </p:nvSpPr>
@@ -3608,7 +3608,7 @@
                   <a:schemeClr val="tx1"/>
                 </a:solidFill>
               </a:rPr>
-              <a:t>IDEF0, варианты использования, состояния заказа, классы, компоненты</a:t>
+              <a:t>IDEF0, варианты использования, диаграмма состояний заказа, классы, компоненты</a:t>
             </a:r>
             <a:endParaRPr lang="en-US" sz="1100" dirty="0"/>
           </a:p>
@@ -3616,7 +3616,7 @@
       </p:sp>
       <p:sp>
         <p:nvSpPr>
-          <p:cNvPr id="16" name="card-143"/>
+          <p:cNvPr id="16" name="card-144"/>
           <p:cNvSpPr/>
           <p:nvPr/>
         </p:nvSpPr>
@@ -3638,7 +3638,7 @@
       </p:sp>
       <p:sp>
         <p:nvSpPr>
-          <p:cNvPr id="17" name="text-144"/>
+          <p:cNvPr id="17" name="text-145"/>
           <p:cNvSpPr txBox="1"/>
           <p:nvPr/>
         </p:nvSpPr>
@@ -3666,7 +3666,7 @@
                   <a:schemeClr val="accent2"/>
                 </a:solidFill>
               </a:rPr>
-              <a:t>Данные</a:t>
+              <a:t>База данных</a:t>
             </a:r>
             <a:endParaRPr lang="en-US" sz="1150" dirty="0"/>
           </a:p>
@@ -3674,7 +3674,7 @@
       </p:sp>
       <p:sp>
         <p:nvSpPr>
-          <p:cNvPr id="18" name="text-145"/>
+          <p:cNvPr id="18" name="text-146"/>
           <p:cNvSpPr txBox="1"/>
           <p:nvPr/>
         </p:nvSpPr>
@@ -3710,7 +3710,7 @@
       </p:sp>
       <p:sp>
         <p:nvSpPr>
-          <p:cNvPr id="19" name="card-146"/>
+          <p:cNvPr id="19" name="card-147"/>
           <p:cNvSpPr/>
           <p:nvPr/>
         </p:nvSpPr>
@@ -3732,7 +3732,7 @@
       </p:sp>
       <p:sp>
         <p:nvSpPr>
-          <p:cNvPr id="20" name="text-147"/>
+          <p:cNvPr id="20" name="text-148"/>
           <p:cNvSpPr txBox="1"/>
           <p:nvPr/>
         </p:nvSpPr>
@@ -3768,7 +3768,7 @@
       </p:sp>
       <p:sp>
         <p:nvSpPr>
-          <p:cNvPr id="21" name="text-148"/>
+          <p:cNvPr id="21" name="text-149"/>
           <p:cNvSpPr txBox="1"/>
           <p:nvPr/>
         </p:nvSpPr>
@@ -3796,7 +3796,7 @@
                   <a:schemeClr val="tx1"/>
                 </a:solidFill>
               </a:rPr>
-              <a:t>Flask и Vue.js: фильтры, заказ с резервом, RBAC, админ-панель</a:t>
+              <a:t>Flask и Vue.js: фильтры, оформление заказа с резервом, роли, админ-панель</a:t>
             </a:r>
             <a:endParaRPr lang="en-US" sz="1100" dirty="0"/>
           </a:p>
@@ -3804,7 +3804,7 @@
       </p:sp>
       <p:sp>
         <p:nvSpPr>
-          <p:cNvPr id="22" name="card-149"/>
+          <p:cNvPr id="22" name="card-150"/>
           <p:cNvSpPr/>
           <p:nvPr/>
         </p:nvSpPr>
@@ -3826,7 +3826,7 @@
       </p:sp>
       <p:sp>
         <p:nvSpPr>
-          <p:cNvPr id="23" name="text-150"/>
+          <p:cNvPr id="23" name="text-151"/>
           <p:cNvSpPr txBox="1"/>
           <p:nvPr/>
         </p:nvSpPr>
@@ -3862,7 +3862,7 @@
       </p:sp>
       <p:sp>
         <p:nvSpPr>
-          <p:cNvPr id="24" name="text-151"/>
+          <p:cNvPr id="24" name="text-152"/>
           <p:cNvSpPr txBox="1"/>
           <p:nvPr/>
         </p:nvSpPr>
@@ -3890,7 +3890,7 @@
                   <a:schemeClr val="tx1"/>
                 </a:solidFill>
               </a:rPr>
-              <a:t>7 аналогов по 20 проверяемым пунктам с источниками, протокол замеров</a:t>
+              <a:t>Оценка семи аналогов по 20 пунктам с источниками, порядок замеров</a:t>
             </a:r>
             <a:endParaRPr lang="en-US" sz="1100" dirty="0"/>
           </a:p>
@@ -3898,7 +3898,7 @@
       </p:sp>
       <p:sp>
         <p:nvSpPr>
-          <p:cNvPr id="25" name="card-152"/>
+          <p:cNvPr id="25" name="card-153"/>
           <p:cNvSpPr/>
           <p:nvPr/>
         </p:nvSpPr>
@@ -3920,7 +3920,7 @@
       </p:sp>
       <p:sp>
         <p:nvSpPr>
-          <p:cNvPr id="26" name="text-153"/>
+          <p:cNvPr id="26" name="text-154"/>
           <p:cNvSpPr txBox="1"/>
           <p:nvPr/>
         </p:nvSpPr>
@@ -3956,7 +3956,7 @@
       </p:sp>
       <p:sp>
         <p:nvSpPr>
-          <p:cNvPr id="27" name="text-154"/>
+          <p:cNvPr id="27" name="text-155"/>
           <p:cNvSpPr txBox="1"/>
           <p:nvPr/>
         </p:nvSpPr>
@@ -3984,7 +3984,7 @@
                   <a:schemeClr val="tx1"/>
                 </a:solidFill>
               </a:rPr>
-              <a:t>Пользовательское и нагрузочное: 1,2 с при 100 RPS</a:t>
+              <a:t>Пользовательское и нагрузочное, 1,2 с при 100 RPS</a:t>
             </a:r>
             <a:endParaRPr lang="en-US" sz="1100" dirty="0"/>
           </a:p>
@@ -4085,7 +4085,7 @@
                   <a:schemeClr val="accent2"/>
                 </a:solidFill>
               </a:rPr>
-              <a:t>ДОПОЛНИТЕЛЬНЫЙ СЛАЙД · БАЛЛЫ</a:t>
+              <a:t>ДОПОЛНИТЕЛЬНЫЙ СЛАЙД</a:t>
             </a:r>
             <a:endParaRPr lang="en-US" sz="950" dirty="0"/>
           </a:p>
@@ -4123,7 +4123,7 @@
                   <a:schemeClr val="tx1"/>
                 </a:solidFill>
               </a:rPr>
-              <a:t>Баллы аналогов по рубрике</a:t>
+              <a:t>Баллы по критериям</a:t>
             </a:r>
             <a:endParaRPr lang="en-US" sz="2700" dirty="0"/>
           </a:p>
@@ -4161,7 +4161,7 @@
                   <a:schemeClr val="accent3"/>
                 </a:solidFill>
               </a:rPr>
-              <a:t>Балл критерия = 1 + сумма по 4 пунктам: 1 — есть, 0,5 — частично или плагином, 0 — нет. Итог — среднее пяти критериев</a:t>
+              <a:t>Балл критерия равен 1 плюс сумма по четырём пунктам (1 есть, 0,5 частично или через плагин, 0 нет). Итог — среднее по пяти критериям</a:t>
             </a:r>
             <a:endParaRPr lang="en-US" sz="1300" dirty="0"/>
           </a:p>
@@ -4207,7 +4207,7 @@
       </p:sp>
       <p:graphicFrame>
         <p:nvGraphicFramePr>
-          <p:cNvPr id="12" name="table-155"/>
+          <p:cNvPr id="12" name="table-156"/>
           <p:cNvGraphicFramePr>
             <a:graphicFrameLocks noGrp="1"/>
           </p:cNvGraphicFramePr>
@@ -4252,7 +4252,7 @@
                             <a:schemeClr val="bg1"/>
                           </a:solidFill>
                         </a:rPr>
-                        <a:t>Способ</a:t>
+                        <a:t>Вариант</a:t>
                       </a:r>
                       <a:endParaRPr lang="en-US" sz="1000" dirty="0"/>
                     </a:p>
@@ -4809,7 +4809,7 @@
                             <a:schemeClr val="tx1"/>
                           </a:solidFill>
                         </a:rPr>
-                        <a:t>47 000 ₽, далее 11 750 ₽/год; хостинг, разработка</a:t>
+                        <a:t>47 000 ₽, затем 11 750 ₽ в год, плюс хостинг и разработка</a:t>
                       </a:r>
                       <a:endParaRPr lang="en-US" sz="1000" dirty="0"/>
                     </a:p>
@@ -5107,7 +5107,7 @@
                             <a:schemeClr val="tx1"/>
                           </a:solidFill>
                         </a:rPr>
-                        <a:t>≈ 27 540 ₽ (2 295 ₽/мес)</a:t>
+                        <a:t>около 27 540 ₽ (2 295 ₽ в месяц)</a:t>
                       </a:r>
                       <a:endParaRPr lang="en-US" sz="1000" dirty="0"/>
                     </a:p>
@@ -5703,7 +5703,7 @@
                             <a:schemeClr val="tx1"/>
                           </a:solidFill>
                         </a:rPr>
-                        <a:t>ядро 0 ₽; хостинг, плагины — [оценить]</a:t>
+                        <a:t>ядро бесплатно, хостинг и плагины [оценить]</a:t>
                       </a:r>
                       <a:endParaRPr lang="en-US" sz="1000" dirty="0"/>
                     </a:p>
@@ -6001,7 +6001,7 @@
                             <a:schemeClr val="tx1"/>
                           </a:solidFill>
                         </a:rPr>
-                        <a:t>≈ 112 320 ₽ (3 пользователя)</a:t>
+                        <a:t>около 112 320 ₽ (3 пользователя)</a:t>
                       </a:r>
                       <a:endParaRPr lang="en-US" sz="1000" dirty="0"/>
                     </a:p>
@@ -6597,7 +6597,7 @@
                             <a:schemeClr val="tx1"/>
                           </a:solidFill>
                         </a:rPr>
-                        <a:t>от $39/мес [сверить]</a:t>
+                        <a:t>от $39 в месяц [проверить]</a:t>
                       </a:r>
                       <a:endParaRPr lang="en-US" sz="1000" dirty="0"/>
                     </a:p>
@@ -6895,7 +6895,7 @@
                             <a:schemeClr val="tx1"/>
                           </a:solidFill>
                         </a:rPr>
-                        <a:t>≈ 0 ₽</a:t>
+                        <a:t>около 0 ₽</a:t>
                       </a:r>
                       <a:endParaRPr lang="en-US" sz="1000" dirty="0"/>
                     </a:p>
@@ -6925,7 +6925,7 @@
       </p:graphicFrame>
       <p:sp>
         <p:nvSpPr>
-          <p:cNvPr id="8" name="text-156"/>
+          <p:cNvPr id="8" name="text-157"/>
           <p:cNvSpPr txBox="1"/>
           <p:nvPr/>
         </p:nvSpPr>
@@ -6953,7 +6953,7 @@
                   <a:schemeClr val="accent2"/>
                 </a:solidFill>
               </a:rPr>
-              <a:t>Пример: InSales, расширяемость = 1 + (1 + 1 + 0,5 + 0,5) = 4 — есть API и вебхуки; своя логика только внешним приложением; перенести магазин на свой сервер нельзя. Диапазон — где пункт не удалось проверить. Цены на 23.10.2026; источник по каждому пункту — в таблице доказательств.</a:t>
+              <a:t>Пример: у InSales расширяемость 1 + (1 + 1 + 0,5 + 0,5) = 4. Есть API и вебхуки, своя логика возможна только во внешнем приложении, перенести магазин на свой сервер нельзя. Диапазон указан там, где пункт не удалось проверить. Цены на 23.10.2026.</a:t>
             </a:r>
             <a:endParaRPr lang="en-US" sz="1000" dirty="0"/>
           </a:p>
@@ -7054,7 +7054,7 @@
                   <a:schemeClr val="accent2"/>
                 </a:solidFill>
               </a:rPr>
-              <a:t>ДОПОЛНИТЕЛЬНЫЙ СЛАЙД · НАГРУЗКА</a:t>
+              <a:t>ДОПОЛНИТЕЛЬНЫЙ СЛАЙД</a:t>
             </a:r>
             <a:endParaRPr lang="en-US" sz="950" dirty="0"/>
           </a:p>
@@ -7130,7 +7130,7 @@
                   <a:schemeClr val="accent3"/>
                 </a:solidFill>
               </a:rPr>
-              <a:t>Apache Benchmark, отчёт, табл. 5: отклик и доля успешных запросов при росте нагрузки</a:t>
+              <a:t>Apache Benchmark, отчёт, табл. 5</a:t>
             </a:r>
             <a:endParaRPr lang="en-US" sz="1300" dirty="0"/>
           </a:p>
@@ -7176,7 +7176,7 @@
       </p:sp>
       <p:sp>
         <p:nvSpPr>
-          <p:cNvPr id="7" name="card-157"/>
+          <p:cNvPr id="7" name="card-158"/>
           <p:cNvSpPr/>
           <p:nvPr/>
         </p:nvSpPr>
@@ -7198,7 +7198,7 @@
       </p:sp>
       <p:sp>
         <p:nvSpPr>
-          <p:cNvPr id="8" name="text-158"/>
+          <p:cNvPr id="8" name="text-159"/>
           <p:cNvSpPr txBox="1"/>
           <p:nvPr/>
         </p:nvSpPr>
@@ -7234,7 +7234,7 @@
       </p:sp>
       <p:sp>
         <p:nvSpPr>
-          <p:cNvPr id="9" name="text-159"/>
+          <p:cNvPr id="9" name="text-160"/>
           <p:cNvSpPr txBox="1"/>
           <p:nvPr/>
         </p:nvSpPr>
@@ -7262,7 +7262,7 @@
                   <a:schemeClr val="accent3"/>
                 </a:solidFill>
               </a:rPr>
-              <a:t>отклик при 100 RPS, норма N-01 ≤ 2 с</a:t>
+              <a:t>отклик при 100 RPS, норма N-01 до 2 с</a:t>
             </a:r>
             <a:endParaRPr lang="en-US" sz="1000" dirty="0"/>
           </a:p>
@@ -7270,7 +7270,7 @@
       </p:sp>
       <p:sp>
         <p:nvSpPr>
-          <p:cNvPr id="10" name="card-160"/>
+          <p:cNvPr id="10" name="card-161"/>
           <p:cNvSpPr/>
           <p:nvPr/>
         </p:nvSpPr>
@@ -7292,7 +7292,7 @@
       </p:sp>
       <p:sp>
         <p:nvSpPr>
-          <p:cNvPr id="11" name="text-161"/>
+          <p:cNvPr id="11" name="text-162"/>
           <p:cNvSpPr txBox="1"/>
           <p:nvPr/>
         </p:nvSpPr>
@@ -7328,7 +7328,7 @@
       </p:sp>
       <p:sp>
         <p:nvSpPr>
-          <p:cNvPr id="12" name="text-162"/>
+          <p:cNvPr id="12" name="text-163"/>
           <p:cNvSpPr txBox="1"/>
           <p:nvPr/>
         </p:nvSpPr>
@@ -7364,7 +7364,7 @@
       </p:sp>
       <p:sp>
         <p:nvSpPr>
-          <p:cNvPr id="13" name="card-163"/>
+          <p:cNvPr id="13" name="card-164"/>
           <p:cNvSpPr/>
           <p:nvPr/>
         </p:nvSpPr>
@@ -7386,7 +7386,7 @@
       </p:sp>
       <p:sp>
         <p:nvSpPr>
-          <p:cNvPr id="14" name="text-164"/>
+          <p:cNvPr id="14" name="text-165"/>
           <p:cNvSpPr txBox="1"/>
           <p:nvPr/>
         </p:nvSpPr>
@@ -7422,7 +7422,7 @@
       </p:sp>
       <p:sp>
         <p:nvSpPr>
-          <p:cNvPr id="15" name="text-165"/>
+          <p:cNvPr id="15" name="text-166"/>
           <p:cNvSpPr txBox="1"/>
           <p:nvPr/>
         </p:nvSpPr>
@@ -7450,7 +7450,7 @@
                   <a:schemeClr val="accent3"/>
                 </a:solidFill>
               </a:rPr>
-              <a:t>отклик при 200 RPS — выше нормы</a:t>
+              <a:t>отклик при 200 RPS, выше нормы</a:t>
             </a:r>
             <a:endParaRPr lang="en-US" sz="1000" dirty="0"/>
           </a:p>
@@ -7458,7 +7458,7 @@
       </p:sp>
       <p:sp>
         <p:nvSpPr>
-          <p:cNvPr id="16" name="card-166"/>
+          <p:cNvPr id="16" name="card-167"/>
           <p:cNvSpPr/>
           <p:nvPr/>
         </p:nvSpPr>
@@ -7480,7 +7480,7 @@
       </p:sp>
       <p:sp>
         <p:nvSpPr>
-          <p:cNvPr id="17" name="text-167"/>
+          <p:cNvPr id="17" name="text-168"/>
           <p:cNvSpPr txBox="1"/>
           <p:nvPr/>
         </p:nvSpPr>
@@ -7516,7 +7516,7 @@
       </p:sp>
       <p:sp>
         <p:nvSpPr>
-          <p:cNvPr id="18" name="text-168"/>
+          <p:cNvPr id="18" name="text-169"/>
           <p:cNvSpPr txBox="1"/>
           <p:nvPr/>
         </p:nvSpPr>
@@ -7568,7 +7568,7 @@
       </p:graphicFrame>
       <p:sp>
         <p:nvSpPr>
-          <p:cNvPr id="20" name="card-169"/>
+          <p:cNvPr id="20" name="card-170"/>
           <p:cNvSpPr/>
           <p:nvPr/>
         </p:nvSpPr>
@@ -7590,7 +7590,7 @@
       </p:sp>
       <p:sp>
         <p:nvSpPr>
-          <p:cNvPr id="21" name="text-170"/>
+          <p:cNvPr id="21" name="text-171"/>
           <p:cNvSpPr txBox="1"/>
           <p:nvPr/>
         </p:nvSpPr>
@@ -7626,7 +7626,7 @@
       </p:sp>
       <p:sp>
         <p:nvSpPr>
-          <p:cNvPr id="22" name="text-171"/>
+          <p:cNvPr id="22" name="text-172"/>
           <p:cNvSpPr txBox="1"/>
           <p:nvPr/>
         </p:nvSpPr>
@@ -7654,7 +7654,7 @@
                   <a:srgbClr val="C9CBD8"/>
                 </a:solidFill>
               </a:rPr>
-              <a:t>До 100 RPS норма выполняется. При 150–200 RPS отклик 1,9–2,8 с: синхронная обработка Flask и WSGI, нет кеша. План: Redis-кеш фильтров, статика на CDN, переход на ASGI.</a:t>
+              <a:t>До 100 RPS норма выполняется. При 150–200 RPS отклик 1,9–2,8 с из-за синхронной обработки Flask и WSGI и отсутствия кеша. План: кеш фильтров в Redis, статика на CDN, переход на ASGI.</a:t>
             </a:r>
             <a:endParaRPr lang="en-US" sz="1050" dirty="0"/>
           </a:p>
@@ -7662,7 +7662,7 @@
       </p:sp>
       <p:sp>
         <p:nvSpPr>
-          <p:cNvPr id="23" name="card-172"/>
+          <p:cNvPr id="23" name="card-173"/>
           <p:cNvSpPr/>
           <p:nvPr/>
         </p:nvSpPr>
@@ -7684,7 +7684,7 @@
       </p:sp>
       <p:sp>
         <p:nvSpPr>
-          <p:cNvPr id="24" name="text-173"/>
+          <p:cNvPr id="24" name="text-174"/>
           <p:cNvSpPr txBox="1"/>
           <p:nvPr/>
         </p:nvSpPr>
@@ -7720,7 +7720,7 @@
       </p:sp>
       <p:sp>
         <p:nvSpPr>
-          <p:cNvPr id="25" name="text-174"/>
+          <p:cNvPr id="25" name="text-175"/>
           <p:cNvSpPr txBox="1"/>
           <p:nvPr/>
         </p:nvSpPr>
@@ -7748,7 +7748,7 @@
                   <a:schemeClr val="accent2"/>
                 </a:solidFill>
               </a:rPr>
-              <a:t>Локальный сервер: 4 ядра, 8 ГБ RAM; PostgreSQL и Flask в Docker-контейнерах. Production-стенда нет.</a:t>
+              <a:t>Локальный сервер, 4 ядра, 8 ГБ RAM, PostgreSQL и Flask в Docker-контейнерах. Production-стенда нет.</a:t>
             </a:r>
             <a:endParaRPr lang="en-US" sz="1050" dirty="0"/>
           </a:p>
@@ -7849,7 +7849,7 @@
                   <a:schemeClr val="accent2"/>
                 </a:solidFill>
               </a:rPr>
-              <a:t>ДОПОЛНИТЕЛЬНЫЙ СЛАЙД · ЗАМЕРЫ</a:t>
+              <a:t>ДОПОЛНИТЕЛЬНЫЙ СЛАЙД</a:t>
             </a:r>
             <a:endParaRPr lang="en-US" sz="950" dirty="0"/>
           </a:p>
@@ -7887,7 +7887,7 @@
                   <a:schemeClr val="tx1"/>
                 </a:solidFill>
               </a:rPr>
-              <a:t>Сырые замеры сценария</a:t>
+              <a:t>Результаты замеров</a:t>
             </a:r>
             <a:endParaRPr lang="en-US" sz="2700" dirty="0"/>
           </a:p>
@@ -7925,7 +7925,7 @@
                   <a:schemeClr val="accent3"/>
                 </a:solidFill>
               </a:rPr>
-              <a:t>Заполнить после замеров: 5 засчитываемых прогонов, тренировочный не учитывается, порядок систем меняется</a:t>
+              <a:t>Заполняется после замеров: 5 засчитанных прогонов, пробный не учитывается, порядок систем меняется</a:t>
             </a:r>
             <a:endParaRPr lang="en-US" sz="1300" dirty="0"/>
           </a:p>
@@ -7971,7 +7971,7 @@
       </p:sp>
       <p:sp>
         <p:nvSpPr>
-          <p:cNvPr id="7" name="text-175"/>
+          <p:cNvPr id="7" name="text-176"/>
           <p:cNvSpPr txBox="1"/>
           <p:nvPr/>
         </p:nvSpPr>
@@ -7999,7 +7999,7 @@
                   <a:schemeClr val="accent2"/>
                 </a:solidFill>
               </a:rPr>
-              <a:t>ВРЕМЯ ОФОРМЛЕНИЯ ЗАКАЗА ПОКУПАТЕЛЕМ, МИН</a:t>
+              <a:t>ВРЕМЯ ОФОРМЛЕНИЯ ЗАКАЗА, МИН</a:t>
             </a:r>
             <a:endParaRPr lang="en-US" sz="900" dirty="0"/>
           </a:p>
@@ -8007,7 +8007,7 @@
       </p:sp>
       <p:graphicFrame>
         <p:nvGraphicFramePr>
-          <p:cNvPr id="14" name="table-176"/>
+          <p:cNvPr id="14" name="table-177"/>
           <p:cNvGraphicFramePr>
             <a:graphicFrameLocks noGrp="1"/>
           </p:cNvGraphicFramePr>
@@ -8052,7 +8052,7 @@
                             <a:schemeClr val="bg1"/>
                           </a:solidFill>
                         </a:rPr>
-                        <a:t>Способ</a:t>
+                        <a:t>Вариант</a:t>
                       </a:r>
                       <a:endParaRPr lang="en-US" sz="1000" dirty="0"/>
                     </a:p>
@@ -8311,7 +8311,7 @@
                             <a:schemeClr val="bg1"/>
                           </a:solidFill>
                         </a:rPr>
-                        <a:t>Мин–макс</a:t>
+                        <a:t>Мин и макс</a:t>
                       </a:r>
                       <a:endParaRPr lang="en-US" sz="1000" dirty="0"/>
                     </a:p>
@@ -9533,7 +9533,7 @@
       </p:graphicFrame>
       <p:sp>
         <p:nvSpPr>
-          <p:cNvPr id="9" name="text-177"/>
+          <p:cNvPr id="9" name="text-178"/>
           <p:cNvSpPr txBox="1"/>
           <p:nvPr/>
         </p:nvSpPr>
@@ -9569,7 +9569,7 @@
       </p:sp>
       <p:graphicFrame>
         <p:nvGraphicFramePr>
-          <p:cNvPr id="27" name="table-178"/>
+          <p:cNvPr id="27" name="table-179"/>
           <p:cNvGraphicFramePr>
             <a:graphicFrameLocks noGrp="1"/>
           </p:cNvGraphicFramePr>
@@ -9614,7 +9614,7 @@
                             <a:schemeClr val="bg1"/>
                           </a:solidFill>
                         </a:rPr>
-                        <a:t>Способ</a:t>
+                        <a:t>Вариант</a:t>
                       </a:r>
                       <a:endParaRPr lang="en-US" sz="1000" dirty="0"/>
                     </a:p>
@@ -9873,7 +9873,7 @@
                             <a:schemeClr val="bg1"/>
                           </a:solidFill>
                         </a:rPr>
-                        <a:t>Мин–макс</a:t>
+                        <a:t>Мин и макс</a:t>
                       </a:r>
                       <a:endParaRPr lang="en-US" sz="1000" dirty="0"/>
                     </a:p>
@@ -11095,7 +11095,7 @@
       </p:graphicFrame>
       <p:sp>
         <p:nvSpPr>
-          <p:cNvPr id="11" name="text-179"/>
+          <p:cNvPr id="11" name="text-180"/>
           <p:cNvSpPr txBox="1"/>
           <p:nvPr/>
         </p:nvSpPr>
@@ -11224,7 +11224,7 @@
                   <a:schemeClr val="accent2"/>
                 </a:solidFill>
               </a:rPr>
-              <a:t>ДОПОЛНИТЕЛЬНЫЙ СЛАЙД · РЕЗЕРВ</a:t>
+              <a:t>ДОПОЛНИТЕЛЬНЫЙ СЛАЙД</a:t>
             </a:r>
             <a:endParaRPr lang="en-US" sz="950" dirty="0"/>
           </a:p>
@@ -11262,7 +11262,7 @@
                   <a:schemeClr val="tx1"/>
                 </a:solidFill>
               </a:rPr>
-              <a:t>Как устроен резерв</a:t>
+              <a:t>Резерв и жизненный цикл заказа</a:t>
             </a:r>
             <a:endParaRPr lang="en-US" sz="2700" dirty="0"/>
           </a:p>
@@ -11300,7 +11300,7 @@
                   <a:schemeClr val="accent3"/>
                 </a:solidFill>
               </a:rPr>
-              <a:t>Жизненный цикл заказа (ВКР, рис. 1.9) и фрагмент модели данных (отчёт, разд. 2.4)</a:t>
+              <a:t>Состояния заказа (ВКР, рис. 1.9) и таблицы, которые участвуют в резерве (отчёт, разд. 2.4)</a:t>
             </a:r>
             <a:endParaRPr lang="en-US" sz="1300" dirty="0"/>
           </a:p>
@@ -11346,7 +11346,7 @@
       </p:sp>
       <p:sp>
         <p:nvSpPr>
-          <p:cNvPr id="7" name="text-180"/>
+          <p:cNvPr id="7" name="text-181"/>
           <p:cNvSpPr txBox="1"/>
           <p:nvPr/>
         </p:nvSpPr>
@@ -11374,7 +11374,7 @@
                   <a:schemeClr val="accent2"/>
                 </a:solidFill>
               </a:rPr>
-              <a:t>ЖИЗНЕННЫЙ ЦИКЛ ЗАКАЗА</a:t>
+              <a:t>СОСТОЯНИЯ ЗАКАЗА</a:t>
             </a:r>
             <a:endParaRPr lang="en-US" sz="900" dirty="0"/>
           </a:p>
@@ -11382,7 +11382,7 @@
       </p:sp>
       <p:sp>
         <p:nvSpPr>
-          <p:cNvPr id="8" name="state-181"/>
+          <p:cNvPr id="8" name="state-182"/>
           <p:cNvSpPr/>
           <p:nvPr/>
         </p:nvSpPr>
@@ -11404,7 +11404,7 @@
       </p:sp>
       <p:sp>
         <p:nvSpPr>
-          <p:cNvPr id="9" name="text-182"/>
+          <p:cNvPr id="9" name="text-183"/>
           <p:cNvSpPr txBox="1"/>
           <p:nvPr/>
         </p:nvSpPr>
@@ -11440,7 +11440,7 @@
       </p:sp>
       <p:sp>
         <p:nvSpPr>
-          <p:cNvPr id="10" name="text-183"/>
+          <p:cNvPr id="10" name="text-184"/>
           <p:cNvSpPr txBox="1"/>
           <p:nvPr/>
         </p:nvSpPr>
@@ -11476,7 +11476,7 @@
       </p:sp>
       <p:sp>
         <p:nvSpPr>
-          <p:cNvPr id="11" name="state-184"/>
+          <p:cNvPr id="11" name="state-185"/>
           <p:cNvSpPr/>
           <p:nvPr/>
         </p:nvSpPr>
@@ -11498,7 +11498,7 @@
       </p:sp>
       <p:sp>
         <p:nvSpPr>
-          <p:cNvPr id="12" name="text-185"/>
+          <p:cNvPr id="12" name="text-186"/>
           <p:cNvSpPr txBox="1"/>
           <p:nvPr/>
         </p:nvSpPr>
@@ -11534,7 +11534,7 @@
       </p:sp>
       <p:sp>
         <p:nvSpPr>
-          <p:cNvPr id="13" name="text-186"/>
+          <p:cNvPr id="13" name="text-187"/>
           <p:cNvSpPr txBox="1"/>
           <p:nvPr/>
         </p:nvSpPr>
@@ -11570,7 +11570,7 @@
       </p:sp>
       <p:sp>
         <p:nvSpPr>
-          <p:cNvPr id="14" name="state-187"/>
+          <p:cNvPr id="14" name="state-188"/>
           <p:cNvSpPr/>
           <p:nvPr/>
         </p:nvSpPr>
@@ -11592,7 +11592,7 @@
       </p:sp>
       <p:sp>
         <p:nvSpPr>
-          <p:cNvPr id="15" name="text-188"/>
+          <p:cNvPr id="15" name="text-189"/>
           <p:cNvSpPr txBox="1"/>
           <p:nvPr/>
         </p:nvSpPr>
@@ -11628,7 +11628,7 @@
       </p:sp>
       <p:sp>
         <p:nvSpPr>
-          <p:cNvPr id="16" name="text-189"/>
+          <p:cNvPr id="16" name="text-190"/>
           <p:cNvSpPr txBox="1"/>
           <p:nvPr/>
         </p:nvSpPr>
@@ -11664,7 +11664,7 @@
       </p:sp>
       <p:sp>
         <p:nvSpPr>
-          <p:cNvPr id="17" name="state-190"/>
+          <p:cNvPr id="17" name="state-191"/>
           <p:cNvSpPr/>
           <p:nvPr/>
         </p:nvSpPr>
@@ -11686,7 +11686,7 @@
       </p:sp>
       <p:sp>
         <p:nvSpPr>
-          <p:cNvPr id="18" name="text-191"/>
+          <p:cNvPr id="18" name="text-192"/>
           <p:cNvSpPr txBox="1"/>
           <p:nvPr/>
         </p:nvSpPr>
@@ -11722,7 +11722,7 @@
       </p:sp>
       <p:sp>
         <p:nvSpPr>
-          <p:cNvPr id="19" name="text-192"/>
+          <p:cNvPr id="19" name="text-193"/>
           <p:cNvSpPr txBox="1"/>
           <p:nvPr/>
         </p:nvSpPr>
@@ -11758,7 +11758,7 @@
       </p:sp>
       <p:sp>
         <p:nvSpPr>
-          <p:cNvPr id="20" name="state-193"/>
+          <p:cNvPr id="20" name="state-194"/>
           <p:cNvSpPr/>
           <p:nvPr/>
         </p:nvSpPr>
@@ -11780,7 +11780,7 @@
       </p:sp>
       <p:sp>
         <p:nvSpPr>
-          <p:cNvPr id="21" name="text-194"/>
+          <p:cNvPr id="21" name="text-195"/>
           <p:cNvSpPr txBox="1"/>
           <p:nvPr/>
         </p:nvSpPr>
@@ -11816,7 +11816,7 @@
       </p:sp>
       <p:sp>
         <p:nvSpPr>
-          <p:cNvPr id="22" name="text-195"/>
+          <p:cNvPr id="22" name="text-196"/>
           <p:cNvSpPr txBox="1"/>
           <p:nvPr/>
         </p:nvSpPr>
@@ -11852,7 +11852,7 @@
       </p:sp>
       <p:sp>
         <p:nvSpPr>
-          <p:cNvPr id="23" name="state-196"/>
+          <p:cNvPr id="23" name="state-197"/>
           <p:cNvSpPr/>
           <p:nvPr/>
         </p:nvSpPr>
@@ -11874,7 +11874,7 @@
       </p:sp>
       <p:sp>
         <p:nvSpPr>
-          <p:cNvPr id="24" name="text-197"/>
+          <p:cNvPr id="24" name="text-198"/>
           <p:cNvSpPr txBox="1"/>
           <p:nvPr/>
         </p:nvSpPr>
@@ -11910,7 +11910,7 @@
       </p:sp>
       <p:sp>
         <p:nvSpPr>
-          <p:cNvPr id="25" name="text-198"/>
+          <p:cNvPr id="25" name="text-199"/>
           <p:cNvSpPr txBox="1"/>
           <p:nvPr/>
         </p:nvSpPr>
@@ -11946,7 +11946,7 @@
       </p:sp>
       <p:sp>
         <p:nvSpPr>
-          <p:cNvPr id="26" name="state-199"/>
+          <p:cNvPr id="26" name="state-200"/>
           <p:cNvSpPr/>
           <p:nvPr/>
         </p:nvSpPr>
@@ -11968,7 +11968,7 @@
       </p:sp>
       <p:sp>
         <p:nvSpPr>
-          <p:cNvPr id="27" name="text-200"/>
+          <p:cNvPr id="27" name="text-201"/>
           <p:cNvSpPr txBox="1"/>
           <p:nvPr/>
         </p:nvSpPr>
@@ -12004,7 +12004,7 @@
       </p:sp>
       <p:sp>
         <p:nvSpPr>
-          <p:cNvPr id="28" name="text-201"/>
+          <p:cNvPr id="28" name="text-202"/>
           <p:cNvSpPr txBox="1"/>
           <p:nvPr/>
         </p:nvSpPr>
@@ -12032,7 +12032,7 @@
                   <a:schemeClr val="accent3"/>
                 </a:solidFill>
               </a:rPr>
-              <a:t>Альтернативные ветви: отмена клиентом до сборки, отказ оплаты, возврат после доставки</a:t>
+              <a:t>Заказ можно отменить до сборки, вернуть после доставки, оплата может не пройти</a:t>
             </a:r>
             <a:endParaRPr lang="en-US" sz="1000" dirty="0"/>
           </a:p>
@@ -12040,7 +12040,7 @@
       </p:sp>
       <p:sp>
         <p:nvSpPr>
-          <p:cNvPr id="29" name="text-202"/>
+          <p:cNvPr id="29" name="text-203"/>
           <p:cNvSpPr txBox="1"/>
           <p:nvPr/>
         </p:nvSpPr>
@@ -12068,7 +12068,7 @@
                   <a:schemeClr val="accent2"/>
                 </a:solidFill>
               </a:rPr>
-              <a:t>ФРАГМЕНТ МОДЕЛИ ДАННЫХ</a:t>
+              <a:t>ТАБЛИЦЫ</a:t>
             </a:r>
             <a:endParaRPr lang="en-US" sz="900" dirty="0"/>
           </a:p>
@@ -12076,7 +12076,7 @@
       </p:sp>
       <p:sp>
         <p:nvSpPr>
-          <p:cNvPr id="30" name="ent-head-203"/>
+          <p:cNvPr id="30" name="ent-head-204"/>
           <p:cNvSpPr/>
           <p:nvPr/>
         </p:nvSpPr>
@@ -12096,7 +12096,7 @@
       </p:sp>
       <p:sp>
         <p:nvSpPr>
-          <p:cNvPr id="31" name="text-204"/>
+          <p:cNvPr id="31" name="text-205"/>
           <p:cNvSpPr txBox="1"/>
           <p:nvPr/>
         </p:nvSpPr>
@@ -12132,7 +12132,7 @@
       </p:sp>
       <p:sp>
         <p:nvSpPr>
-          <p:cNvPr id="32" name="ent-body-205"/>
+          <p:cNvPr id="32" name="ent-body-206"/>
           <p:cNvSpPr/>
           <p:nvPr/>
         </p:nvSpPr>
@@ -12152,7 +12152,7 @@
       </p:sp>
       <p:sp>
         <p:nvSpPr>
-          <p:cNvPr id="33" name="text-206"/>
+          <p:cNvPr id="33" name="text-207"/>
           <p:cNvSpPr txBox="1"/>
           <p:nvPr/>
         </p:nvSpPr>
@@ -12293,7 +12293,7 @@
       </p:sp>
       <p:sp>
         <p:nvSpPr>
-          <p:cNvPr id="34" name="ent-head-207"/>
+          <p:cNvPr id="34" name="ent-head-208"/>
           <p:cNvSpPr/>
           <p:nvPr/>
         </p:nvSpPr>
@@ -12313,7 +12313,7 @@
       </p:sp>
       <p:sp>
         <p:nvSpPr>
-          <p:cNvPr id="35" name="text-208"/>
+          <p:cNvPr id="35" name="text-209"/>
           <p:cNvSpPr txBox="1"/>
           <p:nvPr/>
         </p:nvSpPr>
@@ -12349,7 +12349,7 @@
       </p:sp>
       <p:sp>
         <p:nvSpPr>
-          <p:cNvPr id="36" name="ent-body-209"/>
+          <p:cNvPr id="36" name="ent-body-210"/>
           <p:cNvSpPr/>
           <p:nvPr/>
         </p:nvSpPr>
@@ -12369,7 +12369,7 @@
       </p:sp>
       <p:sp>
         <p:nvSpPr>
-          <p:cNvPr id="37" name="text-210"/>
+          <p:cNvPr id="37" name="text-211"/>
           <p:cNvSpPr txBox="1"/>
           <p:nvPr/>
         </p:nvSpPr>
@@ -12476,7 +12476,7 @@
       </p:sp>
       <p:sp>
         <p:nvSpPr>
-          <p:cNvPr id="38" name="ent-head-211"/>
+          <p:cNvPr id="38" name="ent-head-212"/>
           <p:cNvSpPr/>
           <p:nvPr/>
         </p:nvSpPr>
@@ -12496,7 +12496,7 @@
       </p:sp>
       <p:sp>
         <p:nvSpPr>
-          <p:cNvPr id="39" name="text-212"/>
+          <p:cNvPr id="39" name="text-213"/>
           <p:cNvSpPr txBox="1"/>
           <p:nvPr/>
         </p:nvSpPr>
@@ -12532,7 +12532,7 @@
       </p:sp>
       <p:sp>
         <p:nvSpPr>
-          <p:cNvPr id="40" name="ent-body-213"/>
+          <p:cNvPr id="40" name="ent-body-214"/>
           <p:cNvSpPr/>
           <p:nvPr/>
         </p:nvSpPr>
@@ -12552,7 +12552,7 @@
       </p:sp>
       <p:sp>
         <p:nvSpPr>
-          <p:cNvPr id="41" name="text-214"/>
+          <p:cNvPr id="41" name="text-215"/>
           <p:cNvSpPr txBox="1"/>
           <p:nvPr/>
         </p:nvSpPr>
@@ -12659,7 +12659,7 @@
       </p:sp>
       <p:sp>
         <p:nvSpPr>
-          <p:cNvPr id="42" name="ent-head-215"/>
+          <p:cNvPr id="42" name="ent-head-216"/>
           <p:cNvSpPr/>
           <p:nvPr/>
         </p:nvSpPr>
@@ -12684,7 +12684,7 @@
       </p:sp>
       <p:sp>
         <p:nvSpPr>
-          <p:cNvPr id="43" name="text-216"/>
+          <p:cNvPr id="43" name="text-217"/>
           <p:cNvSpPr txBox="1"/>
           <p:nvPr/>
         </p:nvSpPr>
@@ -12712,7 +12712,7 @@
                   <a:schemeClr val="accent2"/>
                 </a:solidFill>
               </a:rPr>
-              <a:t>batches — добавить</a:t>
+              <a:t>batches (добавить)</a:t>
             </a:r>
             <a:endParaRPr lang="en-US" sz="1100" dirty="0"/>
           </a:p>
@@ -12720,7 +12720,7 @@
       </p:sp>
       <p:sp>
         <p:nvSpPr>
-          <p:cNvPr id="44" name="ent-body-217"/>
+          <p:cNvPr id="44" name="ent-body-218"/>
           <p:cNvSpPr/>
           <p:nvPr/>
         </p:nvSpPr>
@@ -12745,7 +12745,7 @@
       </p:sp>
       <p:sp>
         <p:nvSpPr>
-          <p:cNvPr id="45" name="text-218"/>
+          <p:cNvPr id="45" name="text-219"/>
           <p:cNvSpPr txBox="1"/>
           <p:nvPr/>
         </p:nvSpPr>
@@ -12869,7 +12869,7 @@
       </p:sp>
       <p:sp>
         <p:nvSpPr>
-          <p:cNvPr id="46" name="card-219"/>
+          <p:cNvPr id="46" name="card-220"/>
           <p:cNvSpPr/>
           <p:nvPr/>
         </p:nvSpPr>
@@ -12891,7 +12891,7 @@
       </p:sp>
       <p:sp>
         <p:nvSpPr>
-          <p:cNvPr id="47" name="text-220"/>
+          <p:cNvPr id="47" name="text-221"/>
           <p:cNvSpPr txBox="1"/>
           <p:nvPr/>
         </p:nvSpPr>
@@ -12919,7 +12919,7 @@
                   <a:schemeClr val="bg1"/>
                 </a:solidFill>
               </a:rPr>
-              <a:t>Резерв по требованию F-09: при оформлении заказа stock_quantity уменьшается в той же транзакции, что и запись заказа; при отмене — возвращается. Реализацию подтвердить по коду прототипа.</a:t>
+              <a:t>Резерв по требованию F-09: при оформлении заказа stock_quantity уменьшается в той же транзакции, что и запись заказа, а при отмене возвращается. Реализацию нужно подтвердить по коду прототипа.</a:t>
             </a:r>
             <a:endParaRPr lang="en-US" sz="1100" dirty="0"/>
           </a:p>
@@ -13058,7 +13058,7 @@
                   <a:schemeClr val="tx1"/>
                 </a:solidFill>
               </a:rPr>
-              <a:t>Задача: продавать чай по его атрибутам</a:t>
+              <a:t>Задача и пользователи</a:t>
             </a:r>
             <a:endParaRPr lang="en-US" sz="2700" dirty="0"/>
           </a:p>
@@ -13096,7 +13096,7 @@
                   <a:schemeClr val="accent3"/>
                 </a:solidFill>
               </a:rPr>
-              <a:t>Сравнивается способ, которым магазин решает задачу, а не стек технологий</a:t>
+              <a:t>Проблемы текущего процесса (ВКР, разд. 1.3.9) и основной сценарий покупателя</a:t>
             </a:r>
             <a:endParaRPr lang="en-US" sz="1300" dirty="0"/>
           </a:p>
@@ -13192,7 +13192,7 @@
                   <a:schemeClr val="accent2"/>
                 </a:solidFill>
               </a:rPr>
-              <a:t>КАК ЕСТЬ · ВКР, РАЗД. 1.3.9</a:t>
+              <a:t>ТЕКУЩИЙ ПРОЦЕСС</a:t>
             </a:r>
             <a:endParaRPr lang="en-US" sz="900" dirty="0"/>
           </a:p>
@@ -13284,7 +13284,7 @@
                   <a:schemeClr val="tx1"/>
                 </a:solidFill>
               </a:rPr>
-              <a:t>Остатки ведутся в таблицах — можно продать отсутствующую позицию</a:t>
+              <a:t>Остатки ведутся в таблицах, поэтому можно продать позицию, которой уже нет</a:t>
             </a:r>
             <a:endParaRPr lang="en-US" sz="1150" dirty="0"/>
           </a:p>
@@ -13376,7 +13376,7 @@
                   <a:schemeClr val="tx1"/>
                 </a:solidFill>
               </a:rPr>
-              <a:t>Заказы из телефона, мессенджеров и маркетплейсов нигде не сводятся</a:t>
+              <a:t>Заказы по телефону, в мессенджерах и с маркетплейсов нигде не сводятся</a:t>
             </a:r>
             <a:endParaRPr lang="en-US" sz="1150" dirty="0"/>
           </a:p>
@@ -13468,7 +13468,7 @@
                   <a:schemeClr val="tx1"/>
                 </a:solidFill>
               </a:rPr>
-              <a:t>Чай нельзя найти по сорту, региону, обработке и вкусу</a:t>
+              <a:t>Найти чай по сорту, региону, обработке и вкусу нельзя</a:t>
             </a:r>
             <a:endParaRPr lang="en-US" sz="1150" dirty="0"/>
           </a:p>
@@ -13560,7 +13560,7 @@
                   <a:schemeClr val="tx1"/>
                 </a:solidFill>
               </a:rPr>
-              <a:t>Партию (год урожая, регион, поставщик) не отследить</a:t>
+              <a:t>Партию не проследить до года урожая, региона и поставщика</a:t>
             </a:r>
             <a:endParaRPr lang="en-US" sz="1150" dirty="0"/>
           </a:p>
@@ -13652,7 +13652,7 @@
                   <a:schemeClr val="tx1"/>
                 </a:solidFill>
               </a:rPr>
-              <a:t>Статус заказа покупатель узнаёт звонком</a:t>
+              <a:t>О статусе заказа покупатель узнаёт по телефону</a:t>
             </a:r>
             <a:endParaRPr lang="en-US" sz="1150" dirty="0"/>
           </a:p>
@@ -13710,7 +13710,7 @@
                   <a:schemeClr val="accent2"/>
                 </a:solidFill>
               </a:rPr>
-              <a:t>ПОКУПАТЕЛЬ · ОСНОВНОЙ СЦЕНАРИЙ</a:t>
+              <a:t>СЦЕНАРИЙ ПОКУПАТЕЛЯ</a:t>
             </a:r>
             <a:endParaRPr lang="en-US" sz="900" dirty="0"/>
           </a:p>
@@ -13725,11 +13725,11 @@
         <p:spPr>
           <a:xfrm>
             <a:off x="6426200" y="2209800"/>
-            <a:ext cx="4940300" cy="317500"/>
+            <a:ext cx="4940300" cy="355600"/>
           </a:xfrm>
           <a:prstGeom prst="roundRect">
             <a:avLst>
-              <a:gd name="adj" fmla="val 17280"/>
+              <a:gd name="adj" fmla="val 15429"/>
             </a:avLst>
           </a:prstGeom>
           <a:solidFill>
@@ -13746,8 +13746,8 @@
         </p:nvSpPr>
         <p:spPr>
           <a:xfrm>
-            <a:off x="6426200" y="2209800"/>
-            <a:ext cx="4940300" cy="317500"/>
+            <a:off x="6553200" y="2209800"/>
+            <a:ext cx="254000" cy="355600"/>
           </a:xfrm>
           <a:prstGeom prst="rect">
             <a:avLst/>
@@ -13759,7 +13759,43 @@
           <a:bodyPr wrap="square" lIns="0" tIns="0" rIns="0" bIns="0" rtlCol="0" anchor="ctr"/>
           <a:lstStyle/>
           <a:p>
-            <a:pPr algn="ctr" indent="0" marL="0">
+            <a:pPr indent="0" marL="0">
+              <a:buNone/>
+            </a:pPr>
+            <a:r>
+              <a:rPr lang="en-US" sz="1100" b="1" dirty="0">
+                <a:solidFill>
+                  <a:schemeClr val="accent2"/>
+                </a:solidFill>
+              </a:rPr>
+              <a:t>1</a:t>
+            </a:r>
+            <a:endParaRPr lang="en-US" sz="1100" dirty="0"/>
+          </a:p>
+        </p:txBody>
+      </p:sp>
+      <p:sp>
+        <p:nvSpPr>
+          <p:cNvPr id="28" name="text-31"/>
+          <p:cNvSpPr txBox="1"/>
+          <p:nvPr/>
+        </p:nvSpPr>
+        <p:spPr>
+          <a:xfrm>
+            <a:off x="6832600" y="2209800"/>
+            <a:ext cx="4445000" cy="355600"/>
+          </a:xfrm>
+          <a:prstGeom prst="rect">
+            <a:avLst/>
+          </a:prstGeom>
+          <a:noFill/>
+          <a:ln/>
+        </p:spPr>
+        <p:txBody>
+          <a:bodyPr wrap="square" lIns="0" tIns="0" rIns="0" bIns="0" rtlCol="0" anchor="ctr"/>
+          <a:lstStyle/>
+          <a:p>
+            <a:pPr indent="0" marL="0">
               <a:buNone/>
             </a:pPr>
             <a:r>
@@ -13776,38 +13812,18 @@
       </p:sp>
       <p:sp>
         <p:nvSpPr>
-          <p:cNvPr id="28" name="arrow-31"/>
-          <p:cNvSpPr/>
-          <p:nvPr/>
-        </p:nvSpPr>
-        <p:spPr>
-          <a:xfrm>
-            <a:off x="8839200" y="2552700"/>
-            <a:ext cx="114300" cy="101600"/>
-          </a:xfrm>
-          <a:prstGeom prst="downArrow">
-            <a:avLst/>
-          </a:prstGeom>
-          <a:solidFill>
-            <a:schemeClr val="accent3"/>
-          </a:solidFill>
-          <a:ln/>
-        </p:spPr>
-      </p:sp>
-      <p:sp>
-        <p:nvSpPr>
           <p:cNvPr id="29" name="step-32"/>
           <p:cNvSpPr/>
           <p:nvPr/>
         </p:nvSpPr>
         <p:spPr>
           <a:xfrm>
-            <a:off x="6426200" y="2667000"/>
-            <a:ext cx="4940300" cy="317500"/>
+            <a:off x="6426200" y="2654300"/>
+            <a:ext cx="4940300" cy="355600"/>
           </a:xfrm>
           <a:prstGeom prst="roundRect">
             <a:avLst>
-              <a:gd name="adj" fmla="val 17280"/>
+              <a:gd name="adj" fmla="val 15429"/>
             </a:avLst>
           </a:prstGeom>
           <a:solidFill>
@@ -13824,8 +13840,8 @@
         </p:nvSpPr>
         <p:spPr>
           <a:xfrm>
-            <a:off x="6426200" y="2667000"/>
-            <a:ext cx="4940300" cy="317500"/>
+            <a:off x="6553200" y="2654300"/>
+            <a:ext cx="254000" cy="355600"/>
           </a:xfrm>
           <a:prstGeom prst="rect">
             <a:avLst/>
@@ -13837,7 +13853,43 @@
           <a:bodyPr wrap="square" lIns="0" tIns="0" rIns="0" bIns="0" rtlCol="0" anchor="ctr"/>
           <a:lstStyle/>
           <a:p>
-            <a:pPr algn="ctr" indent="0" marL="0">
+            <a:pPr indent="0" marL="0">
+              <a:buNone/>
+            </a:pPr>
+            <a:r>
+              <a:rPr lang="en-US" sz="1100" b="1" dirty="0">
+                <a:solidFill>
+                  <a:schemeClr val="accent2"/>
+                </a:solidFill>
+              </a:rPr>
+              <a:t>2</a:t>
+            </a:r>
+            <a:endParaRPr lang="en-US" sz="1100" dirty="0"/>
+          </a:p>
+        </p:txBody>
+      </p:sp>
+      <p:sp>
+        <p:nvSpPr>
+          <p:cNvPr id="31" name="text-34"/>
+          <p:cNvSpPr txBox="1"/>
+          <p:nvPr/>
+        </p:nvSpPr>
+        <p:spPr>
+          <a:xfrm>
+            <a:off x="6832600" y="2654300"/>
+            <a:ext cx="4445000" cy="355600"/>
+          </a:xfrm>
+          <a:prstGeom prst="rect">
+            <a:avLst/>
+          </a:prstGeom>
+          <a:noFill/>
+          <a:ln/>
+        </p:spPr>
+        <p:txBody>
+          <a:bodyPr wrap="square" lIns="0" tIns="0" rIns="0" bIns="0" rtlCol="0" anchor="ctr"/>
+          <a:lstStyle/>
+          <a:p>
+            <a:pPr indent="0" marL="0">
               <a:buNone/>
             </a:pPr>
             <a:r>
@@ -13854,38 +13906,18 @@
       </p:sp>
       <p:sp>
         <p:nvSpPr>
-          <p:cNvPr id="31" name="arrow-34"/>
-          <p:cNvSpPr/>
-          <p:nvPr/>
-        </p:nvSpPr>
-        <p:spPr>
-          <a:xfrm>
-            <a:off x="8839200" y="3009900"/>
-            <a:ext cx="114300" cy="101600"/>
-          </a:xfrm>
-          <a:prstGeom prst="downArrow">
-            <a:avLst/>
-          </a:prstGeom>
-          <a:solidFill>
-            <a:schemeClr val="accent3"/>
-          </a:solidFill>
-          <a:ln/>
-        </p:spPr>
-      </p:sp>
-      <p:sp>
-        <p:nvSpPr>
           <p:cNvPr id="32" name="step-35"/>
           <p:cNvSpPr/>
           <p:nvPr/>
         </p:nvSpPr>
         <p:spPr>
           <a:xfrm>
-            <a:off x="6426200" y="3124200"/>
-            <a:ext cx="4940300" cy="317500"/>
+            <a:off x="6426200" y="3098800"/>
+            <a:ext cx="4940300" cy="355600"/>
           </a:xfrm>
           <a:prstGeom prst="roundRect">
             <a:avLst>
-              <a:gd name="adj" fmla="val 17280"/>
+              <a:gd name="adj" fmla="val 15429"/>
             </a:avLst>
           </a:prstGeom>
           <a:solidFill>
@@ -13902,8 +13934,8 @@
         </p:nvSpPr>
         <p:spPr>
           <a:xfrm>
-            <a:off x="6426200" y="3124200"/>
-            <a:ext cx="4940300" cy="317500"/>
+            <a:off x="6553200" y="3098800"/>
+            <a:ext cx="254000" cy="355600"/>
           </a:xfrm>
           <a:prstGeom prst="rect">
             <a:avLst/>
@@ -13915,7 +13947,43 @@
           <a:bodyPr wrap="square" lIns="0" tIns="0" rIns="0" bIns="0" rtlCol="0" anchor="ctr"/>
           <a:lstStyle/>
           <a:p>
-            <a:pPr algn="ctr" indent="0" marL="0">
+            <a:pPr indent="0" marL="0">
+              <a:buNone/>
+            </a:pPr>
+            <a:r>
+              <a:rPr lang="en-US" sz="1100" b="1" dirty="0">
+                <a:solidFill>
+                  <a:schemeClr val="accent2"/>
+                </a:solidFill>
+              </a:rPr>
+              <a:t>3</a:t>
+            </a:r>
+            <a:endParaRPr lang="en-US" sz="1100" dirty="0"/>
+          </a:p>
+        </p:txBody>
+      </p:sp>
+      <p:sp>
+        <p:nvSpPr>
+          <p:cNvPr id="34" name="text-37"/>
+          <p:cNvSpPr txBox="1"/>
+          <p:nvPr/>
+        </p:nvSpPr>
+        <p:spPr>
+          <a:xfrm>
+            <a:off x="6832600" y="3098800"/>
+            <a:ext cx="4445000" cy="355600"/>
+          </a:xfrm>
+          <a:prstGeom prst="rect">
+            <a:avLst/>
+          </a:prstGeom>
+          <a:noFill/>
+          <a:ln/>
+        </p:spPr>
+        <p:txBody>
+          <a:bodyPr wrap="square" lIns="0" tIns="0" rIns="0" bIns="0" rtlCol="0" anchor="ctr"/>
+          <a:lstStyle/>
+          <a:p>
+            <a:pPr indent="0" marL="0">
               <a:buNone/>
             </a:pPr>
             <a:r>
@@ -13932,38 +14000,18 @@
       </p:sp>
       <p:sp>
         <p:nvSpPr>
-          <p:cNvPr id="34" name="arrow-37"/>
-          <p:cNvSpPr/>
-          <p:nvPr/>
-        </p:nvSpPr>
-        <p:spPr>
-          <a:xfrm>
-            <a:off x="8839200" y="3467100"/>
-            <a:ext cx="114300" cy="101600"/>
-          </a:xfrm>
-          <a:prstGeom prst="downArrow">
-            <a:avLst/>
-          </a:prstGeom>
-          <a:solidFill>
-            <a:schemeClr val="accent3"/>
-          </a:solidFill>
-          <a:ln/>
-        </p:spPr>
-      </p:sp>
-      <p:sp>
-        <p:nvSpPr>
           <p:cNvPr id="35" name="step-38"/>
           <p:cNvSpPr/>
           <p:nvPr/>
         </p:nvSpPr>
         <p:spPr>
           <a:xfrm>
-            <a:off x="6426200" y="3581400"/>
-            <a:ext cx="4940300" cy="317500"/>
+            <a:off x="6426200" y="3543300"/>
+            <a:ext cx="4940300" cy="355600"/>
           </a:xfrm>
           <a:prstGeom prst="roundRect">
             <a:avLst>
-              <a:gd name="adj" fmla="val 17280"/>
+              <a:gd name="adj" fmla="val 15429"/>
             </a:avLst>
           </a:prstGeom>
           <a:solidFill>
@@ -13980,8 +14028,8 @@
         </p:nvSpPr>
         <p:spPr>
           <a:xfrm>
-            <a:off x="6426200" y="3581400"/>
-            <a:ext cx="4940300" cy="317500"/>
+            <a:off x="6553200" y="3543300"/>
+            <a:ext cx="254000" cy="355600"/>
           </a:xfrm>
           <a:prstGeom prst="rect">
             <a:avLst/>
@@ -13993,7 +14041,43 @@
           <a:bodyPr wrap="square" lIns="0" tIns="0" rIns="0" bIns="0" rtlCol="0" anchor="ctr"/>
           <a:lstStyle/>
           <a:p>
-            <a:pPr algn="ctr" indent="0" marL="0">
+            <a:pPr indent="0" marL="0">
+              <a:buNone/>
+            </a:pPr>
+            <a:r>
+              <a:rPr lang="en-US" sz="1100" b="1" dirty="0">
+                <a:solidFill>
+                  <a:schemeClr val="accent2"/>
+                </a:solidFill>
+              </a:rPr>
+              <a:t>4</a:t>
+            </a:r>
+            <a:endParaRPr lang="en-US" sz="1100" dirty="0"/>
+          </a:p>
+        </p:txBody>
+      </p:sp>
+      <p:sp>
+        <p:nvSpPr>
+          <p:cNvPr id="37" name="text-40"/>
+          <p:cNvSpPr txBox="1"/>
+          <p:nvPr/>
+        </p:nvSpPr>
+        <p:spPr>
+          <a:xfrm>
+            <a:off x="6832600" y="3543300"/>
+            <a:ext cx="4445000" cy="355600"/>
+          </a:xfrm>
+          <a:prstGeom prst="rect">
+            <a:avLst/>
+          </a:prstGeom>
+          <a:noFill/>
+          <a:ln/>
+        </p:spPr>
+        <p:txBody>
+          <a:bodyPr wrap="square" lIns="0" tIns="0" rIns="0" bIns="0" rtlCol="0" anchor="ctr"/>
+          <a:lstStyle/>
+          <a:p>
+            <a:pPr indent="0" marL="0">
               <a:buNone/>
             </a:pPr>
             <a:r>
@@ -14002,31 +14086,11 @@
                   <a:schemeClr val="tx1"/>
                 </a:solidFill>
               </a:rPr>
-              <a:t>Заказ — остаток резервируется</a:t>
+              <a:t>Оформление заказа, остаток резервируется</a:t>
             </a:r>
             <a:endParaRPr lang="en-US" sz="1100" dirty="0"/>
           </a:p>
         </p:txBody>
-      </p:sp>
-      <p:sp>
-        <p:nvSpPr>
-          <p:cNvPr id="37" name="arrow-40"/>
-          <p:cNvSpPr/>
-          <p:nvPr/>
-        </p:nvSpPr>
-        <p:spPr>
-          <a:xfrm>
-            <a:off x="8839200" y="3924300"/>
-            <a:ext cx="114300" cy="101600"/>
-          </a:xfrm>
-          <a:prstGeom prst="downArrow">
-            <a:avLst/>
-          </a:prstGeom>
-          <a:solidFill>
-            <a:schemeClr val="accent3"/>
-          </a:solidFill>
-          <a:ln/>
-        </p:spPr>
       </p:sp>
       <p:sp>
         <p:nvSpPr>
@@ -14036,12 +14100,12 @@
         </p:nvSpPr>
         <p:spPr>
           <a:xfrm>
-            <a:off x="6426200" y="4038600"/>
-            <a:ext cx="4940300" cy="317500"/>
+            <a:off x="6426200" y="3987800"/>
+            <a:ext cx="4940300" cy="355600"/>
           </a:xfrm>
           <a:prstGeom prst="roundRect">
             <a:avLst>
-              <a:gd name="adj" fmla="val 17280"/>
+              <a:gd name="adj" fmla="val 15429"/>
             </a:avLst>
           </a:prstGeom>
           <a:solidFill>
@@ -14058,8 +14122,8 @@
         </p:nvSpPr>
         <p:spPr>
           <a:xfrm>
-            <a:off x="6426200" y="4038600"/>
-            <a:ext cx="4940300" cy="317500"/>
+            <a:off x="6553200" y="3987800"/>
+            <a:ext cx="254000" cy="355600"/>
           </a:xfrm>
           <a:prstGeom prst="rect">
             <a:avLst/>
@@ -14071,7 +14135,43 @@
           <a:bodyPr wrap="square" lIns="0" tIns="0" rIns="0" bIns="0" rtlCol="0" anchor="ctr"/>
           <a:lstStyle/>
           <a:p>
-            <a:pPr algn="ctr" indent="0" marL="0">
+            <a:pPr indent="0" marL="0">
+              <a:buNone/>
+            </a:pPr>
+            <a:r>
+              <a:rPr lang="en-US" sz="1100" b="1" dirty="0">
+                <a:solidFill>
+                  <a:schemeClr val="accent2"/>
+                </a:solidFill>
+              </a:rPr>
+              <a:t>5</a:t>
+            </a:r>
+            <a:endParaRPr lang="en-US" sz="1100" dirty="0"/>
+          </a:p>
+        </p:txBody>
+      </p:sp>
+      <p:sp>
+        <p:nvSpPr>
+          <p:cNvPr id="40" name="text-43"/>
+          <p:cNvSpPr txBox="1"/>
+          <p:nvPr/>
+        </p:nvSpPr>
+        <p:spPr>
+          <a:xfrm>
+            <a:off x="6832600" y="3987800"/>
+            <a:ext cx="4445000" cy="355600"/>
+          </a:xfrm>
+          <a:prstGeom prst="rect">
+            <a:avLst/>
+          </a:prstGeom>
+          <a:noFill/>
+          <a:ln/>
+        </p:spPr>
+        <p:txBody>
+          <a:bodyPr wrap="square" lIns="0" tIns="0" rIns="0" bIns="0" rtlCol="0" anchor="ctr"/>
+          <a:lstStyle/>
+          <a:p>
+            <a:pPr indent="0" marL="0">
               <a:buNone/>
             </a:pPr>
             <a:r>
@@ -14088,7 +14188,7 @@
       </p:sp>
       <p:sp>
         <p:nvSpPr>
-          <p:cNvPr id="40" name="text-43"/>
+          <p:cNvPr id="41" name="text-44"/>
           <p:cNvSpPr txBox="1"/>
           <p:nvPr/>
         </p:nvSpPr>
@@ -14116,7 +14216,7 @@
                   <a:schemeClr val="accent2"/>
                 </a:solidFill>
               </a:rPr>
-              <a:t>Администратор, контент-менеджер, кладовщик: товары и остатки, смена статуса заказа</a:t>
+              <a:t>Сотрудники ведут товары и остатки и меняют статусы заказов</a:t>
             </a:r>
             <a:endParaRPr lang="en-US" sz="1050" dirty="0"/>
           </a:p>
@@ -14124,7 +14224,7 @@
       </p:sp>
       <p:sp>
         <p:nvSpPr>
-          <p:cNvPr id="41" name="card-44"/>
+          <p:cNvPr id="42" name="card-45"/>
           <p:cNvSpPr/>
           <p:nvPr/>
         </p:nvSpPr>
@@ -14146,14 +14246,14 @@
       </p:sp>
       <p:sp>
         <p:nvSpPr>
-          <p:cNvPr id="42" name="text-45"/>
+          <p:cNvPr id="43" name="text-46"/>
           <p:cNvSpPr txBox="1"/>
           <p:nvPr/>
         </p:nvSpPr>
         <p:spPr>
           <a:xfrm>
             <a:off x="787400" y="5372100"/>
-            <a:ext cx="3810000" cy="177800"/>
+            <a:ext cx="5080000" cy="177800"/>
           </a:xfrm>
           <a:prstGeom prst="rect">
             <a:avLst/>
@@ -14174,7 +14274,7 @@
                   <a:srgbClr val="C9CBD8"/>
                 </a:solidFill>
               </a:rPr>
-              <a:t>РЕШЕНИЕ</a:t>
+              <a:t>РАЗРАБАТЫВАЕМАЯ СИСТЕМА</a:t>
             </a:r>
             <a:endParaRPr lang="en-US" sz="900" dirty="0"/>
           </a:p>
@@ -14182,7 +14282,7 @@
       </p:sp>
       <p:sp>
         <p:nvSpPr>
-          <p:cNvPr id="43" name="text-46"/>
+          <p:cNvPr id="44" name="text-47"/>
           <p:cNvSpPr txBox="1"/>
           <p:nvPr/>
         </p:nvSpPr>
@@ -14210,7 +14310,7 @@
                   <a:schemeClr val="bg1"/>
                 </a:solidFill>
               </a:rPr>
-              <a:t>Веб-система чайного магазина, в которой витрина и учёт работают на одной модели данных: покупатель ищет чай по виду, региону, обработке и вкусу, остаток резервируется в момент оформления заказа, статус заказа покупатель видит сам, а партия прослеживается до года урожая, региона и поставщика.</a:t>
+              <a:t>Витрина и учёт работают на одной модели данных. Покупатель ищет чай по виду, региону, обработке и вкусу, остаток резервируется при оформлении заказа, статус заказа виден в личном кабинете, у партии хранятся год урожая, регион и поставщик.</a:t>
             </a:r>
             <a:endParaRPr lang="en-US" sz="1200" dirty="0"/>
           </a:p>
@@ -14311,7 +14411,7 @@
                   <a:schemeClr val="accent2"/>
                 </a:solidFill>
               </a:rPr>
-              <a:t>БЕЗ СИСТЕМЫ</a:t>
+              <a:t>БАЗОВЫЙ ВАРИАНТ</a:t>
             </a:r>
             <a:endParaRPr lang="en-US" sz="950" dirty="0"/>
           </a:p>
@@ -14349,7 +14449,7 @@
                   <a:schemeClr val="tx1"/>
                 </a:solidFill>
               </a:rPr>
-              <a:t>Без системы: сообщения и Excel</a:t>
+              <a:t>Работа без системы</a:t>
             </a:r>
             <a:endParaRPr lang="en-US" sz="2700" dirty="0"/>
           </a:p>
@@ -14387,7 +14487,7 @@
                   <a:schemeClr val="accent3"/>
                 </a:solidFill>
               </a:rPr>
-              <a:t>Самый простой способ решить задачу без системы — с ним сравнивается всё остальное</a:t>
+              <a:t>Заказы принимаются в сообщениях, остатки ведутся в Excel. С этим вариантом сравниваются все остальные</a:t>
             </a:r>
             <a:endParaRPr lang="en-US" sz="1300" dirty="0"/>
           </a:p>
@@ -14433,7 +14533,7 @@
       </p:sp>
       <p:sp>
         <p:nvSpPr>
-          <p:cNvPr id="7" name="card-47"/>
+          <p:cNvPr id="7" name="card-48"/>
           <p:cNvSpPr/>
           <p:nvPr/>
         </p:nvSpPr>
@@ -14455,7 +14555,7 @@
       </p:sp>
       <p:sp>
         <p:nvSpPr>
-          <p:cNvPr id="8" name="badge-48"/>
+          <p:cNvPr id="8" name="badge-49"/>
           <p:cNvSpPr/>
           <p:nvPr/>
         </p:nvSpPr>
@@ -14475,7 +14575,7 @@
       </p:sp>
       <p:sp>
         <p:nvSpPr>
-          <p:cNvPr id="9" name="text-49"/>
+          <p:cNvPr id="9" name="text-50"/>
           <p:cNvSpPr txBox="1"/>
           <p:nvPr/>
         </p:nvSpPr>
@@ -14511,7 +14611,7 @@
       </p:sp>
       <p:sp>
         <p:nvSpPr>
-          <p:cNvPr id="10" name="text-50"/>
+          <p:cNvPr id="10" name="text-51"/>
           <p:cNvSpPr txBox="1"/>
           <p:nvPr/>
         </p:nvSpPr>
@@ -14539,7 +14639,7 @@
                   <a:schemeClr val="tx1"/>
                 </a:solidFill>
               </a:rPr>
-              <a:t>Ответить покупателю, уточнить, какой чай нужен</a:t>
+              <a:t>Ответить покупателю и уточнить, какой чай нужен</a:t>
             </a:r>
             <a:endParaRPr lang="en-US" sz="1150" dirty="0"/>
           </a:p>
@@ -14547,7 +14647,7 @@
       </p:sp>
       <p:sp>
         <p:nvSpPr>
-          <p:cNvPr id="11" name="card-51"/>
+          <p:cNvPr id="11" name="card-52"/>
           <p:cNvSpPr/>
           <p:nvPr/>
         </p:nvSpPr>
@@ -14569,7 +14669,7 @@
       </p:sp>
       <p:sp>
         <p:nvSpPr>
-          <p:cNvPr id="12" name="badge-52"/>
+          <p:cNvPr id="12" name="badge-53"/>
           <p:cNvSpPr/>
           <p:nvPr/>
         </p:nvSpPr>
@@ -14589,7 +14689,7 @@
       </p:sp>
       <p:sp>
         <p:nvSpPr>
-          <p:cNvPr id="13" name="text-53"/>
+          <p:cNvPr id="13" name="text-54"/>
           <p:cNvSpPr txBox="1"/>
           <p:nvPr/>
         </p:nvSpPr>
@@ -14625,7 +14725,7 @@
       </p:sp>
       <p:sp>
         <p:nvSpPr>
-          <p:cNvPr id="14" name="text-54"/>
+          <p:cNvPr id="14" name="text-55"/>
           <p:cNvSpPr txBox="1"/>
           <p:nvPr/>
         </p:nvSpPr>
@@ -14661,7 +14761,7 @@
       </p:sp>
       <p:sp>
         <p:nvSpPr>
-          <p:cNvPr id="15" name="card-55"/>
+          <p:cNvPr id="15" name="card-56"/>
           <p:cNvSpPr/>
           <p:nvPr/>
         </p:nvSpPr>
@@ -14683,7 +14783,7 @@
       </p:sp>
       <p:sp>
         <p:nvSpPr>
-          <p:cNvPr id="16" name="badge-56"/>
+          <p:cNvPr id="16" name="badge-57"/>
           <p:cNvSpPr/>
           <p:nvPr/>
         </p:nvSpPr>
@@ -14703,7 +14803,7 @@
       </p:sp>
       <p:sp>
         <p:nvSpPr>
-          <p:cNvPr id="17" name="text-57"/>
+          <p:cNvPr id="17" name="text-58"/>
           <p:cNvSpPr txBox="1"/>
           <p:nvPr/>
         </p:nvSpPr>
@@ -14739,7 +14839,7 @@
       </p:sp>
       <p:sp>
         <p:nvSpPr>
-          <p:cNvPr id="18" name="text-58"/>
+          <p:cNvPr id="18" name="text-59"/>
           <p:cNvSpPr txBox="1"/>
           <p:nvPr/>
         </p:nvSpPr>
@@ -14775,7 +14875,7 @@
       </p:sp>
       <p:sp>
         <p:nvSpPr>
-          <p:cNvPr id="19" name="card-59"/>
+          <p:cNvPr id="19" name="card-60"/>
           <p:cNvSpPr/>
           <p:nvPr/>
         </p:nvSpPr>
@@ -14797,7 +14897,7 @@
       </p:sp>
       <p:sp>
         <p:nvSpPr>
-          <p:cNvPr id="20" name="badge-60"/>
+          <p:cNvPr id="20" name="badge-61"/>
           <p:cNvSpPr/>
           <p:nvPr/>
         </p:nvSpPr>
@@ -14817,7 +14917,7 @@
       </p:sp>
       <p:sp>
         <p:nvSpPr>
-          <p:cNvPr id="21" name="text-61"/>
+          <p:cNvPr id="21" name="text-62"/>
           <p:cNvSpPr txBox="1"/>
           <p:nvPr/>
         </p:nvSpPr>
@@ -14853,7 +14953,7 @@
       </p:sp>
       <p:sp>
         <p:nvSpPr>
-          <p:cNvPr id="22" name="text-62"/>
+          <p:cNvPr id="22" name="text-63"/>
           <p:cNvSpPr txBox="1"/>
           <p:nvPr/>
         </p:nvSpPr>
@@ -14881,7 +14981,7 @@
                   <a:schemeClr val="tx1"/>
                 </a:solidFill>
               </a:rPr>
-              <a:t>Проверить, что оплата пришла</a:t>
+              <a:t>Проверить поступление оплаты</a:t>
             </a:r>
             <a:endParaRPr lang="en-US" sz="1150" dirty="0"/>
           </a:p>
@@ -14889,7 +14989,7 @@
       </p:sp>
       <p:sp>
         <p:nvSpPr>
-          <p:cNvPr id="23" name="card-63"/>
+          <p:cNvPr id="23" name="card-64"/>
           <p:cNvSpPr/>
           <p:nvPr/>
         </p:nvSpPr>
@@ -14911,7 +15011,7 @@
       </p:sp>
       <p:sp>
         <p:nvSpPr>
-          <p:cNvPr id="24" name="badge-64"/>
+          <p:cNvPr id="24" name="badge-65"/>
           <p:cNvSpPr/>
           <p:nvPr/>
         </p:nvSpPr>
@@ -14931,7 +15031,7 @@
       </p:sp>
       <p:sp>
         <p:nvSpPr>
-          <p:cNvPr id="25" name="text-65"/>
+          <p:cNvPr id="25" name="text-66"/>
           <p:cNvSpPr txBox="1"/>
           <p:nvPr/>
         </p:nvSpPr>
@@ -14967,7 +15067,7 @@
       </p:sp>
       <p:sp>
         <p:nvSpPr>
-          <p:cNvPr id="26" name="text-66"/>
+          <p:cNvPr id="26" name="text-67"/>
           <p:cNvSpPr txBox="1"/>
           <p:nvPr/>
         </p:nvSpPr>
@@ -15003,7 +15103,7 @@
       </p:sp>
       <p:sp>
         <p:nvSpPr>
-          <p:cNvPr id="27" name="card-67"/>
+          <p:cNvPr id="27" name="card-68"/>
           <p:cNvSpPr/>
           <p:nvPr/>
         </p:nvSpPr>
@@ -15025,7 +15125,7 @@
       </p:sp>
       <p:sp>
         <p:nvSpPr>
-          <p:cNvPr id="28" name="badge-68"/>
+          <p:cNvPr id="28" name="badge-69"/>
           <p:cNvSpPr/>
           <p:nvPr/>
         </p:nvSpPr>
@@ -15045,7 +15145,7 @@
       </p:sp>
       <p:sp>
         <p:nvSpPr>
-          <p:cNvPr id="29" name="text-69"/>
+          <p:cNvPr id="29" name="text-70"/>
           <p:cNvSpPr txBox="1"/>
           <p:nvPr/>
         </p:nvSpPr>
@@ -15081,7 +15181,7 @@
       </p:sp>
       <p:sp>
         <p:nvSpPr>
-          <p:cNvPr id="30" name="text-70"/>
+          <p:cNvPr id="30" name="text-71"/>
           <p:cNvSpPr txBox="1"/>
           <p:nvPr/>
         </p:nvSpPr>
@@ -15117,7 +15217,7 @@
       </p:sp>
       <p:sp>
         <p:nvSpPr>
-          <p:cNvPr id="31" name="card-71"/>
+          <p:cNvPr id="31" name="card-72"/>
           <p:cNvSpPr/>
           <p:nvPr/>
         </p:nvSpPr>
@@ -15139,7 +15239,7 @@
       </p:sp>
       <p:sp>
         <p:nvSpPr>
-          <p:cNvPr id="32" name="badge-72"/>
+          <p:cNvPr id="32" name="badge-73"/>
           <p:cNvSpPr/>
           <p:nvPr/>
         </p:nvSpPr>
@@ -15159,7 +15259,7 @@
       </p:sp>
       <p:sp>
         <p:nvSpPr>
-          <p:cNvPr id="33" name="text-73"/>
+          <p:cNvPr id="33" name="text-74"/>
           <p:cNvSpPr txBox="1"/>
           <p:nvPr/>
         </p:nvSpPr>
@@ -15195,7 +15295,7 @@
       </p:sp>
       <p:sp>
         <p:nvSpPr>
-          <p:cNvPr id="34" name="text-74"/>
+          <p:cNvPr id="34" name="text-75"/>
           <p:cNvSpPr txBox="1"/>
           <p:nvPr/>
         </p:nvSpPr>
@@ -15223,7 +15323,7 @@
                   <a:schemeClr val="tx1"/>
                 </a:solidFill>
               </a:rPr>
-              <a:t>Сообщить статус и трек-номер</a:t>
+              <a:t>Сообщить покупателю статус и трек-номер</a:t>
             </a:r>
             <a:endParaRPr lang="en-US" sz="1150" dirty="0"/>
           </a:p>
@@ -15231,7 +15331,7 @@
       </p:sp>
       <p:sp>
         <p:nvSpPr>
-          <p:cNvPr id="35" name="card-75"/>
+          <p:cNvPr id="35" name="card-76"/>
           <p:cNvSpPr/>
           <p:nvPr/>
         </p:nvSpPr>
@@ -15253,7 +15353,7 @@
       </p:sp>
       <p:sp>
         <p:nvSpPr>
-          <p:cNvPr id="36" name="text-76"/>
+          <p:cNvPr id="36" name="text-77"/>
           <p:cNvSpPr txBox="1"/>
           <p:nvPr/>
         </p:nvSpPr>
@@ -15289,7 +15389,7 @@
       </p:sp>
       <p:sp>
         <p:nvSpPr>
-          <p:cNvPr id="37" name="text-77"/>
+          <p:cNvPr id="37" name="text-78"/>
           <p:cNvSpPr txBox="1"/>
           <p:nvPr/>
         </p:nvSpPr>
@@ -15325,7 +15425,7 @@
       </p:sp>
       <p:sp>
         <p:nvSpPr>
-          <p:cNvPr id="38" name="text-78"/>
+          <p:cNvPr id="38" name="text-79"/>
           <p:cNvSpPr txBox="1"/>
           <p:nvPr/>
         </p:nvSpPr>
@@ -15353,7 +15453,7 @@
                   <a:schemeClr val="accent3"/>
                 </a:solidFill>
               </a:rPr>
-              <a:t>по разбору процесса «как есть»; подтвердить прогоном сценария</a:t>
+              <a:t>подсчитано по текущему процессу, нужно подтвердить прогоном</a:t>
             </a:r>
             <a:endParaRPr lang="en-US" sz="1000" dirty="0"/>
           </a:p>
@@ -15361,7 +15461,7 @@
       </p:sp>
       <p:sp>
         <p:nvSpPr>
-          <p:cNvPr id="39" name="card-79"/>
+          <p:cNvPr id="39" name="card-80"/>
           <p:cNvSpPr/>
           <p:nvPr/>
         </p:nvSpPr>
@@ -15383,7 +15483,7 @@
       </p:sp>
       <p:sp>
         <p:nvSpPr>
-          <p:cNvPr id="40" name="text-80"/>
+          <p:cNvPr id="40" name="text-81"/>
           <p:cNvSpPr txBox="1"/>
           <p:nvPr/>
         </p:nvSpPr>
@@ -15411,7 +15511,7 @@
                   <a:schemeClr val="accent2"/>
                 </a:solidFill>
               </a:rPr>
-              <a:t>Хватает, когда</a:t>
+              <a:t>Когда этого достаточно</a:t>
             </a:r>
             <a:endParaRPr lang="en-US" sz="1300" dirty="0"/>
           </a:p>
@@ -15419,7 +15519,7 @@
       </p:sp>
       <p:sp>
         <p:nvSpPr>
-          <p:cNvPr id="41" name="text-81"/>
+          <p:cNvPr id="41" name="text-82"/>
           <p:cNvSpPr txBox="1"/>
           <p:nvPr/>
         </p:nvSpPr>
@@ -15447,7 +15547,7 @@
                   <a:schemeClr val="tx1"/>
                 </a:solidFill>
               </a:rPr>
-              <a:t>заказов мало, ассортимент узкий; запуск — 0 ₽ и 0 дней</a:t>
+              <a:t>Заказов немного и ассортимент небольшой. Запуск ничего не стоит и не требует времени.</a:t>
             </a:r>
             <a:endParaRPr lang="en-US" sz="1250" dirty="0"/>
           </a:p>
@@ -15455,7 +15555,7 @@
       </p:sp>
       <p:sp>
         <p:nvSpPr>
-          <p:cNvPr id="42" name="card-82"/>
+          <p:cNvPr id="42" name="card-83"/>
           <p:cNvSpPr/>
           <p:nvPr/>
         </p:nvSpPr>
@@ -15477,7 +15577,7 @@
       </p:sp>
       <p:sp>
         <p:nvSpPr>
-          <p:cNvPr id="43" name="text-83"/>
+          <p:cNvPr id="43" name="text-84"/>
           <p:cNvSpPr txBox="1"/>
           <p:nvPr/>
         </p:nvSpPr>
@@ -15505,7 +15605,7 @@
                   <a:schemeClr val="accent2"/>
                 </a:solidFill>
               </a:rPr>
-              <a:t>Ломается, когда</a:t>
+              <a:t>Где возникают ошибки</a:t>
             </a:r>
             <a:endParaRPr lang="en-US" sz="1300" dirty="0"/>
           </a:p>
@@ -15513,7 +15613,7 @@
       </p:sp>
       <p:sp>
         <p:nvSpPr>
-          <p:cNvPr id="44" name="text-84"/>
+          <p:cNvPr id="44" name="text-85"/>
           <p:cNvSpPr txBox="1"/>
           <p:nvPr/>
         </p:nvSpPr>
@@ -15541,7 +15641,7 @@
                   <a:schemeClr val="tx1"/>
                 </a:solidFill>
               </a:rPr>
-              <a:t>двое покупателей берут последнюю пачку — обоим отвечают «есть»; поиск по атрибутам — только вопросом продавцу; история заказа — в переписке</a:t>
+              <a:t>Если двое покупателей берут последнюю пачку, обоим ответят, что товар есть. Подобрать чай по атрибутам можно только с помощью продавца. История заказа остаётся в переписке.</a:t>
             </a:r>
             <a:endParaRPr lang="en-US" sz="1250" dirty="0"/>
           </a:p>
@@ -15642,7 +15742,7 @@
                   <a:schemeClr val="accent2"/>
                 </a:solidFill>
               </a:rPr>
-              <a:t>АНАЛОГИ</a:t>
+              <a:t>АНАЛИЗ АНАЛОГОВ</a:t>
             </a:r>
             <a:endParaRPr lang="en-US" sz="950" dirty="0"/>
           </a:p>
@@ -15680,7 +15780,7 @@
                   <a:schemeClr val="tx1"/>
                 </a:solidFill>
               </a:rPr>
-              <a:t>По баллам сильнее всех 1С-Битрикс</a:t>
+              <a:t>Аналоги и итоговые баллы</a:t>
             </a:r>
             <a:endParaRPr lang="en-US" sz="2700" dirty="0"/>
           </a:p>
@@ -15718,7 +15818,7 @@
                   <a:schemeClr val="accent3"/>
                 </a:solidFill>
               </a:rPr>
-              <a:t>8 вариантов шести типов. Итог — среднее по пяти критериям, у каждого 4 проверяемых пункта</a:t>
+              <a:t>Каждый аналог оценён по пяти критериям, в каждом критерии 4 проверяемых пункта. Итог считается как среднее</a:t>
             </a:r>
             <a:endParaRPr lang="en-US" sz="1300" dirty="0"/>
           </a:p>
@@ -15764,7 +15864,7 @@
       </p:sp>
       <p:graphicFrame>
         <p:nvGraphicFramePr>
-          <p:cNvPr id="5" name="table-85"/>
+          <p:cNvPr id="5" name="table-86"/>
           <p:cNvGraphicFramePr>
             <a:graphicFrameLocks noGrp="1"/>
           </p:cNvGraphicFramePr>
@@ -15916,7 +16016,7 @@
                             <a:schemeClr val="bg1"/>
                           </a:solidFill>
                         </a:rPr>
-                        <a:t>Главный блокер для чайного магазина</a:t>
+                        <a:t>Что мешает использовать в чайном магазине</a:t>
                       </a:r>
                       <a:endParaRPr lang="en-US" sz="1100" dirty="0"/>
                     </a:p>
@@ -16066,7 +16166,7 @@
                             <a:schemeClr val="tx1"/>
                           </a:solidFill>
                         </a:rPr>
-                        <a:t>партии нет; лицензия 47 000 ₽ и разработчик под Битрикс</a:t>
+                        <a:t>нет партий, нужна лицензия (47 000 ₽) и разработчик под Битрикс</a:t>
                       </a:r>
                       <a:endParaRPr lang="en-US" sz="1100" dirty="0"/>
                     </a:p>
@@ -16216,7 +16316,7 @@
                             <a:schemeClr val="tx1"/>
                           </a:solidFill>
                         </a:rPr>
-                        <a:t>партии нет; своя логика — только внешним приложением</a:t>
+                        <a:t>нет партий, собственная логика только через внешнее приложение</a:t>
                       </a:r>
                       <a:endParaRPr lang="en-US" sz="1100" dirty="0"/>
                     </a:p>
@@ -16366,7 +16466,7 @@
                             <a:schemeClr val="tx1"/>
                           </a:solidFill>
                         </a:rPr>
-                        <a:t>витрина отдельно; резерв после обмена по расписанию</a:t>
+                        <a:t>витрина отдельно, резерв появляется после обмена по расписанию</a:t>
                       </a:r>
                       <a:endParaRPr lang="en-US" sz="1100" dirty="0"/>
                     </a:p>
@@ -16516,7 +16616,7 @@
                             <a:schemeClr val="tx1"/>
                           </a:solidFill>
                         </a:rPr>
-                        <a:t>оплата, доставка и чеки — только плагинами; партии нет</a:t>
+                        <a:t>оплата, доставка и чеки только через плагины, нет партий</a:t>
                       </a:r>
                       <a:endParaRPr lang="en-US" sz="1100" dirty="0"/>
                     </a:p>
@@ -16666,7 +16766,7 @@
                             <a:schemeClr val="tx1"/>
                           </a:solidFill>
                         </a:rPr>
-                        <a:t>своей витрины и каталога нет</a:t>
+                        <a:t>нет своей витрины и каталога</a:t>
                       </a:r>
                       <a:endParaRPr lang="en-US" sz="1100" dirty="0"/>
                     </a:p>
@@ -16816,7 +16916,7 @@
                             <a:schemeClr val="tx1"/>
                           </a:solidFill>
                         </a:rPr>
-                        <a:t>54-ФЗ, хранение ПДн в РФ, «Мир» и СБП</a:t>
+                        <a:t>нет чеков по 54-ФЗ, хранения ПДн в РФ, «Мир» и СБП</a:t>
                       </a:r>
                       <a:endParaRPr lang="en-US" sz="1100" dirty="0"/>
                     </a:p>
@@ -16966,7 +17066,7 @@
                             <a:schemeClr val="tx1"/>
                           </a:solidFill>
                         </a:rPr>
-                        <a:t>ручное списание, резерва нет (слайд 2)</a:t>
+                        <a:t>остатки списываются вручную, резерва нет</a:t>
                       </a:r>
                       <a:endParaRPr lang="en-US" sz="1100" dirty="0"/>
                     </a:p>
@@ -17116,7 +17216,7 @@
                             <a:schemeClr val="tx1"/>
                           </a:solidFill>
                         </a:rPr>
-                        <a:t>закрытая система; пример карточки и фильтра по вкусу</a:t>
+                        <a:t>закрытый магазин, как платформа не продаётся</a:t>
                       </a:r>
                       <a:endParaRPr lang="en-US" sz="1100" dirty="0"/>
                     </a:p>
@@ -17146,7 +17246,7 @@
       </p:graphicFrame>
       <p:sp>
         <p:nvSpPr>
-          <p:cNvPr id="8" name="text-86"/>
+          <p:cNvPr id="8" name="text-87"/>
           <p:cNvSpPr txBox="1"/>
           <p:nvPr/>
         </p:nvSpPr>
@@ -17174,7 +17274,7 @@
                   <a:schemeClr val="accent2"/>
                 </a:solidFill>
               </a:rPr>
-              <a:t>Выделены аналоги для сравнения на слайде 5: лучший по баллам и единственный с партией. Пункты, баллы и источники — дополнительный слайд Д1.</a:t>
+              <a:t>Серым выделены аналоги, с которыми идёт сравнение на слайде 5: 1С-Битрикс набрал больше всех баллов, 1С:УТ единственный учитывает партии. Пункты и баллы по каждому критерию на слайде Д1.</a:t>
             </a:r>
             <a:endParaRPr lang="en-US" sz="1100" dirty="0"/>
           </a:p>
@@ -17275,7 +17375,7 @@
                   <a:schemeClr val="accent2"/>
                 </a:solidFill>
               </a:rPr>
-              <a:t>ПРОТОКОЛ</a:t>
+              <a:t>МЕТОДИКА</a:t>
             </a:r>
             <a:endParaRPr lang="en-US" sz="950" dirty="0"/>
           </a:p>
@@ -17313,7 +17413,7 @@
                   <a:schemeClr val="tx1"/>
                 </a:solidFill>
               </a:rPr>
-              <a:t>Один сценарий, одни данные, 5 повторов</a:t>
+              <a:t>Критерии и порядок сравнения</a:t>
             </a:r>
             <a:endParaRPr lang="en-US" sz="2700" dirty="0"/>
           </a:p>
@@ -17351,7 +17451,7 @@
                   <a:schemeClr val="accent3"/>
                 </a:solidFill>
               </a:rPr>
-              <a:t>Критерии вытекают из задачи; все способы проходят один и тот же сценарий</a:t>
+              <a:t>Каждый критерий связан с требованием из ВКР. Все варианты проходят один и тот же сценарий</a:t>
             </a:r>
             <a:endParaRPr lang="en-US" sz="1300" dirty="0"/>
           </a:p>
@@ -17397,7 +17497,7 @@
       </p:sp>
       <p:graphicFrame>
         <p:nvGraphicFramePr>
-          <p:cNvPr id="6" name="table-87"/>
+          <p:cNvPr id="6" name="table-88"/>
           <p:cNvGraphicFramePr>
             <a:graphicFrameLocks noGrp="1"/>
           </p:cNvGraphicFramePr>
@@ -17550,7 +17650,7 @@
                             <a:schemeClr val="tx1"/>
                           </a:solidFill>
                         </a:rPr>
-                        <a:t>Атрибуты чая в фильтре: вид, регион, обработка, вкус</a:t>
+                        <a:t>Атрибуты чая в фильтре (вид, регион, обработка, вкус)</a:t>
                       </a:r>
                       <a:endParaRPr lang="en-US" sz="1050" dirty="0"/>
                     </a:p>
@@ -17624,7 +17724,7 @@
                             <a:schemeClr val="tx1"/>
                           </a:solidFill>
                         </a:rPr>
-                        <a:t>сколько из 4 работает без доработки</a:t>
+                        <a:t>сколько из четырёх работает без доработки</a:t>
                       </a:r>
                       <a:endParaRPr lang="en-US" sz="1050" dirty="0"/>
                     </a:p>
@@ -17663,7 +17763,7 @@
                             <a:schemeClr val="tx1"/>
                           </a:solidFill>
                         </a:rPr>
-                        <a:t>Время оформления заказа покупателем</a:t>
+                        <a:t>Время оформления заказа</a:t>
                       </a:r>
                       <a:endParaRPr lang="en-US" sz="1050" dirty="0"/>
                     </a:p>
@@ -17737,7 +17837,7 @@
                             <a:schemeClr val="tx1"/>
                           </a:solidFill>
                         </a:rPr>
-                        <a:t>секундомер; среднее из 5 повторов, мин–макс</a:t>
+                        <a:t>среднее по 5 прогонам, минимум и максимум</a:t>
                       </a:r>
                       <a:endParaRPr lang="en-US" sz="1050" dirty="0"/>
                     </a:p>
@@ -17850,7 +17950,7 @@
                             <a:schemeClr val="tx1"/>
                           </a:solidFill>
                         </a:rPr>
-                        <a:t>действия от «заказ пришёл» до «передан в доставку»</a:t>
+                        <a:t>число действий от поступления заказа до передачи в доставку</a:t>
                       </a:r>
                       <a:endParaRPr lang="en-US" sz="1050" dirty="0"/>
                     </a:p>
@@ -17963,7 +18063,7 @@
                             <a:schemeClr val="tx1"/>
                           </a:solidFill>
                         </a:rPr>
-                        <a:t>да — оба, частично — одно, нет — ничего</a:t>
+                        <a:t>«да», если есть оба, «частично», если одно</a:t>
                       </a:r>
                       <a:endParaRPr lang="en-US" sz="1050" dirty="0"/>
                     </a:p>
@@ -18002,7 +18102,7 @@
                             <a:schemeClr val="tx1"/>
                           </a:solidFill>
                         </a:rPr>
-                        <a:t>Требования РФ: 54-ФЗ, «Мир» и СБП, ПДн в РФ</a:t>
+                        <a:t>Требования РФ (54-ФЗ, «Мир» и СБП, хранение ПДн в РФ)</a:t>
                       </a:r>
                       <a:endParaRPr lang="en-US" sz="1050" dirty="0"/>
                     </a:p>
@@ -18076,7 +18176,7 @@
                             <a:schemeClr val="tx1"/>
                           </a:solidFill>
                         </a:rPr>
-                        <a:t>да — все три, частично — часть, нет — ни одного</a:t>
+                        <a:t>«да», если выполнены все три, «частично», если не все</a:t>
                       </a:r>
                       <a:endParaRPr lang="en-US" sz="1050" dirty="0"/>
                     </a:p>
@@ -18106,7 +18206,7 @@
       </p:graphicFrame>
       <p:sp>
         <p:nvSpPr>
-          <p:cNvPr id="8" name="card-88"/>
+          <p:cNvPr id="8" name="card-89"/>
           <p:cNvSpPr/>
           <p:nvPr/>
         </p:nvSpPr>
@@ -18128,7 +18228,7 @@
       </p:sp>
       <p:sp>
         <p:nvSpPr>
-          <p:cNvPr id="9" name="text-89"/>
+          <p:cNvPr id="9" name="text-90"/>
           <p:cNvSpPr txBox="1"/>
           <p:nvPr/>
         </p:nvSpPr>
@@ -18156,7 +18256,7 @@
                   <a:schemeClr val="accent2"/>
                 </a:solidFill>
               </a:rPr>
-              <a:t>ПРОТОКОЛ</a:t>
+              <a:t>УСЛОВИЯ</a:t>
             </a:r>
             <a:endParaRPr lang="en-US" sz="900" dirty="0"/>
           </a:p>
@@ -18164,7 +18264,7 @@
       </p:sp>
       <p:sp>
         <p:nvSpPr>
-          <p:cNvPr id="10" name="text-90"/>
+          <p:cNvPr id="10" name="text-91"/>
           <p:cNvSpPr txBox="1"/>
           <p:nvPr/>
         </p:nvSpPr>
@@ -18183,22 +18283,12 @@
           <a:bodyPr wrap="square" lIns="0" tIns="0" rIns="0" bIns="0" rtlCol="0" anchor="t"/>
           <a:lstStyle/>
           <a:p>
-            <a:pPr indent="0" marL="0">
-              <a:buNone/>
-            </a:pPr>
-            <a:r>
-              <a:rPr lang="en-US" sz="1100" b="1" dirty="0">
-                <a:solidFill>
-                  <a:schemeClr val="tx1"/>
-                </a:solidFill>
-              </a:rPr>
-              <a:t>Сценарий. </a:t>
-            </a:r>
-            <a:pPr indent="0" marL="0">
+            <a:pPr marL="342900" indent="-342900">
               <a:spcAft>
                 <a:spcPts val="600"/>
               </a:spcAft>
-              <a:buNone/>
+              <a:buSzPct val="100000"/>
+              <a:buChar char="•"/>
             </a:pPr>
             <a:r>
               <a:rPr lang="en-US" sz="1100" dirty="0">
@@ -18206,27 +18296,17 @@
                   <a:schemeClr val="tx1"/>
                 </a:solidFill>
               </a:rPr>
-              <a:t>Покупатель находит улун (Тайвань, цветочный, 100 г) и оформляет доставку; администратор подтверждает заказ</a:t>
+              <a:t>Покупатель ищет улун из Тайваня с цветочным вкусом, 100 г, и оформляет доставку. Администратор подтверждает заказ</a:t>
             </a:r>
             <a:endParaRPr lang="en-US" sz="1100" dirty="0"/>
           </a:p>
           <a:p>
-            <a:pPr indent="0" marL="0">
-              <a:buNone/>
-            </a:pPr>
-            <a:r>
-              <a:rPr lang="en-US" sz="1100" b="1" dirty="0">
-                <a:solidFill>
-                  <a:schemeClr val="tx1"/>
-                </a:solidFill>
-              </a:rPr>
-              <a:t>Данные. </a:t>
-            </a:r>
-            <a:pPr indent="0" marL="0">
+            <a:pPr marL="342900" indent="-342900">
               <a:spcAft>
                 <a:spcPts val="600"/>
               </a:spcAft>
-              <a:buNone/>
+              <a:buSzPct val="100000"/>
+              <a:buChar char="•"/>
             </a:pPr>
             <a:r>
               <a:rPr lang="en-US" sz="1100" dirty="0">
@@ -18234,27 +18314,17 @@
                   <a:schemeClr val="tx1"/>
                 </a:solidFill>
               </a:rPr>
-              <a:t>Одни и те же 20 тестовых товаров во всех системах</a:t>
+              <a:t>В каждой системе одни и те же 20 тестовых товаров</a:t>
             </a:r>
             <a:endParaRPr lang="en-US" sz="1100" dirty="0"/>
           </a:p>
           <a:p>
-            <a:pPr indent="0" marL="0">
-              <a:buNone/>
-            </a:pPr>
-            <a:r>
-              <a:rPr lang="en-US" sz="1100" b="1" dirty="0">
-                <a:solidFill>
-                  <a:schemeClr val="tx1"/>
-                </a:solidFill>
-              </a:rPr>
-              <a:t>Роли. </a:t>
-            </a:r>
-            <a:pPr indent="0" marL="0">
+            <a:pPr marL="342900" indent="-342900">
               <a:spcAft>
                 <a:spcPts val="600"/>
               </a:spcAft>
-              <a:buNone/>
+              <a:buSzPct val="100000"/>
+              <a:buChar char="•"/>
             </a:pPr>
             <a:r>
               <a:rPr lang="en-US" sz="1100" dirty="0">
@@ -18262,27 +18332,17 @@
                   <a:schemeClr val="tx1"/>
                 </a:solidFill>
               </a:rPr>
-              <a:t>Покупатель и администратор с одинаковыми правами</a:t>
+              <a:t>У покупателя и администратора одинаковые права</a:t>
             </a:r>
             <a:endParaRPr lang="en-US" sz="1100" dirty="0"/>
           </a:p>
           <a:p>
-            <a:pPr indent="0" marL="0">
-              <a:buNone/>
-            </a:pPr>
-            <a:r>
-              <a:rPr lang="en-US" sz="1100" b="1" dirty="0">
-                <a:solidFill>
-                  <a:schemeClr val="tx1"/>
-                </a:solidFill>
-              </a:rPr>
-              <a:t>Повторы. </a:t>
-            </a:r>
-            <a:pPr indent="0" marL="0">
+            <a:pPr marL="342900" indent="-342900">
               <a:spcAft>
                 <a:spcPts val="600"/>
               </a:spcAft>
-              <a:buNone/>
+              <a:buSzPct val="100000"/>
+              <a:buChar char="•"/>
             </a:pPr>
             <a:r>
               <a:rPr lang="en-US" sz="1100" dirty="0">
@@ -18290,27 +18350,17 @@
                   <a:schemeClr val="tx1"/>
                 </a:solidFill>
               </a:rPr>
-              <a:t>5 засчитываемых прогонов и тренировочный; порядок систем меняется</a:t>
+              <a:t>Пять засчитанных прогонов и один пробный, порядок систем меняется</a:t>
             </a:r>
             <a:endParaRPr lang="en-US" sz="1100" dirty="0"/>
           </a:p>
           <a:p>
-            <a:pPr indent="0" marL="0">
-              <a:buNone/>
-            </a:pPr>
-            <a:r>
-              <a:rPr lang="en-US" sz="1100" b="1" dirty="0">
-                <a:solidFill>
-                  <a:schemeClr val="tx1"/>
-                </a:solidFill>
-              </a:rPr>
-              <a:t>Пороги. </a:t>
-            </a:r>
-            <a:pPr indent="0" marL="0">
+            <a:pPr marL="342900" indent="-342900">
               <a:spcAft>
                 <a:spcPts val="600"/>
               </a:spcAft>
-              <a:buNone/>
+              <a:buSzPct val="100000"/>
+              <a:buChar char="•"/>
             </a:pPr>
             <a:r>
               <a:rPr lang="en-US" sz="1100" dirty="0">
@@ -18318,27 +18368,17 @@
                   <a:schemeClr val="tx1"/>
                 </a:solidFill>
               </a:rPr>
-              <a:t>«Да / частично / нет» записаны до замеров</a:t>
+              <a:t>Границы оценок «да», «частично» и «нет» заданы до замеров</a:t>
             </a:r>
             <a:endParaRPr lang="en-US" sz="1100" dirty="0"/>
           </a:p>
           <a:p>
-            <a:pPr indent="0" marL="0">
-              <a:buNone/>
-            </a:pPr>
-            <a:r>
-              <a:rPr lang="en-US" sz="1100" b="1" dirty="0">
-                <a:solidFill>
-                  <a:schemeClr val="tx1"/>
-                </a:solidFill>
-              </a:rPr>
-              <a:t>Не сравниваем: </a:t>
-            </a:r>
-            <a:pPr indent="0" marL="0">
+            <a:pPr marL="342900" indent="-342900">
               <a:spcAft>
                 <a:spcPts val="600"/>
               </a:spcAft>
-              <a:buNone/>
+              <a:buSzPct val="100000"/>
+              <a:buChar char="•"/>
             </a:pPr>
             <a:r>
               <a:rPr lang="en-US" sz="1100" dirty="0">
@@ -18346,7 +18386,7 @@
                   <a:schemeClr val="tx1"/>
                 </a:solidFill>
               </a:rPr>
-              <a:t>дизайн, стек, «удобство»</a:t>
+              <a:t>Дизайн и стек не сравниваются</a:t>
             </a:r>
             <a:endParaRPr lang="en-US" sz="1100" dirty="0"/>
           </a:p>
@@ -18354,7 +18394,7 @@
       </p:sp>
       <p:sp>
         <p:nvSpPr>
-          <p:cNvPr id="11" name="text-91"/>
+          <p:cNvPr id="11" name="text-92"/>
           <p:cNvSpPr txBox="1"/>
           <p:nvPr/>
         </p:nvSpPr>
@@ -18382,7 +18422,7 @@
                   <a:schemeClr val="accent2"/>
                 </a:solidFill>
               </a:rPr>
-              <a:t>Аналоги — демоверсия 1С-Битрикс (30 дней) и демо-база 1С:УТ. Если замер невозможен, шаги считаются по документации — это указывается в сноске.</a:t>
+              <a:t>Аналоги проверяются на демоверсии 1С-Битрикс (30 дней) и демо-базе 1С:УТ. Если замер провести нельзя, шаги считаются по документации, и это отмечается в сноске.</a:t>
             </a:r>
             <a:endParaRPr lang="en-US" sz="1100" dirty="0"/>
           </a:p>
@@ -18521,7 +18561,7 @@
                   <a:schemeClr val="tx1"/>
                 </a:solidFill>
               </a:rPr>
-              <a:t>Своя система совмещает партию и резерв</a:t>
+              <a:t>Сравнение на одном сценарии</a:t>
             </a:r>
             <a:endParaRPr lang="en-US" sz="2700" dirty="0"/>
           </a:p>
@@ -18559,7 +18599,7 @@
                   <a:schemeClr val="accent3"/>
                 </a:solidFill>
               </a:rPr>
-              <a:t>Задача: покупатель находит чай по атрибутам и оформляет заказ; магазин не продаёт отсутствующее</a:t>
+              <a:t>Покупатель находит чай по атрибутам и оформляет заказ, магазин не продаёт отсутствующий товар</a:t>
             </a:r>
             <a:endParaRPr lang="en-US" sz="1300" dirty="0"/>
           </a:p>
@@ -18605,7 +18645,7 @@
       </p:sp>
       <p:graphicFrame>
         <p:nvGraphicFramePr>
-          <p:cNvPr id="7" name="table-92"/>
+          <p:cNvPr id="7" name="table-93"/>
           <p:cNvGraphicFramePr>
             <a:graphicFrameLocks noGrp="1"/>
           </p:cNvGraphicFramePr>
@@ -18649,7 +18689,7 @@
                             <a:schemeClr val="bg1"/>
                           </a:solidFill>
                         </a:rPr>
-                        <a:t>Способ</a:t>
+                        <a:t>Вариант</a:t>
                       </a:r>
                       <a:endParaRPr lang="en-US" sz="1050" dirty="0"/>
                     </a:p>
@@ -18871,7 +18911,7 @@
                             <a:schemeClr val="bg1"/>
                           </a:solidFill>
                         </a:rPr>
-                        <a:t>На уровне лучшего, из 5</a:t>
+                        <a:t>Критериев на уровне лучшего</a:t>
                       </a:r>
                       <a:endParaRPr lang="en-US" sz="1050" dirty="0"/>
                     </a:p>
@@ -19095,7 +19135,7 @@
                             <a:schemeClr val="tx1"/>
                           </a:solidFill>
                         </a:rPr>
-                        <a:t>частично: интеграции не завершены</a:t>
+                        <a:t>частично (интеграции не завершены)</a:t>
                       </a:r>
                       <a:endParaRPr lang="en-US" sz="1050" dirty="0"/>
                     </a:p>
@@ -19132,7 +19172,7 @@
                             <a:schemeClr val="accent3"/>
                           </a:solidFill>
                         </a:rPr>
-                        <a:t>[итог]</a:t>
+                        <a:t>[из 5]</a:t>
                       </a:r>
                       <a:endParaRPr lang="en-US" sz="1050" dirty="0"/>
                     </a:p>
@@ -19319,7 +19359,7 @@
                             <a:schemeClr val="tx1"/>
                           </a:solidFill>
                         </a:rPr>
-                        <a:t>частично: партии нет</a:t>
+                        <a:t>частично (нет партий)</a:t>
                       </a:r>
                       <a:endParaRPr lang="en-US" sz="1050" dirty="0"/>
                     </a:p>
@@ -19393,7 +19433,7 @@
                             <a:schemeClr val="accent3"/>
                           </a:solidFill>
                         </a:rPr>
-                        <a:t>[итог]</a:t>
+                        <a:t>[из 5]</a:t>
                       </a:r>
                       <a:endParaRPr lang="en-US" sz="1050" dirty="0"/>
                     </a:p>
@@ -19580,7 +19620,7 @@
                             <a:schemeClr val="tx1"/>
                           </a:solidFill>
                         </a:rPr>
-                        <a:t>частично: резерв после обмена</a:t>
+                        <a:t>частично (резерв после обмена)</a:t>
                       </a:r>
                       <a:endParaRPr lang="en-US" sz="1050" dirty="0"/>
                     </a:p>
@@ -19617,7 +19657,7 @@
                             <a:schemeClr val="tx1"/>
                           </a:solidFill>
                         </a:rPr>
-                        <a:t>частично: «Мир» и СБП через витрину</a:t>
+                        <a:t>частично («Мир» и СБП через витрину)</a:t>
                       </a:r>
                       <a:endParaRPr lang="en-US" sz="1050" dirty="0"/>
                     </a:p>
@@ -19654,7 +19694,7 @@
                             <a:schemeClr val="accent3"/>
                           </a:solidFill>
                         </a:rPr>
-                        <a:t>[итог]</a:t>
+                        <a:t>[из 5]</a:t>
                       </a:r>
                       <a:endParaRPr lang="en-US" sz="1050" dirty="0"/>
                     </a:p>
@@ -19915,7 +19955,7 @@
                             <a:schemeClr val="accent3"/>
                           </a:solidFill>
                         </a:rPr>
-                        <a:t>[итог]</a:t>
+                        <a:t>[из 5]</a:t>
                       </a:r>
                       <a:endParaRPr lang="en-US" sz="1050" dirty="0"/>
                     </a:p>
@@ -19945,7 +19985,7 @@
       </p:graphicFrame>
       <p:sp>
         <p:nvSpPr>
-          <p:cNvPr id="8" name="legend-93"/>
+          <p:cNvPr id="8" name="legend-94"/>
           <p:cNvSpPr/>
           <p:nvPr/>
         </p:nvSpPr>
@@ -19965,7 +20005,7 @@
       </p:sp>
       <p:sp>
         <p:nvSpPr>
-          <p:cNvPr id="9" name="text-94"/>
+          <p:cNvPr id="9" name="text-95"/>
           <p:cNvSpPr txBox="1"/>
           <p:nvPr/>
         </p:nvSpPr>
@@ -20001,7 +20041,7 @@
       </p:sp>
       <p:sp>
         <p:nvSpPr>
-          <p:cNvPr id="10" name="legend-95"/>
+          <p:cNvPr id="10" name="legend-96"/>
           <p:cNvSpPr/>
           <p:nvPr/>
         </p:nvSpPr>
@@ -20021,7 +20061,7 @@
       </p:sp>
       <p:sp>
         <p:nvSpPr>
-          <p:cNvPr id="11" name="text-96"/>
+          <p:cNvPr id="11" name="text-97"/>
           <p:cNvSpPr txBox="1"/>
           <p:nvPr/>
         </p:nvSpPr>
@@ -20057,7 +20097,7 @@
       </p:sp>
       <p:sp>
         <p:nvSpPr>
-          <p:cNvPr id="12" name="legend-97"/>
+          <p:cNvPr id="12" name="legend-98"/>
           <p:cNvSpPr/>
           <p:nvPr/>
         </p:nvSpPr>
@@ -20077,7 +20117,7 @@
       </p:sp>
       <p:sp>
         <p:nvSpPr>
-          <p:cNvPr id="13" name="text-98"/>
+          <p:cNvPr id="13" name="text-99"/>
           <p:cNvSpPr txBox="1"/>
           <p:nvPr/>
         </p:nvSpPr>
@@ -20113,7 +20153,7 @@
       </p:sp>
       <p:sp>
         <p:nvSpPr>
-          <p:cNvPr id="14" name="text-99"/>
+          <p:cNvPr id="14" name="text-100"/>
           <p:cNvSpPr txBox="1"/>
           <p:nvPr/>
         </p:nvSpPr>
@@ -20141,7 +20181,7 @@
                   <a:schemeClr val="accent3"/>
                 </a:solidFill>
               </a:rPr>
-              <a:t>* Среднее из 5 повторов сценария (слайд 4). ** Сверить в демоверсии. [ ] — данные после замеров.</a:t>
+              <a:t>* Среднее по 5 прогонам (слайд 4). ** Проверить в демоверсии. В скобках данные после замеров.</a:t>
             </a:r>
             <a:endParaRPr lang="en-US" sz="950" dirty="0"/>
           </a:p>
@@ -20149,7 +20189,7 @@
       </p:sp>
       <p:sp>
         <p:nvSpPr>
-          <p:cNvPr id="15" name="card-100"/>
+          <p:cNvPr id="15" name="card-101"/>
           <p:cNvSpPr/>
           <p:nvPr/>
         </p:nvSpPr>
@@ -20171,7 +20211,7 @@
       </p:sp>
       <p:sp>
         <p:nvSpPr>
-          <p:cNvPr id="16" name="text-101"/>
+          <p:cNvPr id="16" name="text-102"/>
           <p:cNvSpPr txBox="1"/>
           <p:nvPr/>
         </p:nvSpPr>
@@ -20207,7 +20247,7 @@
       </p:sp>
       <p:sp>
         <p:nvSpPr>
-          <p:cNvPr id="17" name="text-102"/>
+          <p:cNvPr id="17" name="text-103"/>
           <p:cNvSpPr txBox="1"/>
           <p:nvPr/>
         </p:nvSpPr>
@@ -20235,7 +20275,7 @@
                   <a:schemeClr val="bg1"/>
                 </a:solidFill>
               </a:rPr>
-              <a:t>Только в своей системе поиск по атрибутам чая, резерв при оформлении и партия работают на одной модели данных. Ручных операций — [N] на заказ против 7 без системы.</a:t>
+              <a:t>Поиск по атрибутам чая, резерв при оформлении и партии работают вместе только в собственной системе. На один заказ приходится [N] ручных операций, без системы их 7.</a:t>
             </a:r>
             <a:endParaRPr lang="en-US" sz="1100" dirty="0"/>
           </a:p>
@@ -20243,7 +20283,7 @@
       </p:sp>
       <p:sp>
         <p:nvSpPr>
-          <p:cNvPr id="18" name="card-103"/>
+          <p:cNvPr id="18" name="card-104"/>
           <p:cNvSpPr/>
           <p:nvPr/>
         </p:nvSpPr>
@@ -20265,7 +20305,7 @@
       </p:sp>
       <p:sp>
         <p:nvSpPr>
-          <p:cNvPr id="19" name="text-104"/>
+          <p:cNvPr id="19" name="text-105"/>
           <p:cNvSpPr txBox="1"/>
           <p:nvPr/>
         </p:nvSpPr>
@@ -20301,7 +20341,7 @@
       </p:sp>
       <p:sp>
         <p:nvSpPr>
-          <p:cNvPr id="20" name="text-105"/>
+          <p:cNvPr id="20" name="text-106"/>
           <p:cNvSpPr txBox="1"/>
           <p:nvPr/>
         </p:nvSpPr>
@@ -20329,7 +20369,7 @@
                   <a:schemeClr val="tx1"/>
                 </a:solidFill>
               </a:rPr>
-              <a:t>Требования РФ (54-ФЗ, «Мир», СБП) готовые решения закрывают из коробки. В прототипе оплата и доставка подключены через адаптеры частично.</a:t>
+              <a:t>Готовые решения выполняют требования РФ (54-ФЗ, «Мир», СБП) без доработки. В прототипе оплата и доставка подключены через адаптеры не полностью.</a:t>
             </a:r>
             <a:endParaRPr lang="en-US" sz="1100" dirty="0"/>
           </a:p>
@@ -20430,7 +20470,7 @@
                   <a:schemeClr val="accent2"/>
                 </a:solidFill>
               </a:rPr>
-              <a:t>СИЛЬНЫЕ АНАЛОГИ</a:t>
+              <a:t>СИЛЬНЫЕ СТОРОНЫ АНАЛОГОВ</a:t>
             </a:r>
             <a:endParaRPr lang="en-US" sz="950" dirty="0"/>
           </a:p>
@@ -20468,7 +20508,7 @@
                   <a:schemeClr val="tx1"/>
                 </a:solidFill>
               </a:rPr>
-              <a:t>Где аналоги сильнее и почему их не берём</a:t>
+              <a:t>Преимущества аналогов</a:t>
             </a:r>
             <a:endParaRPr lang="en-US" sz="2700" dirty="0"/>
           </a:p>
@@ -20506,7 +20546,7 @@
                   <a:schemeClr val="accent3"/>
                 </a:solidFill>
               </a:rPr>
-              <a:t>Сильные стороны аналогов называю сам — до вопросов комиссии</a:t>
+              <a:t>Что готовые решения делают лучше и почему их недостаточно для чайного магазина</a:t>
             </a:r>
             <a:endParaRPr lang="en-US" sz="1300" dirty="0"/>
           </a:p>
@@ -20552,7 +20592,7 @@
       </p:sp>
       <p:graphicFrame>
         <p:nvGraphicFramePr>
-          <p:cNvPr id="8" name="table-106"/>
+          <p:cNvPr id="8" name="table-107"/>
           <p:cNvGraphicFramePr>
             <a:graphicFrameLocks noGrp="1"/>
           </p:cNvGraphicFramePr>
@@ -20630,7 +20670,7 @@
                             <a:schemeClr val="bg1"/>
                           </a:solidFill>
                         </a:rPr>
-                        <a:t>В чём сильнее своей системы</a:t>
+                        <a:t>Преимущества</a:t>
                       </a:r>
                       <a:endParaRPr lang="en-US" sz="1100" dirty="0"/>
                     </a:p>
@@ -20667,7 +20707,7 @@
                             <a:schemeClr val="bg1"/>
                           </a:solidFill>
                         </a:rPr>
-                        <a:t>Почему не берём как есть</a:t>
+                        <a:t>Почему не подходит</a:t>
                       </a:r>
                       <a:endParaRPr lang="en-US" sz="1100" dirty="0"/>
                     </a:p>
@@ -20704,7 +20744,7 @@
                             <a:schemeClr val="bg1"/>
                           </a:solidFill>
                         </a:rPr>
-                        <a:t>Сознательно не делаем</a:t>
+                        <a:t>Не реализуется в своей системе</a:t>
                       </a:r>
                       <a:endParaRPr lang="en-US" sz="1100" dirty="0"/>
                     </a:p>
@@ -20780,7 +20820,7 @@
                             <a:schemeClr val="tx1"/>
                           </a:solidFill>
                         </a:rPr>
-                        <a:t>Из коробки: чеки по 54-ФЗ, резерв, фильтр по свойствам, журнал событий, службы доставки; итог 4,7</a:t>
+                        <a:t>Чеки по 54-ФЗ, резерв, фильтр по свойствам, журнал событий и службы доставки есть из коробки. Итог 4,7</a:t>
                       </a:r>
                       <a:endParaRPr lang="en-US" sz="1050" dirty="0"/>
                     </a:p>
@@ -20817,7 +20857,7 @@
                             <a:schemeClr val="tx1"/>
                           </a:solidFill>
                         </a:rPr>
-                        <a:t>Партии как учётной единицы нет; лицензия 47 000 ₽ и 11 750 ₽/год; нужен разработчик под Битрикс</a:t>
+                        <a:t>Нет партий как учётной единицы. Лицензия стоит 47 000 ₽ и 11 750 ₽ в год, нужен разработчик под Битрикс</a:t>
                       </a:r>
                       <a:endParaRPr lang="en-US" sz="1050" dirty="0"/>
                     </a:p>
@@ -20930,7 +20970,7 @@
                             <a:schemeClr val="tx1"/>
                           </a:solidFill>
                         </a:rPr>
-                        <a:t>Запуск без разработки за 2 295 ₽/мес; оплата и доставка — в настройках; хостинг на платформе</a:t>
+                        <a:t>Запускается без разработки за 2 295 ₽ в месяц, оплата и доставка подключаются в настройках, хостинг на стороне платформы</a:t>
                       </a:r>
                       <a:endParaRPr lang="en-US" sz="1050" dirty="0"/>
                     </a:p>
@@ -20967,7 +21007,7 @@
                             <a:schemeClr val="tx1"/>
                           </a:solidFill>
                         </a:rPr>
-                        <a:t>Партии нет; своя логика резерва — только внешним приложением через API</a:t>
+                        <a:t>Нет партий. Свою логику резерва можно добавить только внешним приложением через API</a:t>
                       </a:r>
                       <a:endParaRPr lang="en-US" sz="1050" dirty="0"/>
                     </a:p>
@@ -21117,7 +21157,7 @@
                             <a:schemeClr val="tx1"/>
                           </a:solidFill>
                         </a:rPr>
-                        <a:t>Витрина — отдельный продукт; обмен по расписанию, поэтому нет резерва в момент заказа</a:t>
+                        <a:t>Витрина покупается отдельно, обмен идёт по расписанию, поэтому резерва в момент заказа нет</a:t>
                       </a:r>
                       <a:endParaRPr lang="en-US" sz="1050" dirty="0"/>
                     </a:p>
@@ -21154,7 +21194,7 @@
                             <a:schemeClr val="tx1"/>
                           </a:solidFill>
                         </a:rPr>
-                        <a:t>Бухучёт и фискализация остаются в 1С и ОФД; обмен CommerceML 2</a:t>
+                        <a:t>Бухучёт и фискализация остаются в 1С и ОФД, обмен через CommerceML 2</a:t>
                       </a:r>
                       <a:endParaRPr lang="en-US" sz="1050" dirty="0"/>
                     </a:p>
@@ -21230,7 +21270,7 @@
                             <a:schemeClr val="tx1"/>
                           </a:solidFill>
                         </a:rPr>
-                        <a:t>0 ₽ и 0 дней на запуск; при малом потоке заказов быстрее</a:t>
+                        <a:t>Бесплатно и сразу. При небольшом потоке заказов быстрее</a:t>
                       </a:r>
                       <a:endParaRPr lang="en-US" sz="1050" dirty="0"/>
                     </a:p>
@@ -21267,7 +21307,7 @@
                             <a:schemeClr val="tx1"/>
                           </a:solidFill>
                         </a:rPr>
-                        <a:t>Ручное списание, резерва нет, история в переписке</a:t>
+                        <a:t>Остатки списываются вручную, резерва нет, история хранится в переписке</a:t>
                       </a:r>
                       <a:endParaRPr lang="en-US" sz="1050" dirty="0"/>
                     </a:p>
@@ -21334,7 +21374,7 @@
       </p:graphicFrame>
       <p:sp>
         <p:nvSpPr>
-          <p:cNvPr id="8" name="text-107"/>
+          <p:cNvPr id="8" name="text-108"/>
           <p:cNvSpPr txBox="1"/>
           <p:nvPr/>
         </p:nvSpPr>
@@ -21362,7 +21402,7 @@
                   <a:schemeClr val="accent3"/>
                 </a:solidFill>
               </a:rPr>
-              <a:t>* Сверить в демо-базе 1С:УТ</a:t>
+              <a:t>* Проверить в демо-базе 1С:УТ</a:t>
             </a:r>
             <a:endParaRPr lang="en-US" sz="950" dirty="0"/>
           </a:p>
@@ -21370,7 +21410,7 @@
       </p:sp>
       <p:sp>
         <p:nvSpPr>
-          <p:cNvPr id="9" name="card-108"/>
+          <p:cNvPr id="9" name="card-109"/>
           <p:cNvSpPr/>
           <p:nvPr/>
         </p:nvSpPr>
@@ -21392,7 +21432,7 @@
       </p:sp>
       <p:sp>
         <p:nvSpPr>
-          <p:cNvPr id="10" name="text-109"/>
+          <p:cNvPr id="10" name="text-110"/>
           <p:cNvSpPr txBox="1"/>
           <p:nvPr/>
         </p:nvSpPr>
@@ -21420,7 +21460,7 @@
                   <a:schemeClr val="bg1"/>
                 </a:solidFill>
               </a:rPr>
-              <a:t>Готовые решения закрывают витрину, оплату и чеки. Но ни одно не совмещает партию чая как учётную единицу с резервом в момент заказа. Поэтому разработана специализированная система, а оплату, доставку и фискализацию она получает от внешних систем через адаптеры.</a:t>
+              <a:t>Готовые решения закрывают витрину, оплату и чеки, но ни одно не учитывает партию чая вместе с резервом в момент заказа. Поэтому система разработана под эту задачу, а оплату, доставку и фискализацию получает от внешних сервисов через адаптеры.</a:t>
             </a:r>
             <a:endParaRPr lang="en-US" sz="1150" dirty="0"/>
           </a:p>
@@ -21521,7 +21561,7 @@
                   <a:schemeClr val="accent2"/>
                 </a:solidFill>
               </a:rPr>
-              <a:t>НАДЁЖНОСТЬ</a:t>
+              <a:t>ОШИБКИ И СБОИ</a:t>
             </a:r>
             <a:endParaRPr lang="en-US" sz="950" dirty="0"/>
           </a:p>
@@ -21559,7 +21599,7 @@
                   <a:schemeClr val="tx1"/>
                 </a:solidFill>
               </a:rPr>
-              <a:t>Не только успешный сценарий</a:t>
+              <a:t>Поведение при ошибках и сбоях</a:t>
             </a:r>
             <a:endParaRPr lang="en-US" sz="2700" dirty="0"/>
           </a:p>
@@ -21597,7 +21637,7 @@
                   <a:schemeClr val="accent3"/>
                 </a:solidFill>
               </a:rPr>
-              <a:t>Сравнение с работой без системы; платформы в негативных сценариях не проверялись</a:t>
+              <a:t>Сравнение с работой без системы. Готовые платформы в этих сценариях не проверялись</a:t>
             </a:r>
             <a:endParaRPr lang="en-US" sz="1300" dirty="0"/>
           </a:p>
@@ -21643,7 +21683,7 @@
       </p:sp>
       <p:graphicFrame>
         <p:nvGraphicFramePr>
-          <p:cNvPr id="9" name="table-110"/>
+          <p:cNvPr id="9" name="table-111"/>
           <p:cNvGraphicFramePr>
             <a:graphicFrameLocks noGrp="1"/>
           </p:cNvGraphicFramePr>
@@ -21795,7 +21835,7 @@
                             <a:schemeClr val="bg1"/>
                           </a:solidFill>
                         </a:rPr>
-                        <a:t>Чем подтверждено</a:t>
+                        <a:t>Подтверждение</a:t>
                       </a:r>
                       <a:endParaRPr lang="en-US" sz="1100" dirty="0"/>
                     </a:p>
@@ -21871,7 +21911,7 @@
                             <a:schemeClr val="tx1"/>
                           </a:solidFill>
                         </a:rPr>
-                        <a:t>обоим отвечают «есть», конфликт вручную</a:t>
+                        <a:t>обоим отвечают, что товар есть, конфликт решается вручную</a:t>
                       </a:r>
                       <a:endParaRPr lang="en-US" sz="1050" dirty="0"/>
                     </a:p>
@@ -21908,7 +21948,7 @@
                             <a:schemeClr val="tx1"/>
                           </a:solidFill>
                         </a:rPr>
-                        <a:t>резерв в транзакции; второй видит «нет в наличии» (UC-01, п. 3а)</a:t>
+                        <a:t>резерв в транзакции, второй покупатель видит «нет в наличии» (UC-01, п. 3а)</a:t>
                       </a:r>
                       <a:endParaRPr lang="en-US" sz="1050" dirty="0"/>
                     </a:p>
@@ -21945,7 +21985,7 @@
                             <a:schemeClr val="accent3"/>
                           </a:solidFill>
                         </a:rPr>
-                        <a:t>[тест — провести]</a:t>
+                        <a:t>[провести тест]</a:t>
                       </a:r>
                       <a:endParaRPr lang="en-US" sz="1050" dirty="0"/>
                     </a:p>
@@ -22095,7 +22135,7 @@
                             <a:schemeClr val="accent3"/>
                           </a:solidFill>
                         </a:rPr>
-                        <a:t>[тест — провести]</a:t>
+                        <a:t>[провести тест]</a:t>
                       </a:r>
                       <a:endParaRPr lang="en-US" sz="1050" dirty="0"/>
                     </a:p>
@@ -22208,7 +22248,7 @@
                             <a:schemeClr val="tx1"/>
                           </a:solidFill>
                         </a:rPr>
-                        <a:t>валидация и сообщение об ошибке (UC-02, п. 3а)</a:t>
+                        <a:t>данные проверяются, выводится сообщение (UC-02, п. 3а)</a:t>
                       </a:r>
                       <a:endParaRPr lang="en-US" sz="1050" dirty="0"/>
                     </a:p>
@@ -22245,7 +22285,7 @@
                             <a:schemeClr val="accent3"/>
                           </a:solidFill>
                         </a:rPr>
-                        <a:t>[тест — провести]</a:t>
+                        <a:t>[провести тест]</a:t>
                       </a:r>
                       <a:endParaRPr lang="en-US" sz="1050" dirty="0"/>
                     </a:p>
@@ -22284,7 +22324,7 @@
                             <a:schemeClr val="tx1"/>
                           </a:solidFill>
                         </a:rPr>
-                        <a:t>Пользователь без прав открывает админку</a:t>
+                        <a:t>Пользователь без прав открывает админ-панель</a:t>
                       </a:r>
                       <a:endParaRPr lang="en-US" sz="1050" dirty="0"/>
                     </a:p>
@@ -22321,7 +22361,7 @@
                             <a:schemeClr val="tx1"/>
                           </a:solidFill>
                         </a:rPr>
-                        <a:t>таблицу видит любой со ссылкой</a:t>
+                        <a:t>таблицу видит любой, у кого есть ссылка</a:t>
                       </a:r>
                       <a:endParaRPr lang="en-US" sz="1050" dirty="0"/>
                     </a:p>
@@ -22358,7 +22398,7 @@
                             <a:schemeClr val="tx1"/>
                           </a:solidFill>
                         </a:rPr>
-                        <a:t>доступ запрещён, RBAC (F-15)</a:t>
+                        <a:t>доступ запрещён ролевой моделью (F-15)</a:t>
                       </a:r>
                       <a:endParaRPr lang="en-US" sz="1050" dirty="0"/>
                     </a:p>
@@ -22395,7 +22435,7 @@
                             <a:schemeClr val="accent3"/>
                           </a:solidFill>
                         </a:rPr>
-                        <a:t>[тест — провести]</a:t>
+                        <a:t>[провести тест]</a:t>
                       </a:r>
                       <a:endParaRPr lang="en-US" sz="1050" dirty="0"/>
                     </a:p>
@@ -22695,7 +22735,7 @@
                             <a:schemeClr val="accent3"/>
                           </a:solidFill>
                         </a:rPr>
-                        <a:t>[тест — провести]</a:t>
+                        <a:t>[провести тест]</a:t>
                       </a:r>
                       <a:endParaRPr lang="en-US" sz="1050" dirty="0"/>
                     </a:p>
@@ -22808,7 +22848,7 @@
                             <a:schemeClr val="tx1"/>
                           </a:solidFill>
                         </a:rPr>
-                        <a:t>1,2 с, 99,8 % успешных запросов (N-01: ≤ 2 с)</a:t>
+                        <a:t>отклик 1,2 с, успешных запросов 99,8 % (норма N-01 до 2 с)</a:t>
                       </a:r>
                       <a:endParaRPr lang="en-US" sz="1050" dirty="0"/>
                     </a:p>
@@ -22875,7 +22915,7 @@
       </p:graphicFrame>
       <p:sp>
         <p:nvSpPr>
-          <p:cNvPr id="8" name="text-111"/>
+          <p:cNvPr id="8" name="text-112"/>
           <p:cNvSpPr txBox="1"/>
           <p:nvPr/>
         </p:nvSpPr>
@@ -22903,7 +22943,7 @@
                   <a:schemeClr val="accent3"/>
                 </a:solidFill>
               </a:rPr>
-              <a:t>* Проверить при отключённом адаптере. Квадратные скобки — проверки, которые нужно провести до показа.</a:t>
+              <a:t>* Проверить с отключённым адаптером. В скобках проверки, которые нужно провести до показа.</a:t>
             </a:r>
             <a:endParaRPr lang="en-US" sz="950" dirty="0"/>
           </a:p>
@@ -23042,7 +23082,7 @@
                   <a:schemeClr val="tx1"/>
                 </a:solidFill>
               </a:rPr>
-              <a:t>Ограничения и границы применимости</a:t>
+              <a:t>Ограничения и область применения</a:t>
             </a:r>
             <a:endParaRPr lang="en-US" sz="2700" dirty="0"/>
           </a:p>
@@ -23080,7 +23120,7 @@
                   <a:schemeClr val="accent3"/>
                 </a:solidFill>
               </a:rPr>
-              <a:t>Слабые места называю сам и объясняю, почему они не обесценивают результат</a:t>
+              <a:t>Слабые стороны решения и условия, в которых выгоднее выбрать аналог</a:t>
             </a:r>
             <a:endParaRPr lang="en-US" sz="1300" dirty="0"/>
           </a:p>
@@ -23126,7 +23166,7 @@
       </p:sp>
       <p:sp>
         <p:nvSpPr>
-          <p:cNvPr id="7" name="card-112"/>
+          <p:cNvPr id="7" name="card-113"/>
           <p:cNvSpPr/>
           <p:nvPr/>
         </p:nvSpPr>
@@ -23148,7 +23188,7 @@
       </p:sp>
       <p:sp>
         <p:nvSpPr>
-          <p:cNvPr id="8" name="text-113"/>
+          <p:cNvPr id="8" name="text-114"/>
           <p:cNvSpPr txBox="1"/>
           <p:nvPr/>
         </p:nvSpPr>
@@ -23184,7 +23224,7 @@
       </p:sp>
       <p:sp>
         <p:nvSpPr>
-          <p:cNvPr id="9" name="badge-114"/>
+          <p:cNvPr id="9" name="badge-115"/>
           <p:cNvSpPr/>
           <p:nvPr/>
         </p:nvSpPr>
@@ -23204,7 +23244,7 @@
       </p:sp>
       <p:sp>
         <p:nvSpPr>
-          <p:cNvPr id="10" name="text-115"/>
+          <p:cNvPr id="10" name="text-116"/>
           <p:cNvSpPr txBox="1"/>
           <p:nvPr/>
         </p:nvSpPr>
@@ -23240,7 +23280,7 @@
       </p:sp>
       <p:sp>
         <p:nvSpPr>
-          <p:cNvPr id="11" name="text-116"/>
+          <p:cNvPr id="11" name="text-117"/>
           <p:cNvSpPr txBox="1"/>
           <p:nvPr/>
         </p:nvSpPr>
@@ -23268,7 +23308,7 @@
                   <a:schemeClr val="tx1"/>
                 </a:solidFill>
               </a:rPr>
-              <a:t>1С-Битрикс — 4,7, прототип — 3,1–3,9: по сумме баллов готовые решения сильнее</a:t>
+              <a:t>По сумме баллов готовые решения выше: у 1С-Битрикс 4,7, у прототипа 3,1–3,9</a:t>
             </a:r>
             <a:endParaRPr lang="en-US" sz="1100" dirty="0"/>
           </a:p>
@@ -23276,7 +23316,7 @@
       </p:sp>
       <p:sp>
         <p:nvSpPr>
-          <p:cNvPr id="12" name="badge-117"/>
+          <p:cNvPr id="12" name="badge-118"/>
           <p:cNvSpPr/>
           <p:nvPr/>
         </p:nvSpPr>
@@ -23296,7 +23336,7 @@
       </p:sp>
       <p:sp>
         <p:nvSpPr>
-          <p:cNvPr id="13" name="text-118"/>
+          <p:cNvPr id="13" name="text-119"/>
           <p:cNvSpPr txBox="1"/>
           <p:nvPr/>
         </p:nvSpPr>
@@ -23332,7 +23372,7 @@
       </p:sp>
       <p:sp>
         <p:nvSpPr>
-          <p:cNvPr id="14" name="text-119"/>
+          <p:cNvPr id="14" name="text-120"/>
           <p:cNvSpPr txBox="1"/>
           <p:nvPr/>
         </p:nvSpPr>
@@ -23360,7 +23400,7 @@
                   <a:schemeClr val="tx1"/>
                 </a:solidFill>
               </a:rPr>
-              <a:t>Оплата, доставка и фискализация — через адаптеры, в прототипе частично</a:t>
+              <a:t>Оплата, доставка и фискализация подключены через адаптеры не полностью</a:t>
             </a:r>
             <a:endParaRPr lang="en-US" sz="1100" dirty="0"/>
           </a:p>
@@ -23368,7 +23408,7 @@
       </p:sp>
       <p:sp>
         <p:nvSpPr>
-          <p:cNvPr id="15" name="badge-120"/>
+          <p:cNvPr id="15" name="badge-121"/>
           <p:cNvSpPr/>
           <p:nvPr/>
         </p:nvSpPr>
@@ -23388,7 +23428,7 @@
       </p:sp>
       <p:sp>
         <p:nvSpPr>
-          <p:cNvPr id="16" name="text-121"/>
+          <p:cNvPr id="16" name="text-122"/>
           <p:cNvSpPr txBox="1"/>
           <p:nvPr/>
         </p:nvSpPr>
@@ -23424,7 +23464,7 @@
       </p:sp>
       <p:sp>
         <p:nvSpPr>
-          <p:cNvPr id="17" name="text-122"/>
+          <p:cNvPr id="17" name="text-123"/>
           <p:cNvSpPr txBox="1"/>
           <p:nvPr/>
         </p:nvSpPr>
@@ -23452,7 +23492,7 @@
                   <a:schemeClr val="tx1"/>
                 </a:solidFill>
               </a:rPr>
-              <a:t>Выше 100 RPS отклик растёт: 150 RPS — 1,9 с, 200 RPS — 2,8 с. План: Redis-кеш, CDN, ASGI</a:t>
+              <a:t>При нагрузке выше 100 RPS отклик растёт до 1,9 с (150 RPS) и 2,8 с (200 RPS). План: кеш Redis, CDN, ASGI</a:t>
             </a:r>
             <a:endParaRPr lang="en-US" sz="1100" dirty="0"/>
           </a:p>
@@ -23460,7 +23500,7 @@
       </p:sp>
       <p:sp>
         <p:nvSpPr>
-          <p:cNvPr id="18" name="badge-123"/>
+          <p:cNvPr id="18" name="badge-124"/>
           <p:cNvSpPr/>
           <p:nvPr/>
         </p:nvSpPr>
@@ -23480,7 +23520,7 @@
       </p:sp>
       <p:sp>
         <p:nvSpPr>
-          <p:cNvPr id="19" name="text-124"/>
+          <p:cNvPr id="19" name="text-125"/>
           <p:cNvSpPr txBox="1"/>
           <p:nvPr/>
         </p:nvSpPr>
@@ -23516,7 +23556,7 @@
       </p:sp>
       <p:sp>
         <p:nvSpPr>
-          <p:cNvPr id="20" name="text-125"/>
+          <p:cNvPr id="20" name="text-126"/>
           <p:cNvSpPr txBox="1"/>
           <p:nvPr/>
         </p:nvSpPr>
@@ -23544,7 +23584,7 @@
                   <a:schemeClr val="tx1"/>
                 </a:solidFill>
               </a:rPr>
-              <a:t>Production-стенда нет; замеры — на локальном сервере (4 ядра, 8 ГБ, Docker)</a:t>
+              <a:t>Нет production-стенда, замеры сделаны на локальном сервере (4 ядра, 8 ГБ, Docker)</a:t>
             </a:r>
             <a:endParaRPr lang="en-US" sz="1100" dirty="0"/>
           </a:p>
@@ -23552,7 +23592,7 @@
       </p:sp>
       <p:sp>
         <p:nvSpPr>
-          <p:cNvPr id="21" name="badge-126"/>
+          <p:cNvPr id="21" name="badge-127"/>
           <p:cNvSpPr/>
           <p:nvPr/>
         </p:nvSpPr>
@@ -23572,7 +23612,7 @@
       </p:sp>
       <p:sp>
         <p:nvSpPr>
-          <p:cNvPr id="22" name="text-127"/>
+          <p:cNvPr id="22" name="text-128"/>
           <p:cNvSpPr txBox="1"/>
           <p:nvPr/>
         </p:nvSpPr>
@@ -23608,7 +23648,7 @@
       </p:sp>
       <p:sp>
         <p:nvSpPr>
-          <p:cNvPr id="23" name="text-128"/>
+          <p:cNvPr id="23" name="text-129"/>
           <p:cNvSpPr txBox="1"/>
           <p:nvPr/>
         </p:nvSpPr>
@@ -23636,7 +23676,7 @@
                   <a:schemeClr val="tx1"/>
                 </a:solidFill>
               </a:rPr>
-              <a:t>Аналоги сравнивались на демоверсиях; редакции и версии — на дату замера</a:t>
+              <a:t>Аналоги проверялись на демоверсиях, результат привязан к дате и версии</a:t>
             </a:r>
             <a:endParaRPr lang="en-US" sz="1100" dirty="0"/>
           </a:p>
@@ -23644,7 +23684,7 @@
       </p:sp>
       <p:sp>
         <p:nvSpPr>
-          <p:cNvPr id="24" name="badge-129"/>
+          <p:cNvPr id="24" name="badge-130"/>
           <p:cNvSpPr/>
           <p:nvPr/>
         </p:nvSpPr>
@@ -23664,7 +23704,7 @@
       </p:sp>
       <p:sp>
         <p:nvSpPr>
-          <p:cNvPr id="25" name="text-130"/>
+          <p:cNvPr id="25" name="text-131"/>
           <p:cNvSpPr txBox="1"/>
           <p:nvPr/>
         </p:nvSpPr>
@@ -23700,7 +23740,7 @@
       </p:sp>
       <p:sp>
         <p:nvSpPr>
-          <p:cNvPr id="26" name="text-131"/>
+          <p:cNvPr id="26" name="text-132"/>
           <p:cNvSpPr txBox="1"/>
           <p:nvPr/>
         </p:nvSpPr>
@@ -23728,7 +23768,7 @@
                   <a:schemeClr val="tx1"/>
                 </a:solidFill>
               </a:rPr>
-              <a:t>Свою систему нужно разрабатывать и сопровождать; стоимость — в гл. 3 ВКР</a:t>
+              <a:t>Собственную систему нужно разрабатывать и сопровождать, затраты посчитаны в гл. 3 ВКР</a:t>
             </a:r>
             <a:endParaRPr lang="en-US" sz="1100" dirty="0"/>
           </a:p>
@@ -23736,7 +23776,7 @@
       </p:sp>
       <p:graphicFrame>
         <p:nvGraphicFramePr>
-          <p:cNvPr id="10" name="table-132"/>
+          <p:cNvPr id="10" name="table-133"/>
           <p:cNvGraphicFramePr>
             <a:graphicFrameLocks noGrp="1"/>
           </p:cNvGraphicFramePr>
@@ -23775,7 +23815,7 @@
                             <a:schemeClr val="bg1"/>
                           </a:solidFill>
                         </a:rPr>
-                        <a:t>Ситуация магазина</a:t>
+                        <a:t>Условия магазина</a:t>
                       </a:r>
                       <a:endParaRPr lang="en-US" sz="1100" dirty="0"/>
                     </a:p>
@@ -23812,7 +23852,7 @@
                             <a:schemeClr val="bg1"/>
                           </a:solidFill>
                         </a:rPr>
-                        <a:t>Разумный выбор</a:t>
+                        <a:t>Подходящий вариант</a:t>
                       </a:r>
                       <a:endParaRPr lang="en-US" sz="1100" dirty="0"/>
                     </a:p>
@@ -23851,7 +23891,7 @@
                             <a:schemeClr val="tx1"/>
                           </a:solidFill>
                         </a:rPr>
-                        <a:t>Мало заказов, узкий ассортимент</a:t>
+                        <a:t>Мало заказов, небольшой ассортимент</a:t>
                       </a:r>
                       <a:endParaRPr lang="en-US" sz="1050" dirty="0"/>
                     </a:p>
@@ -24079,7 +24119,7 @@
                             <a:schemeClr val="tx1"/>
                           </a:solidFill>
                         </a:rPr>
-                        <a:t>Уже есть 1С и розничная точка</a:t>
+                        <a:t>Уже работают 1С и розничная точка</a:t>
                       </a:r>
                       <a:endParaRPr lang="en-US" sz="1050" dirty="0"/>
                     </a:p>
@@ -24155,7 +24195,7 @@
                             <a:schemeClr val="bg1"/>
                           </a:solidFill>
                         </a:rPr>
-                        <a:t>Партии, поиск по атрибутам и резерв в одной модели</a:t>
+                        <a:t>Партии, поиск по атрибутам и резерв нужны в одной системе</a:t>
                       </a:r>
                       <a:endParaRPr lang="en-US" sz="1050" dirty="0"/>
                     </a:p>
@@ -24222,7 +24262,7 @@
       </p:graphicFrame>
       <p:sp>
         <p:nvSpPr>
-          <p:cNvPr id="28" name="text-133"/>
+          <p:cNvPr id="28" name="text-134"/>
           <p:cNvSpPr txBox="1"/>
           <p:nvPr/>
         </p:nvSpPr>
@@ -24250,7 +24290,7 @@
                   <a:schemeClr val="accent2"/>
                 </a:solidFill>
               </a:rPr>
-              <a:t>Основной сценарий и учётная часть работают. Ограничения касаются интеграций, а их архитектура выносит за адаптеры.</a:t>
+              <a:t>Основной сценарий и учёт работают. Ограничения связаны с интеграциями, которые вынесены в адаптеры.</a:t>
             </a:r>
             <a:endParaRPr lang="en-US" sz="1100" dirty="0"/>
           </a:p>

--- a/docs/Сравнение с аналогами — презентация.pptx
+++ b/docs/Сравнение с аналогами — презентация.pptx
@@ -16,12 +16,9 @@
     <p:sldId id="264" r:id="rId10"/>
     <p:sldId id="265" r:id="rId11"/>
     <p:sldId id="266" r:id="rId12"/>
-    <p:sldId id="267" r:id="rId13"/>
-    <p:sldId id="268" r:id="rId14"/>
-    <p:sldId id="269" r:id="rId15"/>
   </p:sldIdLst>
   <p:notesMasterIdLst>
-    <p:notesMasterId r:id="rId16"/>
+    <p:notesMasterId r:id="rId13"/>
   </p:notesMasterIdLst>
   <p:sldSz cx="12192000" cy="6858000"/>
   <p:notesSz cx="6858000" cy="12192000"/>
@@ -120,12 +117,12 @@
   <p:extLst>
     <p:ext uri="{521415D9-36F7-43E2-AB2F-B90AF26B5E84}">
       <p14:sectionLst xmlns:p14="http://schemas.microsoft.com/office/powerpoint/2010/main">
-        <p14:section name="Титул" id="{837b8c70-ce80-6078-b436-97c593865be3}">
+        <p14:section name="Титул" id="{9a962ba8-f11d-31eb-7e8c-0a6472bfb15d}">
           <p14:sldIdLst>
             <p14:sldId id="256"/>
           </p14:sldIdLst>
         </p14:section>
-        <p14:section name="Основная часть" id="{fba78b94-6181-7677-3cf6-3a556b347371}">
+        <p14:section name="Основная часть" id="{16402d69-331c-3fc7-388a-eecaf7ada00a}">
           <p14:sldIdLst>
             <p14:sldId id="257"/>
             <p14:sldId id="258"/>
@@ -138,12 +135,9 @@
             <p14:sldId id="265"/>
           </p14:sldIdLst>
         </p14:section>
-        <p14:section name="Дополнительные слайды" id="{a512b749-e04a-bb69-7662-169589be2ef7}">
+        <p14:section name="Дополнительные слайды" id="{8dd387ac-1685-19e4-4377-68016b6ed84e}">
           <p14:sldIdLst>
             <p14:sldId id="266"/>
-            <p14:sldId id="267"/>
-            <p14:sldId id="268"/>
-            <p14:sldId id="269"/>
           </p14:sldIdLst>
         </p14:section>
       </p14:sectionLst>
@@ -153,344 +147,6 @@
     </p:ext>
   </p:extLst>
 </p:presentation>
-</file>
-
-<file path=ppt/charts/chart1.xml><?xml version="1.0" encoding="utf-8"?>
-<c:chartSpace xmlns:c="http://schemas.openxmlformats.org/drawingml/2006/chart" xmlns:a="http://schemas.openxmlformats.org/drawingml/2006/main" xmlns:r="http://schemas.openxmlformats.org/officeDocument/2006/relationships">
-  <c:date1904 val="0"/>
-  <c:roundedCorners val="1"/>
-  <c:chart>
-    <c:title>
-      <c:tx>
-        <c:rich>
-          <a:bodyPr/>
-          <a:lstStyle/>
-          <a:p>
-            <a:pPr>
-              <a:defRPr sz="1100" b="0" i="0" u="none" strike="noStrike">
-                <a:solidFill>
-                  <a:srgbClr val="171520"/>
-                </a:solidFill>
-                <a:latin typeface="+mn-lt"/>
-              </a:defRPr>
-            </a:pPr>
-            <a:r>
-              <a:rPr sz="1100" b="0" i="0" u="none" strike="noStrike">
-                <a:solidFill>
-                  <a:srgbClr val="171520"/>
-                </a:solidFill>
-                <a:latin typeface="+mn-lt"/>
-              </a:rPr>
-              <a:t>Среднее время отклика, с</a:t>
-            </a:r>
-          </a:p>
-        </c:rich>
-      </c:tx>
-      <c:layout/>
-      <c:overlay val="0"/>
-    </c:title>
-    <c:autoTitleDeleted val="0"/>
-    <c:plotArea>
-      <c:layout/>
-      <c:barChart>
-        <c:barDir val="col"/>
-        <c:grouping val="clustered"/>
-        <c:varyColors val="0"/>
-        <c:ser>
-          <c:idx val="0"/>
-          <c:order val="0"/>
-          <c:tx>
-            <c:strRef>
-              <c:f>Sheet1!$B$1</c:f>
-              <c:strCache>
-                <c:ptCount val="1"/>
-                <c:pt idx="0">
-                  <c:v>Отклик, с</c:v>
-                </c:pt>
-              </c:strCache>
-            </c:strRef>
-          </c:tx>
-          <c:spPr>
-            <a:solidFill>
-              <a:srgbClr val="2A253E"/>
-            </a:solidFill>
-            <a:effectLst/>
-          </c:spPr>
-          <c:invertIfNegative val="0"/>
-          <c:dLbls>
-            <c:numFmt formatCode="0.0" sourceLinked="0"/>
-            <c:txPr>
-              <a:bodyPr/>
-              <a:lstStyle/>
-              <a:p>
-                <a:pPr>
-                  <a:defRPr b="0" i="0" strike="noStrike" sz="1000" u="none">
-                    <a:solidFill>
-                      <a:srgbClr val="171520"/>
-                    </a:solidFill>
-                    <a:latin typeface="+mn-lt"/>
-                  </a:defRPr>
-                </a:pPr>
-              </a:p>
-            </c:txPr>
-            <c:showLegendKey val="0"/>
-            <c:showVal val="1"/>
-            <c:showCatName val="0"/>
-            <c:showSerName val="0"/>
-            <c:showPercent val="0"/>
-            <c:showBubbleSize val="0"/>
-            <c:showLeaderLines val="0"/>
-          </c:dLbls>
-          <c:dPt>
-            <c:idx val="0"/>
-            <c:invertIfNegative val="0"/>
-            <c:bubble3D val="0"/>
-            <c:spPr>
-              <a:solidFill>
-                <a:srgbClr val="2A253E"/>
-              </a:solidFill>
-              <a:effectLst/>
-            </c:spPr>
-          </c:dPt>
-          <c:dPt>
-            <c:idx val="1"/>
-            <c:invertIfNegative val="0"/>
-            <c:bubble3D val="0"/>
-            <c:spPr>
-              <a:solidFill>
-                <a:srgbClr val="2A253E"/>
-              </a:solidFill>
-              <a:effectLst/>
-            </c:spPr>
-          </c:dPt>
-          <c:dPt>
-            <c:idx val="2"/>
-            <c:invertIfNegative val="0"/>
-            <c:bubble3D val="0"/>
-            <c:spPr>
-              <a:solidFill>
-                <a:srgbClr val="2A253E"/>
-              </a:solidFill>
-              <a:effectLst/>
-            </c:spPr>
-          </c:dPt>
-          <c:dPt>
-            <c:idx val="3"/>
-            <c:invertIfNegative val="0"/>
-            <c:bubble3D val="0"/>
-            <c:spPr>
-              <a:solidFill>
-                <a:srgbClr val="9EA2B0"/>
-              </a:solidFill>
-              <a:effectLst/>
-            </c:spPr>
-          </c:dPt>
-          <c:dPt>
-            <c:idx val="4"/>
-            <c:invertIfNegative val="0"/>
-            <c:bubble3D val="0"/>
-            <c:spPr>
-              <a:solidFill>
-                <a:srgbClr val="9EA2B0"/>
-              </a:solidFill>
-              <a:effectLst/>
-            </c:spPr>
-          </c:dPt>
-          <c:cat>
-            <c:multiLvlStrRef>
-              <c:f>Sheet1!$A$2:$A$6</c:f>
-              <c:multiLvlStrCache>
-                <c:ptCount val="5"/>
-                <c:lvl>
-                  <c:pt idx="0">
-                    <c:v>10 RPS</c:v>
-                  </c:pt>
-                  <c:pt idx="1">
-                    <c:v>50 RPS</c:v>
-                  </c:pt>
-                  <c:pt idx="2">
-                    <c:v>100 RPS</c:v>
-                  </c:pt>
-                  <c:pt idx="3">
-                    <c:v>150 RPS</c:v>
-                  </c:pt>
-                  <c:pt idx="4">
-                    <c:v>200 RPS</c:v>
-                  </c:pt>
-                </c:lvl>
-              </c:multiLvlStrCache>
-            </c:multiLvlStrRef>
-          </c:cat>
-          <c:val>
-            <c:numRef>
-              <c:f>Sheet1!$B$2:$B$6</c:f>
-              <c:numCache>
-                <c:formatCode>General</c:formatCode>
-                <c:ptCount val="5"/>
-                <c:pt idx="0">
-                  <c:v>0.4</c:v>
-                </c:pt>
-                <c:pt idx="1">
-                  <c:v>0.7</c:v>
-                </c:pt>
-                <c:pt idx="2">
-                  <c:v>1.2</c:v>
-                </c:pt>
-                <c:pt idx="3">
-                  <c:v>1.9</c:v>
-                </c:pt>
-                <c:pt idx="4">
-                  <c:v>2.8</c:v>
-                </c:pt>
-              </c:numCache>
-            </c:numRef>
-          </c:val>
-        </c:ser>
-        <c:dLbls>
-          <c:numFmt formatCode="0.0" sourceLinked="0"/>
-          <c:txPr>
-            <a:bodyPr/>
-            <a:lstStyle/>
-            <a:p>
-              <a:pPr>
-                <a:defRPr b="0" i="0" strike="noStrike" sz="1000" u="none">
-                  <a:solidFill>
-                    <a:srgbClr val="171520"/>
-                  </a:solidFill>
-                  <a:latin typeface="+mn-lt"/>
-                </a:defRPr>
-              </a:pPr>
-            </a:p>
-          </c:txPr>
-          <c:showLegendKey val="0"/>
-          <c:showVal val="1"/>
-          <c:showCatName val="0"/>
-          <c:showSerName val="0"/>
-          <c:showPercent val="0"/>
-          <c:showBubbleSize val="0"/>
-          <c:showLeaderLines val="0"/>
-        </c:dLbls>
-        <c:gapWidth val="150"/>
-        <c:overlap val="0"/>
-        <c:axId val="2094734554"/>
-        <c:axId val="2094734552"/>
-        <c:axId val="2094734556"/>
-      </c:barChart>
-      <c:catAx>
-        <c:axId val="2094734554"/>
-        <c:scaling>
-          <c:orientation val="minMax"/>
-        </c:scaling>
-        <c:delete val="0"/>
-        <c:axPos val="b"/>
-        <c:numFmt formatCode="General" sourceLinked="1"/>
-        <c:majorTickMark val="out"/>
-        <c:minorTickMark val="none"/>
-        <c:tickLblPos val="low"/>
-        <c:spPr>
-          <a:ln w="12700" cap="flat">
-            <a:solidFill>
-              <a:srgbClr val="888888"/>
-            </a:solidFill>
-            <a:prstDash val="solid"/>
-            <a:round/>
-          </a:ln>
-        </c:spPr>
-        <c:txPr>
-          <a:bodyPr/>
-          <a:lstStyle/>
-          <a:p>
-            <a:pPr>
-              <a:defRPr sz="1000" b="0" i="0" u="none" strike="noStrike">
-                <a:solidFill>
-                  <a:srgbClr val="5C6175"/>
-                </a:solidFill>
-                <a:latin typeface="+mn-lt"/>
-              </a:defRPr>
-            </a:pPr>
-            <a:endParaRPr lang="en-US"/>
-          </a:p>
-        </c:txPr>
-        <c:crossAx val="2094734552"/>
-        <c:crosses val="autoZero"/>
-        <c:auto val="1"/>
-        <c:lblAlgn val="ctr"/>
-        <c:noMultiLvlLbl val="1"/>
-      </c:catAx>
-      <c:valAx>
-        <c:axId val="2094734552"/>
-        <c:scaling>
-          <c:orientation val="minMax"/>
-          <c:max val="3"/>
-          <c:min val="0"/>
-        </c:scaling>
-        <c:delete val="0"/>
-        <c:axPos val="l"/>
-        <c:majorGridlines>
-          <c:spPr>
-            <a:ln w="6350" cap="flat">
-              <a:solidFill>
-                <a:srgbClr val="E3E4EB"/>
-              </a:solidFill>
-              <a:prstDash val="solid"/>
-              <a:round/>
-            </a:ln>
-          </c:spPr>
-        </c:majorGridlines>
-        <c:numFmt formatCode="0.0" sourceLinked="0"/>
-        <c:majorTickMark val="out"/>
-        <c:minorTickMark val="none"/>
-        <c:tickLblPos val="nextTo"/>
-        <c:spPr>
-          <a:ln w="12700" cap="flat">
-            <a:solidFill>
-              <a:srgbClr val="888888"/>
-            </a:solidFill>
-            <a:prstDash val="solid"/>
-            <a:round/>
-          </a:ln>
-        </c:spPr>
-        <c:txPr>
-          <a:bodyPr/>
-          <a:lstStyle/>
-          <a:p>
-            <a:pPr>
-              <a:defRPr sz="1000" b="0" i="0" u="none" strike="noStrike">
-                <a:solidFill>
-                  <a:srgbClr val="5C6175"/>
-                </a:solidFill>
-                <a:latin typeface="+mn-lt"/>
-              </a:defRPr>
-            </a:pPr>
-            <a:endParaRPr lang="en-US"/>
-          </a:p>
-        </c:txPr>
-        <c:crossAx val="2094734554"/>
-        <c:crosses val="autoZero"/>
-        <c:crossBetween val="between"/>
-      </c:valAx>
-      <c:spPr>
-        <a:noFill/>
-        <a:ln>
-          <a:noFill/>
-        </a:ln>
-        <a:effectLst/>
-      </c:spPr>
-    </c:plotArea>
-    <c:plotVisOnly val="1"/>
-    <c:dispBlanksAs val="span"/>
-  </c:chart>
-  <c:spPr>
-    <a:noFill/>
-    <a:ln>
-      <a:noFill/>
-    </a:ln>
-    <a:effectLst/>
-  </c:spPr>
-  <c:externalData r:id="rId1">
-    <c:autoUpdate val="0"/>
-  </c:externalData>
-</c:chartSpace>
 </file>
 
 <file path=ppt/notesMasters/notesMaster1.xml><?xml version="1.0" encoding="utf-8"?>
@@ -976,7 +632,7 @@
           <a:p>
             <a:r>
               <a:rPr lang="en-US" dirty="0"/>
-              <a:t>Система не лучше всех аналогов по сумме функций. Она подходит магазину, у которого ассортимент состоит из партий, и это главный довод в пользу разработки.</a:t>
+              <a:t>По сумме функций система уступает аналогам. Её стоит делать, если магазин закупает чай партиями.</a:t>
             </a:r>
             <a:endParaRPr lang="en-US" dirty="0"/>
           </a:p>
@@ -1106,270 +762,6 @@
 </p:notes>
 </file>
 
-<file path=ppt/notesSlides/notesSlide12.xml><?xml version="1.0" encoding="utf-8"?>
-<p:notes xmlns:a="http://schemas.openxmlformats.org/drawingml/2006/main" xmlns:r="http://schemas.openxmlformats.org/officeDocument/2006/relationships" xmlns:p="http://schemas.openxmlformats.org/presentationml/2006/main">
-  <p:cSld>
-    <p:spTree>
-      <p:nvGrpSpPr>
-        <p:cNvPr id="1" name=""/>
-        <p:cNvGrpSpPr/>
-        <p:nvPr/>
-      </p:nvGrpSpPr>
-      <p:grpSpPr>
-        <a:xfrm>
-          <a:off x="0" y="0"/>
-          <a:ext cx="0" cy="0"/>
-          <a:chOff x="0" y="0"/>
-          <a:chExt cx="0" cy="0"/>
-        </a:xfrm>
-      </p:grpSpPr>
-      <p:sp>
-        <p:nvSpPr>
-          <p:cNvPr id="2" name="Slide Image Placeholder 1"/>
-          <p:cNvSpPr>
-            <a:spLocks noGrp="1" noRot="1" noChangeAspect="1"/>
-          </p:cNvSpPr>
-          <p:nvPr>
-            <p:ph type="sldImg"/>
-          </p:nvPr>
-        </p:nvSpPr>
-        <p:spPr/>
-      </p:sp>
-      <p:sp>
-        <p:nvSpPr>
-          <p:cNvPr id="3" name="Notes Placeholder 2"/>
-          <p:cNvSpPr>
-            <a:spLocks noGrp="1"/>
-          </p:cNvSpPr>
-          <p:nvPr>
-            <p:ph type="body" idx="1"/>
-          </p:nvPr>
-        </p:nvSpPr>
-        <p:spPr/>
-        <p:txBody>
-          <a:bodyPr/>
-          <a:lstStyle/>
-          <a:p>
-            <a:r>
-              <a:rPr lang="en-US" dirty="0"/>
-              <a:t>Показывать, если спросят о производительности или о падении сервера.</a:t>
-            </a:r>
-            <a:endParaRPr lang="en-US" dirty="0"/>
-          </a:p>
-        </p:txBody>
-      </p:sp>
-      <p:sp>
-        <p:nvSpPr>
-          <p:cNvPr id="4" name="Slide Number Placeholder 3"/>
-          <p:cNvSpPr>
-            <a:spLocks noGrp="1"/>
-          </p:cNvSpPr>
-          <p:nvPr>
-            <p:ph type="sldNum" sz="quarter" idx="10"/>
-          </p:nvPr>
-        </p:nvSpPr>
-        <p:spPr/>
-        <p:txBody>
-          <a:bodyPr/>
-          <a:lstStyle/>
-          <a:p>
-            <a:fld id="{F7021451-1387-4CA6-816F-3879F97B5CBC}" type="slidenum">
-              <a:rPr lang="en-US"/>
-              <a:t>12</a:t>
-            </a:fld>
-            <a:endParaRPr lang="en-US"/>
-          </a:p>
-        </p:txBody>
-      </p:sp>
-    </p:spTree>
-    <p:extLst>
-      <p:ext uri="{BB962C8B-B14F-4D97-AF65-F5344CB8AC3E}">
-        <p14:creationId xmlns:p14="http://schemas.microsoft.com/office/powerpoint/2010/main" val="1024086991"/>
-      </p:ext>
-    </p:extLst>
-  </p:cSld>
-  <p:clrMapOvr>
-    <a:masterClrMapping/>
-  </p:clrMapOvr>
-</p:notes>
-</file>
-
-<file path=ppt/notesSlides/notesSlide13.xml><?xml version="1.0" encoding="utf-8"?>
-<p:notes xmlns:a="http://schemas.openxmlformats.org/drawingml/2006/main" xmlns:r="http://schemas.openxmlformats.org/officeDocument/2006/relationships" xmlns:p="http://schemas.openxmlformats.org/presentationml/2006/main">
-  <p:cSld>
-    <p:spTree>
-      <p:nvGrpSpPr>
-        <p:cNvPr id="1" name=""/>
-        <p:cNvGrpSpPr/>
-        <p:nvPr/>
-      </p:nvGrpSpPr>
-      <p:grpSpPr>
-        <a:xfrm>
-          <a:off x="0" y="0"/>
-          <a:ext cx="0" cy="0"/>
-          <a:chOff x="0" y="0"/>
-          <a:chExt cx="0" cy="0"/>
-        </a:xfrm>
-      </p:grpSpPr>
-      <p:sp>
-        <p:nvSpPr>
-          <p:cNvPr id="2" name="Slide Image Placeholder 1"/>
-          <p:cNvSpPr>
-            <a:spLocks noGrp="1" noRot="1" noChangeAspect="1"/>
-          </p:cNvSpPr>
-          <p:nvPr>
-            <p:ph type="sldImg"/>
-          </p:nvPr>
-        </p:nvSpPr>
-        <p:spPr/>
-      </p:sp>
-      <p:sp>
-        <p:nvSpPr>
-          <p:cNvPr id="3" name="Notes Placeholder 2"/>
-          <p:cNvSpPr>
-            <a:spLocks noGrp="1"/>
-          </p:cNvSpPr>
-          <p:nvPr>
-            <p:ph type="body" idx="1"/>
-          </p:nvPr>
-        </p:nvSpPr>
-        <p:spPr/>
-        <p:txBody>
-          <a:bodyPr/>
-          <a:lstStyle/>
-          <a:p>
-            <a:r>
-              <a:rPr lang="en-US" dirty="0"/>
-              <a:t>Показывать, если спросят, как проводились замеры.</a:t>
-            </a:r>
-            <a:endParaRPr lang="en-US" dirty="0"/>
-          </a:p>
-        </p:txBody>
-      </p:sp>
-      <p:sp>
-        <p:nvSpPr>
-          <p:cNvPr id="4" name="Slide Number Placeholder 3"/>
-          <p:cNvSpPr>
-            <a:spLocks noGrp="1"/>
-          </p:cNvSpPr>
-          <p:nvPr>
-            <p:ph type="sldNum" sz="quarter" idx="10"/>
-          </p:nvPr>
-        </p:nvSpPr>
-        <p:spPr/>
-        <p:txBody>
-          <a:bodyPr/>
-          <a:lstStyle/>
-          <a:p>
-            <a:fld id="{F7021451-1387-4CA6-816F-3879F97B5CBC}" type="slidenum">
-              <a:rPr lang="en-US"/>
-              <a:t>13</a:t>
-            </a:fld>
-            <a:endParaRPr lang="en-US"/>
-          </a:p>
-        </p:txBody>
-      </p:sp>
-    </p:spTree>
-    <p:extLst>
-      <p:ext uri="{BB962C8B-B14F-4D97-AF65-F5344CB8AC3E}">
-        <p14:creationId xmlns:p14="http://schemas.microsoft.com/office/powerpoint/2010/main" val="1024086991"/>
-      </p:ext>
-    </p:extLst>
-  </p:cSld>
-  <p:clrMapOvr>
-    <a:masterClrMapping/>
-  </p:clrMapOvr>
-</p:notes>
-</file>
-
-<file path=ppt/notesSlides/notesSlide14.xml><?xml version="1.0" encoding="utf-8"?>
-<p:notes xmlns:a="http://schemas.openxmlformats.org/drawingml/2006/main" xmlns:r="http://schemas.openxmlformats.org/officeDocument/2006/relationships" xmlns:p="http://schemas.openxmlformats.org/presentationml/2006/main">
-  <p:cSld>
-    <p:spTree>
-      <p:nvGrpSpPr>
-        <p:cNvPr id="1" name=""/>
-        <p:cNvGrpSpPr/>
-        <p:nvPr/>
-      </p:nvGrpSpPr>
-      <p:grpSpPr>
-        <a:xfrm>
-          <a:off x="0" y="0"/>
-          <a:ext cx="0" cy="0"/>
-          <a:chOff x="0" y="0"/>
-          <a:chExt cx="0" cy="0"/>
-        </a:xfrm>
-      </p:grpSpPr>
-      <p:sp>
-        <p:nvSpPr>
-          <p:cNvPr id="2" name="Slide Image Placeholder 1"/>
-          <p:cNvSpPr>
-            <a:spLocks noGrp="1" noRot="1" noChangeAspect="1"/>
-          </p:cNvSpPr>
-          <p:nvPr>
-            <p:ph type="sldImg"/>
-          </p:nvPr>
-        </p:nvSpPr>
-        <p:spPr/>
-      </p:sp>
-      <p:sp>
-        <p:nvSpPr>
-          <p:cNvPr id="3" name="Notes Placeholder 2"/>
-          <p:cNvSpPr>
-            <a:spLocks noGrp="1"/>
-          </p:cNvSpPr>
-          <p:nvPr>
-            <p:ph type="body" idx="1"/>
-          </p:nvPr>
-        </p:nvSpPr>
-        <p:spPr/>
-        <p:txBody>
-          <a:bodyPr/>
-          <a:lstStyle/>
-          <a:p>
-            <a:r>
-              <a:rPr lang="en-US" dirty="0"/>
-              <a:t>Показывать, если спросят, как работает резерв и где хранятся партии. Таблицы batches в модели пока нет.</a:t>
-            </a:r>
-            <a:endParaRPr lang="en-US" dirty="0"/>
-          </a:p>
-        </p:txBody>
-      </p:sp>
-      <p:sp>
-        <p:nvSpPr>
-          <p:cNvPr id="4" name="Slide Number Placeholder 3"/>
-          <p:cNvSpPr>
-            <a:spLocks noGrp="1"/>
-          </p:cNvSpPr>
-          <p:nvPr>
-            <p:ph type="sldNum" sz="quarter" idx="10"/>
-          </p:nvPr>
-        </p:nvSpPr>
-        <p:spPr/>
-        <p:txBody>
-          <a:bodyPr/>
-          <a:lstStyle/>
-          <a:p>
-            <a:fld id="{F7021451-1387-4CA6-816F-3879F97B5CBC}" type="slidenum">
-              <a:rPr lang="en-US"/>
-              <a:t>14</a:t>
-            </a:fld>
-            <a:endParaRPr lang="en-US"/>
-          </a:p>
-        </p:txBody>
-      </p:sp>
-    </p:spTree>
-    <p:extLst>
-      <p:ext uri="{BB962C8B-B14F-4D97-AF65-F5344CB8AC3E}">
-        <p14:creationId xmlns:p14="http://schemas.microsoft.com/office/powerpoint/2010/main" val="1024086991"/>
-      </p:ext>
-    </p:extLst>
-  </p:cSld>
-  <p:clrMapOvr>
-    <a:masterClrMapping/>
-  </p:clrMapOvr>
-</p:notes>
-</file>
-
 <file path=ppt/notesSlides/notesSlide2.xml><?xml version="1.0" encoding="utf-8"?>
 <p:notes xmlns:a="http://schemas.openxmlformats.org/drawingml/2006/main" xmlns:r="http://schemas.openxmlformats.org/officeDocument/2006/relationships" xmlns:p="http://schemas.openxmlformats.org/presentationml/2006/main">
   <p:cSld>
@@ -1680,7 +1072,7 @@
           <a:p>
             <a:r>
               <a:rPr lang="en-US" dirty="0"/>
-              <a:t>Критерии взяты из требований ВКР. Все варианты проходят один сценарий на одинаковых данных, по пять прогонов.</a:t>
+              <a:t>Критерии взяты из требований ВКР. Время покупателя рассчитано по модели KLM, действия администратора посчитаны по описанию процессов. Если спросят про секундомер: это расчёт по модели KLM, правило расчёта приведено в условиях.</a:t>
             </a:r>
             <a:endParaRPr lang="en-US" dirty="0"/>
           </a:p>
@@ -1768,7 +1160,7 @@
           <a:p>
             <a:r>
               <a:rPr lang="en-US" dirty="0"/>
-              <a:t>Здесь задача и условия сравнения, вывод и ограничение. Таблицу вслух не читать. Заголовок и вывод уточнить после замеров.</a:t>
+              <a:t>Строки отсортированы по числу лучших результатов. Покупателю везде нужна примерно минута. Прототип отстаёт по атрибутам, интеграциям и партиям, это нужно сказать прямо.</a:t>
             </a:r>
             <a:endParaRPr lang="en-US" dirty="0"/>
           </a:p>
@@ -1944,7 +1336,7 @@
           <a:p>
             <a:r>
               <a:rPr lang="en-US" dirty="0"/>
-              <a:t>Главный пример — последняя пачка: без системы её продадут двоим, в системе остаток резервируется при оформлении. Готовые платформы в этих сценариях не проверялись.</a:t>
+              <a:t>Главный пример с последней пачкой. Без системы её продадут двоим, а в системе остаток резервируется при оформлении. Честно сказать: этот сценарий есть в спецификации, но тестом не проверялся. Тестами подтверждены только устойчивость к обновлению страницы и нагрузка 100 RPS.</a:t>
             </a:r>
             <a:endParaRPr lang="en-US" dirty="0"/>
           </a:p>
@@ -2032,7 +1424,7 @@
           <a:p>
             <a:r>
               <a:rPr lang="en-US" dirty="0"/>
-              <a:t>Готовые решения в сумме сильнее. Собственная система нужна в одном случае: когда партии, поиск по атрибутам и резерв должны работать вместе.</a:t>
+              <a:t>По числу выполненных пунктов готовые решения впереди. Своя система нужна, когда партии, поиск по атрибутам и резерв должны работать вместе.</a:t>
             </a:r>
             <a:endParaRPr lang="en-US" dirty="0"/>
           </a:p>
@@ -3334,7 +2726,7 @@
       </p:sp>
       <p:sp>
         <p:nvSpPr>
-          <p:cNvPr id="7" name="card-135"/>
+          <p:cNvPr id="7" name="card-138"/>
           <p:cNvSpPr/>
           <p:nvPr/>
         </p:nvSpPr>
@@ -3356,7 +2748,7 @@
       </p:sp>
       <p:sp>
         <p:nvSpPr>
-          <p:cNvPr id="8" name="text-136"/>
+          <p:cNvPr id="8" name="text-139"/>
           <p:cNvSpPr txBox="1"/>
           <p:nvPr/>
         </p:nvSpPr>
@@ -3384,7 +2776,7 @@
                   <a:schemeClr val="bg1"/>
                 </a:solidFill>
               </a:rPr>
-              <a:t>Готовые решения в сумме набирают больше баллов. Но партию, резерв при оформлении и поиск по атрибутам чая в одной модели данных поддерживает только собственная система. Для магазина, у которого ассортимент состоит из партий, это оправдывает разработку. В других условиях выгоднее аналоги со слайда 8.</a:t>
+              <a:t>По числу выполненных пунктов готовые решения впереди, покупателю везде нужна примерно минута. Ни один аналог не ведёт учёт по партиям вместе с резервом в момент заказа, и под эту задачу разрабатывается система. В прототипе партий пока нет, их нужно добавить. Если партии магазину не важны, лучше выбрать один из аналогов со слайда 8.</a:t>
             </a:r>
             <a:endParaRPr lang="en-US" sz="1200" dirty="0"/>
           </a:p>
@@ -3392,7 +2784,7 @@
       </p:sp>
       <p:sp>
         <p:nvSpPr>
-          <p:cNvPr id="9" name="text-137"/>
+          <p:cNvPr id="9" name="text-140"/>
           <p:cNvSpPr txBox="1"/>
           <p:nvPr/>
         </p:nvSpPr>
@@ -3428,7 +2820,7 @@
       </p:sp>
       <p:sp>
         <p:nvSpPr>
-          <p:cNvPr id="10" name="card-138"/>
+          <p:cNvPr id="10" name="card-141"/>
           <p:cNvSpPr/>
           <p:nvPr/>
         </p:nvSpPr>
@@ -3450,7 +2842,7 @@
       </p:sp>
       <p:sp>
         <p:nvSpPr>
-          <p:cNvPr id="11" name="text-139"/>
+          <p:cNvPr id="11" name="text-142"/>
           <p:cNvSpPr txBox="1"/>
           <p:nvPr/>
         </p:nvSpPr>
@@ -3486,7 +2878,7 @@
       </p:sp>
       <p:sp>
         <p:nvSpPr>
-          <p:cNvPr id="12" name="text-140"/>
+          <p:cNvPr id="12" name="text-143"/>
           <p:cNvSpPr txBox="1"/>
           <p:nvPr/>
         </p:nvSpPr>
@@ -3514,7 +2906,7 @@
                   <a:schemeClr val="tx1"/>
                 </a:solidFill>
               </a:rPr>
-              <a:t>Текущий процесс, 17 функциональных и 13 нефункциональных требований</a:t>
+              <a:t>Описан текущий процесс, сформулировано 17 функциональных и 13 нефункциональных требований</a:t>
             </a:r>
             <a:endParaRPr lang="en-US" sz="1100" dirty="0"/>
           </a:p>
@@ -3522,7 +2914,7 @@
       </p:sp>
       <p:sp>
         <p:nvSpPr>
-          <p:cNvPr id="13" name="card-141"/>
+          <p:cNvPr id="13" name="card-144"/>
           <p:cNvSpPr/>
           <p:nvPr/>
         </p:nvSpPr>
@@ -3544,7 +2936,7 @@
       </p:sp>
       <p:sp>
         <p:nvSpPr>
-          <p:cNvPr id="14" name="text-142"/>
+          <p:cNvPr id="14" name="text-145"/>
           <p:cNvSpPr txBox="1"/>
           <p:nvPr/>
         </p:nvSpPr>
@@ -3580,7 +2972,7 @@
       </p:sp>
       <p:sp>
         <p:nvSpPr>
-          <p:cNvPr id="15" name="text-143"/>
+          <p:cNvPr id="15" name="text-146"/>
           <p:cNvSpPr txBox="1"/>
           <p:nvPr/>
         </p:nvSpPr>
@@ -3616,7 +3008,7 @@
       </p:sp>
       <p:sp>
         <p:nvSpPr>
-          <p:cNvPr id="16" name="card-144"/>
+          <p:cNvPr id="16" name="card-147"/>
           <p:cNvSpPr/>
           <p:nvPr/>
         </p:nvSpPr>
@@ -3638,7 +3030,7 @@
       </p:sp>
       <p:sp>
         <p:nvSpPr>
-          <p:cNvPr id="17" name="text-145"/>
+          <p:cNvPr id="17" name="text-148"/>
           <p:cNvSpPr txBox="1"/>
           <p:nvPr/>
         </p:nvSpPr>
@@ -3674,7 +3066,7 @@
       </p:sp>
       <p:sp>
         <p:nvSpPr>
-          <p:cNvPr id="18" name="text-146"/>
+          <p:cNvPr id="18" name="text-149"/>
           <p:cNvSpPr txBox="1"/>
           <p:nvPr/>
         </p:nvSpPr>
@@ -3710,7 +3102,7 @@
       </p:sp>
       <p:sp>
         <p:nvSpPr>
-          <p:cNvPr id="19" name="card-147"/>
+          <p:cNvPr id="19" name="card-150"/>
           <p:cNvSpPr/>
           <p:nvPr/>
         </p:nvSpPr>
@@ -3732,7 +3124,7 @@
       </p:sp>
       <p:sp>
         <p:nvSpPr>
-          <p:cNvPr id="20" name="text-148"/>
+          <p:cNvPr id="20" name="text-151"/>
           <p:cNvSpPr txBox="1"/>
           <p:nvPr/>
         </p:nvSpPr>
@@ -3768,7 +3160,7 @@
       </p:sp>
       <p:sp>
         <p:nvSpPr>
-          <p:cNvPr id="21" name="text-149"/>
+          <p:cNvPr id="21" name="text-152"/>
           <p:cNvSpPr txBox="1"/>
           <p:nvPr/>
         </p:nvSpPr>
@@ -3804,7 +3196,7 @@
       </p:sp>
       <p:sp>
         <p:nvSpPr>
-          <p:cNvPr id="22" name="card-150"/>
+          <p:cNvPr id="22" name="card-153"/>
           <p:cNvSpPr/>
           <p:nvPr/>
         </p:nvSpPr>
@@ -3826,7 +3218,7 @@
       </p:sp>
       <p:sp>
         <p:nvSpPr>
-          <p:cNvPr id="23" name="text-151"/>
+          <p:cNvPr id="23" name="text-154"/>
           <p:cNvSpPr txBox="1"/>
           <p:nvPr/>
         </p:nvSpPr>
@@ -3862,7 +3254,7 @@
       </p:sp>
       <p:sp>
         <p:nvSpPr>
-          <p:cNvPr id="24" name="text-152"/>
+          <p:cNvPr id="24" name="text-155"/>
           <p:cNvSpPr txBox="1"/>
           <p:nvPr/>
         </p:nvSpPr>
@@ -3890,7 +3282,7 @@
                   <a:schemeClr val="tx1"/>
                 </a:solidFill>
               </a:rPr>
-              <a:t>Оценка семи аналогов по 20 пунктам с источниками, порядок замеров</a:t>
+              <a:t>Семь аналогов оценены по 20 пунктам с источниками, описан порядок замеров</a:t>
             </a:r>
             <a:endParaRPr lang="en-US" sz="1100" dirty="0"/>
           </a:p>
@@ -3898,7 +3290,7 @@
       </p:sp>
       <p:sp>
         <p:nvSpPr>
-          <p:cNvPr id="25" name="card-153"/>
+          <p:cNvPr id="25" name="card-156"/>
           <p:cNvSpPr/>
           <p:nvPr/>
         </p:nvSpPr>
@@ -3920,7 +3312,7 @@
       </p:sp>
       <p:sp>
         <p:nvSpPr>
-          <p:cNvPr id="26" name="text-154"/>
+          <p:cNvPr id="26" name="text-157"/>
           <p:cNvSpPr txBox="1"/>
           <p:nvPr/>
         </p:nvSpPr>
@@ -3956,7 +3348,7 @@
       </p:sp>
       <p:sp>
         <p:nvSpPr>
-          <p:cNvPr id="27" name="text-155"/>
+          <p:cNvPr id="27" name="text-158"/>
           <p:cNvSpPr txBox="1"/>
           <p:nvPr/>
         </p:nvSpPr>
@@ -4123,7 +3515,7 @@
                   <a:schemeClr val="tx1"/>
                 </a:solidFill>
               </a:rPr>
-              <a:t>Баллы по критериям</a:t>
+              <a:t>Выполненные пункты по критериям</a:t>
             </a:r>
             <a:endParaRPr lang="en-US" sz="2700" dirty="0"/>
           </a:p>
@@ -4161,7 +3553,7 @@
                   <a:schemeClr val="accent3"/>
                 </a:solidFill>
               </a:rPr>
-              <a:t>Балл критерия равен 1 плюс сумма по четырём пунктам (1 есть, 0,5 частично или через плагин, 0 нет). Итог — среднее по пяти критериям</a:t>
+              <a:t>Сколько пунктов из четырёх выполнено в каждом критерии. Выполненный пункт 1, частично выполненный 0,5</a:t>
             </a:r>
             <a:endParaRPr lang="en-US" sz="1300" dirty="0"/>
           </a:p>
@@ -4207,7 +3599,7 @@
       </p:sp>
       <p:graphicFrame>
         <p:nvGraphicFramePr>
-          <p:cNvPr id="12" name="table-156"/>
+          <p:cNvPr id="12" name="table-159"/>
           <p:cNvGraphicFramePr>
             <a:graphicFrameLocks noGrp="1"/>
           </p:cNvGraphicFramePr>
@@ -4474,7 +3866,7 @@
                             <a:schemeClr val="bg1"/>
                           </a:solidFill>
                         </a:rPr>
-                        <a:t>Итог</a:t>
+                        <a:t>Всего из 20</a:t>
                       </a:r>
                       <a:endParaRPr lang="en-US" sz="1000" dirty="0"/>
                     </a:p>
@@ -4587,7 +3979,7 @@
                             <a:schemeClr val="tx1"/>
                           </a:solidFill>
                         </a:rPr>
-                        <a:t>5</a:t>
+                        <a:t>4</a:t>
                       </a:r>
                       <a:endParaRPr lang="en-US" sz="1050" dirty="0"/>
                     </a:p>
@@ -4624,6 +4016,80 @@
                             <a:schemeClr val="tx1"/>
                           </a:solidFill>
                         </a:rPr>
+                        <a:t>3</a:t>
+                      </a:r>
+                      <a:endParaRPr lang="en-US" sz="1050" dirty="0"/>
+                    </a:p>
+                  </a:txBody>
+                  <a:tcPr marL="101600" marR="76200" marT="25400" marB="25400" anchor="ctr">
+                    <a:lnL w="0" cap="flat" cmpd="sng" algn="ctr">
+                      <a:noFill/>
+                    </a:lnL>
+                    <a:lnR w="0" cap="flat" cmpd="sng" algn="ctr">
+                      <a:noFill/>
+                    </a:lnR>
+                    <a:lnT w="0" cap="flat" cmpd="sng" algn="ctr">
+                      <a:noFill/>
+                    </a:lnT>
+                    <a:lnB w="0" cap="flat" cmpd="sng" algn="ctr">
+                      <a:noFill/>
+                    </a:lnB>
+                    <a:solidFill>
+                      <a:schemeClr val="bg2"/>
+                    </a:solidFill>
+                  </a:tcPr>
+                </a:tc>
+                <a:tc>
+                  <a:txBody>
+                    <a:bodyPr/>
+                    <a:lstStyle/>
+                    <a:p>
+                      <a:pPr algn="ctr" indent="0" marL="0">
+                        <a:buNone/>
+                      </a:pPr>
+                      <a:r>
+                        <a:rPr lang="en-US" sz="1050" dirty="0">
+                          <a:solidFill>
+                            <a:schemeClr val="tx1"/>
+                          </a:solidFill>
+                        </a:rPr>
+                        <a:t>3,5</a:t>
+                      </a:r>
+                      <a:endParaRPr lang="en-US" sz="1050" dirty="0"/>
+                    </a:p>
+                  </a:txBody>
+                  <a:tcPr marL="101600" marR="76200" marT="25400" marB="25400" anchor="ctr">
+                    <a:lnL w="0" cap="flat" cmpd="sng" algn="ctr">
+                      <a:noFill/>
+                    </a:lnL>
+                    <a:lnR w="0" cap="flat" cmpd="sng" algn="ctr">
+                      <a:noFill/>
+                    </a:lnR>
+                    <a:lnT w="0" cap="flat" cmpd="sng" algn="ctr">
+                      <a:noFill/>
+                    </a:lnT>
+                    <a:lnB w="0" cap="flat" cmpd="sng" algn="ctr">
+                      <a:noFill/>
+                    </a:lnB>
+                    <a:solidFill>
+                      <a:schemeClr val="bg2"/>
+                    </a:solidFill>
+                  </a:tcPr>
+                </a:tc>
+                <a:tc>
+                  <a:txBody>
+                    <a:bodyPr/>
+                    <a:lstStyle/>
+                    <a:p>
+                      <a:pPr algn="ctr" indent="0" marL="0">
+                        <a:buNone/>
+                      </a:pPr>
+                      <a:r>
+                        <a:rPr lang="en-US" sz="1050" dirty="0">
+                          <a:solidFill>
+                            <a:schemeClr val="tx1"/>
+                          </a:solidFill>
+                        </a:rPr>
                         <a:t>4</a:t>
                       </a:r>
                       <a:endParaRPr lang="en-US" sz="1050" dirty="0"/>
@@ -4661,7 +4127,7 @@
                             <a:schemeClr val="tx1"/>
                           </a:solidFill>
                         </a:rPr>
-                        <a:t>4,5</a:t>
+                        <a:t>4</a:t>
                       </a:r>
                       <a:endParaRPr lang="en-US" sz="1050" dirty="0"/>
                     </a:p>
@@ -4693,86 +4159,12 @@
                         <a:buNone/>
                       </a:pPr>
                       <a:r>
-                        <a:rPr lang="en-US" sz="1050" dirty="0">
-                          <a:solidFill>
-                            <a:schemeClr val="tx1"/>
-                          </a:solidFill>
-                        </a:rPr>
-                        <a:t>5</a:t>
-                      </a:r>
-                      <a:endParaRPr lang="en-US" sz="1050" dirty="0"/>
-                    </a:p>
-                  </a:txBody>
-                  <a:tcPr marL="101600" marR="76200" marT="25400" marB="25400" anchor="ctr">
-                    <a:lnL w="0" cap="flat" cmpd="sng" algn="ctr">
-                      <a:noFill/>
-                    </a:lnL>
-                    <a:lnR w="0" cap="flat" cmpd="sng" algn="ctr">
-                      <a:noFill/>
-                    </a:lnR>
-                    <a:lnT w="0" cap="flat" cmpd="sng" algn="ctr">
-                      <a:noFill/>
-                    </a:lnT>
-                    <a:lnB w="0" cap="flat" cmpd="sng" algn="ctr">
-                      <a:noFill/>
-                    </a:lnB>
-                    <a:solidFill>
-                      <a:schemeClr val="bg2"/>
-                    </a:solidFill>
-                  </a:tcPr>
-                </a:tc>
-                <a:tc>
-                  <a:txBody>
-                    <a:bodyPr/>
-                    <a:lstStyle/>
-                    <a:p>
-                      <a:pPr algn="ctr" indent="0" marL="0">
-                        <a:buNone/>
-                      </a:pPr>
-                      <a:r>
-                        <a:rPr lang="en-US" sz="1050" dirty="0">
-                          <a:solidFill>
-                            <a:schemeClr val="tx1"/>
-                          </a:solidFill>
-                        </a:rPr>
-                        <a:t>5</a:t>
-                      </a:r>
-                      <a:endParaRPr lang="en-US" sz="1050" dirty="0"/>
-                    </a:p>
-                  </a:txBody>
-                  <a:tcPr marL="101600" marR="76200" marT="25400" marB="25400" anchor="ctr">
-                    <a:lnL w="0" cap="flat" cmpd="sng" algn="ctr">
-                      <a:noFill/>
-                    </a:lnL>
-                    <a:lnR w="0" cap="flat" cmpd="sng" algn="ctr">
-                      <a:noFill/>
-                    </a:lnR>
-                    <a:lnT w="0" cap="flat" cmpd="sng" algn="ctr">
-                      <a:noFill/>
-                    </a:lnT>
-                    <a:lnB w="0" cap="flat" cmpd="sng" algn="ctr">
-                      <a:noFill/>
-                    </a:lnB>
-                    <a:solidFill>
-                      <a:schemeClr val="bg2"/>
-                    </a:solidFill>
-                  </a:tcPr>
-                </a:tc>
-                <a:tc>
-                  <a:txBody>
-                    <a:bodyPr/>
-                    <a:lstStyle/>
-                    <a:p>
-                      <a:pPr algn="ctr" indent="0" marL="0">
-                        <a:buNone/>
-                      </a:pPr>
-                      <a:r>
                         <a:rPr lang="en-US" sz="1050" b="1" dirty="0">
                           <a:solidFill>
                             <a:schemeClr val="tx1"/>
                           </a:solidFill>
                         </a:rPr>
-                        <a:t>4,7</a:t>
+                        <a:t>18,5</a:t>
                       </a:r>
                       <a:endParaRPr lang="en-US" sz="1050" dirty="0"/>
                     </a:p>
@@ -4885,7 +4277,7 @@
                             <a:schemeClr val="tx1"/>
                           </a:solidFill>
                         </a:rPr>
-                        <a:t>3,5–4,5</a:t>
+                        <a:t>2,5–3,5</a:t>
                       </a:r>
                       <a:endParaRPr lang="en-US" sz="1050" dirty="0"/>
                     </a:p>
@@ -4922,7 +4314,7 @@
                             <a:schemeClr val="tx1"/>
                           </a:solidFill>
                         </a:rPr>
-                        <a:t>4</a:t>
+                        <a:t>3</a:t>
                       </a:r>
                       <a:endParaRPr lang="en-US" sz="1050" dirty="0"/>
                     </a:p>
@@ -4959,7 +4351,7 @@
                             <a:schemeClr val="tx1"/>
                           </a:solidFill>
                         </a:rPr>
-                        <a:t>4,5</a:t>
+                        <a:t>3,5</a:t>
                       </a:r>
                       <a:endParaRPr lang="en-US" sz="1050" dirty="0"/>
                     </a:p>
@@ -4996,7 +4388,7 @@
                             <a:schemeClr val="tx1"/>
                           </a:solidFill>
                         </a:rPr>
-                        <a:t>4</a:t>
+                        <a:t>3</a:t>
                       </a:r>
                       <a:endParaRPr lang="en-US" sz="1050" dirty="0"/>
                     </a:p>
@@ -5033,7 +4425,7 @@
                             <a:schemeClr val="tx1"/>
                           </a:solidFill>
                         </a:rPr>
-                        <a:t>4–5</a:t>
+                        <a:t>3–4</a:t>
                       </a:r>
                       <a:endParaRPr lang="en-US" sz="1050" dirty="0"/>
                     </a:p>
@@ -5070,7 +4462,7 @@
                             <a:schemeClr val="tx1"/>
                           </a:solidFill>
                         </a:rPr>
-                        <a:t>4,0–4,4</a:t>
+                        <a:t>15–17</a:t>
                       </a:r>
                       <a:endParaRPr lang="en-US" sz="1050" dirty="0"/>
                     </a:p>
@@ -5183,7 +4575,7 @@
                             <a:schemeClr val="tx1"/>
                           </a:solidFill>
                         </a:rPr>
-                        <a:t>4–5</a:t>
+                        <a:t>3–4</a:t>
                       </a:r>
                       <a:endParaRPr lang="en-US" sz="1050" dirty="0"/>
                     </a:p>
@@ -5220,7 +4612,7 @@
                             <a:schemeClr val="tx1"/>
                           </a:solidFill>
                         </a:rPr>
-                        <a:t>4</a:t>
+                        <a:t>3</a:t>
                       </a:r>
                       <a:endParaRPr lang="en-US" sz="1050" dirty="0"/>
                     </a:p>
@@ -5257,7 +4649,7 @@
                             <a:schemeClr val="tx1"/>
                           </a:solidFill>
                         </a:rPr>
-                        <a:t>3</a:t>
+                        <a:t>2</a:t>
                       </a:r>
                       <a:endParaRPr lang="en-US" sz="1050" dirty="0"/>
                     </a:p>
@@ -5294,7 +4686,7 @@
                             <a:schemeClr val="tx1"/>
                           </a:solidFill>
                         </a:rPr>
-                        <a:t>4,5</a:t>
+                        <a:t>3,5</a:t>
                       </a:r>
                       <a:endParaRPr lang="en-US" sz="1050" dirty="0"/>
                     </a:p>
@@ -5331,7 +4723,7 @@
                             <a:schemeClr val="tx1"/>
                           </a:solidFill>
                         </a:rPr>
-                        <a:t>4,5</a:t>
+                        <a:t>3,5</a:t>
                       </a:r>
                       <a:endParaRPr lang="en-US" sz="1050" dirty="0"/>
                     </a:p>
@@ -5368,7 +4760,7 @@
                             <a:schemeClr val="tx1"/>
                           </a:solidFill>
                         </a:rPr>
-                        <a:t>4,0–4,2</a:t>
+                        <a:t>15–16</a:t>
                       </a:r>
                       <a:endParaRPr lang="en-US" sz="1050" dirty="0"/>
                     </a:p>
@@ -5481,6 +4873,117 @@
                             <a:schemeClr val="tx1"/>
                           </a:solidFill>
                         </a:rPr>
+                        <a:t>3</a:t>
+                      </a:r>
+                      <a:endParaRPr lang="en-US" sz="1050" dirty="0"/>
+                    </a:p>
+                  </a:txBody>
+                  <a:tcPr marL="101600" marR="76200" marT="25400" marB="25400" anchor="ctr">
+                    <a:lnL w="0" cap="flat" cmpd="sng" algn="ctr">
+                      <a:noFill/>
+                    </a:lnL>
+                    <a:lnR w="0" cap="flat" cmpd="sng" algn="ctr">
+                      <a:noFill/>
+                    </a:lnR>
+                    <a:lnT w="0" cap="flat" cmpd="sng" algn="ctr">
+                      <a:noFill/>
+                    </a:lnT>
+                    <a:lnB w="0" cap="flat" cmpd="sng" algn="ctr">
+                      <a:noFill/>
+                    </a:lnB>
+                    <a:solidFill>
+                      <a:schemeClr val="bg1"/>
+                    </a:solidFill>
+                  </a:tcPr>
+                </a:tc>
+                <a:tc>
+                  <a:txBody>
+                    <a:bodyPr/>
+                    <a:lstStyle/>
+                    <a:p>
+                      <a:pPr algn="ctr" indent="0" marL="0">
+                        <a:buNone/>
+                      </a:pPr>
+                      <a:r>
+                        <a:rPr lang="en-US" sz="1050" dirty="0">
+                          <a:solidFill>
+                            <a:schemeClr val="tx1"/>
+                          </a:solidFill>
+                        </a:rPr>
+                        <a:t>3</a:t>
+                      </a:r>
+                      <a:endParaRPr lang="en-US" sz="1050" dirty="0"/>
+                    </a:p>
+                  </a:txBody>
+                  <a:tcPr marL="101600" marR="76200" marT="25400" marB="25400" anchor="ctr">
+                    <a:lnL w="0" cap="flat" cmpd="sng" algn="ctr">
+                      <a:noFill/>
+                    </a:lnL>
+                    <a:lnR w="0" cap="flat" cmpd="sng" algn="ctr">
+                      <a:noFill/>
+                    </a:lnR>
+                    <a:lnT w="0" cap="flat" cmpd="sng" algn="ctr">
+                      <a:noFill/>
+                    </a:lnT>
+                    <a:lnB w="0" cap="flat" cmpd="sng" algn="ctr">
+                      <a:noFill/>
+                    </a:lnB>
+                    <a:solidFill>
+                      <a:schemeClr val="bg1"/>
+                    </a:solidFill>
+                  </a:tcPr>
+                </a:tc>
+                <a:tc>
+                  <a:txBody>
+                    <a:bodyPr/>
+                    <a:lstStyle/>
+                    <a:p>
+                      <a:pPr algn="ctr" indent="0" marL="0">
+                        <a:buNone/>
+                      </a:pPr>
+                      <a:r>
+                        <a:rPr lang="en-US" sz="1050" dirty="0">
+                          <a:solidFill>
+                            <a:schemeClr val="tx1"/>
+                          </a:solidFill>
+                        </a:rPr>
+                        <a:t>2</a:t>
+                      </a:r>
+                      <a:endParaRPr lang="en-US" sz="1050" dirty="0"/>
+                    </a:p>
+                  </a:txBody>
+                  <a:tcPr marL="101600" marR="76200" marT="25400" marB="25400" anchor="ctr">
+                    <a:lnL w="0" cap="flat" cmpd="sng" algn="ctr">
+                      <a:noFill/>
+                    </a:lnL>
+                    <a:lnR w="0" cap="flat" cmpd="sng" algn="ctr">
+                      <a:noFill/>
+                    </a:lnR>
+                    <a:lnT w="0" cap="flat" cmpd="sng" algn="ctr">
+                      <a:noFill/>
+                    </a:lnT>
+                    <a:lnB w="0" cap="flat" cmpd="sng" algn="ctr">
+                      <a:noFill/>
+                    </a:lnB>
+                    <a:solidFill>
+                      <a:schemeClr val="bg1"/>
+                    </a:solidFill>
+                  </a:tcPr>
+                </a:tc>
+                <a:tc>
+                  <a:txBody>
+                    <a:bodyPr/>
+                    <a:lstStyle/>
+                    <a:p>
+                      <a:pPr algn="ctr" indent="0" marL="0">
+                        <a:buNone/>
+                      </a:pPr>
+                      <a:r>
+                        <a:rPr lang="en-US" sz="1050" dirty="0">
+                          <a:solidFill>
+                            <a:schemeClr val="tx1"/>
+                          </a:solidFill>
+                        </a:rPr>
                         <a:t>4</a:t>
                       </a:r>
                       <a:endParaRPr lang="en-US" sz="1050" dirty="0"/>
@@ -5518,7 +5021,7 @@
                             <a:schemeClr val="tx1"/>
                           </a:solidFill>
                         </a:rPr>
-                        <a:t>4</a:t>
+                        <a:t>3,5</a:t>
                       </a:r>
                       <a:endParaRPr lang="en-US" sz="1050" dirty="0"/>
                     </a:p>
@@ -5550,123 +5053,12 @@
                         <a:buNone/>
                       </a:pPr>
                       <a:r>
-                        <a:rPr lang="en-US" sz="1050" dirty="0">
-                          <a:solidFill>
-                            <a:schemeClr val="tx1"/>
-                          </a:solidFill>
-                        </a:rPr>
-                        <a:t>3</a:t>
-                      </a:r>
-                      <a:endParaRPr lang="en-US" sz="1050" dirty="0"/>
-                    </a:p>
-                  </a:txBody>
-                  <a:tcPr marL="101600" marR="76200" marT="25400" marB="25400" anchor="ctr">
-                    <a:lnL w="0" cap="flat" cmpd="sng" algn="ctr">
-                      <a:noFill/>
-                    </a:lnL>
-                    <a:lnR w="0" cap="flat" cmpd="sng" algn="ctr">
-                      <a:noFill/>
-                    </a:lnR>
-                    <a:lnT w="0" cap="flat" cmpd="sng" algn="ctr">
-                      <a:noFill/>
-                    </a:lnT>
-                    <a:lnB w="0" cap="flat" cmpd="sng" algn="ctr">
-                      <a:noFill/>
-                    </a:lnB>
-                    <a:solidFill>
-                      <a:schemeClr val="bg1"/>
-                    </a:solidFill>
-                  </a:tcPr>
-                </a:tc>
-                <a:tc>
-                  <a:txBody>
-                    <a:bodyPr/>
-                    <a:lstStyle/>
-                    <a:p>
-                      <a:pPr algn="ctr" indent="0" marL="0">
-                        <a:buNone/>
-                      </a:pPr>
-                      <a:r>
-                        <a:rPr lang="en-US" sz="1050" dirty="0">
-                          <a:solidFill>
-                            <a:schemeClr val="tx1"/>
-                          </a:solidFill>
-                        </a:rPr>
-                        <a:t>5</a:t>
-                      </a:r>
-                      <a:endParaRPr lang="en-US" sz="1050" dirty="0"/>
-                    </a:p>
-                  </a:txBody>
-                  <a:tcPr marL="101600" marR="76200" marT="25400" marB="25400" anchor="ctr">
-                    <a:lnL w="0" cap="flat" cmpd="sng" algn="ctr">
-                      <a:noFill/>
-                    </a:lnL>
-                    <a:lnR w="0" cap="flat" cmpd="sng" algn="ctr">
-                      <a:noFill/>
-                    </a:lnR>
-                    <a:lnT w="0" cap="flat" cmpd="sng" algn="ctr">
-                      <a:noFill/>
-                    </a:lnT>
-                    <a:lnB w="0" cap="flat" cmpd="sng" algn="ctr">
-                      <a:noFill/>
-                    </a:lnB>
-                    <a:solidFill>
-                      <a:schemeClr val="bg1"/>
-                    </a:solidFill>
-                  </a:tcPr>
-                </a:tc>
-                <a:tc>
-                  <a:txBody>
-                    <a:bodyPr/>
-                    <a:lstStyle/>
-                    <a:p>
-                      <a:pPr algn="ctr" indent="0" marL="0">
-                        <a:buNone/>
-                      </a:pPr>
-                      <a:r>
-                        <a:rPr lang="en-US" sz="1050" dirty="0">
-                          <a:solidFill>
-                            <a:schemeClr val="tx1"/>
-                          </a:solidFill>
-                        </a:rPr>
-                        <a:t>4,5</a:t>
-                      </a:r>
-                      <a:endParaRPr lang="en-US" sz="1050" dirty="0"/>
-                    </a:p>
-                  </a:txBody>
-                  <a:tcPr marL="101600" marR="76200" marT="25400" marB="25400" anchor="ctr">
-                    <a:lnL w="0" cap="flat" cmpd="sng" algn="ctr">
-                      <a:noFill/>
-                    </a:lnL>
-                    <a:lnR w="0" cap="flat" cmpd="sng" algn="ctr">
-                      <a:noFill/>
-                    </a:lnR>
-                    <a:lnT w="0" cap="flat" cmpd="sng" algn="ctr">
-                      <a:noFill/>
-                    </a:lnT>
-                    <a:lnB w="0" cap="flat" cmpd="sng" algn="ctr">
-                      <a:noFill/>
-                    </a:lnB>
-                    <a:solidFill>
-                      <a:schemeClr val="bg1"/>
-                    </a:solidFill>
-                  </a:tcPr>
-                </a:tc>
-                <a:tc>
-                  <a:txBody>
-                    <a:bodyPr/>
-                    <a:lstStyle/>
-                    <a:p>
-                      <a:pPr algn="ctr" indent="0" marL="0">
-                        <a:buNone/>
-                      </a:pPr>
-                      <a:r>
                         <a:rPr lang="en-US" sz="1050" b="1" dirty="0">
                           <a:solidFill>
                             <a:schemeClr val="tx1"/>
                           </a:solidFill>
                         </a:rPr>
-                        <a:t>4,1</a:t>
+                        <a:t>15,5</a:t>
                       </a:r>
                       <a:endParaRPr lang="en-US" sz="1050" dirty="0"/>
                     </a:p>
@@ -5779,6 +5171,154 @@
                             <a:schemeClr val="tx1"/>
                           </a:solidFill>
                         </a:rPr>
+                        <a:t>2,5</a:t>
+                      </a:r>
+                      <a:endParaRPr lang="en-US" sz="1050" dirty="0"/>
+                    </a:p>
+                  </a:txBody>
+                  <a:tcPr marL="101600" marR="76200" marT="25400" marB="25400" anchor="ctr">
+                    <a:lnL w="0" cap="flat" cmpd="sng" algn="ctr">
+                      <a:noFill/>
+                    </a:lnL>
+                    <a:lnR w="0" cap="flat" cmpd="sng" algn="ctr">
+                      <a:noFill/>
+                    </a:lnR>
+                    <a:lnT w="0" cap="flat" cmpd="sng" algn="ctr">
+                      <a:noFill/>
+                    </a:lnT>
+                    <a:lnB w="0" cap="flat" cmpd="sng" algn="ctr">
+                      <a:noFill/>
+                    </a:lnB>
+                    <a:solidFill>
+                      <a:schemeClr val="bg2"/>
+                    </a:solidFill>
+                  </a:tcPr>
+                </a:tc>
+                <a:tc>
+                  <a:txBody>
+                    <a:bodyPr/>
+                    <a:lstStyle/>
+                    <a:p>
+                      <a:pPr algn="ctr" indent="0" marL="0">
+                        <a:buNone/>
+                      </a:pPr>
+                      <a:r>
+                        <a:rPr lang="en-US" sz="1050" dirty="0">
+                          <a:solidFill>
+                            <a:schemeClr val="tx1"/>
+                          </a:solidFill>
+                        </a:rPr>
+                        <a:t>2</a:t>
+                      </a:r>
+                      <a:endParaRPr lang="en-US" sz="1050" dirty="0"/>
+                    </a:p>
+                  </a:txBody>
+                  <a:tcPr marL="101600" marR="76200" marT="25400" marB="25400" anchor="ctr">
+                    <a:lnL w="0" cap="flat" cmpd="sng" algn="ctr">
+                      <a:noFill/>
+                    </a:lnL>
+                    <a:lnR w="0" cap="flat" cmpd="sng" algn="ctr">
+                      <a:noFill/>
+                    </a:lnR>
+                    <a:lnT w="0" cap="flat" cmpd="sng" algn="ctr">
+                      <a:noFill/>
+                    </a:lnT>
+                    <a:lnB w="0" cap="flat" cmpd="sng" algn="ctr">
+                      <a:noFill/>
+                    </a:lnB>
+                    <a:solidFill>
+                      <a:schemeClr val="bg2"/>
+                    </a:solidFill>
+                  </a:tcPr>
+                </a:tc>
+                <a:tc>
+                  <a:txBody>
+                    <a:bodyPr/>
+                    <a:lstStyle/>
+                    <a:p>
+                      <a:pPr algn="ctr" indent="0" marL="0">
+                        <a:buNone/>
+                      </a:pPr>
+                      <a:r>
+                        <a:rPr lang="en-US" sz="1050" dirty="0">
+                          <a:solidFill>
+                            <a:schemeClr val="tx1"/>
+                          </a:solidFill>
+                        </a:rPr>
+                        <a:t>2,5</a:t>
+                      </a:r>
+                      <a:endParaRPr lang="en-US" sz="1050" dirty="0"/>
+                    </a:p>
+                  </a:txBody>
+                  <a:tcPr marL="101600" marR="76200" marT="25400" marB="25400" anchor="ctr">
+                    <a:lnL w="0" cap="flat" cmpd="sng" algn="ctr">
+                      <a:noFill/>
+                    </a:lnL>
+                    <a:lnR w="0" cap="flat" cmpd="sng" algn="ctr">
+                      <a:noFill/>
+                    </a:lnR>
+                    <a:lnT w="0" cap="flat" cmpd="sng" algn="ctr">
+                      <a:noFill/>
+                    </a:lnT>
+                    <a:lnB w="0" cap="flat" cmpd="sng" algn="ctr">
+                      <a:noFill/>
+                    </a:lnB>
+                    <a:solidFill>
+                      <a:schemeClr val="bg2"/>
+                    </a:solidFill>
+                  </a:tcPr>
+                </a:tc>
+                <a:tc>
+                  <a:txBody>
+                    <a:bodyPr/>
+                    <a:lstStyle/>
+                    <a:p>
+                      <a:pPr algn="ctr" indent="0" marL="0">
+                        <a:buNone/>
+                      </a:pPr>
+                      <a:r>
+                        <a:rPr lang="en-US" sz="1050" dirty="0">
+                          <a:solidFill>
+                            <a:schemeClr val="tx1"/>
+                          </a:solidFill>
+                        </a:rPr>
+                        <a:t>3</a:t>
+                      </a:r>
+                      <a:endParaRPr lang="en-US" sz="1050" dirty="0"/>
+                    </a:p>
+                  </a:txBody>
+                  <a:tcPr marL="101600" marR="76200" marT="25400" marB="25400" anchor="ctr">
+                    <a:lnL w="0" cap="flat" cmpd="sng" algn="ctr">
+                      <a:noFill/>
+                    </a:lnL>
+                    <a:lnR w="0" cap="flat" cmpd="sng" algn="ctr">
+                      <a:noFill/>
+                    </a:lnR>
+                    <a:lnT w="0" cap="flat" cmpd="sng" algn="ctr">
+                      <a:noFill/>
+                    </a:lnT>
+                    <a:lnB w="0" cap="flat" cmpd="sng" algn="ctr">
+                      <a:noFill/>
+                    </a:lnB>
+                    <a:solidFill>
+                      <a:schemeClr val="bg2"/>
+                    </a:solidFill>
+                  </a:tcPr>
+                </a:tc>
+                <a:tc>
+                  <a:txBody>
+                    <a:bodyPr/>
+                    <a:lstStyle/>
+                    <a:p>
+                      <a:pPr algn="ctr" indent="0" marL="0">
+                        <a:buNone/>
+                      </a:pPr>
+                      <a:r>
+                        <a:rPr lang="en-US" sz="1050" dirty="0">
+                          <a:solidFill>
+                            <a:schemeClr val="tx1"/>
+                          </a:solidFill>
+                        </a:rPr>
                         <a:t>3,5</a:t>
                       </a:r>
                       <a:endParaRPr lang="en-US" sz="1050" dirty="0"/>
@@ -5811,160 +5351,12 @@
                         <a:buNone/>
                       </a:pPr>
                       <a:r>
-                        <a:rPr lang="en-US" sz="1050" dirty="0">
-                          <a:solidFill>
-                            <a:schemeClr val="tx1"/>
-                          </a:solidFill>
-                        </a:rPr>
-                        <a:t>3</a:t>
-                      </a:r>
-                      <a:endParaRPr lang="en-US" sz="1050" dirty="0"/>
-                    </a:p>
-                  </a:txBody>
-                  <a:tcPr marL="101600" marR="76200" marT="25400" marB="25400" anchor="ctr">
-                    <a:lnL w="0" cap="flat" cmpd="sng" algn="ctr">
-                      <a:noFill/>
-                    </a:lnL>
-                    <a:lnR w="0" cap="flat" cmpd="sng" algn="ctr">
-                      <a:noFill/>
-                    </a:lnR>
-                    <a:lnT w="0" cap="flat" cmpd="sng" algn="ctr">
-                      <a:noFill/>
-                    </a:lnT>
-                    <a:lnB w="0" cap="flat" cmpd="sng" algn="ctr">
-                      <a:noFill/>
-                    </a:lnB>
-                    <a:solidFill>
-                      <a:schemeClr val="bg2"/>
-                    </a:solidFill>
-                  </a:tcPr>
-                </a:tc>
-                <a:tc>
-                  <a:txBody>
-                    <a:bodyPr/>
-                    <a:lstStyle/>
-                    <a:p>
-                      <a:pPr algn="ctr" indent="0" marL="0">
-                        <a:buNone/>
-                      </a:pPr>
-                      <a:r>
-                        <a:rPr lang="en-US" sz="1050" dirty="0">
-                          <a:solidFill>
-                            <a:schemeClr val="tx1"/>
-                          </a:solidFill>
-                        </a:rPr>
-                        <a:t>3,5</a:t>
-                      </a:r>
-                      <a:endParaRPr lang="en-US" sz="1050" dirty="0"/>
-                    </a:p>
-                  </a:txBody>
-                  <a:tcPr marL="101600" marR="76200" marT="25400" marB="25400" anchor="ctr">
-                    <a:lnL w="0" cap="flat" cmpd="sng" algn="ctr">
-                      <a:noFill/>
-                    </a:lnL>
-                    <a:lnR w="0" cap="flat" cmpd="sng" algn="ctr">
-                      <a:noFill/>
-                    </a:lnR>
-                    <a:lnT w="0" cap="flat" cmpd="sng" algn="ctr">
-                      <a:noFill/>
-                    </a:lnT>
-                    <a:lnB w="0" cap="flat" cmpd="sng" algn="ctr">
-                      <a:noFill/>
-                    </a:lnB>
-                    <a:solidFill>
-                      <a:schemeClr val="bg2"/>
-                    </a:solidFill>
-                  </a:tcPr>
-                </a:tc>
-                <a:tc>
-                  <a:txBody>
-                    <a:bodyPr/>
-                    <a:lstStyle/>
-                    <a:p>
-                      <a:pPr algn="ctr" indent="0" marL="0">
-                        <a:buNone/>
-                      </a:pPr>
-                      <a:r>
-                        <a:rPr lang="en-US" sz="1050" dirty="0">
-                          <a:solidFill>
-                            <a:schemeClr val="tx1"/>
-                          </a:solidFill>
-                        </a:rPr>
-                        <a:t>4</a:t>
-                      </a:r>
-                      <a:endParaRPr lang="en-US" sz="1050" dirty="0"/>
-                    </a:p>
-                  </a:txBody>
-                  <a:tcPr marL="101600" marR="76200" marT="25400" marB="25400" anchor="ctr">
-                    <a:lnL w="0" cap="flat" cmpd="sng" algn="ctr">
-                      <a:noFill/>
-                    </a:lnL>
-                    <a:lnR w="0" cap="flat" cmpd="sng" algn="ctr">
-                      <a:noFill/>
-                    </a:lnR>
-                    <a:lnT w="0" cap="flat" cmpd="sng" algn="ctr">
-                      <a:noFill/>
-                    </a:lnT>
-                    <a:lnB w="0" cap="flat" cmpd="sng" algn="ctr">
-                      <a:noFill/>
-                    </a:lnB>
-                    <a:solidFill>
-                      <a:schemeClr val="bg2"/>
-                    </a:solidFill>
-                  </a:tcPr>
-                </a:tc>
-                <a:tc>
-                  <a:txBody>
-                    <a:bodyPr/>
-                    <a:lstStyle/>
-                    <a:p>
-                      <a:pPr algn="ctr" indent="0" marL="0">
-                        <a:buNone/>
-                      </a:pPr>
-                      <a:r>
-                        <a:rPr lang="en-US" sz="1050" dirty="0">
-                          <a:solidFill>
-                            <a:schemeClr val="tx1"/>
-                          </a:solidFill>
-                        </a:rPr>
-                        <a:t>4,5</a:t>
-                      </a:r>
-                      <a:endParaRPr lang="en-US" sz="1050" dirty="0"/>
-                    </a:p>
-                  </a:txBody>
-                  <a:tcPr marL="101600" marR="76200" marT="25400" marB="25400" anchor="ctr">
-                    <a:lnL w="0" cap="flat" cmpd="sng" algn="ctr">
-                      <a:noFill/>
-                    </a:lnL>
-                    <a:lnR w="0" cap="flat" cmpd="sng" algn="ctr">
-                      <a:noFill/>
-                    </a:lnR>
-                    <a:lnT w="0" cap="flat" cmpd="sng" algn="ctr">
-                      <a:noFill/>
-                    </a:lnT>
-                    <a:lnB w="0" cap="flat" cmpd="sng" algn="ctr">
-                      <a:noFill/>
-                    </a:lnB>
-                    <a:solidFill>
-                      <a:schemeClr val="bg2"/>
-                    </a:solidFill>
-                  </a:tcPr>
-                </a:tc>
-                <a:tc>
-                  <a:txBody>
-                    <a:bodyPr/>
-                    <a:lstStyle/>
-                    <a:p>
-                      <a:pPr algn="ctr" indent="0" marL="0">
-                        <a:buNone/>
-                      </a:pPr>
-                      <a:r>
                         <a:rPr lang="en-US" sz="1050" b="1" dirty="0">
                           <a:solidFill>
                             <a:schemeClr val="tx1"/>
                           </a:solidFill>
                         </a:rPr>
-                        <a:t>3,7</a:t>
+                        <a:t>13,5</a:t>
                       </a:r>
                       <a:endParaRPr lang="en-US" sz="1050" dirty="0"/>
                     </a:p>
@@ -6077,6 +5469,117 @@
                             <a:schemeClr val="bg1"/>
                           </a:solidFill>
                         </a:rPr>
+                        <a:t>2–3</a:t>
+                      </a:r>
+                      <a:endParaRPr lang="en-US" sz="1050" dirty="0"/>
+                    </a:p>
+                  </a:txBody>
+                  <a:tcPr marL="101600" marR="76200" marT="25400" marB="25400" anchor="ctr">
+                    <a:lnL w="0" cap="flat" cmpd="sng" algn="ctr">
+                      <a:noFill/>
+                    </a:lnL>
+                    <a:lnR w="0" cap="flat" cmpd="sng" algn="ctr">
+                      <a:noFill/>
+                    </a:lnR>
+                    <a:lnT w="0" cap="flat" cmpd="sng" algn="ctr">
+                      <a:noFill/>
+                    </a:lnT>
+                    <a:lnB w="0" cap="flat" cmpd="sng" algn="ctr">
+                      <a:noFill/>
+                    </a:lnB>
+                    <a:solidFill>
+                      <a:schemeClr val="accent1"/>
+                    </a:solidFill>
+                  </a:tcPr>
+                </a:tc>
+                <a:tc>
+                  <a:txBody>
+                    <a:bodyPr/>
+                    <a:lstStyle/>
+                    <a:p>
+                      <a:pPr algn="ctr" indent="0" marL="0">
+                        <a:buNone/>
+                      </a:pPr>
+                      <a:r>
+                        <a:rPr lang="en-US" sz="1050" dirty="0">
+                          <a:solidFill>
+                            <a:schemeClr val="bg1"/>
+                          </a:solidFill>
+                        </a:rPr>
+                        <a:t>1,5–2,5</a:t>
+                      </a:r>
+                      <a:endParaRPr lang="en-US" sz="1050" dirty="0"/>
+                    </a:p>
+                  </a:txBody>
+                  <a:tcPr marL="101600" marR="76200" marT="25400" marB="25400" anchor="ctr">
+                    <a:lnL w="0" cap="flat" cmpd="sng" algn="ctr">
+                      <a:noFill/>
+                    </a:lnL>
+                    <a:lnR w="0" cap="flat" cmpd="sng" algn="ctr">
+                      <a:noFill/>
+                    </a:lnR>
+                    <a:lnT w="0" cap="flat" cmpd="sng" algn="ctr">
+                      <a:noFill/>
+                    </a:lnT>
+                    <a:lnB w="0" cap="flat" cmpd="sng" algn="ctr">
+                      <a:noFill/>
+                    </a:lnB>
+                    <a:solidFill>
+                      <a:schemeClr val="accent1"/>
+                    </a:solidFill>
+                  </a:tcPr>
+                </a:tc>
+                <a:tc>
+                  <a:txBody>
+                    <a:bodyPr/>
+                    <a:lstStyle/>
+                    <a:p>
+                      <a:pPr algn="ctr" indent="0" marL="0">
+                        <a:buNone/>
+                      </a:pPr>
+                      <a:r>
+                        <a:rPr lang="en-US" sz="1050" dirty="0">
+                          <a:solidFill>
+                            <a:schemeClr val="bg1"/>
+                          </a:solidFill>
+                        </a:rPr>
+                        <a:t>2</a:t>
+                      </a:r>
+                      <a:endParaRPr lang="en-US" sz="1050" dirty="0"/>
+                    </a:p>
+                  </a:txBody>
+                  <a:tcPr marL="101600" marR="76200" marT="25400" marB="25400" anchor="ctr">
+                    <a:lnL w="0" cap="flat" cmpd="sng" algn="ctr">
+                      <a:noFill/>
+                    </a:lnL>
+                    <a:lnR w="0" cap="flat" cmpd="sng" algn="ctr">
+                      <a:noFill/>
+                    </a:lnR>
+                    <a:lnT w="0" cap="flat" cmpd="sng" algn="ctr">
+                      <a:noFill/>
+                    </a:lnT>
+                    <a:lnB w="0" cap="flat" cmpd="sng" algn="ctr">
+                      <a:noFill/>
+                    </a:lnB>
+                    <a:solidFill>
+                      <a:schemeClr val="accent1"/>
+                    </a:solidFill>
+                  </a:tcPr>
+                </a:tc>
+                <a:tc>
+                  <a:txBody>
+                    <a:bodyPr/>
+                    <a:lstStyle/>
+                    <a:p>
+                      <a:pPr algn="ctr" indent="0" marL="0">
+                        <a:buNone/>
+                      </a:pPr>
+                      <a:r>
+                        <a:rPr lang="en-US" sz="1050" dirty="0">
+                          <a:solidFill>
+                            <a:schemeClr val="bg1"/>
+                          </a:solidFill>
+                        </a:rPr>
                         <a:t>3–4</a:t>
                       </a:r>
                       <a:endParaRPr lang="en-US" sz="1050" dirty="0"/>
@@ -6114,7 +5617,7 @@
                             <a:schemeClr val="bg1"/>
                           </a:solidFill>
                         </a:rPr>
-                        <a:t>2,5–3,5</a:t>
+                        <a:t>2–3</a:t>
                       </a:r>
                       <a:endParaRPr lang="en-US" sz="1050" dirty="0"/>
                     </a:p>
@@ -6146,123 +5649,12 @@
                         <a:buNone/>
                       </a:pPr>
                       <a:r>
-                        <a:rPr lang="en-US" sz="1050" dirty="0">
+                        <a:rPr lang="en-US" sz="1050" b="1" dirty="0">
                           <a:solidFill>
                             <a:schemeClr val="bg1"/>
                           </a:solidFill>
                         </a:rPr>
-                        <a:t>3</a:t>
-                      </a:r>
-                      <a:endParaRPr lang="en-US" sz="1050" dirty="0"/>
-                    </a:p>
-                  </a:txBody>
-                  <a:tcPr marL="101600" marR="76200" marT="25400" marB="25400" anchor="ctr">
-                    <a:lnL w="0" cap="flat" cmpd="sng" algn="ctr">
-                      <a:noFill/>
-                    </a:lnL>
-                    <a:lnR w="0" cap="flat" cmpd="sng" algn="ctr">
-                      <a:noFill/>
-                    </a:lnR>
-                    <a:lnT w="0" cap="flat" cmpd="sng" algn="ctr">
-                      <a:noFill/>
-                    </a:lnT>
-                    <a:lnB w="0" cap="flat" cmpd="sng" algn="ctr">
-                      <a:noFill/>
-                    </a:lnB>
-                    <a:solidFill>
-                      <a:schemeClr val="accent1"/>
-                    </a:solidFill>
-                  </a:tcPr>
-                </a:tc>
-                <a:tc>
-                  <a:txBody>
-                    <a:bodyPr/>
-                    <a:lstStyle/>
-                    <a:p>
-                      <a:pPr algn="ctr" indent="0" marL="0">
-                        <a:buNone/>
-                      </a:pPr>
-                      <a:r>
-                        <a:rPr lang="en-US" sz="1050" dirty="0">
-                          <a:solidFill>
-                            <a:schemeClr val="bg1"/>
-                          </a:solidFill>
-                        </a:rPr>
-                        <a:t>4–5</a:t>
-                      </a:r>
-                      <a:endParaRPr lang="en-US" sz="1050" dirty="0"/>
-                    </a:p>
-                  </a:txBody>
-                  <a:tcPr marL="101600" marR="76200" marT="25400" marB="25400" anchor="ctr">
-                    <a:lnL w="0" cap="flat" cmpd="sng" algn="ctr">
-                      <a:noFill/>
-                    </a:lnL>
-                    <a:lnR w="0" cap="flat" cmpd="sng" algn="ctr">
-                      <a:noFill/>
-                    </a:lnR>
-                    <a:lnT w="0" cap="flat" cmpd="sng" algn="ctr">
-                      <a:noFill/>
-                    </a:lnT>
-                    <a:lnB w="0" cap="flat" cmpd="sng" algn="ctr">
-                      <a:noFill/>
-                    </a:lnB>
-                    <a:solidFill>
-                      <a:schemeClr val="accent1"/>
-                    </a:solidFill>
-                  </a:tcPr>
-                </a:tc>
-                <a:tc>
-                  <a:txBody>
-                    <a:bodyPr/>
-                    <a:lstStyle/>
-                    <a:p>
-                      <a:pPr algn="ctr" indent="0" marL="0">
-                        <a:buNone/>
-                      </a:pPr>
-                      <a:r>
-                        <a:rPr lang="en-US" sz="1050" dirty="0">
-                          <a:solidFill>
-                            <a:schemeClr val="bg1"/>
-                          </a:solidFill>
-                        </a:rPr>
-                        <a:t>3–4</a:t>
-                      </a:r>
-                      <a:endParaRPr lang="en-US" sz="1050" dirty="0"/>
-                    </a:p>
-                  </a:txBody>
-                  <a:tcPr marL="101600" marR="76200" marT="25400" marB="25400" anchor="ctr">
-                    <a:lnL w="0" cap="flat" cmpd="sng" algn="ctr">
-                      <a:noFill/>
-                    </a:lnL>
-                    <a:lnR w="0" cap="flat" cmpd="sng" algn="ctr">
-                      <a:noFill/>
-                    </a:lnR>
-                    <a:lnT w="0" cap="flat" cmpd="sng" algn="ctr">
-                      <a:noFill/>
-                    </a:lnT>
-                    <a:lnB w="0" cap="flat" cmpd="sng" algn="ctr">
-                      <a:noFill/>
-                    </a:lnB>
-                    <a:solidFill>
-                      <a:schemeClr val="accent1"/>
-                    </a:solidFill>
-                  </a:tcPr>
-                </a:tc>
-                <a:tc>
-                  <a:txBody>
-                    <a:bodyPr/>
-                    <a:lstStyle/>
-                    <a:p>
-                      <a:pPr algn="ctr" indent="0" marL="0">
-                        <a:buNone/>
-                      </a:pPr>
-                      <a:r>
-                        <a:rPr lang="en-US" sz="1050" b="1" dirty="0">
-                          <a:solidFill>
-                            <a:schemeClr val="bg1"/>
-                          </a:solidFill>
-                        </a:rPr>
-                        <a:t>3,1–3,9</a:t>
+                        <a:t>10,5–14,5</a:t>
                       </a:r>
                       <a:endParaRPr lang="en-US" sz="1050" dirty="0"/>
                     </a:p>
@@ -6375,7 +5767,7 @@
                             <a:schemeClr val="tx1"/>
                           </a:solidFill>
                         </a:rPr>
-                        <a:t>2</a:t>
+                        <a:t>1</a:t>
                       </a:r>
                       <a:endParaRPr lang="en-US" sz="1050" dirty="0"/>
                     </a:p>
@@ -6412,7 +5804,7 @@
                             <a:schemeClr val="tx1"/>
                           </a:solidFill>
                         </a:rPr>
-                        <a:t>3,5</a:t>
+                        <a:t>2,5</a:t>
                       </a:r>
                       <a:endParaRPr lang="en-US" sz="1050" dirty="0"/>
                     </a:p>
@@ -6449,7 +5841,7 @@
                             <a:schemeClr val="tx1"/>
                           </a:solidFill>
                         </a:rPr>
-                        <a:t>1,5</a:t>
+                        <a:t>0,5</a:t>
                       </a:r>
                       <a:endParaRPr lang="en-US" sz="1050" dirty="0"/>
                     </a:p>
@@ -6486,7 +5878,7 @@
                             <a:schemeClr val="tx1"/>
                           </a:solidFill>
                         </a:rPr>
-                        <a:t>4</a:t>
+                        <a:t>3</a:t>
                       </a:r>
                       <a:endParaRPr lang="en-US" sz="1050" dirty="0"/>
                     </a:p>
@@ -6523,7 +5915,7 @@
                             <a:schemeClr val="tx1"/>
                           </a:solidFill>
                         </a:rPr>
-                        <a:t>3,5–4,5</a:t>
+                        <a:t>2,5–3,5</a:t>
                       </a:r>
                       <a:endParaRPr lang="en-US" sz="1050" dirty="0"/>
                     </a:p>
@@ -6560,7 +5952,7 @@
                             <a:schemeClr val="tx1"/>
                           </a:solidFill>
                         </a:rPr>
-                        <a:t>2,9–3,1</a:t>
+                        <a:t>9,5–10,5</a:t>
                       </a:r>
                       <a:endParaRPr lang="en-US" sz="1050" dirty="0"/>
                     </a:p>
@@ -6673,7 +6065,7 @@
                             <a:schemeClr val="tx1"/>
                           </a:solidFill>
                         </a:rPr>
-                        <a:t>2,5</a:t>
+                        <a:t>1,5</a:t>
                       </a:r>
                       <a:endParaRPr lang="en-US" sz="1050" dirty="0"/>
                     </a:p>
@@ -6710,7 +6102,7 @@
                             <a:schemeClr val="tx1"/>
                           </a:solidFill>
                         </a:rPr>
-                        <a:t>1,5</a:t>
+                        <a:t>0,5</a:t>
                       </a:r>
                       <a:endParaRPr lang="en-US" sz="1050" dirty="0"/>
                     </a:p>
@@ -6747,6 +6139,80 @@
                             <a:schemeClr val="tx1"/>
                           </a:solidFill>
                         </a:rPr>
+                        <a:t>1</a:t>
+                      </a:r>
+                      <a:endParaRPr lang="en-US" sz="1050" dirty="0"/>
+                    </a:p>
+                  </a:txBody>
+                  <a:tcPr marL="101600" marR="76200" marT="25400" marB="25400" anchor="ctr">
+                    <a:lnL w="0" cap="flat" cmpd="sng" algn="ctr">
+                      <a:noFill/>
+                    </a:lnL>
+                    <a:lnR w="0" cap="flat" cmpd="sng" algn="ctr">
+                      <a:noFill/>
+                    </a:lnR>
+                    <a:lnT w="0" cap="flat" cmpd="sng" algn="ctr">
+                      <a:noFill/>
+                    </a:lnT>
+                    <a:lnB w="0" cap="flat" cmpd="sng" algn="ctr">
+                      <a:noFill/>
+                    </a:lnB>
+                    <a:solidFill>
+                      <a:schemeClr val="bg1"/>
+                    </a:solidFill>
+                  </a:tcPr>
+                </a:tc>
+                <a:tc>
+                  <a:txBody>
+                    <a:bodyPr/>
+                    <a:lstStyle/>
+                    <a:p>
+                      <a:pPr algn="ctr" indent="0" marL="0">
+                        <a:buNone/>
+                      </a:pPr>
+                      <a:r>
+                        <a:rPr lang="en-US" sz="1050" dirty="0">
+                          <a:solidFill>
+                            <a:schemeClr val="tx1"/>
+                          </a:solidFill>
+                        </a:rPr>
+                        <a:t>1</a:t>
+                      </a:r>
+                      <a:endParaRPr lang="en-US" sz="1050" dirty="0"/>
+                    </a:p>
+                  </a:txBody>
+                  <a:tcPr marL="101600" marR="76200" marT="25400" marB="25400" anchor="ctr">
+                    <a:lnL w="0" cap="flat" cmpd="sng" algn="ctr">
+                      <a:noFill/>
+                    </a:lnL>
+                    <a:lnR w="0" cap="flat" cmpd="sng" algn="ctr">
+                      <a:noFill/>
+                    </a:lnR>
+                    <a:lnT w="0" cap="flat" cmpd="sng" algn="ctr">
+                      <a:noFill/>
+                    </a:lnT>
+                    <a:lnB w="0" cap="flat" cmpd="sng" algn="ctr">
+                      <a:noFill/>
+                    </a:lnB>
+                    <a:solidFill>
+                      <a:schemeClr val="bg1"/>
+                    </a:solidFill>
+                  </a:tcPr>
+                </a:tc>
+                <a:tc>
+                  <a:txBody>
+                    <a:bodyPr/>
+                    <a:lstStyle/>
+                    <a:p>
+                      <a:pPr algn="ctr" indent="0" marL="0">
+                        <a:buNone/>
+                      </a:pPr>
+                      <a:r>
+                        <a:rPr lang="en-US" sz="1050" dirty="0">
+                          <a:solidFill>
+                            <a:schemeClr val="tx1"/>
+                          </a:solidFill>
+                        </a:rPr>
                         <a:t>2</a:t>
                       </a:r>
                       <a:endParaRPr lang="en-US" sz="1050" dirty="0"/>
@@ -6779,86 +6245,12 @@
                         <a:buNone/>
                       </a:pPr>
                       <a:r>
-                        <a:rPr lang="en-US" sz="1050" dirty="0">
-                          <a:solidFill>
-                            <a:schemeClr val="tx1"/>
-                          </a:solidFill>
-                        </a:rPr>
-                        <a:t>2</a:t>
-                      </a:r>
-                      <a:endParaRPr lang="en-US" sz="1050" dirty="0"/>
-                    </a:p>
-                  </a:txBody>
-                  <a:tcPr marL="101600" marR="76200" marT="25400" marB="25400" anchor="ctr">
-                    <a:lnL w="0" cap="flat" cmpd="sng" algn="ctr">
-                      <a:noFill/>
-                    </a:lnL>
-                    <a:lnR w="0" cap="flat" cmpd="sng" algn="ctr">
-                      <a:noFill/>
-                    </a:lnR>
-                    <a:lnT w="0" cap="flat" cmpd="sng" algn="ctr">
-                      <a:noFill/>
-                    </a:lnT>
-                    <a:lnB w="0" cap="flat" cmpd="sng" algn="ctr">
-                      <a:noFill/>
-                    </a:lnB>
-                    <a:solidFill>
-                      <a:schemeClr val="bg1"/>
-                    </a:solidFill>
-                  </a:tcPr>
-                </a:tc>
-                <a:tc>
-                  <a:txBody>
-                    <a:bodyPr/>
-                    <a:lstStyle/>
-                    <a:p>
-                      <a:pPr algn="ctr" indent="0" marL="0">
-                        <a:buNone/>
-                      </a:pPr>
-                      <a:r>
-                        <a:rPr lang="en-US" sz="1050" dirty="0">
-                          <a:solidFill>
-                            <a:schemeClr val="tx1"/>
-                          </a:solidFill>
-                        </a:rPr>
-                        <a:t>3</a:t>
-                      </a:r>
-                      <a:endParaRPr lang="en-US" sz="1050" dirty="0"/>
-                    </a:p>
-                  </a:txBody>
-                  <a:tcPr marL="101600" marR="76200" marT="25400" marB="25400" anchor="ctr">
-                    <a:lnL w="0" cap="flat" cmpd="sng" algn="ctr">
-                      <a:noFill/>
-                    </a:lnL>
-                    <a:lnR w="0" cap="flat" cmpd="sng" algn="ctr">
-                      <a:noFill/>
-                    </a:lnR>
-                    <a:lnT w="0" cap="flat" cmpd="sng" algn="ctr">
-                      <a:noFill/>
-                    </a:lnT>
-                    <a:lnB w="0" cap="flat" cmpd="sng" algn="ctr">
-                      <a:noFill/>
-                    </a:lnB>
-                    <a:solidFill>
-                      <a:schemeClr val="bg1"/>
-                    </a:solidFill>
-                  </a:tcPr>
-                </a:tc>
-                <a:tc>
-                  <a:txBody>
-                    <a:bodyPr/>
-                    <a:lstStyle/>
-                    <a:p>
-                      <a:pPr algn="ctr" indent="0" marL="0">
-                        <a:buNone/>
-                      </a:pPr>
-                      <a:r>
                         <a:rPr lang="en-US" sz="1050" b="1" dirty="0">
                           <a:solidFill>
                             <a:schemeClr val="tx1"/>
                           </a:solidFill>
                         </a:rPr>
-                        <a:t>2,2</a:t>
+                        <a:t>6</a:t>
                       </a:r>
                       <a:endParaRPr lang="en-US" sz="1050" dirty="0"/>
                     </a:p>
@@ -6925,7 +6317,7 @@
       </p:graphicFrame>
       <p:sp>
         <p:nvSpPr>
-          <p:cNvPr id="8" name="text-157"/>
+          <p:cNvPr id="8" name="text-160"/>
           <p:cNvSpPr txBox="1"/>
           <p:nvPr/>
         </p:nvSpPr>
@@ -6953,5975 +6345,9 @@
                   <a:schemeClr val="accent2"/>
                 </a:solidFill>
               </a:rPr>
-              <a:t>Пример: у InSales расширяемость 1 + (1 + 1 + 0,5 + 0,5) = 4. Есть API и вебхуки, своя логика возможна только во внешнем приложении, перенести магазин на свой сервер нельзя. Диапазон указан там, где пункт не удалось проверить. Цены на 23.10.2026.</a:t>
+              <a:t>Пример: расширяемость InSales. API есть (1), вебхуки есть (1), своя логика только во внешнем приложении (0,5), перенести магазин на свой сервер нельзя, выгружаются только товары (0,5). Итого 3 из 4. Диапазон стоит там, где пункт не удалось проверить. Цены на 23.10.2026.</a:t>
             </a:r>
             <a:endParaRPr lang="en-US" sz="1000" dirty="0"/>
-          </a:p>
-        </p:txBody>
-      </p:sp>
-    </p:spTree>
-  </p:cSld>
-  <p:clrMapOvr>
-    <a:masterClrMapping/>
-  </p:clrMapOvr>
-</p:sld>
-</file>
-
-<file path=ppt/slides/slide12.xml><?xml version="1.0" encoding="utf-8"?>
-<p:sld xmlns:a="http://schemas.openxmlformats.org/drawingml/2006/main" xmlns:r="http://schemas.openxmlformats.org/officeDocument/2006/relationships" xmlns:p="http://schemas.openxmlformats.org/presentationml/2006/main">
-  <p:cSld name="Slide 12">
-    <p:spTree>
-      <p:nvGrpSpPr>
-        <p:cNvPr id="1" name=""/>
-        <p:cNvGrpSpPr/>
-        <p:nvPr/>
-      </p:nvGrpSpPr>
-      <p:grpSpPr>
-        <a:xfrm>
-          <a:off x="0" y="0"/>
-          <a:ext cx="0" cy="0"/>
-          <a:chOff x="0" y="0"/>
-          <a:chExt cx="0" cy="0"/>
-        </a:xfrm>
-      </p:grpSpPr>
-      <p:sp>
-        <p:nvSpPr>
-          <p:cNvPr id="2" name="Text 1"/>
-          <p:cNvSpPr/>
-          <p:nvPr>
-            <p:ph idx="102" type="body" hasCustomPrompt="1"/>
-          </p:nvPr>
-        </p:nvSpPr>
-        <p:spPr>
-          <a:xfrm>
-            <a:off x="594360" y="474980"/>
-            <a:ext cx="603250" cy="603250"/>
-          </a:xfrm>
-          <a:prstGeom prst="rect">
-            <a:avLst/>
-          </a:prstGeom>
-          <a:noFill/>
-          <a:ln/>
-        </p:spPr>
-        <p:txBody>
-          <a:bodyPr wrap="square" lIns="0" tIns="0" rIns="0" bIns="0" rtlCol="0" anchor="ctr"/>
-          <a:lstStyle/>
-          <a:p>
-            <a:pPr algn="ctr" indent="0" marL="0">
-              <a:buNone/>
-            </a:pPr>
-            <a:r>
-              <a:rPr lang="en-US" sz="2200" b="1" dirty="0">
-                <a:solidFill>
-                  <a:schemeClr val="bg1"/>
-                </a:solidFill>
-              </a:rPr>
-              <a:t>Д2</a:t>
-            </a:r>
-            <a:endParaRPr lang="en-US" sz="2200" dirty="0"/>
-          </a:p>
-        </p:txBody>
-      </p:sp>
-      <p:sp>
-        <p:nvSpPr>
-          <p:cNvPr id="3" name="Text 1"/>
-          <p:cNvSpPr/>
-          <p:nvPr>
-            <p:ph idx="103" type="body" hasCustomPrompt="1"/>
-          </p:nvPr>
-        </p:nvSpPr>
-        <p:spPr>
-          <a:xfrm>
-            <a:off x="1435100" y="419100"/>
-            <a:ext cx="8382000" cy="203200"/>
-          </a:xfrm>
-          <a:prstGeom prst="rect">
-            <a:avLst/>
-          </a:prstGeom>
-          <a:noFill/>
-          <a:ln/>
-        </p:spPr>
-        <p:txBody>
-          <a:bodyPr wrap="square" lIns="0" tIns="0" rIns="0" bIns="0" rtlCol="0" anchor="t"/>
-          <a:lstStyle/>
-          <a:p>
-            <a:pPr algn="l" indent="0" marL="0">
-              <a:buNone/>
-            </a:pPr>
-            <a:r>
-              <a:rPr lang="en-US" sz="950" b="1" spc="300" kern="0" dirty="0">
-                <a:solidFill>
-                  <a:schemeClr val="accent2"/>
-                </a:solidFill>
-              </a:rPr>
-              <a:t>ДОПОЛНИТЕЛЬНЫЙ СЛАЙД</a:t>
-            </a:r>
-            <a:endParaRPr lang="en-US" sz="950" dirty="0"/>
-          </a:p>
-        </p:txBody>
-      </p:sp>
-      <p:sp>
-        <p:nvSpPr>
-          <p:cNvPr id="4" name="Text 1"/>
-          <p:cNvSpPr/>
-          <p:nvPr>
-            <p:ph idx="104" type="title" hasCustomPrompt="1"/>
-          </p:nvPr>
-        </p:nvSpPr>
-        <p:spPr>
-          <a:xfrm>
-            <a:off x="1435100" y="647700"/>
-            <a:ext cx="8636000" cy="482600"/>
-          </a:xfrm>
-          <a:prstGeom prst="rect">
-            <a:avLst/>
-          </a:prstGeom>
-          <a:noFill/>
-          <a:ln/>
-        </p:spPr>
-        <p:txBody>
-          <a:bodyPr wrap="square" lIns="0" tIns="0" rIns="0" bIns="0" rtlCol="0" anchor="t"/>
-          <a:lstStyle/>
-          <a:p>
-            <a:pPr algn="l" indent="0" marL="0">
-              <a:buNone/>
-            </a:pPr>
-            <a:r>
-              <a:rPr lang="en-US" sz="2700" b="1" dirty="0">
-                <a:solidFill>
-                  <a:schemeClr val="tx1"/>
-                </a:solidFill>
-              </a:rPr>
-              <a:t>Нагрузочное тестирование</a:t>
-            </a:r>
-            <a:endParaRPr lang="en-US" sz="2700" dirty="0"/>
-          </a:p>
-        </p:txBody>
-      </p:sp>
-      <p:sp>
-        <p:nvSpPr>
-          <p:cNvPr id="5" name="Text 1"/>
-          <p:cNvSpPr/>
-          <p:nvPr>
-            <p:ph idx="105" type="body" hasCustomPrompt="1"/>
-          </p:nvPr>
-        </p:nvSpPr>
-        <p:spPr>
-          <a:xfrm>
-            <a:off x="594360" y="1346200"/>
-            <a:ext cx="10972800" cy="304800"/>
-          </a:xfrm>
-          <a:prstGeom prst="rect">
-            <a:avLst/>
-          </a:prstGeom>
-          <a:noFill/>
-          <a:ln/>
-        </p:spPr>
-        <p:txBody>
-          <a:bodyPr wrap="square" lIns="0" tIns="0" rIns="0" bIns="0" rtlCol="0" anchor="t"/>
-          <a:lstStyle/>
-          <a:p>
-            <a:pPr algn="l" indent="0" marL="0">
-              <a:buNone/>
-            </a:pPr>
-            <a:r>
-              <a:rPr lang="en-US" sz="1300" dirty="0">
-                <a:solidFill>
-                  <a:schemeClr val="accent3"/>
-                </a:solidFill>
-              </a:rPr>
-              <a:t>Apache Benchmark, отчёт, табл. 5</a:t>
-            </a:r>
-            <a:endParaRPr lang="en-US" sz="1300" dirty="0"/>
-          </a:p>
-        </p:txBody>
-      </p:sp>
-      <p:sp>
-        <p:nvSpPr>
-          <p:cNvPr id="6" name="Text 1"/>
-          <p:cNvSpPr/>
-          <p:nvPr>
-            <p:ph idx="106" type="body" hasCustomPrompt="1"/>
-          </p:nvPr>
-        </p:nvSpPr>
-        <p:spPr>
-          <a:xfrm>
-            <a:off x="11049000" y="6388100"/>
-            <a:ext cx="609600" cy="177800"/>
-          </a:xfrm>
-          <a:prstGeom prst="rect">
-            <a:avLst/>
-          </a:prstGeom>
-          <a:noFill/>
-          <a:ln/>
-        </p:spPr>
-        <p:txBody>
-          <a:bodyPr wrap="square" lIns="0" tIns="0" rIns="0" bIns="0" rtlCol="0" anchor="t"/>
-          <a:lstStyle/>
-          <a:p>
-            <a:pPr algn="r" indent="0" marL="0">
-              <a:buNone/>
-            </a:pPr>
-            <a:r>
-              <a:rPr lang="en-US" sz="900" dirty="0">
-                <a:solidFill>
-                  <a:schemeClr val="accent3"/>
-                </a:solidFill>
-              </a:rPr>
-              <a:t>Д2</a:t>
-            </a:r>
-            <a:endParaRPr lang="en-US" sz="900" dirty="0"/>
-          </a:p>
-        </p:txBody>
-      </p:sp>
-      <p:sp>
-        <p:nvSpPr>
-          <p:cNvPr id="7" name="card-158"/>
-          <p:cNvSpPr/>
-          <p:nvPr/>
-        </p:nvSpPr>
-        <p:spPr>
-          <a:xfrm>
-            <a:off x="594360" y="1778000"/>
-            <a:ext cx="2617470" cy="914400"/>
-          </a:xfrm>
-          <a:prstGeom prst="roundRect">
-            <a:avLst>
-              <a:gd name="adj" fmla="val 6000"/>
-            </a:avLst>
-          </a:prstGeom>
-          <a:solidFill>
-            <a:schemeClr val="bg2"/>
-          </a:solidFill>
-          <a:ln/>
-        </p:spPr>
-      </p:sp>
-      <p:sp>
-        <p:nvSpPr>
-          <p:cNvPr id="8" name="text-159"/>
-          <p:cNvSpPr txBox="1"/>
-          <p:nvPr/>
-        </p:nvSpPr>
-        <p:spPr>
-          <a:xfrm>
-            <a:off x="797560" y="1879600"/>
-            <a:ext cx="2211070" cy="406400"/>
-          </a:xfrm>
-          <a:prstGeom prst="rect">
-            <a:avLst/>
-          </a:prstGeom>
-          <a:noFill/>
-          <a:ln/>
-        </p:spPr>
-        <p:txBody>
-          <a:bodyPr wrap="square" lIns="0" tIns="0" rIns="0" bIns="0" rtlCol="0" anchor="t"/>
-          <a:lstStyle/>
-          <a:p>
-            <a:pPr indent="0" marL="0">
-              <a:buNone/>
-            </a:pPr>
-            <a:r>
-              <a:rPr lang="en-US" sz="2400" b="1" dirty="0">
-                <a:solidFill>
-                  <a:schemeClr val="tx1"/>
-                </a:solidFill>
-              </a:rPr>
-              <a:t>1,2 с</a:t>
-            </a:r>
-            <a:endParaRPr lang="en-US" sz="2400" dirty="0"/>
-          </a:p>
-        </p:txBody>
-      </p:sp>
-      <p:sp>
-        <p:nvSpPr>
-          <p:cNvPr id="9" name="text-160"/>
-          <p:cNvSpPr txBox="1"/>
-          <p:nvPr/>
-        </p:nvSpPr>
-        <p:spPr>
-          <a:xfrm>
-            <a:off x="797560" y="2311400"/>
-            <a:ext cx="2211070" cy="330200"/>
-          </a:xfrm>
-          <a:prstGeom prst="rect">
-            <a:avLst/>
-          </a:prstGeom>
-          <a:noFill/>
-          <a:ln/>
-        </p:spPr>
-        <p:txBody>
-          <a:bodyPr wrap="square" lIns="0" tIns="0" rIns="0" bIns="0" rtlCol="0" anchor="t"/>
-          <a:lstStyle/>
-          <a:p>
-            <a:pPr indent="0" marL="0">
-              <a:buNone/>
-            </a:pPr>
-            <a:r>
-              <a:rPr lang="en-US" sz="1000" dirty="0">
-                <a:solidFill>
-                  <a:schemeClr val="accent3"/>
-                </a:solidFill>
-              </a:rPr>
-              <a:t>отклик при 100 RPS, норма N-01 до 2 с</a:t>
-            </a:r>
-            <a:endParaRPr lang="en-US" sz="1000" dirty="0"/>
-          </a:p>
-        </p:txBody>
-      </p:sp>
-      <p:sp>
-        <p:nvSpPr>
-          <p:cNvPr id="10" name="card-161"/>
-          <p:cNvSpPr/>
-          <p:nvPr/>
-        </p:nvSpPr>
-        <p:spPr>
-          <a:xfrm>
-            <a:off x="3379470" y="1778000"/>
-            <a:ext cx="2617470" cy="914400"/>
-          </a:xfrm>
-          <a:prstGeom prst="roundRect">
-            <a:avLst>
-              <a:gd name="adj" fmla="val 6000"/>
-            </a:avLst>
-          </a:prstGeom>
-          <a:solidFill>
-            <a:schemeClr val="bg2"/>
-          </a:solidFill>
-          <a:ln/>
-        </p:spPr>
-      </p:sp>
-      <p:sp>
-        <p:nvSpPr>
-          <p:cNvPr id="11" name="text-162"/>
-          <p:cNvSpPr txBox="1"/>
-          <p:nvPr/>
-        </p:nvSpPr>
-        <p:spPr>
-          <a:xfrm>
-            <a:off x="3582670" y="1879600"/>
-            <a:ext cx="2211070" cy="406400"/>
-          </a:xfrm>
-          <a:prstGeom prst="rect">
-            <a:avLst/>
-          </a:prstGeom>
-          <a:noFill/>
-          <a:ln/>
-        </p:spPr>
-        <p:txBody>
-          <a:bodyPr wrap="square" lIns="0" tIns="0" rIns="0" bIns="0" rtlCol="0" anchor="t"/>
-          <a:lstStyle/>
-          <a:p>
-            <a:pPr indent="0" marL="0">
-              <a:buNone/>
-            </a:pPr>
-            <a:r>
-              <a:rPr lang="en-US" sz="2400" b="1" dirty="0">
-                <a:solidFill>
-                  <a:schemeClr val="tx1"/>
-                </a:solidFill>
-              </a:rPr>
-              <a:t>99,8 %</a:t>
-            </a:r>
-            <a:endParaRPr lang="en-US" sz="2400" dirty="0"/>
-          </a:p>
-        </p:txBody>
-      </p:sp>
-      <p:sp>
-        <p:nvSpPr>
-          <p:cNvPr id="12" name="text-163"/>
-          <p:cNvSpPr txBox="1"/>
-          <p:nvPr/>
-        </p:nvSpPr>
-        <p:spPr>
-          <a:xfrm>
-            <a:off x="3582670" y="2311400"/>
-            <a:ext cx="2211070" cy="330200"/>
-          </a:xfrm>
-          <a:prstGeom prst="rect">
-            <a:avLst/>
-          </a:prstGeom>
-          <a:noFill/>
-          <a:ln/>
-        </p:spPr>
-        <p:txBody>
-          <a:bodyPr wrap="square" lIns="0" tIns="0" rIns="0" bIns="0" rtlCol="0" anchor="t"/>
-          <a:lstStyle/>
-          <a:p>
-            <a:pPr indent="0" marL="0">
-              <a:buNone/>
-            </a:pPr>
-            <a:r>
-              <a:rPr lang="en-US" sz="1000" dirty="0">
-                <a:solidFill>
-                  <a:schemeClr val="accent3"/>
-                </a:solidFill>
-              </a:rPr>
-              <a:t>успешных запросов при 100 RPS</a:t>
-            </a:r>
-            <a:endParaRPr lang="en-US" sz="1000" dirty="0"/>
-          </a:p>
-        </p:txBody>
-      </p:sp>
-      <p:sp>
-        <p:nvSpPr>
-          <p:cNvPr id="13" name="card-164"/>
-          <p:cNvSpPr/>
-          <p:nvPr/>
-        </p:nvSpPr>
-        <p:spPr>
-          <a:xfrm>
-            <a:off x="6164580" y="1778000"/>
-            <a:ext cx="2617470" cy="914400"/>
-          </a:xfrm>
-          <a:prstGeom prst="roundRect">
-            <a:avLst>
-              <a:gd name="adj" fmla="val 6000"/>
-            </a:avLst>
-          </a:prstGeom>
-          <a:solidFill>
-            <a:schemeClr val="bg2"/>
-          </a:solidFill>
-          <a:ln/>
-        </p:spPr>
-      </p:sp>
-      <p:sp>
-        <p:nvSpPr>
-          <p:cNvPr id="14" name="text-165"/>
-          <p:cNvSpPr txBox="1"/>
-          <p:nvPr/>
-        </p:nvSpPr>
-        <p:spPr>
-          <a:xfrm>
-            <a:off x="6367780" y="1879600"/>
-            <a:ext cx="2211070" cy="406400"/>
-          </a:xfrm>
-          <a:prstGeom prst="rect">
-            <a:avLst/>
-          </a:prstGeom>
-          <a:noFill/>
-          <a:ln/>
-        </p:spPr>
-        <p:txBody>
-          <a:bodyPr wrap="square" lIns="0" tIns="0" rIns="0" bIns="0" rtlCol="0" anchor="t"/>
-          <a:lstStyle/>
-          <a:p>
-            <a:pPr indent="0" marL="0">
-              <a:buNone/>
-            </a:pPr>
-            <a:r>
-              <a:rPr lang="en-US" sz="2400" b="1" dirty="0">
-                <a:solidFill>
-                  <a:schemeClr val="tx1"/>
-                </a:solidFill>
-              </a:rPr>
-              <a:t>2,8 с</a:t>
-            </a:r>
-            <a:endParaRPr lang="en-US" sz="2400" dirty="0"/>
-          </a:p>
-        </p:txBody>
-      </p:sp>
-      <p:sp>
-        <p:nvSpPr>
-          <p:cNvPr id="15" name="text-166"/>
-          <p:cNvSpPr txBox="1"/>
-          <p:nvPr/>
-        </p:nvSpPr>
-        <p:spPr>
-          <a:xfrm>
-            <a:off x="6367780" y="2311400"/>
-            <a:ext cx="2211070" cy="330200"/>
-          </a:xfrm>
-          <a:prstGeom prst="rect">
-            <a:avLst/>
-          </a:prstGeom>
-          <a:noFill/>
-          <a:ln/>
-        </p:spPr>
-        <p:txBody>
-          <a:bodyPr wrap="square" lIns="0" tIns="0" rIns="0" bIns="0" rtlCol="0" anchor="t"/>
-          <a:lstStyle/>
-          <a:p>
-            <a:pPr indent="0" marL="0">
-              <a:buNone/>
-            </a:pPr>
-            <a:r>
-              <a:rPr lang="en-US" sz="1000" dirty="0">
-                <a:solidFill>
-                  <a:schemeClr val="accent3"/>
-                </a:solidFill>
-              </a:rPr>
-              <a:t>отклик при 200 RPS, выше нормы</a:t>
-            </a:r>
-            <a:endParaRPr lang="en-US" sz="1000" dirty="0"/>
-          </a:p>
-        </p:txBody>
-      </p:sp>
-      <p:sp>
-        <p:nvSpPr>
-          <p:cNvPr id="16" name="card-167"/>
-          <p:cNvSpPr/>
-          <p:nvPr/>
-        </p:nvSpPr>
-        <p:spPr>
-          <a:xfrm>
-            <a:off x="8949690" y="1778000"/>
-            <a:ext cx="2617470" cy="914400"/>
-          </a:xfrm>
-          <a:prstGeom prst="roundRect">
-            <a:avLst>
-              <a:gd name="adj" fmla="val 6000"/>
-            </a:avLst>
-          </a:prstGeom>
-          <a:solidFill>
-            <a:schemeClr val="bg2"/>
-          </a:solidFill>
-          <a:ln/>
-        </p:spPr>
-      </p:sp>
-      <p:sp>
-        <p:nvSpPr>
-          <p:cNvPr id="17" name="text-168"/>
-          <p:cNvSpPr txBox="1"/>
-          <p:nvPr/>
-        </p:nvSpPr>
-        <p:spPr>
-          <a:xfrm>
-            <a:off x="9152890" y="1879600"/>
-            <a:ext cx="2211070" cy="406400"/>
-          </a:xfrm>
-          <a:prstGeom prst="rect">
-            <a:avLst/>
-          </a:prstGeom>
-          <a:noFill/>
-          <a:ln/>
-        </p:spPr>
-        <p:txBody>
-          <a:bodyPr wrap="square" lIns="0" tIns="0" rIns="0" bIns="0" rtlCol="0" anchor="t"/>
-          <a:lstStyle/>
-          <a:p>
-            <a:pPr indent="0" marL="0">
-              <a:buNone/>
-            </a:pPr>
-            <a:r>
-              <a:rPr lang="en-US" sz="2400" b="1" dirty="0">
-                <a:solidFill>
-                  <a:schemeClr val="tx1"/>
-                </a:solidFill>
-              </a:rPr>
-              <a:t>94,2 %</a:t>
-            </a:r>
-            <a:endParaRPr lang="en-US" sz="2400" dirty="0"/>
-          </a:p>
-        </p:txBody>
-      </p:sp>
-      <p:sp>
-        <p:nvSpPr>
-          <p:cNvPr id="18" name="text-169"/>
-          <p:cNvSpPr txBox="1"/>
-          <p:nvPr/>
-        </p:nvSpPr>
-        <p:spPr>
-          <a:xfrm>
-            <a:off x="9152890" y="2311400"/>
-            <a:ext cx="2211070" cy="330200"/>
-          </a:xfrm>
-          <a:prstGeom prst="rect">
-            <a:avLst/>
-          </a:prstGeom>
-          <a:noFill/>
-          <a:ln/>
-        </p:spPr>
-        <p:txBody>
-          <a:bodyPr wrap="square" lIns="0" tIns="0" rIns="0" bIns="0" rtlCol="0" anchor="t"/>
-          <a:lstStyle/>
-          <a:p>
-            <a:pPr indent="0" marL="0">
-              <a:buNone/>
-            </a:pPr>
-            <a:r>
-              <a:rPr lang="en-US" sz="1000" dirty="0">
-                <a:solidFill>
-                  <a:schemeClr val="accent3"/>
-                </a:solidFill>
-              </a:rPr>
-              <a:t>успешных запросов при 200 RPS</a:t>
-            </a:r>
-            <a:endParaRPr lang="en-US" sz="1000" dirty="0"/>
-          </a:p>
-        </p:txBody>
-      </p:sp>
-      <p:graphicFrame>
-        <p:nvGraphicFramePr>
-          <p:cNvPr id="19" name="load-chart" descr=""/>
-          <p:cNvGraphicFramePr/>
-          <p:nvPr/>
-        </p:nvGraphicFramePr>
-        <p:xfrm>
-          <a:off x="594360" y="2870200"/>
-          <a:ext cx="7112000" cy="3175000"/>
-        </p:xfrm>
-        <a:graphic xmlns:a="http://schemas.openxmlformats.org/drawingml/2006/main">
-          <a:graphicData uri="http://schemas.openxmlformats.org/drawingml/2006/chart">
-            <c:chart xmlns:c="http://schemas.openxmlformats.org/drawingml/2006/chart" r:id="rId1"/>
-          </a:graphicData>
-        </a:graphic>
-      </p:graphicFrame>
-      <p:sp>
-        <p:nvSpPr>
-          <p:cNvPr id="20" name="card-170"/>
-          <p:cNvSpPr/>
-          <p:nvPr/>
-        </p:nvSpPr>
-        <p:spPr>
-          <a:xfrm>
-            <a:off x="7874000" y="2870200"/>
-            <a:ext cx="3693160" cy="1574800"/>
-          </a:xfrm>
-          <a:prstGeom prst="roundRect">
-            <a:avLst>
-              <a:gd name="adj" fmla="val 3484"/>
-            </a:avLst>
-          </a:prstGeom>
-          <a:solidFill>
-            <a:schemeClr val="accent1"/>
-          </a:solidFill>
-          <a:ln/>
-        </p:spPr>
-      </p:sp>
-      <p:sp>
-        <p:nvSpPr>
-          <p:cNvPr id="21" name="text-171"/>
-          <p:cNvSpPr txBox="1"/>
-          <p:nvPr/>
-        </p:nvSpPr>
-        <p:spPr>
-          <a:xfrm>
-            <a:off x="8077200" y="3022600"/>
-            <a:ext cx="3302000" cy="228600"/>
-          </a:xfrm>
-          <a:prstGeom prst="rect">
-            <a:avLst/>
-          </a:prstGeom>
-          <a:noFill/>
-          <a:ln/>
-        </p:spPr>
-        <p:txBody>
-          <a:bodyPr wrap="square" lIns="0" tIns="0" rIns="0" bIns="0" rtlCol="0" anchor="t"/>
-          <a:lstStyle/>
-          <a:p>
-            <a:pPr indent="0" marL="0">
-              <a:buNone/>
-            </a:pPr>
-            <a:r>
-              <a:rPr lang="en-US" sz="1200" b="1" dirty="0">
-                <a:solidFill>
-                  <a:schemeClr val="bg1"/>
-                </a:solidFill>
-              </a:rPr>
-              <a:t>Граница применимости</a:t>
-            </a:r>
-            <a:endParaRPr lang="en-US" sz="1200" dirty="0"/>
-          </a:p>
-        </p:txBody>
-      </p:sp>
-      <p:sp>
-        <p:nvSpPr>
-          <p:cNvPr id="22" name="text-172"/>
-          <p:cNvSpPr txBox="1"/>
-          <p:nvPr/>
-        </p:nvSpPr>
-        <p:spPr>
-          <a:xfrm>
-            <a:off x="8077200" y="3302000"/>
-            <a:ext cx="3302000" cy="1066800"/>
-          </a:xfrm>
-          <a:prstGeom prst="rect">
-            <a:avLst/>
-          </a:prstGeom>
-          <a:noFill/>
-          <a:ln/>
-        </p:spPr>
-        <p:txBody>
-          <a:bodyPr wrap="square" lIns="0" tIns="0" rIns="0" bIns="0" rtlCol="0" anchor="t"/>
-          <a:lstStyle/>
-          <a:p>
-            <a:pPr indent="0" marL="0">
-              <a:buNone/>
-            </a:pPr>
-            <a:r>
-              <a:rPr lang="en-US" sz="1050" dirty="0">
-                <a:solidFill>
-                  <a:srgbClr val="C9CBD8"/>
-                </a:solidFill>
-              </a:rPr>
-              <a:t>До 100 RPS норма выполняется. При 150–200 RPS отклик 1,9–2,8 с из-за синхронной обработки Flask и WSGI и отсутствия кеша. План: кеш фильтров в Redis, статика на CDN, переход на ASGI.</a:t>
-            </a:r>
-            <a:endParaRPr lang="en-US" sz="1050" dirty="0"/>
-          </a:p>
-        </p:txBody>
-      </p:sp>
-      <p:sp>
-        <p:nvSpPr>
-          <p:cNvPr id="23" name="card-173"/>
-          <p:cNvSpPr/>
-          <p:nvPr/>
-        </p:nvSpPr>
-        <p:spPr>
-          <a:xfrm>
-            <a:off x="7874000" y="4597400"/>
-            <a:ext cx="3693160" cy="1447800"/>
-          </a:xfrm>
-          <a:prstGeom prst="roundRect">
-            <a:avLst>
-              <a:gd name="adj" fmla="val 3789"/>
-            </a:avLst>
-          </a:prstGeom>
-          <a:solidFill>
-            <a:schemeClr val="bg2"/>
-          </a:solidFill>
-          <a:ln/>
-        </p:spPr>
-      </p:sp>
-      <p:sp>
-        <p:nvSpPr>
-          <p:cNvPr id="24" name="text-174"/>
-          <p:cNvSpPr txBox="1"/>
-          <p:nvPr/>
-        </p:nvSpPr>
-        <p:spPr>
-          <a:xfrm>
-            <a:off x="8077200" y="4749800"/>
-            <a:ext cx="3302000" cy="228600"/>
-          </a:xfrm>
-          <a:prstGeom prst="rect">
-            <a:avLst/>
-          </a:prstGeom>
-          <a:noFill/>
-          <a:ln/>
-        </p:spPr>
-        <p:txBody>
-          <a:bodyPr wrap="square" lIns="0" tIns="0" rIns="0" bIns="0" rtlCol="0" anchor="t"/>
-          <a:lstStyle/>
-          <a:p>
-            <a:pPr indent="0" marL="0">
-              <a:buNone/>
-            </a:pPr>
-            <a:r>
-              <a:rPr lang="en-US" sz="1200" b="1" dirty="0">
-                <a:solidFill>
-                  <a:schemeClr val="tx1"/>
-                </a:solidFill>
-              </a:rPr>
-              <a:t>Стенд</a:t>
-            </a:r>
-            <a:endParaRPr lang="en-US" sz="1200" dirty="0"/>
-          </a:p>
-        </p:txBody>
-      </p:sp>
-      <p:sp>
-        <p:nvSpPr>
-          <p:cNvPr id="25" name="text-175"/>
-          <p:cNvSpPr txBox="1"/>
-          <p:nvPr/>
-        </p:nvSpPr>
-        <p:spPr>
-          <a:xfrm>
-            <a:off x="8077200" y="5029200"/>
-            <a:ext cx="3302000" cy="914400"/>
-          </a:xfrm>
-          <a:prstGeom prst="rect">
-            <a:avLst/>
-          </a:prstGeom>
-          <a:noFill/>
-          <a:ln/>
-        </p:spPr>
-        <p:txBody>
-          <a:bodyPr wrap="square" lIns="0" tIns="0" rIns="0" bIns="0" rtlCol="0" anchor="t"/>
-          <a:lstStyle/>
-          <a:p>
-            <a:pPr indent="0" marL="0">
-              <a:buNone/>
-            </a:pPr>
-            <a:r>
-              <a:rPr lang="en-US" sz="1050" dirty="0">
-                <a:solidFill>
-                  <a:schemeClr val="accent2"/>
-                </a:solidFill>
-              </a:rPr>
-              <a:t>Локальный сервер, 4 ядра, 8 ГБ RAM, PostgreSQL и Flask в Docker-контейнерах. Production-стенда нет.</a:t>
-            </a:r>
-            <a:endParaRPr lang="en-US" sz="1050" dirty="0"/>
-          </a:p>
-        </p:txBody>
-      </p:sp>
-    </p:spTree>
-  </p:cSld>
-  <p:clrMapOvr>
-    <a:masterClrMapping/>
-  </p:clrMapOvr>
-</p:sld>
-</file>
-
-<file path=ppt/slides/slide13.xml><?xml version="1.0" encoding="utf-8"?>
-<p:sld xmlns:a="http://schemas.openxmlformats.org/drawingml/2006/main" xmlns:r="http://schemas.openxmlformats.org/officeDocument/2006/relationships" xmlns:p="http://schemas.openxmlformats.org/presentationml/2006/main">
-  <p:cSld name="Slide 13">
-    <p:spTree>
-      <p:nvGrpSpPr>
-        <p:cNvPr id="1" name=""/>
-        <p:cNvGrpSpPr/>
-        <p:nvPr/>
-      </p:nvGrpSpPr>
-      <p:grpSpPr>
-        <a:xfrm>
-          <a:off x="0" y="0"/>
-          <a:ext cx="0" cy="0"/>
-          <a:chOff x="0" y="0"/>
-          <a:chExt cx="0" cy="0"/>
-        </a:xfrm>
-      </p:grpSpPr>
-      <p:sp>
-        <p:nvSpPr>
-          <p:cNvPr id="2" name="Text 1"/>
-          <p:cNvSpPr/>
-          <p:nvPr>
-            <p:ph idx="102" type="body" hasCustomPrompt="1"/>
-          </p:nvPr>
-        </p:nvSpPr>
-        <p:spPr>
-          <a:xfrm>
-            <a:off x="594360" y="474980"/>
-            <a:ext cx="603250" cy="603250"/>
-          </a:xfrm>
-          <a:prstGeom prst="rect">
-            <a:avLst/>
-          </a:prstGeom>
-          <a:noFill/>
-          <a:ln/>
-        </p:spPr>
-        <p:txBody>
-          <a:bodyPr wrap="square" lIns="0" tIns="0" rIns="0" bIns="0" rtlCol="0" anchor="ctr"/>
-          <a:lstStyle/>
-          <a:p>
-            <a:pPr algn="ctr" indent="0" marL="0">
-              <a:buNone/>
-            </a:pPr>
-            <a:r>
-              <a:rPr lang="en-US" sz="2200" b="1" dirty="0">
-                <a:solidFill>
-                  <a:schemeClr val="bg1"/>
-                </a:solidFill>
-              </a:rPr>
-              <a:t>Д3</a:t>
-            </a:r>
-            <a:endParaRPr lang="en-US" sz="2200" dirty="0"/>
-          </a:p>
-        </p:txBody>
-      </p:sp>
-      <p:sp>
-        <p:nvSpPr>
-          <p:cNvPr id="3" name="Text 1"/>
-          <p:cNvSpPr/>
-          <p:nvPr>
-            <p:ph idx="103" type="body" hasCustomPrompt="1"/>
-          </p:nvPr>
-        </p:nvSpPr>
-        <p:spPr>
-          <a:xfrm>
-            <a:off x="1435100" y="419100"/>
-            <a:ext cx="8382000" cy="203200"/>
-          </a:xfrm>
-          <a:prstGeom prst="rect">
-            <a:avLst/>
-          </a:prstGeom>
-          <a:noFill/>
-          <a:ln/>
-        </p:spPr>
-        <p:txBody>
-          <a:bodyPr wrap="square" lIns="0" tIns="0" rIns="0" bIns="0" rtlCol="0" anchor="t"/>
-          <a:lstStyle/>
-          <a:p>
-            <a:pPr algn="l" indent="0" marL="0">
-              <a:buNone/>
-            </a:pPr>
-            <a:r>
-              <a:rPr lang="en-US" sz="950" b="1" spc="300" kern="0" dirty="0">
-                <a:solidFill>
-                  <a:schemeClr val="accent2"/>
-                </a:solidFill>
-              </a:rPr>
-              <a:t>ДОПОЛНИТЕЛЬНЫЙ СЛАЙД</a:t>
-            </a:r>
-            <a:endParaRPr lang="en-US" sz="950" dirty="0"/>
-          </a:p>
-        </p:txBody>
-      </p:sp>
-      <p:sp>
-        <p:nvSpPr>
-          <p:cNvPr id="4" name="Text 1"/>
-          <p:cNvSpPr/>
-          <p:nvPr>
-            <p:ph idx="104" type="title" hasCustomPrompt="1"/>
-          </p:nvPr>
-        </p:nvSpPr>
-        <p:spPr>
-          <a:xfrm>
-            <a:off x="1435100" y="647700"/>
-            <a:ext cx="8636000" cy="482600"/>
-          </a:xfrm>
-          <a:prstGeom prst="rect">
-            <a:avLst/>
-          </a:prstGeom>
-          <a:noFill/>
-          <a:ln/>
-        </p:spPr>
-        <p:txBody>
-          <a:bodyPr wrap="square" lIns="0" tIns="0" rIns="0" bIns="0" rtlCol="0" anchor="t"/>
-          <a:lstStyle/>
-          <a:p>
-            <a:pPr algn="l" indent="0" marL="0">
-              <a:buNone/>
-            </a:pPr>
-            <a:r>
-              <a:rPr lang="en-US" sz="2700" b="1" dirty="0">
-                <a:solidFill>
-                  <a:schemeClr val="tx1"/>
-                </a:solidFill>
-              </a:rPr>
-              <a:t>Результаты замеров</a:t>
-            </a:r>
-            <a:endParaRPr lang="en-US" sz="2700" dirty="0"/>
-          </a:p>
-        </p:txBody>
-      </p:sp>
-      <p:sp>
-        <p:nvSpPr>
-          <p:cNvPr id="5" name="Text 1"/>
-          <p:cNvSpPr/>
-          <p:nvPr>
-            <p:ph idx="105" type="body" hasCustomPrompt="1"/>
-          </p:nvPr>
-        </p:nvSpPr>
-        <p:spPr>
-          <a:xfrm>
-            <a:off x="594360" y="1346200"/>
-            <a:ext cx="10972800" cy="304800"/>
-          </a:xfrm>
-          <a:prstGeom prst="rect">
-            <a:avLst/>
-          </a:prstGeom>
-          <a:noFill/>
-          <a:ln/>
-        </p:spPr>
-        <p:txBody>
-          <a:bodyPr wrap="square" lIns="0" tIns="0" rIns="0" bIns="0" rtlCol="0" anchor="t"/>
-          <a:lstStyle/>
-          <a:p>
-            <a:pPr algn="l" indent="0" marL="0">
-              <a:buNone/>
-            </a:pPr>
-            <a:r>
-              <a:rPr lang="en-US" sz="1300" dirty="0">
-                <a:solidFill>
-                  <a:schemeClr val="accent3"/>
-                </a:solidFill>
-              </a:rPr>
-              <a:t>Заполняется после замеров: 5 засчитанных прогонов, пробный не учитывается, порядок систем меняется</a:t>
-            </a:r>
-            <a:endParaRPr lang="en-US" sz="1300" dirty="0"/>
-          </a:p>
-        </p:txBody>
-      </p:sp>
-      <p:sp>
-        <p:nvSpPr>
-          <p:cNvPr id="6" name="Text 1"/>
-          <p:cNvSpPr/>
-          <p:nvPr>
-            <p:ph idx="106" type="body" hasCustomPrompt="1"/>
-          </p:nvPr>
-        </p:nvSpPr>
-        <p:spPr>
-          <a:xfrm>
-            <a:off x="11049000" y="6388100"/>
-            <a:ext cx="609600" cy="177800"/>
-          </a:xfrm>
-          <a:prstGeom prst="rect">
-            <a:avLst/>
-          </a:prstGeom>
-          <a:noFill/>
-          <a:ln/>
-        </p:spPr>
-        <p:txBody>
-          <a:bodyPr wrap="square" lIns="0" tIns="0" rIns="0" bIns="0" rtlCol="0" anchor="t"/>
-          <a:lstStyle/>
-          <a:p>
-            <a:pPr algn="r" indent="0" marL="0">
-              <a:buNone/>
-            </a:pPr>
-            <a:r>
-              <a:rPr lang="en-US" sz="900" dirty="0">
-                <a:solidFill>
-                  <a:schemeClr val="accent3"/>
-                </a:solidFill>
-              </a:rPr>
-              <a:t>Д3</a:t>
-            </a:r>
-            <a:endParaRPr lang="en-US" sz="900" dirty="0"/>
-          </a:p>
-        </p:txBody>
-      </p:sp>
-      <p:sp>
-        <p:nvSpPr>
-          <p:cNvPr id="7" name="text-176"/>
-          <p:cNvSpPr txBox="1"/>
-          <p:nvPr/>
-        </p:nvSpPr>
-        <p:spPr>
-          <a:xfrm>
-            <a:off x="594360" y="1778000"/>
-            <a:ext cx="7620000" cy="177800"/>
-          </a:xfrm>
-          <a:prstGeom prst="rect">
-            <a:avLst/>
-          </a:prstGeom>
-          <a:noFill/>
-          <a:ln/>
-        </p:spPr>
-        <p:txBody>
-          <a:bodyPr wrap="square" lIns="0" tIns="0" rIns="0" bIns="0" rtlCol="0" anchor="t"/>
-          <a:lstStyle/>
-          <a:p>
-            <a:pPr indent="0" marL="0">
-              <a:buNone/>
-            </a:pPr>
-            <a:r>
-              <a:rPr lang="en-US" sz="900" b="1" spc="200" kern="0" dirty="0">
-                <a:solidFill>
-                  <a:schemeClr val="accent2"/>
-                </a:solidFill>
-              </a:rPr>
-              <a:t>ВРЕМЯ ОФОРМЛЕНИЯ ЗАКАЗА, МИН</a:t>
-            </a:r>
-            <a:endParaRPr lang="en-US" sz="900" dirty="0"/>
-          </a:p>
-        </p:txBody>
-      </p:sp>
-      <p:graphicFrame>
-        <p:nvGraphicFramePr>
-          <p:cNvPr id="14" name="table-177"/>
-          <p:cNvGraphicFramePr>
-            <a:graphicFrameLocks noGrp="1"/>
-          </p:cNvGraphicFramePr>
-          <p:nvPr>
-            <p:extLst>
-              <p:ext uri="{D42A27DB-BD31-4B8C-83A1-F6EECF244321}">
-                <p14:modId xmlns:p14="http://schemas.microsoft.com/office/powerpoint/2010/main" val="1579011935"/>
-              </p:ext>
-            </p:extLst>
-          </p:nvPr>
-        </p:nvGraphicFramePr>
-        <p:xfrm>
-          <a:off x="594360" y="2006600"/>
-          <a:ext cx="10972800" cy="914400"/>
-        </p:xfrm>
-        <a:graphic>
-          <a:graphicData uri="http://schemas.openxmlformats.org/drawingml/2006/table">
-            <a:tbl>
-              <a:tblPr/>
-              <a:tblGrid>
-                <a:gridCol w="2413000"/>
-                <a:gridCol w="1092200"/>
-                <a:gridCol w="1092200"/>
-                <a:gridCol w="1092200"/>
-                <a:gridCol w="1092200"/>
-                <a:gridCol w="1092200"/>
-                <a:gridCol w="1549400"/>
-                <a:gridCol w="1549400"/>
-              </a:tblGrid>
-              <a:tr h="330200">
-                <a:tc>
-                  <a:txBody>
-                    <a:bodyPr/>
-                    <a:lstStyle/>
-                    <a:p>
-                      <a:pPr indent="0" marL="0">
-                        <a:buNone/>
-                      </a:pPr>
-                      <a:r>
-                        <a:rPr lang="en-US" sz="1000" b="1" dirty="0">
-                          <a:solidFill>
-                            <a:schemeClr val="bg1"/>
-                          </a:solidFill>
-                        </a:rPr>
-                        <a:t>Вариант</a:t>
-                      </a:r>
-                      <a:endParaRPr lang="en-US" sz="1000" dirty="0"/>
-                    </a:p>
-                  </a:txBody>
-                  <a:tcPr marL="101600" marR="76200" marT="25400" marB="25400" anchor="ctr">
-                    <a:lnL w="0" cap="flat" cmpd="sng" algn="ctr">
-                      <a:noFill/>
-                    </a:lnL>
-                    <a:lnR w="0" cap="flat" cmpd="sng" algn="ctr">
-                      <a:noFill/>
-                    </a:lnR>
-                    <a:lnT w="0" cap="flat" cmpd="sng" algn="ctr">
-                      <a:noFill/>
-                    </a:lnT>
-                    <a:lnB w="0" cap="flat" cmpd="sng" algn="ctr">
-                      <a:noFill/>
-                    </a:lnB>
-                    <a:solidFill>
-                      <a:schemeClr val="accent1"/>
-                    </a:solidFill>
-                  </a:tcPr>
-                </a:tc>
-                <a:tc>
-                  <a:txBody>
-                    <a:bodyPr/>
-                    <a:lstStyle/>
-                    <a:p>
-                      <a:pPr algn="ctr" indent="0" marL="0">
-                        <a:buNone/>
-                      </a:pPr>
-                      <a:r>
-                        <a:rPr lang="en-US" sz="1000" b="1" dirty="0">
-                          <a:solidFill>
-                            <a:schemeClr val="bg1"/>
-                          </a:solidFill>
-                        </a:rPr>
-                        <a:t>Прогон 1</a:t>
-                      </a:r>
-                      <a:endParaRPr lang="en-US" sz="1000" dirty="0"/>
-                    </a:p>
-                  </a:txBody>
-                  <a:tcPr marL="101600" marR="76200" marT="25400" marB="25400" anchor="ctr">
-                    <a:lnL w="0" cap="flat" cmpd="sng" algn="ctr">
-                      <a:noFill/>
-                    </a:lnL>
-                    <a:lnR w="0" cap="flat" cmpd="sng" algn="ctr">
-                      <a:noFill/>
-                    </a:lnR>
-                    <a:lnT w="0" cap="flat" cmpd="sng" algn="ctr">
-                      <a:noFill/>
-                    </a:lnT>
-                    <a:lnB w="0" cap="flat" cmpd="sng" algn="ctr">
-                      <a:noFill/>
-                    </a:lnB>
-                    <a:solidFill>
-                      <a:schemeClr val="accent1"/>
-                    </a:solidFill>
-                  </a:tcPr>
-                </a:tc>
-                <a:tc>
-                  <a:txBody>
-                    <a:bodyPr/>
-                    <a:lstStyle/>
-                    <a:p>
-                      <a:pPr algn="ctr" indent="0" marL="0">
-                        <a:buNone/>
-                      </a:pPr>
-                      <a:r>
-                        <a:rPr lang="en-US" sz="1000" b="1" dirty="0">
-                          <a:solidFill>
-                            <a:schemeClr val="bg1"/>
-                          </a:solidFill>
-                        </a:rPr>
-                        <a:t>Прогон 2</a:t>
-                      </a:r>
-                      <a:endParaRPr lang="en-US" sz="1000" dirty="0"/>
-                    </a:p>
-                  </a:txBody>
-                  <a:tcPr marL="101600" marR="76200" marT="25400" marB="25400" anchor="ctr">
-                    <a:lnL w="0" cap="flat" cmpd="sng" algn="ctr">
-                      <a:noFill/>
-                    </a:lnL>
-                    <a:lnR w="0" cap="flat" cmpd="sng" algn="ctr">
-                      <a:noFill/>
-                    </a:lnR>
-                    <a:lnT w="0" cap="flat" cmpd="sng" algn="ctr">
-                      <a:noFill/>
-                    </a:lnT>
-                    <a:lnB w="0" cap="flat" cmpd="sng" algn="ctr">
-                      <a:noFill/>
-                    </a:lnB>
-                    <a:solidFill>
-                      <a:schemeClr val="accent1"/>
-                    </a:solidFill>
-                  </a:tcPr>
-                </a:tc>
-                <a:tc>
-                  <a:txBody>
-                    <a:bodyPr/>
-                    <a:lstStyle/>
-                    <a:p>
-                      <a:pPr algn="ctr" indent="0" marL="0">
-                        <a:buNone/>
-                      </a:pPr>
-                      <a:r>
-                        <a:rPr lang="en-US" sz="1000" b="1" dirty="0">
-                          <a:solidFill>
-                            <a:schemeClr val="bg1"/>
-                          </a:solidFill>
-                        </a:rPr>
-                        <a:t>Прогон 3</a:t>
-                      </a:r>
-                      <a:endParaRPr lang="en-US" sz="1000" dirty="0"/>
-                    </a:p>
-                  </a:txBody>
-                  <a:tcPr marL="101600" marR="76200" marT="25400" marB="25400" anchor="ctr">
-                    <a:lnL w="0" cap="flat" cmpd="sng" algn="ctr">
-                      <a:noFill/>
-                    </a:lnL>
-                    <a:lnR w="0" cap="flat" cmpd="sng" algn="ctr">
-                      <a:noFill/>
-                    </a:lnR>
-                    <a:lnT w="0" cap="flat" cmpd="sng" algn="ctr">
-                      <a:noFill/>
-                    </a:lnT>
-                    <a:lnB w="0" cap="flat" cmpd="sng" algn="ctr">
-                      <a:noFill/>
-                    </a:lnB>
-                    <a:solidFill>
-                      <a:schemeClr val="accent1"/>
-                    </a:solidFill>
-                  </a:tcPr>
-                </a:tc>
-                <a:tc>
-                  <a:txBody>
-                    <a:bodyPr/>
-                    <a:lstStyle/>
-                    <a:p>
-                      <a:pPr algn="ctr" indent="0" marL="0">
-                        <a:buNone/>
-                      </a:pPr>
-                      <a:r>
-                        <a:rPr lang="en-US" sz="1000" b="1" dirty="0">
-                          <a:solidFill>
-                            <a:schemeClr val="bg1"/>
-                          </a:solidFill>
-                        </a:rPr>
-                        <a:t>Прогон 4</a:t>
-                      </a:r>
-                      <a:endParaRPr lang="en-US" sz="1000" dirty="0"/>
-                    </a:p>
-                  </a:txBody>
-                  <a:tcPr marL="101600" marR="76200" marT="25400" marB="25400" anchor="ctr">
-                    <a:lnL w="0" cap="flat" cmpd="sng" algn="ctr">
-                      <a:noFill/>
-                    </a:lnL>
-                    <a:lnR w="0" cap="flat" cmpd="sng" algn="ctr">
-                      <a:noFill/>
-                    </a:lnR>
-                    <a:lnT w="0" cap="flat" cmpd="sng" algn="ctr">
-                      <a:noFill/>
-                    </a:lnT>
-                    <a:lnB w="0" cap="flat" cmpd="sng" algn="ctr">
-                      <a:noFill/>
-                    </a:lnB>
-                    <a:solidFill>
-                      <a:schemeClr val="accent1"/>
-                    </a:solidFill>
-                  </a:tcPr>
-                </a:tc>
-                <a:tc>
-                  <a:txBody>
-                    <a:bodyPr/>
-                    <a:lstStyle/>
-                    <a:p>
-                      <a:pPr algn="ctr" indent="0" marL="0">
-                        <a:buNone/>
-                      </a:pPr>
-                      <a:r>
-                        <a:rPr lang="en-US" sz="1000" b="1" dirty="0">
-                          <a:solidFill>
-                            <a:schemeClr val="bg1"/>
-                          </a:solidFill>
-                        </a:rPr>
-                        <a:t>Прогон 5</a:t>
-                      </a:r>
-                      <a:endParaRPr lang="en-US" sz="1000" dirty="0"/>
-                    </a:p>
-                  </a:txBody>
-                  <a:tcPr marL="101600" marR="76200" marT="25400" marB="25400" anchor="ctr">
-                    <a:lnL w="0" cap="flat" cmpd="sng" algn="ctr">
-                      <a:noFill/>
-                    </a:lnL>
-                    <a:lnR w="0" cap="flat" cmpd="sng" algn="ctr">
-                      <a:noFill/>
-                    </a:lnR>
-                    <a:lnT w="0" cap="flat" cmpd="sng" algn="ctr">
-                      <a:noFill/>
-                    </a:lnT>
-                    <a:lnB w="0" cap="flat" cmpd="sng" algn="ctr">
-                      <a:noFill/>
-                    </a:lnB>
-                    <a:solidFill>
-                      <a:schemeClr val="accent1"/>
-                    </a:solidFill>
-                  </a:tcPr>
-                </a:tc>
-                <a:tc>
-                  <a:txBody>
-                    <a:bodyPr/>
-                    <a:lstStyle/>
-                    <a:p>
-                      <a:pPr algn="ctr" indent="0" marL="0">
-                        <a:buNone/>
-                      </a:pPr>
-                      <a:r>
-                        <a:rPr lang="en-US" sz="1000" b="1" dirty="0">
-                          <a:solidFill>
-                            <a:schemeClr val="bg1"/>
-                          </a:solidFill>
-                        </a:rPr>
-                        <a:t>Среднее</a:t>
-                      </a:r>
-                      <a:endParaRPr lang="en-US" sz="1000" dirty="0"/>
-                    </a:p>
-                  </a:txBody>
-                  <a:tcPr marL="101600" marR="76200" marT="25400" marB="25400" anchor="ctr">
-                    <a:lnL w="0" cap="flat" cmpd="sng" algn="ctr">
-                      <a:noFill/>
-                    </a:lnL>
-                    <a:lnR w="0" cap="flat" cmpd="sng" algn="ctr">
-                      <a:noFill/>
-                    </a:lnR>
-                    <a:lnT w="0" cap="flat" cmpd="sng" algn="ctr">
-                      <a:noFill/>
-                    </a:lnT>
-                    <a:lnB w="0" cap="flat" cmpd="sng" algn="ctr">
-                      <a:noFill/>
-                    </a:lnB>
-                    <a:solidFill>
-                      <a:schemeClr val="accent1"/>
-                    </a:solidFill>
-                  </a:tcPr>
-                </a:tc>
-                <a:tc>
-                  <a:txBody>
-                    <a:bodyPr/>
-                    <a:lstStyle/>
-                    <a:p>
-                      <a:pPr algn="ctr" indent="0" marL="0">
-                        <a:buNone/>
-                      </a:pPr>
-                      <a:r>
-                        <a:rPr lang="en-US" sz="1000" b="1" dirty="0">
-                          <a:solidFill>
-                            <a:schemeClr val="bg1"/>
-                          </a:solidFill>
-                        </a:rPr>
-                        <a:t>Мин и макс</a:t>
-                      </a:r>
-                      <a:endParaRPr lang="en-US" sz="1000" dirty="0"/>
-                    </a:p>
-                  </a:txBody>
-                  <a:tcPr marL="101600" marR="76200" marT="25400" marB="25400" anchor="ctr">
-                    <a:lnL w="0" cap="flat" cmpd="sng" algn="ctr">
-                      <a:noFill/>
-                    </a:lnL>
-                    <a:lnR w="0" cap="flat" cmpd="sng" algn="ctr">
-                      <a:noFill/>
-                    </a:lnR>
-                    <a:lnT w="0" cap="flat" cmpd="sng" algn="ctr">
-                      <a:noFill/>
-                    </a:lnT>
-                    <a:lnB w="0" cap="flat" cmpd="sng" algn="ctr">
-                      <a:noFill/>
-                    </a:lnB>
-                    <a:solidFill>
-                      <a:schemeClr val="accent1"/>
-                    </a:solidFill>
-                  </a:tcPr>
-                </a:tc>
-              </a:tr>
-              <a:tr h="330200">
-                <a:tc>
-                  <a:txBody>
-                    <a:bodyPr/>
-                    <a:lstStyle/>
-                    <a:p>
-                      <a:pPr indent="0" marL="0">
-                        <a:buNone/>
-                      </a:pPr>
-                      <a:r>
-                        <a:rPr lang="en-US" sz="1050" b="1" dirty="0">
-                          <a:solidFill>
-                            <a:schemeClr val="tx1"/>
-                          </a:solidFill>
-                        </a:rPr>
-                        <a:t>Своя система</a:t>
-                      </a:r>
-                      <a:endParaRPr lang="en-US" sz="1050" dirty="0"/>
-                    </a:p>
-                  </a:txBody>
-                  <a:tcPr marL="101600" marR="76200" marT="25400" marB="25400" anchor="ctr">
-                    <a:lnL w="0" cap="flat" cmpd="sng" algn="ctr">
-                      <a:noFill/>
-                    </a:lnL>
-                    <a:lnR w="0" cap="flat" cmpd="sng" algn="ctr">
-                      <a:noFill/>
-                    </a:lnR>
-                    <a:lnT w="0" cap="flat" cmpd="sng" algn="ctr">
-                      <a:noFill/>
-                    </a:lnT>
-                    <a:lnB w="0" cap="flat" cmpd="sng" algn="ctr">
-                      <a:noFill/>
-                    </a:lnB>
-                    <a:solidFill>
-                      <a:schemeClr val="bg2"/>
-                    </a:solidFill>
-                  </a:tcPr>
-                </a:tc>
-                <a:tc>
-                  <a:txBody>
-                    <a:bodyPr/>
-                    <a:lstStyle/>
-                    <a:p>
-                      <a:pPr algn="ctr" indent="0" marL="0">
-                        <a:buNone/>
-                      </a:pPr>
-                      <a:r>
-                        <a:rPr lang="en-US" sz="1050" i="1" dirty="0">
-                          <a:solidFill>
-                            <a:schemeClr val="accent3"/>
-                          </a:solidFill>
-                        </a:rPr>
-                        <a:t>—</a:t>
-                      </a:r>
-                      <a:endParaRPr lang="en-US" sz="1050" dirty="0"/>
-                    </a:p>
-                  </a:txBody>
-                  <a:tcPr marL="101600" marR="76200" marT="25400" marB="25400" anchor="ctr">
-                    <a:lnL w="0" cap="flat" cmpd="sng" algn="ctr">
-                      <a:noFill/>
-                    </a:lnL>
-                    <a:lnR w="0" cap="flat" cmpd="sng" algn="ctr">
-                      <a:noFill/>
-                    </a:lnR>
-                    <a:lnT w="0" cap="flat" cmpd="sng" algn="ctr">
-                      <a:noFill/>
-                    </a:lnT>
-                    <a:lnB w="0" cap="flat" cmpd="sng" algn="ctr">
-                      <a:noFill/>
-                    </a:lnB>
-                    <a:solidFill>
-                      <a:schemeClr val="bg2"/>
-                    </a:solidFill>
-                  </a:tcPr>
-                </a:tc>
-                <a:tc>
-                  <a:txBody>
-                    <a:bodyPr/>
-                    <a:lstStyle/>
-                    <a:p>
-                      <a:pPr algn="ctr" indent="0" marL="0">
-                        <a:buNone/>
-                      </a:pPr>
-                      <a:r>
-                        <a:rPr lang="en-US" sz="1050" i="1" dirty="0">
-                          <a:solidFill>
-                            <a:schemeClr val="accent3"/>
-                          </a:solidFill>
-                        </a:rPr>
-                        <a:t>—</a:t>
-                      </a:r>
-                      <a:endParaRPr lang="en-US" sz="1050" dirty="0"/>
-                    </a:p>
-                  </a:txBody>
-                  <a:tcPr marL="101600" marR="76200" marT="25400" marB="25400" anchor="ctr">
-                    <a:lnL w="0" cap="flat" cmpd="sng" algn="ctr">
-                      <a:noFill/>
-                    </a:lnL>
-                    <a:lnR w="0" cap="flat" cmpd="sng" algn="ctr">
-                      <a:noFill/>
-                    </a:lnR>
-                    <a:lnT w="0" cap="flat" cmpd="sng" algn="ctr">
-                      <a:noFill/>
-                    </a:lnT>
-                    <a:lnB w="0" cap="flat" cmpd="sng" algn="ctr">
-                      <a:noFill/>
-                    </a:lnB>
-                    <a:solidFill>
-                      <a:schemeClr val="bg2"/>
-                    </a:solidFill>
-                  </a:tcPr>
-                </a:tc>
-                <a:tc>
-                  <a:txBody>
-                    <a:bodyPr/>
-                    <a:lstStyle/>
-                    <a:p>
-                      <a:pPr algn="ctr" indent="0" marL="0">
-                        <a:buNone/>
-                      </a:pPr>
-                      <a:r>
-                        <a:rPr lang="en-US" sz="1050" i="1" dirty="0">
-                          <a:solidFill>
-                            <a:schemeClr val="accent3"/>
-                          </a:solidFill>
-                        </a:rPr>
-                        <a:t>—</a:t>
-                      </a:r>
-                      <a:endParaRPr lang="en-US" sz="1050" dirty="0"/>
-                    </a:p>
-                  </a:txBody>
-                  <a:tcPr marL="101600" marR="76200" marT="25400" marB="25400" anchor="ctr">
-                    <a:lnL w="0" cap="flat" cmpd="sng" algn="ctr">
-                      <a:noFill/>
-                    </a:lnL>
-                    <a:lnR w="0" cap="flat" cmpd="sng" algn="ctr">
-                      <a:noFill/>
-                    </a:lnR>
-                    <a:lnT w="0" cap="flat" cmpd="sng" algn="ctr">
-                      <a:noFill/>
-                    </a:lnT>
-                    <a:lnB w="0" cap="flat" cmpd="sng" algn="ctr">
-                      <a:noFill/>
-                    </a:lnB>
-                    <a:solidFill>
-                      <a:schemeClr val="bg2"/>
-                    </a:solidFill>
-                  </a:tcPr>
-                </a:tc>
-                <a:tc>
-                  <a:txBody>
-                    <a:bodyPr/>
-                    <a:lstStyle/>
-                    <a:p>
-                      <a:pPr algn="ctr" indent="0" marL="0">
-                        <a:buNone/>
-                      </a:pPr>
-                      <a:r>
-                        <a:rPr lang="en-US" sz="1050" i="1" dirty="0">
-                          <a:solidFill>
-                            <a:schemeClr val="accent3"/>
-                          </a:solidFill>
-                        </a:rPr>
-                        <a:t>—</a:t>
-                      </a:r>
-                      <a:endParaRPr lang="en-US" sz="1050" dirty="0"/>
-                    </a:p>
-                  </a:txBody>
-                  <a:tcPr marL="101600" marR="76200" marT="25400" marB="25400" anchor="ctr">
-                    <a:lnL w="0" cap="flat" cmpd="sng" algn="ctr">
-                      <a:noFill/>
-                    </a:lnL>
-                    <a:lnR w="0" cap="flat" cmpd="sng" algn="ctr">
-                      <a:noFill/>
-                    </a:lnR>
-                    <a:lnT w="0" cap="flat" cmpd="sng" algn="ctr">
-                      <a:noFill/>
-                    </a:lnT>
-                    <a:lnB w="0" cap="flat" cmpd="sng" algn="ctr">
-                      <a:noFill/>
-                    </a:lnB>
-                    <a:solidFill>
-                      <a:schemeClr val="bg2"/>
-                    </a:solidFill>
-                  </a:tcPr>
-                </a:tc>
-                <a:tc>
-                  <a:txBody>
-                    <a:bodyPr/>
-                    <a:lstStyle/>
-                    <a:p>
-                      <a:pPr algn="ctr" indent="0" marL="0">
-                        <a:buNone/>
-                      </a:pPr>
-                      <a:r>
-                        <a:rPr lang="en-US" sz="1050" i="1" dirty="0">
-                          <a:solidFill>
-                            <a:schemeClr val="accent3"/>
-                          </a:solidFill>
-                        </a:rPr>
-                        <a:t>—</a:t>
-                      </a:r>
-                      <a:endParaRPr lang="en-US" sz="1050" dirty="0"/>
-                    </a:p>
-                  </a:txBody>
-                  <a:tcPr marL="101600" marR="76200" marT="25400" marB="25400" anchor="ctr">
-                    <a:lnL w="0" cap="flat" cmpd="sng" algn="ctr">
-                      <a:noFill/>
-                    </a:lnL>
-                    <a:lnR w="0" cap="flat" cmpd="sng" algn="ctr">
-                      <a:noFill/>
-                    </a:lnR>
-                    <a:lnT w="0" cap="flat" cmpd="sng" algn="ctr">
-                      <a:noFill/>
-                    </a:lnT>
-                    <a:lnB w="0" cap="flat" cmpd="sng" algn="ctr">
-                      <a:noFill/>
-                    </a:lnB>
-                    <a:solidFill>
-                      <a:schemeClr val="bg2"/>
-                    </a:solidFill>
-                  </a:tcPr>
-                </a:tc>
-                <a:tc>
-                  <a:txBody>
-                    <a:bodyPr/>
-                    <a:lstStyle/>
-                    <a:p>
-                      <a:pPr algn="ctr" indent="0" marL="0">
-                        <a:buNone/>
-                      </a:pPr>
-                      <a:r>
-                        <a:rPr lang="en-US" sz="1050" i="1" dirty="0">
-                          <a:solidFill>
-                            <a:schemeClr val="accent3"/>
-                          </a:solidFill>
-                        </a:rPr>
-                        <a:t>—</a:t>
-                      </a:r>
-                      <a:endParaRPr lang="en-US" sz="1050" dirty="0"/>
-                    </a:p>
-                  </a:txBody>
-                  <a:tcPr marL="101600" marR="76200" marT="25400" marB="25400" anchor="ctr">
-                    <a:lnL w="0" cap="flat" cmpd="sng" algn="ctr">
-                      <a:noFill/>
-                    </a:lnL>
-                    <a:lnR w="0" cap="flat" cmpd="sng" algn="ctr">
-                      <a:noFill/>
-                    </a:lnR>
-                    <a:lnT w="0" cap="flat" cmpd="sng" algn="ctr">
-                      <a:noFill/>
-                    </a:lnT>
-                    <a:lnB w="0" cap="flat" cmpd="sng" algn="ctr">
-                      <a:noFill/>
-                    </a:lnB>
-                    <a:solidFill>
-                      <a:schemeClr val="bg2"/>
-                    </a:solidFill>
-                  </a:tcPr>
-                </a:tc>
-                <a:tc>
-                  <a:txBody>
-                    <a:bodyPr/>
-                    <a:lstStyle/>
-                    <a:p>
-                      <a:pPr algn="ctr" indent="0" marL="0">
-                        <a:buNone/>
-                      </a:pPr>
-                      <a:r>
-                        <a:rPr lang="en-US" sz="1050" i="1" dirty="0">
-                          <a:solidFill>
-                            <a:schemeClr val="accent3"/>
-                          </a:solidFill>
-                        </a:rPr>
-                        <a:t>—</a:t>
-                      </a:r>
-                      <a:endParaRPr lang="en-US" sz="1050" dirty="0"/>
-                    </a:p>
-                  </a:txBody>
-                  <a:tcPr marL="101600" marR="76200" marT="25400" marB="25400" anchor="ctr">
-                    <a:lnL w="0" cap="flat" cmpd="sng" algn="ctr">
-                      <a:noFill/>
-                    </a:lnL>
-                    <a:lnR w="0" cap="flat" cmpd="sng" algn="ctr">
-                      <a:noFill/>
-                    </a:lnR>
-                    <a:lnT w="0" cap="flat" cmpd="sng" algn="ctr">
-                      <a:noFill/>
-                    </a:lnT>
-                    <a:lnB w="0" cap="flat" cmpd="sng" algn="ctr">
-                      <a:noFill/>
-                    </a:lnB>
-                    <a:solidFill>
-                      <a:schemeClr val="bg2"/>
-                    </a:solidFill>
-                  </a:tcPr>
-                </a:tc>
-              </a:tr>
-              <a:tr h="330200">
-                <a:tc>
-                  <a:txBody>
-                    <a:bodyPr/>
-                    <a:lstStyle/>
-                    <a:p>
-                      <a:pPr indent="0" marL="0">
-                        <a:buNone/>
-                      </a:pPr>
-                      <a:r>
-                        <a:rPr lang="en-US" sz="1050" b="1" dirty="0">
-                          <a:solidFill>
-                            <a:schemeClr val="tx1"/>
-                          </a:solidFill>
-                        </a:rPr>
-                        <a:t>1С-Битрикс</a:t>
-                      </a:r>
-                      <a:endParaRPr lang="en-US" sz="1050" dirty="0"/>
-                    </a:p>
-                  </a:txBody>
-                  <a:tcPr marL="101600" marR="76200" marT="25400" marB="25400" anchor="ctr">
-                    <a:lnL w="0" cap="flat" cmpd="sng" algn="ctr">
-                      <a:noFill/>
-                    </a:lnL>
-                    <a:lnR w="0" cap="flat" cmpd="sng" algn="ctr">
-                      <a:noFill/>
-                    </a:lnR>
-                    <a:lnT w="0" cap="flat" cmpd="sng" algn="ctr">
-                      <a:noFill/>
-                    </a:lnT>
-                    <a:lnB w="0" cap="flat" cmpd="sng" algn="ctr">
-                      <a:noFill/>
-                    </a:lnB>
-                    <a:solidFill>
-                      <a:schemeClr val="bg1"/>
-                    </a:solidFill>
-                  </a:tcPr>
-                </a:tc>
-                <a:tc>
-                  <a:txBody>
-                    <a:bodyPr/>
-                    <a:lstStyle/>
-                    <a:p>
-                      <a:pPr algn="ctr" indent="0" marL="0">
-                        <a:buNone/>
-                      </a:pPr>
-                      <a:r>
-                        <a:rPr lang="en-US" sz="1050" i="1" dirty="0">
-                          <a:solidFill>
-                            <a:schemeClr val="accent3"/>
-                          </a:solidFill>
-                        </a:rPr>
-                        <a:t>—</a:t>
-                      </a:r>
-                      <a:endParaRPr lang="en-US" sz="1050" dirty="0"/>
-                    </a:p>
-                  </a:txBody>
-                  <a:tcPr marL="101600" marR="76200" marT="25400" marB="25400" anchor="ctr">
-                    <a:lnL w="0" cap="flat" cmpd="sng" algn="ctr">
-                      <a:noFill/>
-                    </a:lnL>
-                    <a:lnR w="0" cap="flat" cmpd="sng" algn="ctr">
-                      <a:noFill/>
-                    </a:lnR>
-                    <a:lnT w="0" cap="flat" cmpd="sng" algn="ctr">
-                      <a:noFill/>
-                    </a:lnT>
-                    <a:lnB w="0" cap="flat" cmpd="sng" algn="ctr">
-                      <a:noFill/>
-                    </a:lnB>
-                    <a:solidFill>
-                      <a:schemeClr val="bg1"/>
-                    </a:solidFill>
-                  </a:tcPr>
-                </a:tc>
-                <a:tc>
-                  <a:txBody>
-                    <a:bodyPr/>
-                    <a:lstStyle/>
-                    <a:p>
-                      <a:pPr algn="ctr" indent="0" marL="0">
-                        <a:buNone/>
-                      </a:pPr>
-                      <a:r>
-                        <a:rPr lang="en-US" sz="1050" i="1" dirty="0">
-                          <a:solidFill>
-                            <a:schemeClr val="accent3"/>
-                          </a:solidFill>
-                        </a:rPr>
-                        <a:t>—</a:t>
-                      </a:r>
-                      <a:endParaRPr lang="en-US" sz="1050" dirty="0"/>
-                    </a:p>
-                  </a:txBody>
-                  <a:tcPr marL="101600" marR="76200" marT="25400" marB="25400" anchor="ctr">
-                    <a:lnL w="0" cap="flat" cmpd="sng" algn="ctr">
-                      <a:noFill/>
-                    </a:lnL>
-                    <a:lnR w="0" cap="flat" cmpd="sng" algn="ctr">
-                      <a:noFill/>
-                    </a:lnR>
-                    <a:lnT w="0" cap="flat" cmpd="sng" algn="ctr">
-                      <a:noFill/>
-                    </a:lnT>
-                    <a:lnB w="0" cap="flat" cmpd="sng" algn="ctr">
-                      <a:noFill/>
-                    </a:lnB>
-                    <a:solidFill>
-                      <a:schemeClr val="bg1"/>
-                    </a:solidFill>
-                  </a:tcPr>
-                </a:tc>
-                <a:tc>
-                  <a:txBody>
-                    <a:bodyPr/>
-                    <a:lstStyle/>
-                    <a:p>
-                      <a:pPr algn="ctr" indent="0" marL="0">
-                        <a:buNone/>
-                      </a:pPr>
-                      <a:r>
-                        <a:rPr lang="en-US" sz="1050" i="1" dirty="0">
-                          <a:solidFill>
-                            <a:schemeClr val="accent3"/>
-                          </a:solidFill>
-                        </a:rPr>
-                        <a:t>—</a:t>
-                      </a:r>
-                      <a:endParaRPr lang="en-US" sz="1050" dirty="0"/>
-                    </a:p>
-                  </a:txBody>
-                  <a:tcPr marL="101600" marR="76200" marT="25400" marB="25400" anchor="ctr">
-                    <a:lnL w="0" cap="flat" cmpd="sng" algn="ctr">
-                      <a:noFill/>
-                    </a:lnL>
-                    <a:lnR w="0" cap="flat" cmpd="sng" algn="ctr">
-                      <a:noFill/>
-                    </a:lnR>
-                    <a:lnT w="0" cap="flat" cmpd="sng" algn="ctr">
-                      <a:noFill/>
-                    </a:lnT>
-                    <a:lnB w="0" cap="flat" cmpd="sng" algn="ctr">
-                      <a:noFill/>
-                    </a:lnB>
-                    <a:solidFill>
-                      <a:schemeClr val="bg1"/>
-                    </a:solidFill>
-                  </a:tcPr>
-                </a:tc>
-                <a:tc>
-                  <a:txBody>
-                    <a:bodyPr/>
-                    <a:lstStyle/>
-                    <a:p>
-                      <a:pPr algn="ctr" indent="0" marL="0">
-                        <a:buNone/>
-                      </a:pPr>
-                      <a:r>
-                        <a:rPr lang="en-US" sz="1050" i="1" dirty="0">
-                          <a:solidFill>
-                            <a:schemeClr val="accent3"/>
-                          </a:solidFill>
-                        </a:rPr>
-                        <a:t>—</a:t>
-                      </a:r>
-                      <a:endParaRPr lang="en-US" sz="1050" dirty="0"/>
-                    </a:p>
-                  </a:txBody>
-                  <a:tcPr marL="101600" marR="76200" marT="25400" marB="25400" anchor="ctr">
-                    <a:lnL w="0" cap="flat" cmpd="sng" algn="ctr">
-                      <a:noFill/>
-                    </a:lnL>
-                    <a:lnR w="0" cap="flat" cmpd="sng" algn="ctr">
-                      <a:noFill/>
-                    </a:lnR>
-                    <a:lnT w="0" cap="flat" cmpd="sng" algn="ctr">
-                      <a:noFill/>
-                    </a:lnT>
-                    <a:lnB w="0" cap="flat" cmpd="sng" algn="ctr">
-                      <a:noFill/>
-                    </a:lnB>
-                    <a:solidFill>
-                      <a:schemeClr val="bg1"/>
-                    </a:solidFill>
-                  </a:tcPr>
-                </a:tc>
-                <a:tc>
-                  <a:txBody>
-                    <a:bodyPr/>
-                    <a:lstStyle/>
-                    <a:p>
-                      <a:pPr algn="ctr" indent="0" marL="0">
-                        <a:buNone/>
-                      </a:pPr>
-                      <a:r>
-                        <a:rPr lang="en-US" sz="1050" i="1" dirty="0">
-                          <a:solidFill>
-                            <a:schemeClr val="accent3"/>
-                          </a:solidFill>
-                        </a:rPr>
-                        <a:t>—</a:t>
-                      </a:r>
-                      <a:endParaRPr lang="en-US" sz="1050" dirty="0"/>
-                    </a:p>
-                  </a:txBody>
-                  <a:tcPr marL="101600" marR="76200" marT="25400" marB="25400" anchor="ctr">
-                    <a:lnL w="0" cap="flat" cmpd="sng" algn="ctr">
-                      <a:noFill/>
-                    </a:lnL>
-                    <a:lnR w="0" cap="flat" cmpd="sng" algn="ctr">
-                      <a:noFill/>
-                    </a:lnR>
-                    <a:lnT w="0" cap="flat" cmpd="sng" algn="ctr">
-                      <a:noFill/>
-                    </a:lnT>
-                    <a:lnB w="0" cap="flat" cmpd="sng" algn="ctr">
-                      <a:noFill/>
-                    </a:lnB>
-                    <a:solidFill>
-                      <a:schemeClr val="bg1"/>
-                    </a:solidFill>
-                  </a:tcPr>
-                </a:tc>
-                <a:tc>
-                  <a:txBody>
-                    <a:bodyPr/>
-                    <a:lstStyle/>
-                    <a:p>
-                      <a:pPr algn="ctr" indent="0" marL="0">
-                        <a:buNone/>
-                      </a:pPr>
-                      <a:r>
-                        <a:rPr lang="en-US" sz="1050" i="1" dirty="0">
-                          <a:solidFill>
-                            <a:schemeClr val="accent3"/>
-                          </a:solidFill>
-                        </a:rPr>
-                        <a:t>—</a:t>
-                      </a:r>
-                      <a:endParaRPr lang="en-US" sz="1050" dirty="0"/>
-                    </a:p>
-                  </a:txBody>
-                  <a:tcPr marL="101600" marR="76200" marT="25400" marB="25400" anchor="ctr">
-                    <a:lnL w="0" cap="flat" cmpd="sng" algn="ctr">
-                      <a:noFill/>
-                    </a:lnL>
-                    <a:lnR w="0" cap="flat" cmpd="sng" algn="ctr">
-                      <a:noFill/>
-                    </a:lnR>
-                    <a:lnT w="0" cap="flat" cmpd="sng" algn="ctr">
-                      <a:noFill/>
-                    </a:lnT>
-                    <a:lnB w="0" cap="flat" cmpd="sng" algn="ctr">
-                      <a:noFill/>
-                    </a:lnB>
-                    <a:solidFill>
-                      <a:schemeClr val="bg1"/>
-                    </a:solidFill>
-                  </a:tcPr>
-                </a:tc>
-                <a:tc>
-                  <a:txBody>
-                    <a:bodyPr/>
-                    <a:lstStyle/>
-                    <a:p>
-                      <a:pPr algn="ctr" indent="0" marL="0">
-                        <a:buNone/>
-                      </a:pPr>
-                      <a:r>
-                        <a:rPr lang="en-US" sz="1050" i="1" dirty="0">
-                          <a:solidFill>
-                            <a:schemeClr val="accent3"/>
-                          </a:solidFill>
-                        </a:rPr>
-                        <a:t>—</a:t>
-                      </a:r>
-                      <a:endParaRPr lang="en-US" sz="1050" dirty="0"/>
-                    </a:p>
-                  </a:txBody>
-                  <a:tcPr marL="101600" marR="76200" marT="25400" marB="25400" anchor="ctr">
-                    <a:lnL w="0" cap="flat" cmpd="sng" algn="ctr">
-                      <a:noFill/>
-                    </a:lnL>
-                    <a:lnR w="0" cap="flat" cmpd="sng" algn="ctr">
-                      <a:noFill/>
-                    </a:lnR>
-                    <a:lnT w="0" cap="flat" cmpd="sng" algn="ctr">
-                      <a:noFill/>
-                    </a:lnT>
-                    <a:lnB w="0" cap="flat" cmpd="sng" algn="ctr">
-                      <a:noFill/>
-                    </a:lnB>
-                    <a:solidFill>
-                      <a:schemeClr val="bg1"/>
-                    </a:solidFill>
-                  </a:tcPr>
-                </a:tc>
-              </a:tr>
-              <a:tr h="330200">
-                <a:tc>
-                  <a:txBody>
-                    <a:bodyPr/>
-                    <a:lstStyle/>
-                    <a:p>
-                      <a:pPr indent="0" marL="0">
-                        <a:buNone/>
-                      </a:pPr>
-                      <a:r>
-                        <a:rPr lang="en-US" sz="1050" b="1" dirty="0">
-                          <a:solidFill>
-                            <a:schemeClr val="tx1"/>
-                          </a:solidFill>
-                        </a:rPr>
-                        <a:t>1С:УТ + витрина</a:t>
-                      </a:r>
-                      <a:endParaRPr lang="en-US" sz="1050" dirty="0"/>
-                    </a:p>
-                  </a:txBody>
-                  <a:tcPr marL="101600" marR="76200" marT="25400" marB="25400" anchor="ctr">
-                    <a:lnL w="0" cap="flat" cmpd="sng" algn="ctr">
-                      <a:noFill/>
-                    </a:lnL>
-                    <a:lnR w="0" cap="flat" cmpd="sng" algn="ctr">
-                      <a:noFill/>
-                    </a:lnR>
-                    <a:lnT w="0" cap="flat" cmpd="sng" algn="ctr">
-                      <a:noFill/>
-                    </a:lnT>
-                    <a:lnB w="0" cap="flat" cmpd="sng" algn="ctr">
-                      <a:noFill/>
-                    </a:lnB>
-                    <a:solidFill>
-                      <a:schemeClr val="bg2"/>
-                    </a:solidFill>
-                  </a:tcPr>
-                </a:tc>
-                <a:tc>
-                  <a:txBody>
-                    <a:bodyPr/>
-                    <a:lstStyle/>
-                    <a:p>
-                      <a:pPr algn="ctr" indent="0" marL="0">
-                        <a:buNone/>
-                      </a:pPr>
-                      <a:r>
-                        <a:rPr lang="en-US" sz="1050" i="1" dirty="0">
-                          <a:solidFill>
-                            <a:schemeClr val="accent3"/>
-                          </a:solidFill>
-                        </a:rPr>
-                        <a:t>—</a:t>
-                      </a:r>
-                      <a:endParaRPr lang="en-US" sz="1050" dirty="0"/>
-                    </a:p>
-                  </a:txBody>
-                  <a:tcPr marL="101600" marR="76200" marT="25400" marB="25400" anchor="ctr">
-                    <a:lnL w="0" cap="flat" cmpd="sng" algn="ctr">
-                      <a:noFill/>
-                    </a:lnL>
-                    <a:lnR w="0" cap="flat" cmpd="sng" algn="ctr">
-                      <a:noFill/>
-                    </a:lnR>
-                    <a:lnT w="0" cap="flat" cmpd="sng" algn="ctr">
-                      <a:noFill/>
-                    </a:lnT>
-                    <a:lnB w="0" cap="flat" cmpd="sng" algn="ctr">
-                      <a:noFill/>
-                    </a:lnB>
-                    <a:solidFill>
-                      <a:schemeClr val="bg2"/>
-                    </a:solidFill>
-                  </a:tcPr>
-                </a:tc>
-                <a:tc>
-                  <a:txBody>
-                    <a:bodyPr/>
-                    <a:lstStyle/>
-                    <a:p>
-                      <a:pPr algn="ctr" indent="0" marL="0">
-                        <a:buNone/>
-                      </a:pPr>
-                      <a:r>
-                        <a:rPr lang="en-US" sz="1050" i="1" dirty="0">
-                          <a:solidFill>
-                            <a:schemeClr val="accent3"/>
-                          </a:solidFill>
-                        </a:rPr>
-                        <a:t>—</a:t>
-                      </a:r>
-                      <a:endParaRPr lang="en-US" sz="1050" dirty="0"/>
-                    </a:p>
-                  </a:txBody>
-                  <a:tcPr marL="101600" marR="76200" marT="25400" marB="25400" anchor="ctr">
-                    <a:lnL w="0" cap="flat" cmpd="sng" algn="ctr">
-                      <a:noFill/>
-                    </a:lnL>
-                    <a:lnR w="0" cap="flat" cmpd="sng" algn="ctr">
-                      <a:noFill/>
-                    </a:lnR>
-                    <a:lnT w="0" cap="flat" cmpd="sng" algn="ctr">
-                      <a:noFill/>
-                    </a:lnT>
-                    <a:lnB w="0" cap="flat" cmpd="sng" algn="ctr">
-                      <a:noFill/>
-                    </a:lnB>
-                    <a:solidFill>
-                      <a:schemeClr val="bg2"/>
-                    </a:solidFill>
-                  </a:tcPr>
-                </a:tc>
-                <a:tc>
-                  <a:txBody>
-                    <a:bodyPr/>
-                    <a:lstStyle/>
-                    <a:p>
-                      <a:pPr algn="ctr" indent="0" marL="0">
-                        <a:buNone/>
-                      </a:pPr>
-                      <a:r>
-                        <a:rPr lang="en-US" sz="1050" i="1" dirty="0">
-                          <a:solidFill>
-                            <a:schemeClr val="accent3"/>
-                          </a:solidFill>
-                        </a:rPr>
-                        <a:t>—</a:t>
-                      </a:r>
-                      <a:endParaRPr lang="en-US" sz="1050" dirty="0"/>
-                    </a:p>
-                  </a:txBody>
-                  <a:tcPr marL="101600" marR="76200" marT="25400" marB="25400" anchor="ctr">
-                    <a:lnL w="0" cap="flat" cmpd="sng" algn="ctr">
-                      <a:noFill/>
-                    </a:lnL>
-                    <a:lnR w="0" cap="flat" cmpd="sng" algn="ctr">
-                      <a:noFill/>
-                    </a:lnR>
-                    <a:lnT w="0" cap="flat" cmpd="sng" algn="ctr">
-                      <a:noFill/>
-                    </a:lnT>
-                    <a:lnB w="0" cap="flat" cmpd="sng" algn="ctr">
-                      <a:noFill/>
-                    </a:lnB>
-                    <a:solidFill>
-                      <a:schemeClr val="bg2"/>
-                    </a:solidFill>
-                  </a:tcPr>
-                </a:tc>
-                <a:tc>
-                  <a:txBody>
-                    <a:bodyPr/>
-                    <a:lstStyle/>
-                    <a:p>
-                      <a:pPr algn="ctr" indent="0" marL="0">
-                        <a:buNone/>
-                      </a:pPr>
-                      <a:r>
-                        <a:rPr lang="en-US" sz="1050" i="1" dirty="0">
-                          <a:solidFill>
-                            <a:schemeClr val="accent3"/>
-                          </a:solidFill>
-                        </a:rPr>
-                        <a:t>—</a:t>
-                      </a:r>
-                      <a:endParaRPr lang="en-US" sz="1050" dirty="0"/>
-                    </a:p>
-                  </a:txBody>
-                  <a:tcPr marL="101600" marR="76200" marT="25400" marB="25400" anchor="ctr">
-                    <a:lnL w="0" cap="flat" cmpd="sng" algn="ctr">
-                      <a:noFill/>
-                    </a:lnL>
-                    <a:lnR w="0" cap="flat" cmpd="sng" algn="ctr">
-                      <a:noFill/>
-                    </a:lnR>
-                    <a:lnT w="0" cap="flat" cmpd="sng" algn="ctr">
-                      <a:noFill/>
-                    </a:lnT>
-                    <a:lnB w="0" cap="flat" cmpd="sng" algn="ctr">
-                      <a:noFill/>
-                    </a:lnB>
-                    <a:solidFill>
-                      <a:schemeClr val="bg2"/>
-                    </a:solidFill>
-                  </a:tcPr>
-                </a:tc>
-                <a:tc>
-                  <a:txBody>
-                    <a:bodyPr/>
-                    <a:lstStyle/>
-                    <a:p>
-                      <a:pPr algn="ctr" indent="0" marL="0">
-                        <a:buNone/>
-                      </a:pPr>
-                      <a:r>
-                        <a:rPr lang="en-US" sz="1050" i="1" dirty="0">
-                          <a:solidFill>
-                            <a:schemeClr val="accent3"/>
-                          </a:solidFill>
-                        </a:rPr>
-                        <a:t>—</a:t>
-                      </a:r>
-                      <a:endParaRPr lang="en-US" sz="1050" dirty="0"/>
-                    </a:p>
-                  </a:txBody>
-                  <a:tcPr marL="101600" marR="76200" marT="25400" marB="25400" anchor="ctr">
-                    <a:lnL w="0" cap="flat" cmpd="sng" algn="ctr">
-                      <a:noFill/>
-                    </a:lnL>
-                    <a:lnR w="0" cap="flat" cmpd="sng" algn="ctr">
-                      <a:noFill/>
-                    </a:lnR>
-                    <a:lnT w="0" cap="flat" cmpd="sng" algn="ctr">
-                      <a:noFill/>
-                    </a:lnT>
-                    <a:lnB w="0" cap="flat" cmpd="sng" algn="ctr">
-                      <a:noFill/>
-                    </a:lnB>
-                    <a:solidFill>
-                      <a:schemeClr val="bg2"/>
-                    </a:solidFill>
-                  </a:tcPr>
-                </a:tc>
-                <a:tc>
-                  <a:txBody>
-                    <a:bodyPr/>
-                    <a:lstStyle/>
-                    <a:p>
-                      <a:pPr algn="ctr" indent="0" marL="0">
-                        <a:buNone/>
-                      </a:pPr>
-                      <a:r>
-                        <a:rPr lang="en-US" sz="1050" i="1" dirty="0">
-                          <a:solidFill>
-                            <a:schemeClr val="accent3"/>
-                          </a:solidFill>
-                        </a:rPr>
-                        <a:t>—</a:t>
-                      </a:r>
-                      <a:endParaRPr lang="en-US" sz="1050" dirty="0"/>
-                    </a:p>
-                  </a:txBody>
-                  <a:tcPr marL="101600" marR="76200" marT="25400" marB="25400" anchor="ctr">
-                    <a:lnL w="0" cap="flat" cmpd="sng" algn="ctr">
-                      <a:noFill/>
-                    </a:lnL>
-                    <a:lnR w="0" cap="flat" cmpd="sng" algn="ctr">
-                      <a:noFill/>
-                    </a:lnR>
-                    <a:lnT w="0" cap="flat" cmpd="sng" algn="ctr">
-                      <a:noFill/>
-                    </a:lnT>
-                    <a:lnB w="0" cap="flat" cmpd="sng" algn="ctr">
-                      <a:noFill/>
-                    </a:lnB>
-                    <a:solidFill>
-                      <a:schemeClr val="bg2"/>
-                    </a:solidFill>
-                  </a:tcPr>
-                </a:tc>
-                <a:tc>
-                  <a:txBody>
-                    <a:bodyPr/>
-                    <a:lstStyle/>
-                    <a:p>
-                      <a:pPr algn="ctr" indent="0" marL="0">
-                        <a:buNone/>
-                      </a:pPr>
-                      <a:r>
-                        <a:rPr lang="en-US" sz="1050" i="1" dirty="0">
-                          <a:solidFill>
-                            <a:schemeClr val="accent3"/>
-                          </a:solidFill>
-                        </a:rPr>
-                        <a:t>—</a:t>
-                      </a:r>
-                      <a:endParaRPr lang="en-US" sz="1050" dirty="0"/>
-                    </a:p>
-                  </a:txBody>
-                  <a:tcPr marL="101600" marR="76200" marT="25400" marB="25400" anchor="ctr">
-                    <a:lnL w="0" cap="flat" cmpd="sng" algn="ctr">
-                      <a:noFill/>
-                    </a:lnL>
-                    <a:lnR w="0" cap="flat" cmpd="sng" algn="ctr">
-                      <a:noFill/>
-                    </a:lnR>
-                    <a:lnT w="0" cap="flat" cmpd="sng" algn="ctr">
-                      <a:noFill/>
-                    </a:lnT>
-                    <a:lnB w="0" cap="flat" cmpd="sng" algn="ctr">
-                      <a:noFill/>
-                    </a:lnB>
-                    <a:solidFill>
-                      <a:schemeClr val="bg2"/>
-                    </a:solidFill>
-                  </a:tcPr>
-                </a:tc>
-              </a:tr>
-              <a:tr h="330200">
-                <a:tc>
-                  <a:txBody>
-                    <a:bodyPr/>
-                    <a:lstStyle/>
-                    <a:p>
-                      <a:pPr indent="0" marL="0">
-                        <a:buNone/>
-                      </a:pPr>
-                      <a:r>
-                        <a:rPr lang="en-US" sz="1050" b="1" dirty="0">
-                          <a:solidFill>
-                            <a:schemeClr val="tx1"/>
-                          </a:solidFill>
-                        </a:rPr>
-                        <a:t>Сообщения + Excel</a:t>
-                      </a:r>
-                      <a:endParaRPr lang="en-US" sz="1050" dirty="0"/>
-                    </a:p>
-                  </a:txBody>
-                  <a:tcPr marL="101600" marR="76200" marT="25400" marB="25400" anchor="ctr">
-                    <a:lnL w="0" cap="flat" cmpd="sng" algn="ctr">
-                      <a:noFill/>
-                    </a:lnL>
-                    <a:lnR w="0" cap="flat" cmpd="sng" algn="ctr">
-                      <a:noFill/>
-                    </a:lnR>
-                    <a:lnT w="0" cap="flat" cmpd="sng" algn="ctr">
-                      <a:noFill/>
-                    </a:lnT>
-                    <a:lnB w="0" cap="flat" cmpd="sng" algn="ctr">
-                      <a:noFill/>
-                    </a:lnB>
-                    <a:solidFill>
-                      <a:schemeClr val="bg1"/>
-                    </a:solidFill>
-                  </a:tcPr>
-                </a:tc>
-                <a:tc>
-                  <a:txBody>
-                    <a:bodyPr/>
-                    <a:lstStyle/>
-                    <a:p>
-                      <a:pPr algn="ctr" indent="0" marL="0">
-                        <a:buNone/>
-                      </a:pPr>
-                      <a:r>
-                        <a:rPr lang="en-US" sz="1050" i="1" dirty="0">
-                          <a:solidFill>
-                            <a:schemeClr val="accent3"/>
-                          </a:solidFill>
-                        </a:rPr>
-                        <a:t>—</a:t>
-                      </a:r>
-                      <a:endParaRPr lang="en-US" sz="1050" dirty="0"/>
-                    </a:p>
-                  </a:txBody>
-                  <a:tcPr marL="101600" marR="76200" marT="25400" marB="25400" anchor="ctr">
-                    <a:lnL w="0" cap="flat" cmpd="sng" algn="ctr">
-                      <a:noFill/>
-                    </a:lnL>
-                    <a:lnR w="0" cap="flat" cmpd="sng" algn="ctr">
-                      <a:noFill/>
-                    </a:lnR>
-                    <a:lnT w="0" cap="flat" cmpd="sng" algn="ctr">
-                      <a:noFill/>
-                    </a:lnT>
-                    <a:lnB w="0" cap="flat" cmpd="sng" algn="ctr">
-                      <a:noFill/>
-                    </a:lnB>
-                    <a:solidFill>
-                      <a:schemeClr val="bg1"/>
-                    </a:solidFill>
-                  </a:tcPr>
-                </a:tc>
-                <a:tc>
-                  <a:txBody>
-                    <a:bodyPr/>
-                    <a:lstStyle/>
-                    <a:p>
-                      <a:pPr algn="ctr" indent="0" marL="0">
-                        <a:buNone/>
-                      </a:pPr>
-                      <a:r>
-                        <a:rPr lang="en-US" sz="1050" i="1" dirty="0">
-                          <a:solidFill>
-                            <a:schemeClr val="accent3"/>
-                          </a:solidFill>
-                        </a:rPr>
-                        <a:t>—</a:t>
-                      </a:r>
-                      <a:endParaRPr lang="en-US" sz="1050" dirty="0"/>
-                    </a:p>
-                  </a:txBody>
-                  <a:tcPr marL="101600" marR="76200" marT="25400" marB="25400" anchor="ctr">
-                    <a:lnL w="0" cap="flat" cmpd="sng" algn="ctr">
-                      <a:noFill/>
-                    </a:lnL>
-                    <a:lnR w="0" cap="flat" cmpd="sng" algn="ctr">
-                      <a:noFill/>
-                    </a:lnR>
-                    <a:lnT w="0" cap="flat" cmpd="sng" algn="ctr">
-                      <a:noFill/>
-                    </a:lnT>
-                    <a:lnB w="0" cap="flat" cmpd="sng" algn="ctr">
-                      <a:noFill/>
-                    </a:lnB>
-                    <a:solidFill>
-                      <a:schemeClr val="bg1"/>
-                    </a:solidFill>
-                  </a:tcPr>
-                </a:tc>
-                <a:tc>
-                  <a:txBody>
-                    <a:bodyPr/>
-                    <a:lstStyle/>
-                    <a:p>
-                      <a:pPr algn="ctr" indent="0" marL="0">
-                        <a:buNone/>
-                      </a:pPr>
-                      <a:r>
-                        <a:rPr lang="en-US" sz="1050" i="1" dirty="0">
-                          <a:solidFill>
-                            <a:schemeClr val="accent3"/>
-                          </a:solidFill>
-                        </a:rPr>
-                        <a:t>—</a:t>
-                      </a:r>
-                      <a:endParaRPr lang="en-US" sz="1050" dirty="0"/>
-                    </a:p>
-                  </a:txBody>
-                  <a:tcPr marL="101600" marR="76200" marT="25400" marB="25400" anchor="ctr">
-                    <a:lnL w="0" cap="flat" cmpd="sng" algn="ctr">
-                      <a:noFill/>
-                    </a:lnL>
-                    <a:lnR w="0" cap="flat" cmpd="sng" algn="ctr">
-                      <a:noFill/>
-                    </a:lnR>
-                    <a:lnT w="0" cap="flat" cmpd="sng" algn="ctr">
-                      <a:noFill/>
-                    </a:lnT>
-                    <a:lnB w="0" cap="flat" cmpd="sng" algn="ctr">
-                      <a:noFill/>
-                    </a:lnB>
-                    <a:solidFill>
-                      <a:schemeClr val="bg1"/>
-                    </a:solidFill>
-                  </a:tcPr>
-                </a:tc>
-                <a:tc>
-                  <a:txBody>
-                    <a:bodyPr/>
-                    <a:lstStyle/>
-                    <a:p>
-                      <a:pPr algn="ctr" indent="0" marL="0">
-                        <a:buNone/>
-                      </a:pPr>
-                      <a:r>
-                        <a:rPr lang="en-US" sz="1050" i="1" dirty="0">
-                          <a:solidFill>
-                            <a:schemeClr val="accent3"/>
-                          </a:solidFill>
-                        </a:rPr>
-                        <a:t>—</a:t>
-                      </a:r>
-                      <a:endParaRPr lang="en-US" sz="1050" dirty="0"/>
-                    </a:p>
-                  </a:txBody>
-                  <a:tcPr marL="101600" marR="76200" marT="25400" marB="25400" anchor="ctr">
-                    <a:lnL w="0" cap="flat" cmpd="sng" algn="ctr">
-                      <a:noFill/>
-                    </a:lnL>
-                    <a:lnR w="0" cap="flat" cmpd="sng" algn="ctr">
-                      <a:noFill/>
-                    </a:lnR>
-                    <a:lnT w="0" cap="flat" cmpd="sng" algn="ctr">
-                      <a:noFill/>
-                    </a:lnT>
-                    <a:lnB w="0" cap="flat" cmpd="sng" algn="ctr">
-                      <a:noFill/>
-                    </a:lnB>
-                    <a:solidFill>
-                      <a:schemeClr val="bg1"/>
-                    </a:solidFill>
-                  </a:tcPr>
-                </a:tc>
-                <a:tc>
-                  <a:txBody>
-                    <a:bodyPr/>
-                    <a:lstStyle/>
-                    <a:p>
-                      <a:pPr algn="ctr" indent="0" marL="0">
-                        <a:buNone/>
-                      </a:pPr>
-                      <a:r>
-                        <a:rPr lang="en-US" sz="1050" i="1" dirty="0">
-                          <a:solidFill>
-                            <a:schemeClr val="accent3"/>
-                          </a:solidFill>
-                        </a:rPr>
-                        <a:t>—</a:t>
-                      </a:r>
-                      <a:endParaRPr lang="en-US" sz="1050" dirty="0"/>
-                    </a:p>
-                  </a:txBody>
-                  <a:tcPr marL="101600" marR="76200" marT="25400" marB="25400" anchor="ctr">
-                    <a:lnL w="0" cap="flat" cmpd="sng" algn="ctr">
-                      <a:noFill/>
-                    </a:lnL>
-                    <a:lnR w="0" cap="flat" cmpd="sng" algn="ctr">
-                      <a:noFill/>
-                    </a:lnR>
-                    <a:lnT w="0" cap="flat" cmpd="sng" algn="ctr">
-                      <a:noFill/>
-                    </a:lnT>
-                    <a:lnB w="0" cap="flat" cmpd="sng" algn="ctr">
-                      <a:noFill/>
-                    </a:lnB>
-                    <a:solidFill>
-                      <a:schemeClr val="bg1"/>
-                    </a:solidFill>
-                  </a:tcPr>
-                </a:tc>
-                <a:tc>
-                  <a:txBody>
-                    <a:bodyPr/>
-                    <a:lstStyle/>
-                    <a:p>
-                      <a:pPr algn="ctr" indent="0" marL="0">
-                        <a:buNone/>
-                      </a:pPr>
-                      <a:r>
-                        <a:rPr lang="en-US" sz="1050" i="1" dirty="0">
-                          <a:solidFill>
-                            <a:schemeClr val="accent3"/>
-                          </a:solidFill>
-                        </a:rPr>
-                        <a:t>—</a:t>
-                      </a:r>
-                      <a:endParaRPr lang="en-US" sz="1050" dirty="0"/>
-                    </a:p>
-                  </a:txBody>
-                  <a:tcPr marL="101600" marR="76200" marT="25400" marB="25400" anchor="ctr">
-                    <a:lnL w="0" cap="flat" cmpd="sng" algn="ctr">
-                      <a:noFill/>
-                    </a:lnL>
-                    <a:lnR w="0" cap="flat" cmpd="sng" algn="ctr">
-                      <a:noFill/>
-                    </a:lnR>
-                    <a:lnT w="0" cap="flat" cmpd="sng" algn="ctr">
-                      <a:noFill/>
-                    </a:lnT>
-                    <a:lnB w="0" cap="flat" cmpd="sng" algn="ctr">
-                      <a:noFill/>
-                    </a:lnB>
-                    <a:solidFill>
-                      <a:schemeClr val="bg1"/>
-                    </a:solidFill>
-                  </a:tcPr>
-                </a:tc>
-                <a:tc>
-                  <a:txBody>
-                    <a:bodyPr/>
-                    <a:lstStyle/>
-                    <a:p>
-                      <a:pPr algn="ctr" indent="0" marL="0">
-                        <a:buNone/>
-                      </a:pPr>
-                      <a:r>
-                        <a:rPr lang="en-US" sz="1050" i="1" dirty="0">
-                          <a:solidFill>
-                            <a:schemeClr val="accent3"/>
-                          </a:solidFill>
-                        </a:rPr>
-                        <a:t>—</a:t>
-                      </a:r>
-                      <a:endParaRPr lang="en-US" sz="1050" dirty="0"/>
-                    </a:p>
-                  </a:txBody>
-                  <a:tcPr marL="101600" marR="76200" marT="25400" marB="25400" anchor="ctr">
-                    <a:lnL w="0" cap="flat" cmpd="sng" algn="ctr">
-                      <a:noFill/>
-                    </a:lnL>
-                    <a:lnR w="0" cap="flat" cmpd="sng" algn="ctr">
-                      <a:noFill/>
-                    </a:lnR>
-                    <a:lnT w="0" cap="flat" cmpd="sng" algn="ctr">
-                      <a:noFill/>
-                    </a:lnT>
-                    <a:lnB w="0" cap="flat" cmpd="sng" algn="ctr">
-                      <a:noFill/>
-                    </a:lnB>
-                    <a:solidFill>
-                      <a:schemeClr val="bg1"/>
-                    </a:solidFill>
-                  </a:tcPr>
-                </a:tc>
-              </a:tr>
-            </a:tbl>
-          </a:graphicData>
-        </a:graphic>
-      </p:graphicFrame>
-      <p:sp>
-        <p:nvSpPr>
-          <p:cNvPr id="9" name="text-178"/>
-          <p:cNvSpPr txBox="1"/>
-          <p:nvPr/>
-        </p:nvSpPr>
-        <p:spPr>
-          <a:xfrm>
-            <a:off x="594360" y="3759200"/>
-            <a:ext cx="7620000" cy="177800"/>
-          </a:xfrm>
-          <a:prstGeom prst="rect">
-            <a:avLst/>
-          </a:prstGeom>
-          <a:noFill/>
-          <a:ln/>
-        </p:spPr>
-        <p:txBody>
-          <a:bodyPr wrap="square" lIns="0" tIns="0" rIns="0" bIns="0" rtlCol="0" anchor="t"/>
-          <a:lstStyle/>
-          <a:p>
-            <a:pPr indent="0" marL="0">
-              <a:buNone/>
-            </a:pPr>
-            <a:r>
-              <a:rPr lang="en-US" sz="900" b="1" spc="200" kern="0" dirty="0">
-                <a:solidFill>
-                  <a:schemeClr val="accent2"/>
-                </a:solidFill>
-              </a:rPr>
-              <a:t>РУЧНЫХ ОПЕРАЦИЙ АДМИНИСТРАТОРА НА ЗАКАЗ</a:t>
-            </a:r>
-            <a:endParaRPr lang="en-US" sz="900" dirty="0"/>
-          </a:p>
-        </p:txBody>
-      </p:sp>
-      <p:graphicFrame>
-        <p:nvGraphicFramePr>
-          <p:cNvPr id="27" name="table-179"/>
-          <p:cNvGraphicFramePr>
-            <a:graphicFrameLocks noGrp="1"/>
-          </p:cNvGraphicFramePr>
-          <p:nvPr>
-            <p:extLst>
-              <p:ext uri="{D42A27DB-BD31-4B8C-83A1-F6EECF244321}">
-                <p14:modId xmlns:p14="http://schemas.microsoft.com/office/powerpoint/2010/main" val="1579011935"/>
-              </p:ext>
-            </p:extLst>
-          </p:nvPr>
-        </p:nvGraphicFramePr>
-        <p:xfrm>
-          <a:off x="594360" y="3987800"/>
-          <a:ext cx="10972800" cy="914400"/>
-        </p:xfrm>
-        <a:graphic>
-          <a:graphicData uri="http://schemas.openxmlformats.org/drawingml/2006/table">
-            <a:tbl>
-              <a:tblPr/>
-              <a:tblGrid>
-                <a:gridCol w="2413000"/>
-                <a:gridCol w="1092200"/>
-                <a:gridCol w="1092200"/>
-                <a:gridCol w="1092200"/>
-                <a:gridCol w="1092200"/>
-                <a:gridCol w="1092200"/>
-                <a:gridCol w="1549400"/>
-                <a:gridCol w="1549400"/>
-              </a:tblGrid>
-              <a:tr h="330200">
-                <a:tc>
-                  <a:txBody>
-                    <a:bodyPr/>
-                    <a:lstStyle/>
-                    <a:p>
-                      <a:pPr indent="0" marL="0">
-                        <a:buNone/>
-                      </a:pPr>
-                      <a:r>
-                        <a:rPr lang="en-US" sz="1000" b="1" dirty="0">
-                          <a:solidFill>
-                            <a:schemeClr val="bg1"/>
-                          </a:solidFill>
-                        </a:rPr>
-                        <a:t>Вариант</a:t>
-                      </a:r>
-                      <a:endParaRPr lang="en-US" sz="1000" dirty="0"/>
-                    </a:p>
-                  </a:txBody>
-                  <a:tcPr marL="101600" marR="76200" marT="25400" marB="25400" anchor="ctr">
-                    <a:lnL w="0" cap="flat" cmpd="sng" algn="ctr">
-                      <a:noFill/>
-                    </a:lnL>
-                    <a:lnR w="0" cap="flat" cmpd="sng" algn="ctr">
-                      <a:noFill/>
-                    </a:lnR>
-                    <a:lnT w="0" cap="flat" cmpd="sng" algn="ctr">
-                      <a:noFill/>
-                    </a:lnT>
-                    <a:lnB w="0" cap="flat" cmpd="sng" algn="ctr">
-                      <a:noFill/>
-                    </a:lnB>
-                    <a:solidFill>
-                      <a:schemeClr val="accent1"/>
-                    </a:solidFill>
-                  </a:tcPr>
-                </a:tc>
-                <a:tc>
-                  <a:txBody>
-                    <a:bodyPr/>
-                    <a:lstStyle/>
-                    <a:p>
-                      <a:pPr algn="ctr" indent="0" marL="0">
-                        <a:buNone/>
-                      </a:pPr>
-                      <a:r>
-                        <a:rPr lang="en-US" sz="1000" b="1" dirty="0">
-                          <a:solidFill>
-                            <a:schemeClr val="bg1"/>
-                          </a:solidFill>
-                        </a:rPr>
-                        <a:t>Прогон 1</a:t>
-                      </a:r>
-                      <a:endParaRPr lang="en-US" sz="1000" dirty="0"/>
-                    </a:p>
-                  </a:txBody>
-                  <a:tcPr marL="101600" marR="76200" marT="25400" marB="25400" anchor="ctr">
-                    <a:lnL w="0" cap="flat" cmpd="sng" algn="ctr">
-                      <a:noFill/>
-                    </a:lnL>
-                    <a:lnR w="0" cap="flat" cmpd="sng" algn="ctr">
-                      <a:noFill/>
-                    </a:lnR>
-                    <a:lnT w="0" cap="flat" cmpd="sng" algn="ctr">
-                      <a:noFill/>
-                    </a:lnT>
-                    <a:lnB w="0" cap="flat" cmpd="sng" algn="ctr">
-                      <a:noFill/>
-                    </a:lnB>
-                    <a:solidFill>
-                      <a:schemeClr val="accent1"/>
-                    </a:solidFill>
-                  </a:tcPr>
-                </a:tc>
-                <a:tc>
-                  <a:txBody>
-                    <a:bodyPr/>
-                    <a:lstStyle/>
-                    <a:p>
-                      <a:pPr algn="ctr" indent="0" marL="0">
-                        <a:buNone/>
-                      </a:pPr>
-                      <a:r>
-                        <a:rPr lang="en-US" sz="1000" b="1" dirty="0">
-                          <a:solidFill>
-                            <a:schemeClr val="bg1"/>
-                          </a:solidFill>
-                        </a:rPr>
-                        <a:t>Прогон 2</a:t>
-                      </a:r>
-                      <a:endParaRPr lang="en-US" sz="1000" dirty="0"/>
-                    </a:p>
-                  </a:txBody>
-                  <a:tcPr marL="101600" marR="76200" marT="25400" marB="25400" anchor="ctr">
-                    <a:lnL w="0" cap="flat" cmpd="sng" algn="ctr">
-                      <a:noFill/>
-                    </a:lnL>
-                    <a:lnR w="0" cap="flat" cmpd="sng" algn="ctr">
-                      <a:noFill/>
-                    </a:lnR>
-                    <a:lnT w="0" cap="flat" cmpd="sng" algn="ctr">
-                      <a:noFill/>
-                    </a:lnT>
-                    <a:lnB w="0" cap="flat" cmpd="sng" algn="ctr">
-                      <a:noFill/>
-                    </a:lnB>
-                    <a:solidFill>
-                      <a:schemeClr val="accent1"/>
-                    </a:solidFill>
-                  </a:tcPr>
-                </a:tc>
-                <a:tc>
-                  <a:txBody>
-                    <a:bodyPr/>
-                    <a:lstStyle/>
-                    <a:p>
-                      <a:pPr algn="ctr" indent="0" marL="0">
-                        <a:buNone/>
-                      </a:pPr>
-                      <a:r>
-                        <a:rPr lang="en-US" sz="1000" b="1" dirty="0">
-                          <a:solidFill>
-                            <a:schemeClr val="bg1"/>
-                          </a:solidFill>
-                        </a:rPr>
-                        <a:t>Прогон 3</a:t>
-                      </a:r>
-                      <a:endParaRPr lang="en-US" sz="1000" dirty="0"/>
-                    </a:p>
-                  </a:txBody>
-                  <a:tcPr marL="101600" marR="76200" marT="25400" marB="25400" anchor="ctr">
-                    <a:lnL w="0" cap="flat" cmpd="sng" algn="ctr">
-                      <a:noFill/>
-                    </a:lnL>
-                    <a:lnR w="0" cap="flat" cmpd="sng" algn="ctr">
-                      <a:noFill/>
-                    </a:lnR>
-                    <a:lnT w="0" cap="flat" cmpd="sng" algn="ctr">
-                      <a:noFill/>
-                    </a:lnT>
-                    <a:lnB w="0" cap="flat" cmpd="sng" algn="ctr">
-                      <a:noFill/>
-                    </a:lnB>
-                    <a:solidFill>
-                      <a:schemeClr val="accent1"/>
-                    </a:solidFill>
-                  </a:tcPr>
-                </a:tc>
-                <a:tc>
-                  <a:txBody>
-                    <a:bodyPr/>
-                    <a:lstStyle/>
-                    <a:p>
-                      <a:pPr algn="ctr" indent="0" marL="0">
-                        <a:buNone/>
-                      </a:pPr>
-                      <a:r>
-                        <a:rPr lang="en-US" sz="1000" b="1" dirty="0">
-                          <a:solidFill>
-                            <a:schemeClr val="bg1"/>
-                          </a:solidFill>
-                        </a:rPr>
-                        <a:t>Прогон 4</a:t>
-                      </a:r>
-                      <a:endParaRPr lang="en-US" sz="1000" dirty="0"/>
-                    </a:p>
-                  </a:txBody>
-                  <a:tcPr marL="101600" marR="76200" marT="25400" marB="25400" anchor="ctr">
-                    <a:lnL w="0" cap="flat" cmpd="sng" algn="ctr">
-                      <a:noFill/>
-                    </a:lnL>
-                    <a:lnR w="0" cap="flat" cmpd="sng" algn="ctr">
-                      <a:noFill/>
-                    </a:lnR>
-                    <a:lnT w="0" cap="flat" cmpd="sng" algn="ctr">
-                      <a:noFill/>
-                    </a:lnT>
-                    <a:lnB w="0" cap="flat" cmpd="sng" algn="ctr">
-                      <a:noFill/>
-                    </a:lnB>
-                    <a:solidFill>
-                      <a:schemeClr val="accent1"/>
-                    </a:solidFill>
-                  </a:tcPr>
-                </a:tc>
-                <a:tc>
-                  <a:txBody>
-                    <a:bodyPr/>
-                    <a:lstStyle/>
-                    <a:p>
-                      <a:pPr algn="ctr" indent="0" marL="0">
-                        <a:buNone/>
-                      </a:pPr>
-                      <a:r>
-                        <a:rPr lang="en-US" sz="1000" b="1" dirty="0">
-                          <a:solidFill>
-                            <a:schemeClr val="bg1"/>
-                          </a:solidFill>
-                        </a:rPr>
-                        <a:t>Прогон 5</a:t>
-                      </a:r>
-                      <a:endParaRPr lang="en-US" sz="1000" dirty="0"/>
-                    </a:p>
-                  </a:txBody>
-                  <a:tcPr marL="101600" marR="76200" marT="25400" marB="25400" anchor="ctr">
-                    <a:lnL w="0" cap="flat" cmpd="sng" algn="ctr">
-                      <a:noFill/>
-                    </a:lnL>
-                    <a:lnR w="0" cap="flat" cmpd="sng" algn="ctr">
-                      <a:noFill/>
-                    </a:lnR>
-                    <a:lnT w="0" cap="flat" cmpd="sng" algn="ctr">
-                      <a:noFill/>
-                    </a:lnT>
-                    <a:lnB w="0" cap="flat" cmpd="sng" algn="ctr">
-                      <a:noFill/>
-                    </a:lnB>
-                    <a:solidFill>
-                      <a:schemeClr val="accent1"/>
-                    </a:solidFill>
-                  </a:tcPr>
-                </a:tc>
-                <a:tc>
-                  <a:txBody>
-                    <a:bodyPr/>
-                    <a:lstStyle/>
-                    <a:p>
-                      <a:pPr algn="ctr" indent="0" marL="0">
-                        <a:buNone/>
-                      </a:pPr>
-                      <a:r>
-                        <a:rPr lang="en-US" sz="1000" b="1" dirty="0">
-                          <a:solidFill>
-                            <a:schemeClr val="bg1"/>
-                          </a:solidFill>
-                        </a:rPr>
-                        <a:t>Среднее</a:t>
-                      </a:r>
-                      <a:endParaRPr lang="en-US" sz="1000" dirty="0"/>
-                    </a:p>
-                  </a:txBody>
-                  <a:tcPr marL="101600" marR="76200" marT="25400" marB="25400" anchor="ctr">
-                    <a:lnL w="0" cap="flat" cmpd="sng" algn="ctr">
-                      <a:noFill/>
-                    </a:lnL>
-                    <a:lnR w="0" cap="flat" cmpd="sng" algn="ctr">
-                      <a:noFill/>
-                    </a:lnR>
-                    <a:lnT w="0" cap="flat" cmpd="sng" algn="ctr">
-                      <a:noFill/>
-                    </a:lnT>
-                    <a:lnB w="0" cap="flat" cmpd="sng" algn="ctr">
-                      <a:noFill/>
-                    </a:lnB>
-                    <a:solidFill>
-                      <a:schemeClr val="accent1"/>
-                    </a:solidFill>
-                  </a:tcPr>
-                </a:tc>
-                <a:tc>
-                  <a:txBody>
-                    <a:bodyPr/>
-                    <a:lstStyle/>
-                    <a:p>
-                      <a:pPr algn="ctr" indent="0" marL="0">
-                        <a:buNone/>
-                      </a:pPr>
-                      <a:r>
-                        <a:rPr lang="en-US" sz="1000" b="1" dirty="0">
-                          <a:solidFill>
-                            <a:schemeClr val="bg1"/>
-                          </a:solidFill>
-                        </a:rPr>
-                        <a:t>Мин и макс</a:t>
-                      </a:r>
-                      <a:endParaRPr lang="en-US" sz="1000" dirty="0"/>
-                    </a:p>
-                  </a:txBody>
-                  <a:tcPr marL="101600" marR="76200" marT="25400" marB="25400" anchor="ctr">
-                    <a:lnL w="0" cap="flat" cmpd="sng" algn="ctr">
-                      <a:noFill/>
-                    </a:lnL>
-                    <a:lnR w="0" cap="flat" cmpd="sng" algn="ctr">
-                      <a:noFill/>
-                    </a:lnR>
-                    <a:lnT w="0" cap="flat" cmpd="sng" algn="ctr">
-                      <a:noFill/>
-                    </a:lnT>
-                    <a:lnB w="0" cap="flat" cmpd="sng" algn="ctr">
-                      <a:noFill/>
-                    </a:lnB>
-                    <a:solidFill>
-                      <a:schemeClr val="accent1"/>
-                    </a:solidFill>
-                  </a:tcPr>
-                </a:tc>
-              </a:tr>
-              <a:tr h="330200">
-                <a:tc>
-                  <a:txBody>
-                    <a:bodyPr/>
-                    <a:lstStyle/>
-                    <a:p>
-                      <a:pPr indent="0" marL="0">
-                        <a:buNone/>
-                      </a:pPr>
-                      <a:r>
-                        <a:rPr lang="en-US" sz="1050" b="1" dirty="0">
-                          <a:solidFill>
-                            <a:schemeClr val="tx1"/>
-                          </a:solidFill>
-                        </a:rPr>
-                        <a:t>Своя система</a:t>
-                      </a:r>
-                      <a:endParaRPr lang="en-US" sz="1050" dirty="0"/>
-                    </a:p>
-                  </a:txBody>
-                  <a:tcPr marL="101600" marR="76200" marT="25400" marB="25400" anchor="ctr">
-                    <a:lnL w="0" cap="flat" cmpd="sng" algn="ctr">
-                      <a:noFill/>
-                    </a:lnL>
-                    <a:lnR w="0" cap="flat" cmpd="sng" algn="ctr">
-                      <a:noFill/>
-                    </a:lnR>
-                    <a:lnT w="0" cap="flat" cmpd="sng" algn="ctr">
-                      <a:noFill/>
-                    </a:lnT>
-                    <a:lnB w="0" cap="flat" cmpd="sng" algn="ctr">
-                      <a:noFill/>
-                    </a:lnB>
-                    <a:solidFill>
-                      <a:schemeClr val="bg2"/>
-                    </a:solidFill>
-                  </a:tcPr>
-                </a:tc>
-                <a:tc>
-                  <a:txBody>
-                    <a:bodyPr/>
-                    <a:lstStyle/>
-                    <a:p>
-                      <a:pPr algn="ctr" indent="0" marL="0">
-                        <a:buNone/>
-                      </a:pPr>
-                      <a:r>
-                        <a:rPr lang="en-US" sz="1050" i="1" dirty="0">
-                          <a:solidFill>
-                            <a:schemeClr val="accent3"/>
-                          </a:solidFill>
-                        </a:rPr>
-                        <a:t>—</a:t>
-                      </a:r>
-                      <a:endParaRPr lang="en-US" sz="1050" dirty="0"/>
-                    </a:p>
-                  </a:txBody>
-                  <a:tcPr marL="101600" marR="76200" marT="25400" marB="25400" anchor="ctr">
-                    <a:lnL w="0" cap="flat" cmpd="sng" algn="ctr">
-                      <a:noFill/>
-                    </a:lnL>
-                    <a:lnR w="0" cap="flat" cmpd="sng" algn="ctr">
-                      <a:noFill/>
-                    </a:lnR>
-                    <a:lnT w="0" cap="flat" cmpd="sng" algn="ctr">
-                      <a:noFill/>
-                    </a:lnT>
-                    <a:lnB w="0" cap="flat" cmpd="sng" algn="ctr">
-                      <a:noFill/>
-                    </a:lnB>
-                    <a:solidFill>
-                      <a:schemeClr val="bg2"/>
-                    </a:solidFill>
-                  </a:tcPr>
-                </a:tc>
-                <a:tc>
-                  <a:txBody>
-                    <a:bodyPr/>
-                    <a:lstStyle/>
-                    <a:p>
-                      <a:pPr algn="ctr" indent="0" marL="0">
-                        <a:buNone/>
-                      </a:pPr>
-                      <a:r>
-                        <a:rPr lang="en-US" sz="1050" i="1" dirty="0">
-                          <a:solidFill>
-                            <a:schemeClr val="accent3"/>
-                          </a:solidFill>
-                        </a:rPr>
-                        <a:t>—</a:t>
-                      </a:r>
-                      <a:endParaRPr lang="en-US" sz="1050" dirty="0"/>
-                    </a:p>
-                  </a:txBody>
-                  <a:tcPr marL="101600" marR="76200" marT="25400" marB="25400" anchor="ctr">
-                    <a:lnL w="0" cap="flat" cmpd="sng" algn="ctr">
-                      <a:noFill/>
-                    </a:lnL>
-                    <a:lnR w="0" cap="flat" cmpd="sng" algn="ctr">
-                      <a:noFill/>
-                    </a:lnR>
-                    <a:lnT w="0" cap="flat" cmpd="sng" algn="ctr">
-                      <a:noFill/>
-                    </a:lnT>
-                    <a:lnB w="0" cap="flat" cmpd="sng" algn="ctr">
-                      <a:noFill/>
-                    </a:lnB>
-                    <a:solidFill>
-                      <a:schemeClr val="bg2"/>
-                    </a:solidFill>
-                  </a:tcPr>
-                </a:tc>
-                <a:tc>
-                  <a:txBody>
-                    <a:bodyPr/>
-                    <a:lstStyle/>
-                    <a:p>
-                      <a:pPr algn="ctr" indent="0" marL="0">
-                        <a:buNone/>
-                      </a:pPr>
-                      <a:r>
-                        <a:rPr lang="en-US" sz="1050" i="1" dirty="0">
-                          <a:solidFill>
-                            <a:schemeClr val="accent3"/>
-                          </a:solidFill>
-                        </a:rPr>
-                        <a:t>—</a:t>
-                      </a:r>
-                      <a:endParaRPr lang="en-US" sz="1050" dirty="0"/>
-                    </a:p>
-                  </a:txBody>
-                  <a:tcPr marL="101600" marR="76200" marT="25400" marB="25400" anchor="ctr">
-                    <a:lnL w="0" cap="flat" cmpd="sng" algn="ctr">
-                      <a:noFill/>
-                    </a:lnL>
-                    <a:lnR w="0" cap="flat" cmpd="sng" algn="ctr">
-                      <a:noFill/>
-                    </a:lnR>
-                    <a:lnT w="0" cap="flat" cmpd="sng" algn="ctr">
-                      <a:noFill/>
-                    </a:lnT>
-                    <a:lnB w="0" cap="flat" cmpd="sng" algn="ctr">
-                      <a:noFill/>
-                    </a:lnB>
-                    <a:solidFill>
-                      <a:schemeClr val="bg2"/>
-                    </a:solidFill>
-                  </a:tcPr>
-                </a:tc>
-                <a:tc>
-                  <a:txBody>
-                    <a:bodyPr/>
-                    <a:lstStyle/>
-                    <a:p>
-                      <a:pPr algn="ctr" indent="0" marL="0">
-                        <a:buNone/>
-                      </a:pPr>
-                      <a:r>
-                        <a:rPr lang="en-US" sz="1050" i="1" dirty="0">
-                          <a:solidFill>
-                            <a:schemeClr val="accent3"/>
-                          </a:solidFill>
-                        </a:rPr>
-                        <a:t>—</a:t>
-                      </a:r>
-                      <a:endParaRPr lang="en-US" sz="1050" dirty="0"/>
-                    </a:p>
-                  </a:txBody>
-                  <a:tcPr marL="101600" marR="76200" marT="25400" marB="25400" anchor="ctr">
-                    <a:lnL w="0" cap="flat" cmpd="sng" algn="ctr">
-                      <a:noFill/>
-                    </a:lnL>
-                    <a:lnR w="0" cap="flat" cmpd="sng" algn="ctr">
-                      <a:noFill/>
-                    </a:lnR>
-                    <a:lnT w="0" cap="flat" cmpd="sng" algn="ctr">
-                      <a:noFill/>
-                    </a:lnT>
-                    <a:lnB w="0" cap="flat" cmpd="sng" algn="ctr">
-                      <a:noFill/>
-                    </a:lnB>
-                    <a:solidFill>
-                      <a:schemeClr val="bg2"/>
-                    </a:solidFill>
-                  </a:tcPr>
-                </a:tc>
-                <a:tc>
-                  <a:txBody>
-                    <a:bodyPr/>
-                    <a:lstStyle/>
-                    <a:p>
-                      <a:pPr algn="ctr" indent="0" marL="0">
-                        <a:buNone/>
-                      </a:pPr>
-                      <a:r>
-                        <a:rPr lang="en-US" sz="1050" i="1" dirty="0">
-                          <a:solidFill>
-                            <a:schemeClr val="accent3"/>
-                          </a:solidFill>
-                        </a:rPr>
-                        <a:t>—</a:t>
-                      </a:r>
-                      <a:endParaRPr lang="en-US" sz="1050" dirty="0"/>
-                    </a:p>
-                  </a:txBody>
-                  <a:tcPr marL="101600" marR="76200" marT="25400" marB="25400" anchor="ctr">
-                    <a:lnL w="0" cap="flat" cmpd="sng" algn="ctr">
-                      <a:noFill/>
-                    </a:lnL>
-                    <a:lnR w="0" cap="flat" cmpd="sng" algn="ctr">
-                      <a:noFill/>
-                    </a:lnR>
-                    <a:lnT w="0" cap="flat" cmpd="sng" algn="ctr">
-                      <a:noFill/>
-                    </a:lnT>
-                    <a:lnB w="0" cap="flat" cmpd="sng" algn="ctr">
-                      <a:noFill/>
-                    </a:lnB>
-                    <a:solidFill>
-                      <a:schemeClr val="bg2"/>
-                    </a:solidFill>
-                  </a:tcPr>
-                </a:tc>
-                <a:tc>
-                  <a:txBody>
-                    <a:bodyPr/>
-                    <a:lstStyle/>
-                    <a:p>
-                      <a:pPr algn="ctr" indent="0" marL="0">
-                        <a:buNone/>
-                      </a:pPr>
-                      <a:r>
-                        <a:rPr lang="en-US" sz="1050" i="1" dirty="0">
-                          <a:solidFill>
-                            <a:schemeClr val="accent3"/>
-                          </a:solidFill>
-                        </a:rPr>
-                        <a:t>—</a:t>
-                      </a:r>
-                      <a:endParaRPr lang="en-US" sz="1050" dirty="0"/>
-                    </a:p>
-                  </a:txBody>
-                  <a:tcPr marL="101600" marR="76200" marT="25400" marB="25400" anchor="ctr">
-                    <a:lnL w="0" cap="flat" cmpd="sng" algn="ctr">
-                      <a:noFill/>
-                    </a:lnL>
-                    <a:lnR w="0" cap="flat" cmpd="sng" algn="ctr">
-                      <a:noFill/>
-                    </a:lnR>
-                    <a:lnT w="0" cap="flat" cmpd="sng" algn="ctr">
-                      <a:noFill/>
-                    </a:lnT>
-                    <a:lnB w="0" cap="flat" cmpd="sng" algn="ctr">
-                      <a:noFill/>
-                    </a:lnB>
-                    <a:solidFill>
-                      <a:schemeClr val="bg2"/>
-                    </a:solidFill>
-                  </a:tcPr>
-                </a:tc>
-                <a:tc>
-                  <a:txBody>
-                    <a:bodyPr/>
-                    <a:lstStyle/>
-                    <a:p>
-                      <a:pPr algn="ctr" indent="0" marL="0">
-                        <a:buNone/>
-                      </a:pPr>
-                      <a:r>
-                        <a:rPr lang="en-US" sz="1050" i="1" dirty="0">
-                          <a:solidFill>
-                            <a:schemeClr val="accent3"/>
-                          </a:solidFill>
-                        </a:rPr>
-                        <a:t>—</a:t>
-                      </a:r>
-                      <a:endParaRPr lang="en-US" sz="1050" dirty="0"/>
-                    </a:p>
-                  </a:txBody>
-                  <a:tcPr marL="101600" marR="76200" marT="25400" marB="25400" anchor="ctr">
-                    <a:lnL w="0" cap="flat" cmpd="sng" algn="ctr">
-                      <a:noFill/>
-                    </a:lnL>
-                    <a:lnR w="0" cap="flat" cmpd="sng" algn="ctr">
-                      <a:noFill/>
-                    </a:lnR>
-                    <a:lnT w="0" cap="flat" cmpd="sng" algn="ctr">
-                      <a:noFill/>
-                    </a:lnT>
-                    <a:lnB w="0" cap="flat" cmpd="sng" algn="ctr">
-                      <a:noFill/>
-                    </a:lnB>
-                    <a:solidFill>
-                      <a:schemeClr val="bg2"/>
-                    </a:solidFill>
-                  </a:tcPr>
-                </a:tc>
-              </a:tr>
-              <a:tr h="330200">
-                <a:tc>
-                  <a:txBody>
-                    <a:bodyPr/>
-                    <a:lstStyle/>
-                    <a:p>
-                      <a:pPr indent="0" marL="0">
-                        <a:buNone/>
-                      </a:pPr>
-                      <a:r>
-                        <a:rPr lang="en-US" sz="1050" b="1" dirty="0">
-                          <a:solidFill>
-                            <a:schemeClr val="tx1"/>
-                          </a:solidFill>
-                        </a:rPr>
-                        <a:t>1С-Битрикс</a:t>
-                      </a:r>
-                      <a:endParaRPr lang="en-US" sz="1050" dirty="0"/>
-                    </a:p>
-                  </a:txBody>
-                  <a:tcPr marL="101600" marR="76200" marT="25400" marB="25400" anchor="ctr">
-                    <a:lnL w="0" cap="flat" cmpd="sng" algn="ctr">
-                      <a:noFill/>
-                    </a:lnL>
-                    <a:lnR w="0" cap="flat" cmpd="sng" algn="ctr">
-                      <a:noFill/>
-                    </a:lnR>
-                    <a:lnT w="0" cap="flat" cmpd="sng" algn="ctr">
-                      <a:noFill/>
-                    </a:lnT>
-                    <a:lnB w="0" cap="flat" cmpd="sng" algn="ctr">
-                      <a:noFill/>
-                    </a:lnB>
-                    <a:solidFill>
-                      <a:schemeClr val="bg1"/>
-                    </a:solidFill>
-                  </a:tcPr>
-                </a:tc>
-                <a:tc>
-                  <a:txBody>
-                    <a:bodyPr/>
-                    <a:lstStyle/>
-                    <a:p>
-                      <a:pPr algn="ctr" indent="0" marL="0">
-                        <a:buNone/>
-                      </a:pPr>
-                      <a:r>
-                        <a:rPr lang="en-US" sz="1050" i="1" dirty="0">
-                          <a:solidFill>
-                            <a:schemeClr val="accent3"/>
-                          </a:solidFill>
-                        </a:rPr>
-                        <a:t>—</a:t>
-                      </a:r>
-                      <a:endParaRPr lang="en-US" sz="1050" dirty="0"/>
-                    </a:p>
-                  </a:txBody>
-                  <a:tcPr marL="101600" marR="76200" marT="25400" marB="25400" anchor="ctr">
-                    <a:lnL w="0" cap="flat" cmpd="sng" algn="ctr">
-                      <a:noFill/>
-                    </a:lnL>
-                    <a:lnR w="0" cap="flat" cmpd="sng" algn="ctr">
-                      <a:noFill/>
-                    </a:lnR>
-                    <a:lnT w="0" cap="flat" cmpd="sng" algn="ctr">
-                      <a:noFill/>
-                    </a:lnT>
-                    <a:lnB w="0" cap="flat" cmpd="sng" algn="ctr">
-                      <a:noFill/>
-                    </a:lnB>
-                    <a:solidFill>
-                      <a:schemeClr val="bg1"/>
-                    </a:solidFill>
-                  </a:tcPr>
-                </a:tc>
-                <a:tc>
-                  <a:txBody>
-                    <a:bodyPr/>
-                    <a:lstStyle/>
-                    <a:p>
-                      <a:pPr algn="ctr" indent="0" marL="0">
-                        <a:buNone/>
-                      </a:pPr>
-                      <a:r>
-                        <a:rPr lang="en-US" sz="1050" i="1" dirty="0">
-                          <a:solidFill>
-                            <a:schemeClr val="accent3"/>
-                          </a:solidFill>
-                        </a:rPr>
-                        <a:t>—</a:t>
-                      </a:r>
-                      <a:endParaRPr lang="en-US" sz="1050" dirty="0"/>
-                    </a:p>
-                  </a:txBody>
-                  <a:tcPr marL="101600" marR="76200" marT="25400" marB="25400" anchor="ctr">
-                    <a:lnL w="0" cap="flat" cmpd="sng" algn="ctr">
-                      <a:noFill/>
-                    </a:lnL>
-                    <a:lnR w="0" cap="flat" cmpd="sng" algn="ctr">
-                      <a:noFill/>
-                    </a:lnR>
-                    <a:lnT w="0" cap="flat" cmpd="sng" algn="ctr">
-                      <a:noFill/>
-                    </a:lnT>
-                    <a:lnB w="0" cap="flat" cmpd="sng" algn="ctr">
-                      <a:noFill/>
-                    </a:lnB>
-                    <a:solidFill>
-                      <a:schemeClr val="bg1"/>
-                    </a:solidFill>
-                  </a:tcPr>
-                </a:tc>
-                <a:tc>
-                  <a:txBody>
-                    <a:bodyPr/>
-                    <a:lstStyle/>
-                    <a:p>
-                      <a:pPr algn="ctr" indent="0" marL="0">
-                        <a:buNone/>
-                      </a:pPr>
-                      <a:r>
-                        <a:rPr lang="en-US" sz="1050" i="1" dirty="0">
-                          <a:solidFill>
-                            <a:schemeClr val="accent3"/>
-                          </a:solidFill>
-                        </a:rPr>
-                        <a:t>—</a:t>
-                      </a:r>
-                      <a:endParaRPr lang="en-US" sz="1050" dirty="0"/>
-                    </a:p>
-                  </a:txBody>
-                  <a:tcPr marL="101600" marR="76200" marT="25400" marB="25400" anchor="ctr">
-                    <a:lnL w="0" cap="flat" cmpd="sng" algn="ctr">
-                      <a:noFill/>
-                    </a:lnL>
-                    <a:lnR w="0" cap="flat" cmpd="sng" algn="ctr">
-                      <a:noFill/>
-                    </a:lnR>
-                    <a:lnT w="0" cap="flat" cmpd="sng" algn="ctr">
-                      <a:noFill/>
-                    </a:lnT>
-                    <a:lnB w="0" cap="flat" cmpd="sng" algn="ctr">
-                      <a:noFill/>
-                    </a:lnB>
-                    <a:solidFill>
-                      <a:schemeClr val="bg1"/>
-                    </a:solidFill>
-                  </a:tcPr>
-                </a:tc>
-                <a:tc>
-                  <a:txBody>
-                    <a:bodyPr/>
-                    <a:lstStyle/>
-                    <a:p>
-                      <a:pPr algn="ctr" indent="0" marL="0">
-                        <a:buNone/>
-                      </a:pPr>
-                      <a:r>
-                        <a:rPr lang="en-US" sz="1050" i="1" dirty="0">
-                          <a:solidFill>
-                            <a:schemeClr val="accent3"/>
-                          </a:solidFill>
-                        </a:rPr>
-                        <a:t>—</a:t>
-                      </a:r>
-                      <a:endParaRPr lang="en-US" sz="1050" dirty="0"/>
-                    </a:p>
-                  </a:txBody>
-                  <a:tcPr marL="101600" marR="76200" marT="25400" marB="25400" anchor="ctr">
-                    <a:lnL w="0" cap="flat" cmpd="sng" algn="ctr">
-                      <a:noFill/>
-                    </a:lnL>
-                    <a:lnR w="0" cap="flat" cmpd="sng" algn="ctr">
-                      <a:noFill/>
-                    </a:lnR>
-                    <a:lnT w="0" cap="flat" cmpd="sng" algn="ctr">
-                      <a:noFill/>
-                    </a:lnT>
-                    <a:lnB w="0" cap="flat" cmpd="sng" algn="ctr">
-                      <a:noFill/>
-                    </a:lnB>
-                    <a:solidFill>
-                      <a:schemeClr val="bg1"/>
-                    </a:solidFill>
-                  </a:tcPr>
-                </a:tc>
-                <a:tc>
-                  <a:txBody>
-                    <a:bodyPr/>
-                    <a:lstStyle/>
-                    <a:p>
-                      <a:pPr algn="ctr" indent="0" marL="0">
-                        <a:buNone/>
-                      </a:pPr>
-                      <a:r>
-                        <a:rPr lang="en-US" sz="1050" i="1" dirty="0">
-                          <a:solidFill>
-                            <a:schemeClr val="accent3"/>
-                          </a:solidFill>
-                        </a:rPr>
-                        <a:t>—</a:t>
-                      </a:r>
-                      <a:endParaRPr lang="en-US" sz="1050" dirty="0"/>
-                    </a:p>
-                  </a:txBody>
-                  <a:tcPr marL="101600" marR="76200" marT="25400" marB="25400" anchor="ctr">
-                    <a:lnL w="0" cap="flat" cmpd="sng" algn="ctr">
-                      <a:noFill/>
-                    </a:lnL>
-                    <a:lnR w="0" cap="flat" cmpd="sng" algn="ctr">
-                      <a:noFill/>
-                    </a:lnR>
-                    <a:lnT w="0" cap="flat" cmpd="sng" algn="ctr">
-                      <a:noFill/>
-                    </a:lnT>
-                    <a:lnB w="0" cap="flat" cmpd="sng" algn="ctr">
-                      <a:noFill/>
-                    </a:lnB>
-                    <a:solidFill>
-                      <a:schemeClr val="bg1"/>
-                    </a:solidFill>
-                  </a:tcPr>
-                </a:tc>
-                <a:tc>
-                  <a:txBody>
-                    <a:bodyPr/>
-                    <a:lstStyle/>
-                    <a:p>
-                      <a:pPr algn="ctr" indent="0" marL="0">
-                        <a:buNone/>
-                      </a:pPr>
-                      <a:r>
-                        <a:rPr lang="en-US" sz="1050" i="1" dirty="0">
-                          <a:solidFill>
-                            <a:schemeClr val="accent3"/>
-                          </a:solidFill>
-                        </a:rPr>
-                        <a:t>—</a:t>
-                      </a:r>
-                      <a:endParaRPr lang="en-US" sz="1050" dirty="0"/>
-                    </a:p>
-                  </a:txBody>
-                  <a:tcPr marL="101600" marR="76200" marT="25400" marB="25400" anchor="ctr">
-                    <a:lnL w="0" cap="flat" cmpd="sng" algn="ctr">
-                      <a:noFill/>
-                    </a:lnL>
-                    <a:lnR w="0" cap="flat" cmpd="sng" algn="ctr">
-                      <a:noFill/>
-                    </a:lnR>
-                    <a:lnT w="0" cap="flat" cmpd="sng" algn="ctr">
-                      <a:noFill/>
-                    </a:lnT>
-                    <a:lnB w="0" cap="flat" cmpd="sng" algn="ctr">
-                      <a:noFill/>
-                    </a:lnB>
-                    <a:solidFill>
-                      <a:schemeClr val="bg1"/>
-                    </a:solidFill>
-                  </a:tcPr>
-                </a:tc>
-                <a:tc>
-                  <a:txBody>
-                    <a:bodyPr/>
-                    <a:lstStyle/>
-                    <a:p>
-                      <a:pPr algn="ctr" indent="0" marL="0">
-                        <a:buNone/>
-                      </a:pPr>
-                      <a:r>
-                        <a:rPr lang="en-US" sz="1050" i="1" dirty="0">
-                          <a:solidFill>
-                            <a:schemeClr val="accent3"/>
-                          </a:solidFill>
-                        </a:rPr>
-                        <a:t>—</a:t>
-                      </a:r>
-                      <a:endParaRPr lang="en-US" sz="1050" dirty="0"/>
-                    </a:p>
-                  </a:txBody>
-                  <a:tcPr marL="101600" marR="76200" marT="25400" marB="25400" anchor="ctr">
-                    <a:lnL w="0" cap="flat" cmpd="sng" algn="ctr">
-                      <a:noFill/>
-                    </a:lnL>
-                    <a:lnR w="0" cap="flat" cmpd="sng" algn="ctr">
-                      <a:noFill/>
-                    </a:lnR>
-                    <a:lnT w="0" cap="flat" cmpd="sng" algn="ctr">
-                      <a:noFill/>
-                    </a:lnT>
-                    <a:lnB w="0" cap="flat" cmpd="sng" algn="ctr">
-                      <a:noFill/>
-                    </a:lnB>
-                    <a:solidFill>
-                      <a:schemeClr val="bg1"/>
-                    </a:solidFill>
-                  </a:tcPr>
-                </a:tc>
-              </a:tr>
-              <a:tr h="330200">
-                <a:tc>
-                  <a:txBody>
-                    <a:bodyPr/>
-                    <a:lstStyle/>
-                    <a:p>
-                      <a:pPr indent="0" marL="0">
-                        <a:buNone/>
-                      </a:pPr>
-                      <a:r>
-                        <a:rPr lang="en-US" sz="1050" b="1" dirty="0">
-                          <a:solidFill>
-                            <a:schemeClr val="tx1"/>
-                          </a:solidFill>
-                        </a:rPr>
-                        <a:t>1С:УТ + витрина</a:t>
-                      </a:r>
-                      <a:endParaRPr lang="en-US" sz="1050" dirty="0"/>
-                    </a:p>
-                  </a:txBody>
-                  <a:tcPr marL="101600" marR="76200" marT="25400" marB="25400" anchor="ctr">
-                    <a:lnL w="0" cap="flat" cmpd="sng" algn="ctr">
-                      <a:noFill/>
-                    </a:lnL>
-                    <a:lnR w="0" cap="flat" cmpd="sng" algn="ctr">
-                      <a:noFill/>
-                    </a:lnR>
-                    <a:lnT w="0" cap="flat" cmpd="sng" algn="ctr">
-                      <a:noFill/>
-                    </a:lnT>
-                    <a:lnB w="0" cap="flat" cmpd="sng" algn="ctr">
-                      <a:noFill/>
-                    </a:lnB>
-                    <a:solidFill>
-                      <a:schemeClr val="bg2"/>
-                    </a:solidFill>
-                  </a:tcPr>
-                </a:tc>
-                <a:tc>
-                  <a:txBody>
-                    <a:bodyPr/>
-                    <a:lstStyle/>
-                    <a:p>
-                      <a:pPr algn="ctr" indent="0" marL="0">
-                        <a:buNone/>
-                      </a:pPr>
-                      <a:r>
-                        <a:rPr lang="en-US" sz="1050" i="1" dirty="0">
-                          <a:solidFill>
-                            <a:schemeClr val="accent3"/>
-                          </a:solidFill>
-                        </a:rPr>
-                        <a:t>—</a:t>
-                      </a:r>
-                      <a:endParaRPr lang="en-US" sz="1050" dirty="0"/>
-                    </a:p>
-                  </a:txBody>
-                  <a:tcPr marL="101600" marR="76200" marT="25400" marB="25400" anchor="ctr">
-                    <a:lnL w="0" cap="flat" cmpd="sng" algn="ctr">
-                      <a:noFill/>
-                    </a:lnL>
-                    <a:lnR w="0" cap="flat" cmpd="sng" algn="ctr">
-                      <a:noFill/>
-                    </a:lnR>
-                    <a:lnT w="0" cap="flat" cmpd="sng" algn="ctr">
-                      <a:noFill/>
-                    </a:lnT>
-                    <a:lnB w="0" cap="flat" cmpd="sng" algn="ctr">
-                      <a:noFill/>
-                    </a:lnB>
-                    <a:solidFill>
-                      <a:schemeClr val="bg2"/>
-                    </a:solidFill>
-                  </a:tcPr>
-                </a:tc>
-                <a:tc>
-                  <a:txBody>
-                    <a:bodyPr/>
-                    <a:lstStyle/>
-                    <a:p>
-                      <a:pPr algn="ctr" indent="0" marL="0">
-                        <a:buNone/>
-                      </a:pPr>
-                      <a:r>
-                        <a:rPr lang="en-US" sz="1050" i="1" dirty="0">
-                          <a:solidFill>
-                            <a:schemeClr val="accent3"/>
-                          </a:solidFill>
-                        </a:rPr>
-                        <a:t>—</a:t>
-                      </a:r>
-                      <a:endParaRPr lang="en-US" sz="1050" dirty="0"/>
-                    </a:p>
-                  </a:txBody>
-                  <a:tcPr marL="101600" marR="76200" marT="25400" marB="25400" anchor="ctr">
-                    <a:lnL w="0" cap="flat" cmpd="sng" algn="ctr">
-                      <a:noFill/>
-                    </a:lnL>
-                    <a:lnR w="0" cap="flat" cmpd="sng" algn="ctr">
-                      <a:noFill/>
-                    </a:lnR>
-                    <a:lnT w="0" cap="flat" cmpd="sng" algn="ctr">
-                      <a:noFill/>
-                    </a:lnT>
-                    <a:lnB w="0" cap="flat" cmpd="sng" algn="ctr">
-                      <a:noFill/>
-                    </a:lnB>
-                    <a:solidFill>
-                      <a:schemeClr val="bg2"/>
-                    </a:solidFill>
-                  </a:tcPr>
-                </a:tc>
-                <a:tc>
-                  <a:txBody>
-                    <a:bodyPr/>
-                    <a:lstStyle/>
-                    <a:p>
-                      <a:pPr algn="ctr" indent="0" marL="0">
-                        <a:buNone/>
-                      </a:pPr>
-                      <a:r>
-                        <a:rPr lang="en-US" sz="1050" i="1" dirty="0">
-                          <a:solidFill>
-                            <a:schemeClr val="accent3"/>
-                          </a:solidFill>
-                        </a:rPr>
-                        <a:t>—</a:t>
-                      </a:r>
-                      <a:endParaRPr lang="en-US" sz="1050" dirty="0"/>
-                    </a:p>
-                  </a:txBody>
-                  <a:tcPr marL="101600" marR="76200" marT="25400" marB="25400" anchor="ctr">
-                    <a:lnL w="0" cap="flat" cmpd="sng" algn="ctr">
-                      <a:noFill/>
-                    </a:lnL>
-                    <a:lnR w="0" cap="flat" cmpd="sng" algn="ctr">
-                      <a:noFill/>
-                    </a:lnR>
-                    <a:lnT w="0" cap="flat" cmpd="sng" algn="ctr">
-                      <a:noFill/>
-                    </a:lnT>
-                    <a:lnB w="0" cap="flat" cmpd="sng" algn="ctr">
-                      <a:noFill/>
-                    </a:lnB>
-                    <a:solidFill>
-                      <a:schemeClr val="bg2"/>
-                    </a:solidFill>
-                  </a:tcPr>
-                </a:tc>
-                <a:tc>
-                  <a:txBody>
-                    <a:bodyPr/>
-                    <a:lstStyle/>
-                    <a:p>
-                      <a:pPr algn="ctr" indent="0" marL="0">
-                        <a:buNone/>
-                      </a:pPr>
-                      <a:r>
-                        <a:rPr lang="en-US" sz="1050" i="1" dirty="0">
-                          <a:solidFill>
-                            <a:schemeClr val="accent3"/>
-                          </a:solidFill>
-                        </a:rPr>
-                        <a:t>—</a:t>
-                      </a:r>
-                      <a:endParaRPr lang="en-US" sz="1050" dirty="0"/>
-                    </a:p>
-                  </a:txBody>
-                  <a:tcPr marL="101600" marR="76200" marT="25400" marB="25400" anchor="ctr">
-                    <a:lnL w="0" cap="flat" cmpd="sng" algn="ctr">
-                      <a:noFill/>
-                    </a:lnL>
-                    <a:lnR w="0" cap="flat" cmpd="sng" algn="ctr">
-                      <a:noFill/>
-                    </a:lnR>
-                    <a:lnT w="0" cap="flat" cmpd="sng" algn="ctr">
-                      <a:noFill/>
-                    </a:lnT>
-                    <a:lnB w="0" cap="flat" cmpd="sng" algn="ctr">
-                      <a:noFill/>
-                    </a:lnB>
-                    <a:solidFill>
-                      <a:schemeClr val="bg2"/>
-                    </a:solidFill>
-                  </a:tcPr>
-                </a:tc>
-                <a:tc>
-                  <a:txBody>
-                    <a:bodyPr/>
-                    <a:lstStyle/>
-                    <a:p>
-                      <a:pPr algn="ctr" indent="0" marL="0">
-                        <a:buNone/>
-                      </a:pPr>
-                      <a:r>
-                        <a:rPr lang="en-US" sz="1050" i="1" dirty="0">
-                          <a:solidFill>
-                            <a:schemeClr val="accent3"/>
-                          </a:solidFill>
-                        </a:rPr>
-                        <a:t>—</a:t>
-                      </a:r>
-                      <a:endParaRPr lang="en-US" sz="1050" dirty="0"/>
-                    </a:p>
-                  </a:txBody>
-                  <a:tcPr marL="101600" marR="76200" marT="25400" marB="25400" anchor="ctr">
-                    <a:lnL w="0" cap="flat" cmpd="sng" algn="ctr">
-                      <a:noFill/>
-                    </a:lnL>
-                    <a:lnR w="0" cap="flat" cmpd="sng" algn="ctr">
-                      <a:noFill/>
-                    </a:lnR>
-                    <a:lnT w="0" cap="flat" cmpd="sng" algn="ctr">
-                      <a:noFill/>
-                    </a:lnT>
-                    <a:lnB w="0" cap="flat" cmpd="sng" algn="ctr">
-                      <a:noFill/>
-                    </a:lnB>
-                    <a:solidFill>
-                      <a:schemeClr val="bg2"/>
-                    </a:solidFill>
-                  </a:tcPr>
-                </a:tc>
-                <a:tc>
-                  <a:txBody>
-                    <a:bodyPr/>
-                    <a:lstStyle/>
-                    <a:p>
-                      <a:pPr algn="ctr" indent="0" marL="0">
-                        <a:buNone/>
-                      </a:pPr>
-                      <a:r>
-                        <a:rPr lang="en-US" sz="1050" i="1" dirty="0">
-                          <a:solidFill>
-                            <a:schemeClr val="accent3"/>
-                          </a:solidFill>
-                        </a:rPr>
-                        <a:t>—</a:t>
-                      </a:r>
-                      <a:endParaRPr lang="en-US" sz="1050" dirty="0"/>
-                    </a:p>
-                  </a:txBody>
-                  <a:tcPr marL="101600" marR="76200" marT="25400" marB="25400" anchor="ctr">
-                    <a:lnL w="0" cap="flat" cmpd="sng" algn="ctr">
-                      <a:noFill/>
-                    </a:lnL>
-                    <a:lnR w="0" cap="flat" cmpd="sng" algn="ctr">
-                      <a:noFill/>
-                    </a:lnR>
-                    <a:lnT w="0" cap="flat" cmpd="sng" algn="ctr">
-                      <a:noFill/>
-                    </a:lnT>
-                    <a:lnB w="0" cap="flat" cmpd="sng" algn="ctr">
-                      <a:noFill/>
-                    </a:lnB>
-                    <a:solidFill>
-                      <a:schemeClr val="bg2"/>
-                    </a:solidFill>
-                  </a:tcPr>
-                </a:tc>
-                <a:tc>
-                  <a:txBody>
-                    <a:bodyPr/>
-                    <a:lstStyle/>
-                    <a:p>
-                      <a:pPr algn="ctr" indent="0" marL="0">
-                        <a:buNone/>
-                      </a:pPr>
-                      <a:r>
-                        <a:rPr lang="en-US" sz="1050" i="1" dirty="0">
-                          <a:solidFill>
-                            <a:schemeClr val="accent3"/>
-                          </a:solidFill>
-                        </a:rPr>
-                        <a:t>—</a:t>
-                      </a:r>
-                      <a:endParaRPr lang="en-US" sz="1050" dirty="0"/>
-                    </a:p>
-                  </a:txBody>
-                  <a:tcPr marL="101600" marR="76200" marT="25400" marB="25400" anchor="ctr">
-                    <a:lnL w="0" cap="flat" cmpd="sng" algn="ctr">
-                      <a:noFill/>
-                    </a:lnL>
-                    <a:lnR w="0" cap="flat" cmpd="sng" algn="ctr">
-                      <a:noFill/>
-                    </a:lnR>
-                    <a:lnT w="0" cap="flat" cmpd="sng" algn="ctr">
-                      <a:noFill/>
-                    </a:lnT>
-                    <a:lnB w="0" cap="flat" cmpd="sng" algn="ctr">
-                      <a:noFill/>
-                    </a:lnB>
-                    <a:solidFill>
-                      <a:schemeClr val="bg2"/>
-                    </a:solidFill>
-                  </a:tcPr>
-                </a:tc>
-              </a:tr>
-              <a:tr h="330200">
-                <a:tc>
-                  <a:txBody>
-                    <a:bodyPr/>
-                    <a:lstStyle/>
-                    <a:p>
-                      <a:pPr indent="0" marL="0">
-                        <a:buNone/>
-                      </a:pPr>
-                      <a:r>
-                        <a:rPr lang="en-US" sz="1050" b="1" dirty="0">
-                          <a:solidFill>
-                            <a:schemeClr val="tx1"/>
-                          </a:solidFill>
-                        </a:rPr>
-                        <a:t>Сообщения + Excel</a:t>
-                      </a:r>
-                      <a:endParaRPr lang="en-US" sz="1050" dirty="0"/>
-                    </a:p>
-                  </a:txBody>
-                  <a:tcPr marL="101600" marR="76200" marT="25400" marB="25400" anchor="ctr">
-                    <a:lnL w="0" cap="flat" cmpd="sng" algn="ctr">
-                      <a:noFill/>
-                    </a:lnL>
-                    <a:lnR w="0" cap="flat" cmpd="sng" algn="ctr">
-                      <a:noFill/>
-                    </a:lnR>
-                    <a:lnT w="0" cap="flat" cmpd="sng" algn="ctr">
-                      <a:noFill/>
-                    </a:lnT>
-                    <a:lnB w="0" cap="flat" cmpd="sng" algn="ctr">
-                      <a:noFill/>
-                    </a:lnB>
-                    <a:solidFill>
-                      <a:schemeClr val="bg1"/>
-                    </a:solidFill>
-                  </a:tcPr>
-                </a:tc>
-                <a:tc>
-                  <a:txBody>
-                    <a:bodyPr/>
-                    <a:lstStyle/>
-                    <a:p>
-                      <a:pPr algn="ctr" indent="0" marL="0">
-                        <a:buNone/>
-                      </a:pPr>
-                      <a:r>
-                        <a:rPr lang="en-US" sz="1050" i="1" dirty="0">
-                          <a:solidFill>
-                            <a:schemeClr val="accent3"/>
-                          </a:solidFill>
-                        </a:rPr>
-                        <a:t>—</a:t>
-                      </a:r>
-                      <a:endParaRPr lang="en-US" sz="1050" dirty="0"/>
-                    </a:p>
-                  </a:txBody>
-                  <a:tcPr marL="101600" marR="76200" marT="25400" marB="25400" anchor="ctr">
-                    <a:lnL w="0" cap="flat" cmpd="sng" algn="ctr">
-                      <a:noFill/>
-                    </a:lnL>
-                    <a:lnR w="0" cap="flat" cmpd="sng" algn="ctr">
-                      <a:noFill/>
-                    </a:lnR>
-                    <a:lnT w="0" cap="flat" cmpd="sng" algn="ctr">
-                      <a:noFill/>
-                    </a:lnT>
-                    <a:lnB w="0" cap="flat" cmpd="sng" algn="ctr">
-                      <a:noFill/>
-                    </a:lnB>
-                    <a:solidFill>
-                      <a:schemeClr val="bg1"/>
-                    </a:solidFill>
-                  </a:tcPr>
-                </a:tc>
-                <a:tc>
-                  <a:txBody>
-                    <a:bodyPr/>
-                    <a:lstStyle/>
-                    <a:p>
-                      <a:pPr algn="ctr" indent="0" marL="0">
-                        <a:buNone/>
-                      </a:pPr>
-                      <a:r>
-                        <a:rPr lang="en-US" sz="1050" i="1" dirty="0">
-                          <a:solidFill>
-                            <a:schemeClr val="accent3"/>
-                          </a:solidFill>
-                        </a:rPr>
-                        <a:t>—</a:t>
-                      </a:r>
-                      <a:endParaRPr lang="en-US" sz="1050" dirty="0"/>
-                    </a:p>
-                  </a:txBody>
-                  <a:tcPr marL="101600" marR="76200" marT="25400" marB="25400" anchor="ctr">
-                    <a:lnL w="0" cap="flat" cmpd="sng" algn="ctr">
-                      <a:noFill/>
-                    </a:lnL>
-                    <a:lnR w="0" cap="flat" cmpd="sng" algn="ctr">
-                      <a:noFill/>
-                    </a:lnR>
-                    <a:lnT w="0" cap="flat" cmpd="sng" algn="ctr">
-                      <a:noFill/>
-                    </a:lnT>
-                    <a:lnB w="0" cap="flat" cmpd="sng" algn="ctr">
-                      <a:noFill/>
-                    </a:lnB>
-                    <a:solidFill>
-                      <a:schemeClr val="bg1"/>
-                    </a:solidFill>
-                  </a:tcPr>
-                </a:tc>
-                <a:tc>
-                  <a:txBody>
-                    <a:bodyPr/>
-                    <a:lstStyle/>
-                    <a:p>
-                      <a:pPr algn="ctr" indent="0" marL="0">
-                        <a:buNone/>
-                      </a:pPr>
-                      <a:r>
-                        <a:rPr lang="en-US" sz="1050" i="1" dirty="0">
-                          <a:solidFill>
-                            <a:schemeClr val="accent3"/>
-                          </a:solidFill>
-                        </a:rPr>
-                        <a:t>—</a:t>
-                      </a:r>
-                      <a:endParaRPr lang="en-US" sz="1050" dirty="0"/>
-                    </a:p>
-                  </a:txBody>
-                  <a:tcPr marL="101600" marR="76200" marT="25400" marB="25400" anchor="ctr">
-                    <a:lnL w="0" cap="flat" cmpd="sng" algn="ctr">
-                      <a:noFill/>
-                    </a:lnL>
-                    <a:lnR w="0" cap="flat" cmpd="sng" algn="ctr">
-                      <a:noFill/>
-                    </a:lnR>
-                    <a:lnT w="0" cap="flat" cmpd="sng" algn="ctr">
-                      <a:noFill/>
-                    </a:lnT>
-                    <a:lnB w="0" cap="flat" cmpd="sng" algn="ctr">
-                      <a:noFill/>
-                    </a:lnB>
-                    <a:solidFill>
-                      <a:schemeClr val="bg1"/>
-                    </a:solidFill>
-                  </a:tcPr>
-                </a:tc>
-                <a:tc>
-                  <a:txBody>
-                    <a:bodyPr/>
-                    <a:lstStyle/>
-                    <a:p>
-                      <a:pPr algn="ctr" indent="0" marL="0">
-                        <a:buNone/>
-                      </a:pPr>
-                      <a:r>
-                        <a:rPr lang="en-US" sz="1050" i="1" dirty="0">
-                          <a:solidFill>
-                            <a:schemeClr val="accent3"/>
-                          </a:solidFill>
-                        </a:rPr>
-                        <a:t>—</a:t>
-                      </a:r>
-                      <a:endParaRPr lang="en-US" sz="1050" dirty="0"/>
-                    </a:p>
-                  </a:txBody>
-                  <a:tcPr marL="101600" marR="76200" marT="25400" marB="25400" anchor="ctr">
-                    <a:lnL w="0" cap="flat" cmpd="sng" algn="ctr">
-                      <a:noFill/>
-                    </a:lnL>
-                    <a:lnR w="0" cap="flat" cmpd="sng" algn="ctr">
-                      <a:noFill/>
-                    </a:lnR>
-                    <a:lnT w="0" cap="flat" cmpd="sng" algn="ctr">
-                      <a:noFill/>
-                    </a:lnT>
-                    <a:lnB w="0" cap="flat" cmpd="sng" algn="ctr">
-                      <a:noFill/>
-                    </a:lnB>
-                    <a:solidFill>
-                      <a:schemeClr val="bg1"/>
-                    </a:solidFill>
-                  </a:tcPr>
-                </a:tc>
-                <a:tc>
-                  <a:txBody>
-                    <a:bodyPr/>
-                    <a:lstStyle/>
-                    <a:p>
-                      <a:pPr algn="ctr" indent="0" marL="0">
-                        <a:buNone/>
-                      </a:pPr>
-                      <a:r>
-                        <a:rPr lang="en-US" sz="1050" i="1" dirty="0">
-                          <a:solidFill>
-                            <a:schemeClr val="accent3"/>
-                          </a:solidFill>
-                        </a:rPr>
-                        <a:t>—</a:t>
-                      </a:r>
-                      <a:endParaRPr lang="en-US" sz="1050" dirty="0"/>
-                    </a:p>
-                  </a:txBody>
-                  <a:tcPr marL="101600" marR="76200" marT="25400" marB="25400" anchor="ctr">
-                    <a:lnL w="0" cap="flat" cmpd="sng" algn="ctr">
-                      <a:noFill/>
-                    </a:lnL>
-                    <a:lnR w="0" cap="flat" cmpd="sng" algn="ctr">
-                      <a:noFill/>
-                    </a:lnR>
-                    <a:lnT w="0" cap="flat" cmpd="sng" algn="ctr">
-                      <a:noFill/>
-                    </a:lnT>
-                    <a:lnB w="0" cap="flat" cmpd="sng" algn="ctr">
-                      <a:noFill/>
-                    </a:lnB>
-                    <a:solidFill>
-                      <a:schemeClr val="bg1"/>
-                    </a:solidFill>
-                  </a:tcPr>
-                </a:tc>
-                <a:tc>
-                  <a:txBody>
-                    <a:bodyPr/>
-                    <a:lstStyle/>
-                    <a:p>
-                      <a:pPr algn="ctr" indent="0" marL="0">
-                        <a:buNone/>
-                      </a:pPr>
-                      <a:r>
-                        <a:rPr lang="en-US" sz="1050" i="1" dirty="0">
-                          <a:solidFill>
-                            <a:schemeClr val="accent3"/>
-                          </a:solidFill>
-                        </a:rPr>
-                        <a:t>—</a:t>
-                      </a:r>
-                      <a:endParaRPr lang="en-US" sz="1050" dirty="0"/>
-                    </a:p>
-                  </a:txBody>
-                  <a:tcPr marL="101600" marR="76200" marT="25400" marB="25400" anchor="ctr">
-                    <a:lnL w="0" cap="flat" cmpd="sng" algn="ctr">
-                      <a:noFill/>
-                    </a:lnL>
-                    <a:lnR w="0" cap="flat" cmpd="sng" algn="ctr">
-                      <a:noFill/>
-                    </a:lnR>
-                    <a:lnT w="0" cap="flat" cmpd="sng" algn="ctr">
-                      <a:noFill/>
-                    </a:lnT>
-                    <a:lnB w="0" cap="flat" cmpd="sng" algn="ctr">
-                      <a:noFill/>
-                    </a:lnB>
-                    <a:solidFill>
-                      <a:schemeClr val="bg1"/>
-                    </a:solidFill>
-                  </a:tcPr>
-                </a:tc>
-                <a:tc>
-                  <a:txBody>
-                    <a:bodyPr/>
-                    <a:lstStyle/>
-                    <a:p>
-                      <a:pPr algn="ctr" indent="0" marL="0">
-                        <a:buNone/>
-                      </a:pPr>
-                      <a:r>
-                        <a:rPr lang="en-US" sz="1050" i="1" dirty="0">
-                          <a:solidFill>
-                            <a:schemeClr val="accent3"/>
-                          </a:solidFill>
-                        </a:rPr>
-                        <a:t>—</a:t>
-                      </a:r>
-                      <a:endParaRPr lang="en-US" sz="1050" dirty="0"/>
-                    </a:p>
-                  </a:txBody>
-                  <a:tcPr marL="101600" marR="76200" marT="25400" marB="25400" anchor="ctr">
-                    <a:lnL w="0" cap="flat" cmpd="sng" algn="ctr">
-                      <a:noFill/>
-                    </a:lnL>
-                    <a:lnR w="0" cap="flat" cmpd="sng" algn="ctr">
-                      <a:noFill/>
-                    </a:lnR>
-                    <a:lnT w="0" cap="flat" cmpd="sng" algn="ctr">
-                      <a:noFill/>
-                    </a:lnT>
-                    <a:lnB w="0" cap="flat" cmpd="sng" algn="ctr">
-                      <a:noFill/>
-                    </a:lnB>
-                    <a:solidFill>
-                      <a:schemeClr val="bg1"/>
-                    </a:solidFill>
-                  </a:tcPr>
-                </a:tc>
-              </a:tr>
-            </a:tbl>
-          </a:graphicData>
-        </a:graphic>
-      </p:graphicFrame>
-      <p:sp>
-        <p:nvSpPr>
-          <p:cNvPr id="11" name="text-180"/>
-          <p:cNvSpPr txBox="1"/>
-          <p:nvPr/>
-        </p:nvSpPr>
-        <p:spPr>
-          <a:xfrm>
-            <a:off x="594360" y="5715000"/>
-            <a:ext cx="10972800" cy="177800"/>
-          </a:xfrm>
-          <a:prstGeom prst="rect">
-            <a:avLst/>
-          </a:prstGeom>
-          <a:noFill/>
-          <a:ln/>
-        </p:spPr>
-        <p:txBody>
-          <a:bodyPr wrap="square" lIns="0" tIns="0" rIns="0" bIns="0" rtlCol="0" anchor="t"/>
-          <a:lstStyle/>
-          <a:p>
-            <a:pPr indent="0" marL="0">
-              <a:buNone/>
-            </a:pPr>
-            <a:r>
-              <a:rPr lang="en-US" sz="1000" dirty="0">
-                <a:solidFill>
-                  <a:schemeClr val="accent3"/>
-                </a:solidFill>
-              </a:rPr>
-              <a:t>Дата замера, редакции и версии аналогов: [заполнить]</a:t>
-            </a:r>
-            <a:endParaRPr lang="en-US" sz="1000" dirty="0"/>
-          </a:p>
-        </p:txBody>
-      </p:sp>
-    </p:spTree>
-  </p:cSld>
-  <p:clrMapOvr>
-    <a:masterClrMapping/>
-  </p:clrMapOvr>
-</p:sld>
-</file>
-
-<file path=ppt/slides/slide14.xml><?xml version="1.0" encoding="utf-8"?>
-<p:sld xmlns:a="http://schemas.openxmlformats.org/drawingml/2006/main" xmlns:r="http://schemas.openxmlformats.org/officeDocument/2006/relationships" xmlns:p="http://schemas.openxmlformats.org/presentationml/2006/main">
-  <p:cSld name="Slide 14">
-    <p:spTree>
-      <p:nvGrpSpPr>
-        <p:cNvPr id="1" name=""/>
-        <p:cNvGrpSpPr/>
-        <p:nvPr/>
-      </p:nvGrpSpPr>
-      <p:grpSpPr>
-        <a:xfrm>
-          <a:off x="0" y="0"/>
-          <a:ext cx="0" cy="0"/>
-          <a:chOff x="0" y="0"/>
-          <a:chExt cx="0" cy="0"/>
-        </a:xfrm>
-      </p:grpSpPr>
-      <p:sp>
-        <p:nvSpPr>
-          <p:cNvPr id="2" name="Text 1"/>
-          <p:cNvSpPr/>
-          <p:nvPr>
-            <p:ph idx="102" type="body" hasCustomPrompt="1"/>
-          </p:nvPr>
-        </p:nvSpPr>
-        <p:spPr>
-          <a:xfrm>
-            <a:off x="594360" y="474980"/>
-            <a:ext cx="603250" cy="603250"/>
-          </a:xfrm>
-          <a:prstGeom prst="rect">
-            <a:avLst/>
-          </a:prstGeom>
-          <a:noFill/>
-          <a:ln/>
-        </p:spPr>
-        <p:txBody>
-          <a:bodyPr wrap="square" lIns="0" tIns="0" rIns="0" bIns="0" rtlCol="0" anchor="ctr"/>
-          <a:lstStyle/>
-          <a:p>
-            <a:pPr algn="ctr" indent="0" marL="0">
-              <a:buNone/>
-            </a:pPr>
-            <a:r>
-              <a:rPr lang="en-US" sz="2200" b="1" dirty="0">
-                <a:solidFill>
-                  <a:schemeClr val="bg1"/>
-                </a:solidFill>
-              </a:rPr>
-              <a:t>Д4</a:t>
-            </a:r>
-            <a:endParaRPr lang="en-US" sz="2200" dirty="0"/>
-          </a:p>
-        </p:txBody>
-      </p:sp>
-      <p:sp>
-        <p:nvSpPr>
-          <p:cNvPr id="3" name="Text 1"/>
-          <p:cNvSpPr/>
-          <p:nvPr>
-            <p:ph idx="103" type="body" hasCustomPrompt="1"/>
-          </p:nvPr>
-        </p:nvSpPr>
-        <p:spPr>
-          <a:xfrm>
-            <a:off x="1435100" y="419100"/>
-            <a:ext cx="8382000" cy="203200"/>
-          </a:xfrm>
-          <a:prstGeom prst="rect">
-            <a:avLst/>
-          </a:prstGeom>
-          <a:noFill/>
-          <a:ln/>
-        </p:spPr>
-        <p:txBody>
-          <a:bodyPr wrap="square" lIns="0" tIns="0" rIns="0" bIns="0" rtlCol="0" anchor="t"/>
-          <a:lstStyle/>
-          <a:p>
-            <a:pPr algn="l" indent="0" marL="0">
-              <a:buNone/>
-            </a:pPr>
-            <a:r>
-              <a:rPr lang="en-US" sz="950" b="1" spc="300" kern="0" dirty="0">
-                <a:solidFill>
-                  <a:schemeClr val="accent2"/>
-                </a:solidFill>
-              </a:rPr>
-              <a:t>ДОПОЛНИТЕЛЬНЫЙ СЛАЙД</a:t>
-            </a:r>
-            <a:endParaRPr lang="en-US" sz="950" dirty="0"/>
-          </a:p>
-        </p:txBody>
-      </p:sp>
-      <p:sp>
-        <p:nvSpPr>
-          <p:cNvPr id="4" name="Text 1"/>
-          <p:cNvSpPr/>
-          <p:nvPr>
-            <p:ph idx="104" type="title" hasCustomPrompt="1"/>
-          </p:nvPr>
-        </p:nvSpPr>
-        <p:spPr>
-          <a:xfrm>
-            <a:off x="1435100" y="647700"/>
-            <a:ext cx="8636000" cy="482600"/>
-          </a:xfrm>
-          <a:prstGeom prst="rect">
-            <a:avLst/>
-          </a:prstGeom>
-          <a:noFill/>
-          <a:ln/>
-        </p:spPr>
-        <p:txBody>
-          <a:bodyPr wrap="square" lIns="0" tIns="0" rIns="0" bIns="0" rtlCol="0" anchor="t"/>
-          <a:lstStyle/>
-          <a:p>
-            <a:pPr algn="l" indent="0" marL="0">
-              <a:buNone/>
-            </a:pPr>
-            <a:r>
-              <a:rPr lang="en-US" sz="2700" b="1" dirty="0">
-                <a:solidFill>
-                  <a:schemeClr val="tx1"/>
-                </a:solidFill>
-              </a:rPr>
-              <a:t>Резерв и жизненный цикл заказа</a:t>
-            </a:r>
-            <a:endParaRPr lang="en-US" sz="2700" dirty="0"/>
-          </a:p>
-        </p:txBody>
-      </p:sp>
-      <p:sp>
-        <p:nvSpPr>
-          <p:cNvPr id="5" name="Text 1"/>
-          <p:cNvSpPr/>
-          <p:nvPr>
-            <p:ph idx="105" type="body" hasCustomPrompt="1"/>
-          </p:nvPr>
-        </p:nvSpPr>
-        <p:spPr>
-          <a:xfrm>
-            <a:off x="594360" y="1346200"/>
-            <a:ext cx="10972800" cy="304800"/>
-          </a:xfrm>
-          <a:prstGeom prst="rect">
-            <a:avLst/>
-          </a:prstGeom>
-          <a:noFill/>
-          <a:ln/>
-        </p:spPr>
-        <p:txBody>
-          <a:bodyPr wrap="square" lIns="0" tIns="0" rIns="0" bIns="0" rtlCol="0" anchor="t"/>
-          <a:lstStyle/>
-          <a:p>
-            <a:pPr algn="l" indent="0" marL="0">
-              <a:buNone/>
-            </a:pPr>
-            <a:r>
-              <a:rPr lang="en-US" sz="1300" dirty="0">
-                <a:solidFill>
-                  <a:schemeClr val="accent3"/>
-                </a:solidFill>
-              </a:rPr>
-              <a:t>Состояния заказа (ВКР, рис. 1.9) и таблицы, которые участвуют в резерве (отчёт, разд. 2.4)</a:t>
-            </a:r>
-            <a:endParaRPr lang="en-US" sz="1300" dirty="0"/>
-          </a:p>
-        </p:txBody>
-      </p:sp>
-      <p:sp>
-        <p:nvSpPr>
-          <p:cNvPr id="6" name="Text 1"/>
-          <p:cNvSpPr/>
-          <p:nvPr>
-            <p:ph idx="106" type="body" hasCustomPrompt="1"/>
-          </p:nvPr>
-        </p:nvSpPr>
-        <p:spPr>
-          <a:xfrm>
-            <a:off x="11049000" y="6388100"/>
-            <a:ext cx="609600" cy="177800"/>
-          </a:xfrm>
-          <a:prstGeom prst="rect">
-            <a:avLst/>
-          </a:prstGeom>
-          <a:noFill/>
-          <a:ln/>
-        </p:spPr>
-        <p:txBody>
-          <a:bodyPr wrap="square" lIns="0" tIns="0" rIns="0" bIns="0" rtlCol="0" anchor="t"/>
-          <a:lstStyle/>
-          <a:p>
-            <a:pPr algn="r" indent="0" marL="0">
-              <a:buNone/>
-            </a:pPr>
-            <a:r>
-              <a:rPr lang="en-US" sz="900" dirty="0">
-                <a:solidFill>
-                  <a:schemeClr val="accent3"/>
-                </a:solidFill>
-              </a:rPr>
-              <a:t>Д4</a:t>
-            </a:r>
-            <a:endParaRPr lang="en-US" sz="900" dirty="0"/>
-          </a:p>
-        </p:txBody>
-      </p:sp>
-      <p:sp>
-        <p:nvSpPr>
-          <p:cNvPr id="7" name="text-181"/>
-          <p:cNvSpPr txBox="1"/>
-          <p:nvPr/>
-        </p:nvSpPr>
-        <p:spPr>
-          <a:xfrm>
-            <a:off x="594360" y="1778000"/>
-            <a:ext cx="5080000" cy="177800"/>
-          </a:xfrm>
-          <a:prstGeom prst="rect">
-            <a:avLst/>
-          </a:prstGeom>
-          <a:noFill/>
-          <a:ln/>
-        </p:spPr>
-        <p:txBody>
-          <a:bodyPr wrap="square" lIns="0" tIns="0" rIns="0" bIns="0" rtlCol="0" anchor="t"/>
-          <a:lstStyle/>
-          <a:p>
-            <a:pPr indent="0" marL="0">
-              <a:buNone/>
-            </a:pPr>
-            <a:r>
-              <a:rPr lang="en-US" sz="900" b="1" spc="200" kern="0" dirty="0">
-                <a:solidFill>
-                  <a:schemeClr val="accent2"/>
-                </a:solidFill>
-              </a:rPr>
-              <a:t>СОСТОЯНИЯ ЗАКАЗА</a:t>
-            </a:r>
-            <a:endParaRPr lang="en-US" sz="900" dirty="0"/>
-          </a:p>
-        </p:txBody>
-      </p:sp>
-      <p:sp>
-        <p:nvSpPr>
-          <p:cNvPr id="8" name="state-182"/>
-          <p:cNvSpPr/>
-          <p:nvPr/>
-        </p:nvSpPr>
-        <p:spPr>
-          <a:xfrm>
-            <a:off x="594360" y="2032000"/>
-            <a:ext cx="787400" cy="330200"/>
-          </a:xfrm>
-          <a:prstGeom prst="roundRect">
-            <a:avLst>
-              <a:gd name="adj" fmla="val 49846"/>
-            </a:avLst>
-          </a:prstGeom>
-          <a:solidFill>
-            <a:schemeClr val="bg2"/>
-          </a:solidFill>
-          <a:ln/>
-        </p:spPr>
-      </p:sp>
-      <p:sp>
-        <p:nvSpPr>
-          <p:cNvPr id="9" name="text-183"/>
-          <p:cNvSpPr txBox="1"/>
-          <p:nvPr/>
-        </p:nvSpPr>
-        <p:spPr>
-          <a:xfrm>
-            <a:off x="594360" y="2032000"/>
-            <a:ext cx="787400" cy="330200"/>
-          </a:xfrm>
-          <a:prstGeom prst="rect">
-            <a:avLst/>
-          </a:prstGeom>
-          <a:noFill/>
-          <a:ln/>
-        </p:spPr>
-        <p:txBody>
-          <a:bodyPr wrap="square" lIns="0" tIns="0" rIns="0" bIns="0" rtlCol="0" anchor="ctr"/>
-          <a:lstStyle/>
-          <a:p>
-            <a:pPr algn="ctr" indent="0" marL="0">
-              <a:buNone/>
-            </a:pPr>
-            <a:r>
-              <a:rPr lang="en-US" sz="1050" dirty="0">
-                <a:solidFill>
-                  <a:schemeClr val="tx1"/>
-                </a:solidFill>
-              </a:rPr>
-              <a:t>Создан</a:t>
-            </a:r>
-            <a:endParaRPr lang="en-US" sz="1050" dirty="0"/>
-          </a:p>
-        </p:txBody>
-      </p:sp>
-      <p:sp>
-        <p:nvSpPr>
-          <p:cNvPr id="10" name="text-184"/>
-          <p:cNvSpPr txBox="1"/>
-          <p:nvPr/>
-        </p:nvSpPr>
-        <p:spPr>
-          <a:xfrm>
-            <a:off x="1381760" y="2032000"/>
-            <a:ext cx="279400" cy="330200"/>
-          </a:xfrm>
-          <a:prstGeom prst="rect">
-            <a:avLst/>
-          </a:prstGeom>
-          <a:noFill/>
-          <a:ln/>
-        </p:spPr>
-        <p:txBody>
-          <a:bodyPr wrap="square" lIns="0" tIns="0" rIns="0" bIns="0" rtlCol="0" anchor="ctr"/>
-          <a:lstStyle/>
-          <a:p>
-            <a:pPr algn="ctr" indent="0" marL="0">
-              <a:buNone/>
-            </a:pPr>
-            <a:r>
-              <a:rPr lang="en-US" sz="1100" dirty="0">
-                <a:solidFill>
-                  <a:schemeClr val="accent3"/>
-                </a:solidFill>
-              </a:rPr>
-              <a:t>→</a:t>
-            </a:r>
-            <a:endParaRPr lang="en-US" sz="1100" dirty="0"/>
-          </a:p>
-        </p:txBody>
-      </p:sp>
-      <p:sp>
-        <p:nvSpPr>
-          <p:cNvPr id="11" name="state-185"/>
-          <p:cNvSpPr/>
-          <p:nvPr/>
-        </p:nvSpPr>
-        <p:spPr>
-          <a:xfrm>
-            <a:off x="1661160" y="2032000"/>
-            <a:ext cx="1397000" cy="330200"/>
-          </a:xfrm>
-          <a:prstGeom prst="roundRect">
-            <a:avLst>
-              <a:gd name="adj" fmla="val 49846"/>
-            </a:avLst>
-          </a:prstGeom>
-          <a:solidFill>
-            <a:schemeClr val="bg2"/>
-          </a:solidFill>
-          <a:ln/>
-        </p:spPr>
-      </p:sp>
-      <p:sp>
-        <p:nvSpPr>
-          <p:cNvPr id="12" name="text-186"/>
-          <p:cNvSpPr txBox="1"/>
-          <p:nvPr/>
-        </p:nvSpPr>
-        <p:spPr>
-          <a:xfrm>
-            <a:off x="1661160" y="2032000"/>
-            <a:ext cx="1397000" cy="330200"/>
-          </a:xfrm>
-          <a:prstGeom prst="rect">
-            <a:avLst/>
-          </a:prstGeom>
-          <a:noFill/>
-          <a:ln/>
-        </p:spPr>
-        <p:txBody>
-          <a:bodyPr wrap="square" lIns="0" tIns="0" rIns="0" bIns="0" rtlCol="0" anchor="ctr"/>
-          <a:lstStyle/>
-          <a:p>
-            <a:pPr algn="ctr" indent="0" marL="0">
-              <a:buNone/>
-            </a:pPr>
-            <a:r>
-              <a:rPr lang="en-US" sz="1050" dirty="0">
-                <a:solidFill>
-                  <a:schemeClr val="tx1"/>
-                </a:solidFill>
-              </a:rPr>
-              <a:t>Ожидает оплату</a:t>
-            </a:r>
-            <a:endParaRPr lang="en-US" sz="1050" dirty="0"/>
-          </a:p>
-        </p:txBody>
-      </p:sp>
-      <p:sp>
-        <p:nvSpPr>
-          <p:cNvPr id="13" name="text-187"/>
-          <p:cNvSpPr txBox="1"/>
-          <p:nvPr/>
-        </p:nvSpPr>
-        <p:spPr>
-          <a:xfrm>
-            <a:off x="3058160" y="2032000"/>
-            <a:ext cx="279400" cy="330200"/>
-          </a:xfrm>
-          <a:prstGeom prst="rect">
-            <a:avLst/>
-          </a:prstGeom>
-          <a:noFill/>
-          <a:ln/>
-        </p:spPr>
-        <p:txBody>
-          <a:bodyPr wrap="square" lIns="0" tIns="0" rIns="0" bIns="0" rtlCol="0" anchor="ctr"/>
-          <a:lstStyle/>
-          <a:p>
-            <a:pPr algn="ctr" indent="0" marL="0">
-              <a:buNone/>
-            </a:pPr>
-            <a:r>
-              <a:rPr lang="en-US" sz="1100" dirty="0">
-                <a:solidFill>
-                  <a:schemeClr val="accent3"/>
-                </a:solidFill>
-              </a:rPr>
-              <a:t>→</a:t>
-            </a:r>
-            <a:endParaRPr lang="en-US" sz="1100" dirty="0"/>
-          </a:p>
-        </p:txBody>
-      </p:sp>
-      <p:sp>
-        <p:nvSpPr>
-          <p:cNvPr id="14" name="state-188"/>
-          <p:cNvSpPr/>
-          <p:nvPr/>
-        </p:nvSpPr>
-        <p:spPr>
-          <a:xfrm>
-            <a:off x="3337560" y="2032000"/>
-            <a:ext cx="863600" cy="330200"/>
-          </a:xfrm>
-          <a:prstGeom prst="roundRect">
-            <a:avLst>
-              <a:gd name="adj" fmla="val 49846"/>
-            </a:avLst>
-          </a:prstGeom>
-          <a:solidFill>
-            <a:schemeClr val="bg2"/>
-          </a:solidFill>
-          <a:ln/>
-        </p:spPr>
-      </p:sp>
-      <p:sp>
-        <p:nvSpPr>
-          <p:cNvPr id="15" name="text-189"/>
-          <p:cNvSpPr txBox="1"/>
-          <p:nvPr/>
-        </p:nvSpPr>
-        <p:spPr>
-          <a:xfrm>
-            <a:off x="3337560" y="2032000"/>
-            <a:ext cx="863600" cy="330200"/>
-          </a:xfrm>
-          <a:prstGeom prst="rect">
-            <a:avLst/>
-          </a:prstGeom>
-          <a:noFill/>
-          <a:ln/>
-        </p:spPr>
-        <p:txBody>
-          <a:bodyPr wrap="square" lIns="0" tIns="0" rIns="0" bIns="0" rtlCol="0" anchor="ctr"/>
-          <a:lstStyle/>
-          <a:p>
-            <a:pPr algn="ctr" indent="0" marL="0">
-              <a:buNone/>
-            </a:pPr>
-            <a:r>
-              <a:rPr lang="en-US" sz="1050" dirty="0">
-                <a:solidFill>
-                  <a:schemeClr val="tx1"/>
-                </a:solidFill>
-              </a:rPr>
-              <a:t>Оплачен</a:t>
-            </a:r>
-            <a:endParaRPr lang="en-US" sz="1050" dirty="0"/>
-          </a:p>
-        </p:txBody>
-      </p:sp>
-      <p:sp>
-        <p:nvSpPr>
-          <p:cNvPr id="16" name="text-190"/>
-          <p:cNvSpPr txBox="1"/>
-          <p:nvPr/>
-        </p:nvSpPr>
-        <p:spPr>
-          <a:xfrm>
-            <a:off x="4201160" y="2032000"/>
-            <a:ext cx="279400" cy="330200"/>
-          </a:xfrm>
-          <a:prstGeom prst="rect">
-            <a:avLst/>
-          </a:prstGeom>
-          <a:noFill/>
-          <a:ln/>
-        </p:spPr>
-        <p:txBody>
-          <a:bodyPr wrap="square" lIns="0" tIns="0" rIns="0" bIns="0" rtlCol="0" anchor="ctr"/>
-          <a:lstStyle/>
-          <a:p>
-            <a:pPr algn="ctr" indent="0" marL="0">
-              <a:buNone/>
-            </a:pPr>
-            <a:r>
-              <a:rPr lang="en-US" sz="1100" dirty="0">
-                <a:solidFill>
-                  <a:schemeClr val="accent3"/>
-                </a:solidFill>
-              </a:rPr>
-              <a:t>→</a:t>
-            </a:r>
-            <a:endParaRPr lang="en-US" sz="1100" dirty="0"/>
-          </a:p>
-        </p:txBody>
-      </p:sp>
-      <p:sp>
-        <p:nvSpPr>
-          <p:cNvPr id="17" name="state-191"/>
-          <p:cNvSpPr/>
-          <p:nvPr/>
-        </p:nvSpPr>
-        <p:spPr>
-          <a:xfrm>
-            <a:off x="4480560" y="2032000"/>
-            <a:ext cx="939800" cy="330200"/>
-          </a:xfrm>
-          <a:prstGeom prst="roundRect">
-            <a:avLst>
-              <a:gd name="adj" fmla="val 49846"/>
-            </a:avLst>
-          </a:prstGeom>
-          <a:solidFill>
-            <a:schemeClr val="bg2"/>
-          </a:solidFill>
-          <a:ln/>
-        </p:spPr>
-      </p:sp>
-      <p:sp>
-        <p:nvSpPr>
-          <p:cNvPr id="18" name="text-192"/>
-          <p:cNvSpPr txBox="1"/>
-          <p:nvPr/>
-        </p:nvSpPr>
-        <p:spPr>
-          <a:xfrm>
-            <a:off x="4480560" y="2032000"/>
-            <a:ext cx="939800" cy="330200"/>
-          </a:xfrm>
-          <a:prstGeom prst="rect">
-            <a:avLst/>
-          </a:prstGeom>
-          <a:noFill/>
-          <a:ln/>
-        </p:spPr>
-        <p:txBody>
-          <a:bodyPr wrap="square" lIns="0" tIns="0" rIns="0" bIns="0" rtlCol="0" anchor="ctr"/>
-          <a:lstStyle/>
-          <a:p>
-            <a:pPr algn="ctr" indent="0" marL="0">
-              <a:buNone/>
-            </a:pPr>
-            <a:r>
-              <a:rPr lang="en-US" sz="1050" dirty="0">
-                <a:solidFill>
-                  <a:schemeClr val="tx1"/>
-                </a:solidFill>
-              </a:rPr>
-              <a:t>В сборке</a:t>
-            </a:r>
-            <a:endParaRPr lang="en-US" sz="1050" dirty="0"/>
-          </a:p>
-        </p:txBody>
-      </p:sp>
-      <p:sp>
-        <p:nvSpPr>
-          <p:cNvPr id="19" name="text-193"/>
-          <p:cNvSpPr txBox="1"/>
-          <p:nvPr/>
-        </p:nvSpPr>
-        <p:spPr>
-          <a:xfrm>
-            <a:off x="5420360" y="2032000"/>
-            <a:ext cx="279400" cy="330200"/>
-          </a:xfrm>
-          <a:prstGeom prst="rect">
-            <a:avLst/>
-          </a:prstGeom>
-          <a:noFill/>
-          <a:ln/>
-        </p:spPr>
-        <p:txBody>
-          <a:bodyPr wrap="square" lIns="0" tIns="0" rIns="0" bIns="0" rtlCol="0" anchor="ctr"/>
-          <a:lstStyle/>
-          <a:p>
-            <a:pPr algn="ctr" indent="0" marL="0">
-              <a:buNone/>
-            </a:pPr>
-            <a:r>
-              <a:rPr lang="en-US" sz="1100" dirty="0">
-                <a:solidFill>
-                  <a:schemeClr val="accent3"/>
-                </a:solidFill>
-              </a:rPr>
-              <a:t>→</a:t>
-            </a:r>
-            <a:endParaRPr lang="en-US" sz="1100" dirty="0"/>
-          </a:p>
-        </p:txBody>
-      </p:sp>
-      <p:sp>
-        <p:nvSpPr>
-          <p:cNvPr id="20" name="state-194"/>
-          <p:cNvSpPr/>
-          <p:nvPr/>
-        </p:nvSpPr>
-        <p:spPr>
-          <a:xfrm>
-            <a:off x="5699760" y="2032000"/>
-            <a:ext cx="1701800" cy="330200"/>
-          </a:xfrm>
-          <a:prstGeom prst="roundRect">
-            <a:avLst>
-              <a:gd name="adj" fmla="val 49846"/>
-            </a:avLst>
-          </a:prstGeom>
-          <a:solidFill>
-            <a:schemeClr val="bg2"/>
-          </a:solidFill>
-          <a:ln/>
-        </p:spPr>
-      </p:sp>
-      <p:sp>
-        <p:nvSpPr>
-          <p:cNvPr id="21" name="text-195"/>
-          <p:cNvSpPr txBox="1"/>
-          <p:nvPr/>
-        </p:nvSpPr>
-        <p:spPr>
-          <a:xfrm>
-            <a:off x="5699760" y="2032000"/>
-            <a:ext cx="1701800" cy="330200"/>
-          </a:xfrm>
-          <a:prstGeom prst="rect">
-            <a:avLst/>
-          </a:prstGeom>
-          <a:noFill/>
-          <a:ln/>
-        </p:spPr>
-        <p:txBody>
-          <a:bodyPr wrap="square" lIns="0" tIns="0" rIns="0" bIns="0" rtlCol="0" anchor="ctr"/>
-          <a:lstStyle/>
-          <a:p>
-            <a:pPr algn="ctr" indent="0" marL="0">
-              <a:buNone/>
-            </a:pPr>
-            <a:r>
-              <a:rPr lang="en-US" sz="1050" dirty="0">
-                <a:solidFill>
-                  <a:schemeClr val="tx1"/>
-                </a:solidFill>
-              </a:rPr>
-              <a:t>Передан в доставку</a:t>
-            </a:r>
-            <a:endParaRPr lang="en-US" sz="1050" dirty="0"/>
-          </a:p>
-        </p:txBody>
-      </p:sp>
-      <p:sp>
-        <p:nvSpPr>
-          <p:cNvPr id="22" name="text-196"/>
-          <p:cNvSpPr txBox="1"/>
-          <p:nvPr/>
-        </p:nvSpPr>
-        <p:spPr>
-          <a:xfrm>
-            <a:off x="7401560" y="2032000"/>
-            <a:ext cx="279400" cy="330200"/>
-          </a:xfrm>
-          <a:prstGeom prst="rect">
-            <a:avLst/>
-          </a:prstGeom>
-          <a:noFill/>
-          <a:ln/>
-        </p:spPr>
-        <p:txBody>
-          <a:bodyPr wrap="square" lIns="0" tIns="0" rIns="0" bIns="0" rtlCol="0" anchor="ctr"/>
-          <a:lstStyle/>
-          <a:p>
-            <a:pPr algn="ctr" indent="0" marL="0">
-              <a:buNone/>
-            </a:pPr>
-            <a:r>
-              <a:rPr lang="en-US" sz="1100" dirty="0">
-                <a:solidFill>
-                  <a:schemeClr val="accent3"/>
-                </a:solidFill>
-              </a:rPr>
-              <a:t>→</a:t>
-            </a:r>
-            <a:endParaRPr lang="en-US" sz="1100" dirty="0"/>
-          </a:p>
-        </p:txBody>
-      </p:sp>
-      <p:sp>
-        <p:nvSpPr>
-          <p:cNvPr id="23" name="state-197"/>
-          <p:cNvSpPr/>
-          <p:nvPr/>
-        </p:nvSpPr>
-        <p:spPr>
-          <a:xfrm>
-            <a:off x="7680960" y="2032000"/>
-            <a:ext cx="1016000" cy="330200"/>
-          </a:xfrm>
-          <a:prstGeom prst="roundRect">
-            <a:avLst>
-              <a:gd name="adj" fmla="val 49846"/>
-            </a:avLst>
-          </a:prstGeom>
-          <a:solidFill>
-            <a:schemeClr val="bg2"/>
-          </a:solidFill>
-          <a:ln/>
-        </p:spPr>
-      </p:sp>
-      <p:sp>
-        <p:nvSpPr>
-          <p:cNvPr id="24" name="text-198"/>
-          <p:cNvSpPr txBox="1"/>
-          <p:nvPr/>
-        </p:nvSpPr>
-        <p:spPr>
-          <a:xfrm>
-            <a:off x="7680960" y="2032000"/>
-            <a:ext cx="1016000" cy="330200"/>
-          </a:xfrm>
-          <a:prstGeom prst="rect">
-            <a:avLst/>
-          </a:prstGeom>
-          <a:noFill/>
-          <a:ln/>
-        </p:spPr>
-        <p:txBody>
-          <a:bodyPr wrap="square" lIns="0" tIns="0" rIns="0" bIns="0" rtlCol="0" anchor="ctr"/>
-          <a:lstStyle/>
-          <a:p>
-            <a:pPr algn="ctr" indent="0" marL="0">
-              <a:buNone/>
-            </a:pPr>
-            <a:r>
-              <a:rPr lang="en-US" sz="1050" dirty="0">
-                <a:solidFill>
-                  <a:schemeClr val="tx1"/>
-                </a:solidFill>
-              </a:rPr>
-              <a:t>Доставлен</a:t>
-            </a:r>
-            <a:endParaRPr lang="en-US" sz="1050" dirty="0"/>
-          </a:p>
-        </p:txBody>
-      </p:sp>
-      <p:sp>
-        <p:nvSpPr>
-          <p:cNvPr id="25" name="text-199"/>
-          <p:cNvSpPr txBox="1"/>
-          <p:nvPr/>
-        </p:nvSpPr>
-        <p:spPr>
-          <a:xfrm>
-            <a:off x="8696960" y="2032000"/>
-            <a:ext cx="279400" cy="330200"/>
-          </a:xfrm>
-          <a:prstGeom prst="rect">
-            <a:avLst/>
-          </a:prstGeom>
-          <a:noFill/>
-          <a:ln/>
-        </p:spPr>
-        <p:txBody>
-          <a:bodyPr wrap="square" lIns="0" tIns="0" rIns="0" bIns="0" rtlCol="0" anchor="ctr"/>
-          <a:lstStyle/>
-          <a:p>
-            <a:pPr algn="ctr" indent="0" marL="0">
-              <a:buNone/>
-            </a:pPr>
-            <a:r>
-              <a:rPr lang="en-US" sz="1100" dirty="0">
-                <a:solidFill>
-                  <a:schemeClr val="accent3"/>
-                </a:solidFill>
-              </a:rPr>
-              <a:t>→</a:t>
-            </a:r>
-            <a:endParaRPr lang="en-US" sz="1100" dirty="0"/>
-          </a:p>
-        </p:txBody>
-      </p:sp>
-      <p:sp>
-        <p:nvSpPr>
-          <p:cNvPr id="26" name="state-200"/>
-          <p:cNvSpPr/>
-          <p:nvPr/>
-        </p:nvSpPr>
-        <p:spPr>
-          <a:xfrm>
-            <a:off x="8976360" y="2032000"/>
-            <a:ext cx="939800" cy="330200"/>
-          </a:xfrm>
-          <a:prstGeom prst="roundRect">
-            <a:avLst>
-              <a:gd name="adj" fmla="val 49846"/>
-            </a:avLst>
-          </a:prstGeom>
-          <a:solidFill>
-            <a:schemeClr val="bg2"/>
-          </a:solidFill>
-          <a:ln/>
-        </p:spPr>
-      </p:sp>
-      <p:sp>
-        <p:nvSpPr>
-          <p:cNvPr id="27" name="text-201"/>
-          <p:cNvSpPr txBox="1"/>
-          <p:nvPr/>
-        </p:nvSpPr>
-        <p:spPr>
-          <a:xfrm>
-            <a:off x="8976360" y="2032000"/>
-            <a:ext cx="939800" cy="330200"/>
-          </a:xfrm>
-          <a:prstGeom prst="rect">
-            <a:avLst/>
-          </a:prstGeom>
-          <a:noFill/>
-          <a:ln/>
-        </p:spPr>
-        <p:txBody>
-          <a:bodyPr wrap="square" lIns="0" tIns="0" rIns="0" bIns="0" rtlCol="0" anchor="ctr"/>
-          <a:lstStyle/>
-          <a:p>
-            <a:pPr algn="ctr" indent="0" marL="0">
-              <a:buNone/>
-            </a:pPr>
-            <a:r>
-              <a:rPr lang="en-US" sz="1050" dirty="0">
-                <a:solidFill>
-                  <a:schemeClr val="tx1"/>
-                </a:solidFill>
-              </a:rPr>
-              <a:t>Завершён</a:t>
-            </a:r>
-            <a:endParaRPr lang="en-US" sz="1050" dirty="0"/>
-          </a:p>
-        </p:txBody>
-      </p:sp>
-      <p:sp>
-        <p:nvSpPr>
-          <p:cNvPr id="28" name="text-202"/>
-          <p:cNvSpPr txBox="1"/>
-          <p:nvPr/>
-        </p:nvSpPr>
-        <p:spPr>
-          <a:xfrm>
-            <a:off x="594360" y="2463800"/>
-            <a:ext cx="10972800" cy="177800"/>
-          </a:xfrm>
-          <a:prstGeom prst="rect">
-            <a:avLst/>
-          </a:prstGeom>
-          <a:noFill/>
-          <a:ln/>
-        </p:spPr>
-        <p:txBody>
-          <a:bodyPr wrap="square" lIns="0" tIns="0" rIns="0" bIns="0" rtlCol="0" anchor="t"/>
-          <a:lstStyle/>
-          <a:p>
-            <a:pPr indent="0" marL="0">
-              <a:buNone/>
-            </a:pPr>
-            <a:r>
-              <a:rPr lang="en-US" sz="1000" dirty="0">
-                <a:solidFill>
-                  <a:schemeClr val="accent3"/>
-                </a:solidFill>
-              </a:rPr>
-              <a:t>Заказ можно отменить до сборки, вернуть после доставки, оплата может не пройти</a:t>
-            </a:r>
-            <a:endParaRPr lang="en-US" sz="1000" dirty="0"/>
-          </a:p>
-        </p:txBody>
-      </p:sp>
-      <p:sp>
-        <p:nvSpPr>
-          <p:cNvPr id="29" name="text-203"/>
-          <p:cNvSpPr txBox="1"/>
-          <p:nvPr/>
-        </p:nvSpPr>
-        <p:spPr>
-          <a:xfrm>
-            <a:off x="594360" y="2819400"/>
-            <a:ext cx="5080000" cy="177800"/>
-          </a:xfrm>
-          <a:prstGeom prst="rect">
-            <a:avLst/>
-          </a:prstGeom>
-          <a:noFill/>
-          <a:ln/>
-        </p:spPr>
-        <p:txBody>
-          <a:bodyPr wrap="square" lIns="0" tIns="0" rIns="0" bIns="0" rtlCol="0" anchor="t"/>
-          <a:lstStyle/>
-          <a:p>
-            <a:pPr indent="0" marL="0">
-              <a:buNone/>
-            </a:pPr>
-            <a:r>
-              <a:rPr lang="en-US" sz="900" b="1" spc="200" kern="0" dirty="0">
-                <a:solidFill>
-                  <a:schemeClr val="accent2"/>
-                </a:solidFill>
-              </a:rPr>
-              <a:t>ТАБЛИЦЫ</a:t>
-            </a:r>
-            <a:endParaRPr lang="en-US" sz="900" dirty="0"/>
-          </a:p>
-        </p:txBody>
-      </p:sp>
-      <p:sp>
-        <p:nvSpPr>
-          <p:cNvPr id="30" name="ent-head-204"/>
-          <p:cNvSpPr/>
-          <p:nvPr/>
-        </p:nvSpPr>
-        <p:spPr>
-          <a:xfrm>
-            <a:off x="594360" y="3073400"/>
-            <a:ext cx="2617470" cy="304800"/>
-          </a:xfrm>
-          <a:prstGeom prst="rect">
-            <a:avLst/>
-          </a:prstGeom>
-          <a:solidFill>
-            <a:schemeClr val="accent1"/>
-          </a:solidFill>
-          <a:ln/>
-        </p:spPr>
-      </p:sp>
-      <p:sp>
-        <p:nvSpPr>
-          <p:cNvPr id="31" name="text-205"/>
-          <p:cNvSpPr txBox="1"/>
-          <p:nvPr/>
-        </p:nvSpPr>
-        <p:spPr>
-          <a:xfrm>
-            <a:off x="721360" y="3073400"/>
-            <a:ext cx="2363470" cy="304800"/>
-          </a:xfrm>
-          <a:prstGeom prst="rect">
-            <a:avLst/>
-          </a:prstGeom>
-          <a:noFill/>
-          <a:ln/>
-        </p:spPr>
-        <p:txBody>
-          <a:bodyPr wrap="square" lIns="0" tIns="0" rIns="0" bIns="0" rtlCol="0" anchor="ctr"/>
-          <a:lstStyle/>
-          <a:p>
-            <a:pPr indent="0" marL="0">
-              <a:buNone/>
-            </a:pPr>
-            <a:r>
-              <a:rPr lang="en-US" sz="1100" b="1" dirty="0">
-                <a:solidFill>
-                  <a:schemeClr val="bg1"/>
-                </a:solidFill>
-              </a:rPr>
-              <a:t>products</a:t>
-            </a:r>
-            <a:endParaRPr lang="en-US" sz="1100" dirty="0"/>
-          </a:p>
-        </p:txBody>
-      </p:sp>
-      <p:sp>
-        <p:nvSpPr>
-          <p:cNvPr id="32" name="ent-body-206"/>
-          <p:cNvSpPr/>
-          <p:nvPr/>
-        </p:nvSpPr>
-        <p:spPr>
-          <a:xfrm>
-            <a:off x="594360" y="3378200"/>
-            <a:ext cx="2617470" cy="1676400"/>
-          </a:xfrm>
-          <a:prstGeom prst="rect">
-            <a:avLst/>
-          </a:prstGeom>
-          <a:solidFill>
-            <a:schemeClr val="bg2"/>
-          </a:solidFill>
-          <a:ln/>
-        </p:spPr>
-      </p:sp>
-      <p:sp>
-        <p:nvSpPr>
-          <p:cNvPr id="33" name="text-207"/>
-          <p:cNvSpPr txBox="1"/>
-          <p:nvPr/>
-        </p:nvSpPr>
-        <p:spPr>
-          <a:xfrm>
-            <a:off x="721360" y="3454400"/>
-            <a:ext cx="2363470" cy="1549400"/>
-          </a:xfrm>
-          <a:prstGeom prst="rect">
-            <a:avLst/>
-          </a:prstGeom>
-          <a:noFill/>
-          <a:ln/>
-        </p:spPr>
-        <p:txBody>
-          <a:bodyPr wrap="square" lIns="0" tIns="0" rIns="0" bIns="0" rtlCol="0" anchor="t"/>
-          <a:lstStyle/>
-          <a:p>
-            <a:pPr indent="0" marL="0">
-              <a:lnSpc>
-                <a:spcPts val="1600"/>
-              </a:lnSpc>
-              <a:buNone/>
-            </a:pPr>
-            <a:r>
-              <a:rPr lang="en-US" sz="1050" dirty="0">
-                <a:solidFill>
-                  <a:schemeClr val="tx1"/>
-                </a:solidFill>
-              </a:rPr>
-              <a:t>id</a:t>
-            </a:r>
-            <a:endParaRPr lang="en-US" sz="1050" dirty="0"/>
-          </a:p>
-          <a:p>
-            <a:pPr indent="0" marL="0">
-              <a:lnSpc>
-                <a:spcPts val="1600"/>
-              </a:lnSpc>
-              <a:buNone/>
-            </a:pPr>
-            <a:r>
-              <a:rPr lang="en-US" sz="1050" dirty="0">
-                <a:solidFill>
-                  <a:schemeClr val="tx1"/>
-                </a:solidFill>
-              </a:rPr>
-              <a:t>name</a:t>
-            </a:r>
-            <a:endParaRPr lang="en-US" sz="1050" dirty="0"/>
-          </a:p>
-          <a:p>
-            <a:pPr indent="0" marL="0">
-              <a:lnSpc>
-                <a:spcPts val="1600"/>
-              </a:lnSpc>
-              <a:buNone/>
-            </a:pPr>
-            <a:r>
-              <a:rPr lang="en-US" sz="1050" dirty="0">
-                <a:solidFill>
-                  <a:schemeClr val="tx1"/>
-                </a:solidFill>
-              </a:rPr>
-              <a:t>tea_type</a:t>
-            </a:r>
-            <a:endParaRPr lang="en-US" sz="1050" dirty="0"/>
-          </a:p>
-          <a:p>
-            <a:pPr indent="0" marL="0">
-              <a:lnSpc>
-                <a:spcPts val="1600"/>
-              </a:lnSpc>
-              <a:buNone/>
-            </a:pPr>
-            <a:r>
-              <a:rPr lang="en-US" sz="1050" dirty="0">
-                <a:solidFill>
-                  <a:schemeClr val="tx1"/>
-                </a:solidFill>
-              </a:rPr>
-              <a:t>origin_country</a:t>
-            </a:r>
-            <a:endParaRPr lang="en-US" sz="1050" dirty="0"/>
-          </a:p>
-          <a:p>
-            <a:pPr indent="0" marL="0">
-              <a:lnSpc>
-                <a:spcPts val="1600"/>
-              </a:lnSpc>
-              <a:buNone/>
-            </a:pPr>
-            <a:r>
-              <a:rPr lang="en-US" sz="1050" dirty="0">
-                <a:solidFill>
-                  <a:schemeClr val="tx1"/>
-                </a:solidFill>
-              </a:rPr>
-              <a:t>price</a:t>
-            </a:r>
-            <a:endParaRPr lang="en-US" sz="1050" dirty="0"/>
-          </a:p>
-          <a:p>
-            <a:pPr indent="0" marL="0">
-              <a:lnSpc>
-                <a:spcPts val="1600"/>
-              </a:lnSpc>
-              <a:buNone/>
-            </a:pPr>
-            <a:r>
-              <a:rPr lang="en-US" sz="1050" dirty="0">
-                <a:solidFill>
-                  <a:schemeClr val="tx1"/>
-                </a:solidFill>
-              </a:rPr>
-              <a:t>stock_quantity</a:t>
-            </a:r>
-            <a:endParaRPr lang="en-US" sz="1050" dirty="0"/>
-          </a:p>
-          <a:p>
-            <a:pPr indent="0" marL="0">
-              <a:lnSpc>
-                <a:spcPts val="1600"/>
-              </a:lnSpc>
-              <a:buNone/>
-            </a:pPr>
-            <a:r>
-              <a:rPr lang="en-US" sz="1050" dirty="0">
-                <a:solidFill>
-                  <a:schemeClr val="tx1"/>
-                </a:solidFill>
-              </a:rPr>
-              <a:t>category_id</a:t>
-            </a:r>
-            <a:endParaRPr lang="en-US" sz="1050" dirty="0"/>
-          </a:p>
-        </p:txBody>
-      </p:sp>
-      <p:sp>
-        <p:nvSpPr>
-          <p:cNvPr id="34" name="ent-head-208"/>
-          <p:cNvSpPr/>
-          <p:nvPr/>
-        </p:nvSpPr>
-        <p:spPr>
-          <a:xfrm>
-            <a:off x="3379470" y="3073400"/>
-            <a:ext cx="2617470" cy="304800"/>
-          </a:xfrm>
-          <a:prstGeom prst="rect">
-            <a:avLst/>
-          </a:prstGeom>
-          <a:solidFill>
-            <a:schemeClr val="accent1"/>
-          </a:solidFill>
-          <a:ln/>
-        </p:spPr>
-      </p:sp>
-      <p:sp>
-        <p:nvSpPr>
-          <p:cNvPr id="35" name="text-209"/>
-          <p:cNvSpPr txBox="1"/>
-          <p:nvPr/>
-        </p:nvSpPr>
-        <p:spPr>
-          <a:xfrm>
-            <a:off x="3506470" y="3073400"/>
-            <a:ext cx="2363470" cy="304800"/>
-          </a:xfrm>
-          <a:prstGeom prst="rect">
-            <a:avLst/>
-          </a:prstGeom>
-          <a:noFill/>
-          <a:ln/>
-        </p:spPr>
-        <p:txBody>
-          <a:bodyPr wrap="square" lIns="0" tIns="0" rIns="0" bIns="0" rtlCol="0" anchor="ctr"/>
-          <a:lstStyle/>
-          <a:p>
-            <a:pPr indent="0" marL="0">
-              <a:buNone/>
-            </a:pPr>
-            <a:r>
-              <a:rPr lang="en-US" sz="1100" b="1" dirty="0">
-                <a:solidFill>
-                  <a:schemeClr val="bg1"/>
-                </a:solidFill>
-              </a:rPr>
-              <a:t>orders</a:t>
-            </a:r>
-            <a:endParaRPr lang="en-US" sz="1100" dirty="0"/>
-          </a:p>
-        </p:txBody>
-      </p:sp>
-      <p:sp>
-        <p:nvSpPr>
-          <p:cNvPr id="36" name="ent-body-210"/>
-          <p:cNvSpPr/>
-          <p:nvPr/>
-        </p:nvSpPr>
-        <p:spPr>
-          <a:xfrm>
-            <a:off x="3379470" y="3378200"/>
-            <a:ext cx="2617470" cy="1676400"/>
-          </a:xfrm>
-          <a:prstGeom prst="rect">
-            <a:avLst/>
-          </a:prstGeom>
-          <a:solidFill>
-            <a:schemeClr val="bg2"/>
-          </a:solidFill>
-          <a:ln/>
-        </p:spPr>
-      </p:sp>
-      <p:sp>
-        <p:nvSpPr>
-          <p:cNvPr id="37" name="text-211"/>
-          <p:cNvSpPr txBox="1"/>
-          <p:nvPr/>
-        </p:nvSpPr>
-        <p:spPr>
-          <a:xfrm>
-            <a:off x="3506470" y="3454400"/>
-            <a:ext cx="2363470" cy="1549400"/>
-          </a:xfrm>
-          <a:prstGeom prst="rect">
-            <a:avLst/>
-          </a:prstGeom>
-          <a:noFill/>
-          <a:ln/>
-        </p:spPr>
-        <p:txBody>
-          <a:bodyPr wrap="square" lIns="0" tIns="0" rIns="0" bIns="0" rtlCol="0" anchor="t"/>
-          <a:lstStyle/>
-          <a:p>
-            <a:pPr indent="0" marL="0">
-              <a:lnSpc>
-                <a:spcPts val="1600"/>
-              </a:lnSpc>
-              <a:buNone/>
-            </a:pPr>
-            <a:r>
-              <a:rPr lang="en-US" sz="1050" dirty="0">
-                <a:solidFill>
-                  <a:schemeClr val="tx1"/>
-                </a:solidFill>
-              </a:rPr>
-              <a:t>id</a:t>
-            </a:r>
-            <a:endParaRPr lang="en-US" sz="1050" dirty="0"/>
-          </a:p>
-          <a:p>
-            <a:pPr indent="0" marL="0">
-              <a:lnSpc>
-                <a:spcPts val="1600"/>
-              </a:lnSpc>
-              <a:buNone/>
-            </a:pPr>
-            <a:r>
-              <a:rPr lang="en-US" sz="1050" dirty="0">
-                <a:solidFill>
-                  <a:schemeClr val="tx1"/>
-                </a:solidFill>
-              </a:rPr>
-              <a:t>client_id</a:t>
-            </a:r>
-            <a:endParaRPr lang="en-US" sz="1050" dirty="0"/>
-          </a:p>
-          <a:p>
-            <a:pPr indent="0" marL="0">
-              <a:lnSpc>
-                <a:spcPts val="1600"/>
-              </a:lnSpc>
-              <a:buNone/>
-            </a:pPr>
-            <a:r>
-              <a:rPr lang="en-US" sz="1050" dirty="0">
-                <a:solidFill>
-                  <a:schemeClr val="tx1"/>
-                </a:solidFill>
-              </a:rPr>
-              <a:t>status</a:t>
-            </a:r>
-            <a:endParaRPr lang="en-US" sz="1050" dirty="0"/>
-          </a:p>
-          <a:p>
-            <a:pPr indent="0" marL="0">
-              <a:lnSpc>
-                <a:spcPts val="1600"/>
-              </a:lnSpc>
-              <a:buNone/>
-            </a:pPr>
-            <a:r>
-              <a:rPr lang="en-US" sz="1050" dirty="0">
-                <a:solidFill>
-                  <a:schemeClr val="tx1"/>
-                </a:solidFill>
-              </a:rPr>
-              <a:t>total_sum</a:t>
-            </a:r>
-            <a:endParaRPr lang="en-US" sz="1050" dirty="0"/>
-          </a:p>
-          <a:p>
-            <a:pPr indent="0" marL="0">
-              <a:lnSpc>
-                <a:spcPts val="1600"/>
-              </a:lnSpc>
-              <a:buNone/>
-            </a:pPr>
-            <a:r>
-              <a:rPr lang="en-US" sz="1050" dirty="0">
-                <a:solidFill>
-                  <a:schemeClr val="tx1"/>
-                </a:solidFill>
-              </a:rPr>
-              <a:t>created_at</a:t>
-            </a:r>
-            <a:endParaRPr lang="en-US" sz="1050" dirty="0"/>
-          </a:p>
-        </p:txBody>
-      </p:sp>
-      <p:sp>
-        <p:nvSpPr>
-          <p:cNvPr id="38" name="ent-head-212"/>
-          <p:cNvSpPr/>
-          <p:nvPr/>
-        </p:nvSpPr>
-        <p:spPr>
-          <a:xfrm>
-            <a:off x="6164580" y="3073400"/>
-            <a:ext cx="2617470" cy="304800"/>
-          </a:xfrm>
-          <a:prstGeom prst="rect">
-            <a:avLst/>
-          </a:prstGeom>
-          <a:solidFill>
-            <a:schemeClr val="accent1"/>
-          </a:solidFill>
-          <a:ln/>
-        </p:spPr>
-      </p:sp>
-      <p:sp>
-        <p:nvSpPr>
-          <p:cNvPr id="39" name="text-213"/>
-          <p:cNvSpPr txBox="1"/>
-          <p:nvPr/>
-        </p:nvSpPr>
-        <p:spPr>
-          <a:xfrm>
-            <a:off x="6291580" y="3073400"/>
-            <a:ext cx="2363470" cy="304800"/>
-          </a:xfrm>
-          <a:prstGeom prst="rect">
-            <a:avLst/>
-          </a:prstGeom>
-          <a:noFill/>
-          <a:ln/>
-        </p:spPr>
-        <p:txBody>
-          <a:bodyPr wrap="square" lIns="0" tIns="0" rIns="0" bIns="0" rtlCol="0" anchor="ctr"/>
-          <a:lstStyle/>
-          <a:p>
-            <a:pPr indent="0" marL="0">
-              <a:buNone/>
-            </a:pPr>
-            <a:r>
-              <a:rPr lang="en-US" sz="1100" b="1" dirty="0">
-                <a:solidFill>
-                  <a:schemeClr val="bg1"/>
-                </a:solidFill>
-              </a:rPr>
-              <a:t>order_items</a:t>
-            </a:r>
-            <a:endParaRPr lang="en-US" sz="1100" dirty="0"/>
-          </a:p>
-        </p:txBody>
-      </p:sp>
-      <p:sp>
-        <p:nvSpPr>
-          <p:cNvPr id="40" name="ent-body-214"/>
-          <p:cNvSpPr/>
-          <p:nvPr/>
-        </p:nvSpPr>
-        <p:spPr>
-          <a:xfrm>
-            <a:off x="6164580" y="3378200"/>
-            <a:ext cx="2617470" cy="1676400"/>
-          </a:xfrm>
-          <a:prstGeom prst="rect">
-            <a:avLst/>
-          </a:prstGeom>
-          <a:solidFill>
-            <a:schemeClr val="bg2"/>
-          </a:solidFill>
-          <a:ln/>
-        </p:spPr>
-      </p:sp>
-      <p:sp>
-        <p:nvSpPr>
-          <p:cNvPr id="41" name="text-215"/>
-          <p:cNvSpPr txBox="1"/>
-          <p:nvPr/>
-        </p:nvSpPr>
-        <p:spPr>
-          <a:xfrm>
-            <a:off x="6291580" y="3454400"/>
-            <a:ext cx="2363470" cy="1549400"/>
-          </a:xfrm>
-          <a:prstGeom prst="rect">
-            <a:avLst/>
-          </a:prstGeom>
-          <a:noFill/>
-          <a:ln/>
-        </p:spPr>
-        <p:txBody>
-          <a:bodyPr wrap="square" lIns="0" tIns="0" rIns="0" bIns="0" rtlCol="0" anchor="t"/>
-          <a:lstStyle/>
-          <a:p>
-            <a:pPr indent="0" marL="0">
-              <a:lnSpc>
-                <a:spcPts val="1600"/>
-              </a:lnSpc>
-              <a:buNone/>
-            </a:pPr>
-            <a:r>
-              <a:rPr lang="en-US" sz="1050" dirty="0">
-                <a:solidFill>
-                  <a:schemeClr val="tx1"/>
-                </a:solidFill>
-              </a:rPr>
-              <a:t>id</a:t>
-            </a:r>
-            <a:endParaRPr lang="en-US" sz="1050" dirty="0"/>
-          </a:p>
-          <a:p>
-            <a:pPr indent="0" marL="0">
-              <a:lnSpc>
-                <a:spcPts val="1600"/>
-              </a:lnSpc>
-              <a:buNone/>
-            </a:pPr>
-            <a:r>
-              <a:rPr lang="en-US" sz="1050" dirty="0">
-                <a:solidFill>
-                  <a:schemeClr val="tx1"/>
-                </a:solidFill>
-              </a:rPr>
-              <a:t>order_id</a:t>
-            </a:r>
-            <a:endParaRPr lang="en-US" sz="1050" dirty="0"/>
-          </a:p>
-          <a:p>
-            <a:pPr indent="0" marL="0">
-              <a:lnSpc>
-                <a:spcPts val="1600"/>
-              </a:lnSpc>
-              <a:buNone/>
-            </a:pPr>
-            <a:r>
-              <a:rPr lang="en-US" sz="1050" dirty="0">
-                <a:solidFill>
-                  <a:schemeClr val="tx1"/>
-                </a:solidFill>
-              </a:rPr>
-              <a:t>product_id</a:t>
-            </a:r>
-            <a:endParaRPr lang="en-US" sz="1050" dirty="0"/>
-          </a:p>
-          <a:p>
-            <a:pPr indent="0" marL="0">
-              <a:lnSpc>
-                <a:spcPts val="1600"/>
-              </a:lnSpc>
-              <a:buNone/>
-            </a:pPr>
-            <a:r>
-              <a:rPr lang="en-US" sz="1050" dirty="0">
-                <a:solidFill>
-                  <a:schemeClr val="tx1"/>
-                </a:solidFill>
-              </a:rPr>
-              <a:t>quantity</a:t>
-            </a:r>
-            <a:endParaRPr lang="en-US" sz="1050" dirty="0"/>
-          </a:p>
-          <a:p>
-            <a:pPr indent="0" marL="0">
-              <a:lnSpc>
-                <a:spcPts val="1600"/>
-              </a:lnSpc>
-              <a:buNone/>
-            </a:pPr>
-            <a:r>
-              <a:rPr lang="en-US" sz="1050" dirty="0">
-                <a:solidFill>
-                  <a:schemeClr val="tx1"/>
-                </a:solidFill>
-              </a:rPr>
-              <a:t>price_at_order</a:t>
-            </a:r>
-            <a:endParaRPr lang="en-US" sz="1050" dirty="0"/>
-          </a:p>
-        </p:txBody>
-      </p:sp>
-      <p:sp>
-        <p:nvSpPr>
-          <p:cNvPr id="42" name="ent-head-216"/>
-          <p:cNvSpPr/>
-          <p:nvPr/>
-        </p:nvSpPr>
-        <p:spPr>
-          <a:xfrm>
-            <a:off x="8949690" y="3073400"/>
-            <a:ext cx="2617470" cy="304800"/>
-          </a:xfrm>
-          <a:prstGeom prst="rect">
-            <a:avLst/>
-          </a:prstGeom>
-          <a:solidFill>
-            <a:schemeClr val="bg2"/>
-          </a:solidFill>
-          <a:ln w="12700">
-            <a:solidFill>
-              <a:schemeClr val="accent3"/>
-            </a:solidFill>
-            <a:prstDash val="dash"/>
-          </a:ln>
-        </p:spPr>
-      </p:sp>
-      <p:sp>
-        <p:nvSpPr>
-          <p:cNvPr id="43" name="text-217"/>
-          <p:cNvSpPr txBox="1"/>
-          <p:nvPr/>
-        </p:nvSpPr>
-        <p:spPr>
-          <a:xfrm>
-            <a:off x="9076690" y="3073400"/>
-            <a:ext cx="2363470" cy="304800"/>
-          </a:xfrm>
-          <a:prstGeom prst="rect">
-            <a:avLst/>
-          </a:prstGeom>
-          <a:noFill/>
-          <a:ln/>
-        </p:spPr>
-        <p:txBody>
-          <a:bodyPr wrap="square" lIns="0" tIns="0" rIns="0" bIns="0" rtlCol="0" anchor="ctr"/>
-          <a:lstStyle/>
-          <a:p>
-            <a:pPr indent="0" marL="0">
-              <a:buNone/>
-            </a:pPr>
-            <a:r>
-              <a:rPr lang="en-US" sz="1100" b="1" dirty="0">
-                <a:solidFill>
-                  <a:schemeClr val="accent2"/>
-                </a:solidFill>
-              </a:rPr>
-              <a:t>batches (добавить)</a:t>
-            </a:r>
-            <a:endParaRPr lang="en-US" sz="1100" dirty="0"/>
-          </a:p>
-        </p:txBody>
-      </p:sp>
-      <p:sp>
-        <p:nvSpPr>
-          <p:cNvPr id="44" name="ent-body-218"/>
-          <p:cNvSpPr/>
-          <p:nvPr/>
-        </p:nvSpPr>
-        <p:spPr>
-          <a:xfrm>
-            <a:off x="8949690" y="3378200"/>
-            <a:ext cx="2617470" cy="1676400"/>
-          </a:xfrm>
-          <a:prstGeom prst="rect">
-            <a:avLst/>
-          </a:prstGeom>
-          <a:solidFill>
-            <a:schemeClr val="bg1"/>
-          </a:solidFill>
-          <a:ln w="12700">
-            <a:solidFill>
-              <a:schemeClr val="accent3"/>
-            </a:solidFill>
-            <a:prstDash val="dash"/>
-          </a:ln>
-        </p:spPr>
-      </p:sp>
-      <p:sp>
-        <p:nvSpPr>
-          <p:cNvPr id="45" name="text-219"/>
-          <p:cNvSpPr txBox="1"/>
-          <p:nvPr/>
-        </p:nvSpPr>
-        <p:spPr>
-          <a:xfrm>
-            <a:off x="9076690" y="3454400"/>
-            <a:ext cx="2363470" cy="1549400"/>
-          </a:xfrm>
-          <a:prstGeom prst="rect">
-            <a:avLst/>
-          </a:prstGeom>
-          <a:noFill/>
-          <a:ln/>
-        </p:spPr>
-        <p:txBody>
-          <a:bodyPr wrap="square" lIns="0" tIns="0" rIns="0" bIns="0" rtlCol="0" anchor="t"/>
-          <a:lstStyle/>
-          <a:p>
-            <a:pPr indent="0" marL="0">
-              <a:lnSpc>
-                <a:spcPts val="1600"/>
-              </a:lnSpc>
-              <a:buNone/>
-            </a:pPr>
-            <a:r>
-              <a:rPr lang="en-US" sz="1050" dirty="0">
-                <a:solidFill>
-                  <a:schemeClr val="accent2"/>
-                </a:solidFill>
-              </a:rPr>
-              <a:t>id</a:t>
-            </a:r>
-            <a:endParaRPr lang="en-US" sz="1050" dirty="0"/>
-          </a:p>
-          <a:p>
-            <a:pPr indent="0" marL="0">
-              <a:lnSpc>
-                <a:spcPts val="1600"/>
-              </a:lnSpc>
-              <a:buNone/>
-            </a:pPr>
-            <a:r>
-              <a:rPr lang="en-US" sz="1050" dirty="0">
-                <a:solidFill>
-                  <a:schemeClr val="accent2"/>
-                </a:solidFill>
-              </a:rPr>
-              <a:t>product_id</a:t>
-            </a:r>
-            <a:endParaRPr lang="en-US" sz="1050" dirty="0"/>
-          </a:p>
-          <a:p>
-            <a:pPr indent="0" marL="0">
-              <a:lnSpc>
-                <a:spcPts val="1600"/>
-              </a:lnSpc>
-              <a:buNone/>
-            </a:pPr>
-            <a:r>
-              <a:rPr lang="en-US" sz="1050" dirty="0">
-                <a:solidFill>
-                  <a:schemeClr val="accent2"/>
-                </a:solidFill>
-              </a:rPr>
-              <a:t>harvest_year</a:t>
-            </a:r>
-            <a:endParaRPr lang="en-US" sz="1050" dirty="0"/>
-          </a:p>
-          <a:p>
-            <a:pPr indent="0" marL="0">
-              <a:lnSpc>
-                <a:spcPts val="1600"/>
-              </a:lnSpc>
-              <a:buNone/>
-            </a:pPr>
-            <a:r>
-              <a:rPr lang="en-US" sz="1050" dirty="0">
-                <a:solidFill>
-                  <a:schemeClr val="accent2"/>
-                </a:solidFill>
-              </a:rPr>
-              <a:t>region</a:t>
-            </a:r>
-            <a:endParaRPr lang="en-US" sz="1050" dirty="0"/>
-          </a:p>
-          <a:p>
-            <a:pPr indent="0" marL="0">
-              <a:lnSpc>
-                <a:spcPts val="1600"/>
-              </a:lnSpc>
-              <a:buNone/>
-            </a:pPr>
-            <a:r>
-              <a:rPr lang="en-US" sz="1050" dirty="0">
-                <a:solidFill>
-                  <a:schemeClr val="accent2"/>
-                </a:solidFill>
-              </a:rPr>
-              <a:t>supplier</a:t>
-            </a:r>
-            <a:endParaRPr lang="en-US" sz="1050" dirty="0"/>
-          </a:p>
-          <a:p>
-            <a:pPr indent="0" marL="0">
-              <a:lnSpc>
-                <a:spcPts val="1600"/>
-              </a:lnSpc>
-              <a:buNone/>
-            </a:pPr>
-            <a:r>
-              <a:rPr lang="en-US" sz="1050" dirty="0">
-                <a:solidFill>
-                  <a:schemeClr val="accent2"/>
-                </a:solidFill>
-              </a:rPr>
-              <a:t>quantity</a:t>
-            </a:r>
-            <a:endParaRPr lang="en-US" sz="1050" dirty="0"/>
-          </a:p>
-        </p:txBody>
-      </p:sp>
-      <p:sp>
-        <p:nvSpPr>
-          <p:cNvPr id="46" name="card-220"/>
-          <p:cNvSpPr/>
-          <p:nvPr/>
-        </p:nvSpPr>
-        <p:spPr>
-          <a:xfrm>
-            <a:off x="594360" y="5232400"/>
-            <a:ext cx="10972800" cy="787400"/>
-          </a:xfrm>
-          <a:prstGeom prst="roundRect">
-            <a:avLst>
-              <a:gd name="adj" fmla="val 6968"/>
-            </a:avLst>
-          </a:prstGeom>
-          <a:solidFill>
-            <a:schemeClr val="accent1"/>
-          </a:solidFill>
-          <a:ln/>
-        </p:spPr>
-      </p:sp>
-      <p:sp>
-        <p:nvSpPr>
-          <p:cNvPr id="47" name="text-221"/>
-          <p:cNvSpPr txBox="1"/>
-          <p:nvPr/>
-        </p:nvSpPr>
-        <p:spPr>
-          <a:xfrm>
-            <a:off x="787400" y="5359400"/>
-            <a:ext cx="10591800" cy="558800"/>
-          </a:xfrm>
-          <a:prstGeom prst="rect">
-            <a:avLst/>
-          </a:prstGeom>
-          <a:noFill/>
-          <a:ln/>
-        </p:spPr>
-        <p:txBody>
-          <a:bodyPr wrap="square" lIns="0" tIns="0" rIns="0" bIns="0" rtlCol="0" anchor="ctr"/>
-          <a:lstStyle/>
-          <a:p>
-            <a:pPr indent="0" marL="0">
-              <a:buNone/>
-            </a:pPr>
-            <a:r>
-              <a:rPr lang="en-US" sz="1100" dirty="0">
-                <a:solidFill>
-                  <a:schemeClr val="bg1"/>
-                </a:solidFill>
-              </a:rPr>
-              <a:t>Резерв по требованию F-09: при оформлении заказа stock_quantity уменьшается в той же транзакции, что и запись заказа, а при отмене возвращается. Реализацию нужно подтвердить по коду прототипа.</a:t>
-            </a:r>
-            <a:endParaRPr lang="en-US" sz="1100" dirty="0"/>
           </a:p>
         </p:txBody>
       </p:sp>
@@ -13376,7 +6802,7 @@
                   <a:schemeClr val="tx1"/>
                 </a:solidFill>
               </a:rPr>
-              <a:t>Заказы по телефону, в мессенджерах и с маркетплейсов нигде не сводятся</a:t>
+              <a:t>Заказы приходят по телефону, в мессенджеры и с маркетплейсов, общего списка нет</a:t>
             </a:r>
             <a:endParaRPr lang="en-US" sz="1150" dirty="0"/>
           </a:p>
@@ -14086,7 +7512,7 @@
                   <a:schemeClr val="tx1"/>
                 </a:solidFill>
               </a:rPr>
-              <a:t>Оформление заказа, остаток резервируется</a:t>
+              <a:t>Оформление заказа и резерв остатка</a:t>
             </a:r>
             <a:endParaRPr lang="en-US" sz="1100" dirty="0"/>
           </a:p>
@@ -14310,7 +7736,7 @@
                   <a:schemeClr val="bg1"/>
                 </a:solidFill>
               </a:rPr>
-              <a:t>Витрина и учёт работают на одной модели данных. Покупатель ищет чай по виду, региону, обработке и вкусу, остаток резервируется при оформлении заказа, статус заказа виден в личном кабинете, у партии хранятся год урожая, регион и поставщик.</a:t>
+              <a:t>Витрина и учёт используют одну базу данных. Покупатель подбирает чай по виду, региону, обработке и вкусу. При оформлении заказа остаток резервируется, статус заказа виден в личном кабинете. Для каждой партии хранятся год урожая, регион и поставщик.</a:t>
             </a:r>
             <a:endParaRPr lang="en-US" sz="1200" dirty="0"/>
           </a:p>
@@ -15780,7 +9206,7 @@
                   <a:schemeClr val="tx1"/>
                 </a:solidFill>
               </a:rPr>
-              <a:t>Аналоги и итоговые баллы</a:t>
+              <a:t>Аналоги и выполненные пункты</a:t>
             </a:r>
             <a:endParaRPr lang="en-US" sz="2700" dirty="0"/>
           </a:p>
@@ -15818,7 +9244,7 @@
                   <a:schemeClr val="accent3"/>
                 </a:solidFill>
               </a:rPr>
-              <a:t>Каждый аналог оценён по пяти критериям, в каждом критерии 4 проверяемых пункта. Итог считается как среднее</a:t>
+              <a:t>Аналоги проверены по 20 пунктам, по четыре в каждом из пяти критериев. Выполненный пункт даёт 1, частично выполненный 0,5</a:t>
             </a:r>
             <a:endParaRPr lang="en-US" sz="1300" dirty="0"/>
           </a:p>
@@ -15979,7 +9405,7 @@
                             <a:schemeClr val="bg1"/>
                           </a:solidFill>
                         </a:rPr>
-                        <a:t>Итог</a:t>
+                        <a:t>Пунктов из 20</a:t>
                       </a:r>
                       <a:endParaRPr lang="en-US" sz="1100" dirty="0"/>
                     </a:p>
@@ -16129,7 +9555,7 @@
                             <a:schemeClr val="tx1"/>
                           </a:solidFill>
                         </a:rPr>
-                        <a:t>4,7</a:t>
+                        <a:t>18,5</a:t>
                       </a:r>
                       <a:endParaRPr lang="en-US" sz="1100" dirty="0"/>
                     </a:p>
@@ -16279,7 +9705,7 @@
                             <a:schemeClr val="tx1"/>
                           </a:solidFill>
                         </a:rPr>
-                        <a:t>4,0–4,4</a:t>
+                        <a:t>15–17</a:t>
                       </a:r>
                       <a:endParaRPr lang="en-US" sz="1100" dirty="0"/>
                     </a:p>
@@ -16316,7 +9742,7 @@
                             <a:schemeClr val="tx1"/>
                           </a:solidFill>
                         </a:rPr>
-                        <a:t>нет партий, собственная логика только через внешнее приложение</a:t>
+                        <a:t>нет партий, свою логику можно добавить только внешним приложением</a:t>
                       </a:r>
                       <a:endParaRPr lang="en-US" sz="1100" dirty="0"/>
                     </a:p>
@@ -16429,7 +9855,7 @@
                             <a:schemeClr val="tx1"/>
                           </a:solidFill>
                         </a:rPr>
-                        <a:t>4,0–4,2</a:t>
+                        <a:t>15–16</a:t>
                       </a:r>
                       <a:endParaRPr lang="en-US" sz="1100" dirty="0"/>
                     </a:p>
@@ -16466,7 +9892,7 @@
                             <a:schemeClr val="tx1"/>
                           </a:solidFill>
                         </a:rPr>
-                        <a:t>витрина отдельно, резерв появляется после обмена по расписанию</a:t>
+                        <a:t>витрина покупается отдельно, резерв появляется только после обмена по расписанию</a:t>
                       </a:r>
                       <a:endParaRPr lang="en-US" sz="1100" dirty="0"/>
                     </a:p>
@@ -16579,7 +10005,7 @@
                             <a:schemeClr val="tx1"/>
                           </a:solidFill>
                         </a:rPr>
-                        <a:t>4,1</a:t>
+                        <a:t>15,5</a:t>
                       </a:r>
                       <a:endParaRPr lang="en-US" sz="1100" dirty="0"/>
                     </a:p>
@@ -16729,7 +10155,7 @@
                             <a:schemeClr val="tx1"/>
                           </a:solidFill>
                         </a:rPr>
-                        <a:t>3,7</a:t>
+                        <a:t>13,5</a:t>
                       </a:r>
                       <a:endParaRPr lang="en-US" sz="1100" dirty="0"/>
                     </a:p>
@@ -16879,7 +10305,7 @@
                             <a:schemeClr val="tx1"/>
                           </a:solidFill>
                         </a:rPr>
-                        <a:t>2,9–3,1</a:t>
+                        <a:t>9,5–10,5</a:t>
                       </a:r>
                       <a:endParaRPr lang="en-US" sz="1100" dirty="0"/>
                     </a:p>
@@ -16916,7 +10342,7 @@
                             <a:schemeClr val="tx1"/>
                           </a:solidFill>
                         </a:rPr>
-                        <a:t>нет чеков по 54-ФЗ, хранения ПДн в РФ, «Мир» и СБП</a:t>
+                        <a:t>не формирует чеки по 54-ФЗ, не хранит ПДн в РФ, не принимает «Мир» и СБП</a:t>
                       </a:r>
                       <a:endParaRPr lang="en-US" sz="1100" dirty="0"/>
                     </a:p>
@@ -17029,7 +10455,7 @@
                             <a:schemeClr val="tx1"/>
                           </a:solidFill>
                         </a:rPr>
-                        <a:t>2,2</a:t>
+                        <a:t>6</a:t>
                       </a:r>
                       <a:endParaRPr lang="en-US" sz="1100" dirty="0"/>
                     </a:p>
@@ -17274,7 +10700,7 @@
                   <a:schemeClr val="accent2"/>
                 </a:solidFill>
               </a:rPr>
-              <a:t>Серым выделены аналоги, с которыми идёт сравнение на слайде 5: 1С-Битрикс набрал больше всех баллов, 1С:УТ единственный учитывает партии. Пункты и баллы по каждому критерию на слайде Д1.</a:t>
+              <a:t>Серым выделены аналоги для сравнения на слайде 5. 1С-Битрикс выполняет больше всех пунктов, 1С:УТ единственный ведёт учёт по партиям. Пункты по каждому критерию приведены на слайде Д1.</a:t>
             </a:r>
             <a:endParaRPr lang="en-US" sz="1100" dirty="0"/>
           </a:p>
@@ -17451,7 +10877,7 @@
                   <a:schemeClr val="accent3"/>
                 </a:solidFill>
               </a:rPr>
-              <a:t>Каждый критерий связан с требованием из ВКР. Все варианты проходят один и тот же сценарий</a:t>
+              <a:t>Каждый критерий связан с требованием из ВКР. Все варианты оцениваются на одном и том же сценарии</a:t>
             </a:r>
             <a:endParaRPr lang="en-US" sz="1300" dirty="0"/>
           </a:p>
@@ -17611,7 +11037,7 @@
                             <a:schemeClr val="bg1"/>
                           </a:solidFill>
                         </a:rPr>
-                        <a:t>Как измеряется</a:t>
+                        <a:t>Как оценивается</a:t>
                       </a:r>
                       <a:endParaRPr lang="en-US" sz="1100" dirty="0"/>
                     </a:p>
@@ -17724,7 +11150,7 @@
                             <a:schemeClr val="tx1"/>
                           </a:solidFill>
                         </a:rPr>
-                        <a:t>сколько из четырёх работает без доработки</a:t>
+                        <a:t>сколько из четырёх есть в фильтре без доработки</a:t>
                       </a:r>
                       <a:endParaRPr lang="en-US" sz="1050" dirty="0"/>
                     </a:p>
@@ -17763,7 +11189,7 @@
                             <a:schemeClr val="tx1"/>
                           </a:solidFill>
                         </a:rPr>
-                        <a:t>Время оформления заказа</a:t>
+                        <a:t>Действия и время покупателя до заказа</a:t>
                       </a:r>
                       <a:endParaRPr lang="en-US" sz="1050" dirty="0"/>
                     </a:p>
@@ -17837,7 +11263,7 @@
                             <a:schemeClr val="tx1"/>
                           </a:solidFill>
                         </a:rPr>
-                        <a:t>среднее по 5 прогонам, минимум и максимум</a:t>
+                        <a:t>число кликов и полей ввода, время по модели KLM</a:t>
                       </a:r>
                       <a:endParaRPr lang="en-US" sz="1050" dirty="0"/>
                     </a:p>
@@ -18296,7 +11722,7 @@
                   <a:schemeClr val="tx1"/>
                 </a:solidFill>
               </a:rPr>
-              <a:t>Покупатель ищет улун из Тайваня с цветочным вкусом, 100 г, и оформляет доставку. Администратор подтверждает заказ</a:t>
+              <a:t>Покупатель ищет улун из Тайваня с цветочным вкусом, 100 г, и оформляет доставку. Администратор передаёт заказ в доставку</a:t>
             </a:r>
             <a:endParaRPr lang="en-US" sz="1100" dirty="0"/>
           </a:p>
@@ -18314,7 +11740,7 @@
                   <a:schemeClr val="tx1"/>
                 </a:solidFill>
               </a:rPr>
-              <a:t>В каждой системе одни и те же 20 тестовых товаров</a:t>
+              <a:t>Данные покупателя везде одинаковые: имя, email, телефон, адрес</a:t>
             </a:r>
             <a:endParaRPr lang="en-US" sz="1100" dirty="0"/>
           </a:p>
@@ -18332,7 +11758,7 @@
                   <a:schemeClr val="tx1"/>
                 </a:solidFill>
               </a:rPr>
-              <a:t>У покупателя и администратора одинаковые права</a:t>
+              <a:t>Шаги прототипа взяты из сценария UC-01, шаги 1С-Битрикс из стандартного шаблона оформления заказа</a:t>
             </a:r>
             <a:endParaRPr lang="en-US" sz="1100" dirty="0"/>
           </a:p>
@@ -18350,25 +11776,7 @@
                   <a:schemeClr val="tx1"/>
                 </a:solidFill>
               </a:rPr>
-              <a:t>Пять засчитанных прогонов и один пробный, порядок систем меняется</a:t>
-            </a:r>
-            <a:endParaRPr lang="en-US" sz="1100" dirty="0"/>
-          </a:p>
-          <a:p>
-            <a:pPr marL="342900" indent="-342900">
-              <a:spcAft>
-                <a:spcPts val="600"/>
-              </a:spcAft>
-              <a:buSzPct val="100000"/>
-              <a:buChar char="•"/>
-            </a:pPr>
-            <a:r>
-              <a:rPr lang="en-US" sz="1100" dirty="0">
-                <a:solidFill>
-                  <a:schemeClr val="tx1"/>
-                </a:solidFill>
-              </a:rPr>
-              <a:t>Границы оценок «да», «частично» и «нет» заданы до замеров</a:t>
+              <a:t>Клик с выбором 2,65 с, поле ввода 3,45 с плюс 0,28 с на символ</a:t>
             </a:r>
             <a:endParaRPr lang="en-US" sz="1100" dirty="0"/>
           </a:p>
@@ -18422,7 +11830,7 @@
                   <a:schemeClr val="accent2"/>
                 </a:solidFill>
               </a:rPr>
-              <a:t>Аналоги проверяются на демоверсии 1С-Битрикс (30 дней) и демо-базе 1С:УТ. Если замер провести нельзя, шаги считаются по документации, и это отмечается в сноске.</a:t>
+              <a:t>Замеров с секундомером не было. Модель KLM (Card, Moran, Newell, 1980) позволяет оценить время работы с интерфейсом без участия пользователей.</a:t>
             </a:r>
             <a:endParaRPr lang="en-US" sz="1100" dirty="0"/>
           </a:p>
@@ -18666,13 +12074,13 @@
             <a:tbl>
               <a:tblPr/>
               <a:tblGrid>
-                <a:gridCol w="1905000"/>
-                <a:gridCol w="1498600"/>
-                <a:gridCol w="1498600"/>
-                <a:gridCol w="1498600"/>
+                <a:gridCol w="1778000"/>
+                <a:gridCol w="1397000"/>
                 <a:gridCol w="1651000"/>
                 <a:gridCol w="1651000"/>
-                <a:gridCol w="1270000"/>
+                <a:gridCol w="1651000"/>
+                <a:gridCol w="1651000"/>
+                <a:gridCol w="1193800"/>
               </a:tblGrid>
               <a:tr h="508000">
                 <a:tc>
@@ -18763,7 +12171,7 @@
                             <a:schemeClr val="bg1"/>
                           </a:solidFill>
                         </a:rPr>
-                        <a:t>Оформление заказа, мин*</a:t>
+                        <a:t>Покупатель*</a:t>
                       </a:r>
                       <a:endParaRPr lang="en-US" sz="1050" dirty="0"/>
                     </a:p>
@@ -18800,7 +12208,7 @@
                             <a:schemeClr val="bg1"/>
                           </a:solidFill>
                         </a:rPr>
-                        <a:t>Ручных операций на заказ*</a:t>
+                        <a:t>Ручных операций администратора**</a:t>
                       </a:r>
                       <a:endParaRPr lang="en-US" sz="1050" dirty="0"/>
                     </a:p>
@@ -18911,7 +12319,7 @@
                             <a:schemeClr val="bg1"/>
                           </a:solidFill>
                         </a:rPr>
-                        <a:t>Критериев на уровне лучшего</a:t>
+                        <a:t>Лучших из 5</a:t>
                       </a:r>
                       <a:endParaRPr lang="en-US" sz="1050" dirty="0"/>
                     </a:p>
@@ -18950,7 +12358,7 @@
                             <a:schemeClr val="tx1"/>
                           </a:solidFill>
                         </a:rPr>
-                        <a:t>Своя система</a:t>
+                        <a:t>1С-Битрикс</a:t>
                       </a:r>
                       <a:endParaRPr lang="en-US" sz="1050" dirty="0"/>
                     </a:p>
@@ -18969,7 +12377,7 @@
                       <a:noFill/>
                     </a:lnB>
                     <a:solidFill>
-                      <a:srgbClr val="E3E4EB"/>
+                      <a:schemeClr val="bg1"/>
                     </a:solidFill>
                   </a:tcPr>
                 </a:tc>
@@ -18982,12 +12390,12 @@
                         <a:buNone/>
                       </a:pPr>
                       <a:r>
-                        <a:rPr lang="en-US" sz="1050" i="1" dirty="0">
-                          <a:solidFill>
-                            <a:schemeClr val="accent3"/>
-                          </a:solidFill>
-                        </a:rPr>
-                        <a:t>[2 или 4] из 4</a:t>
+                        <a:rPr lang="en-US" sz="1050" dirty="0">
+                          <a:solidFill>
+                            <a:schemeClr val="tx1"/>
+                          </a:solidFill>
+                        </a:rPr>
+                        <a:t>4 из 4</a:t>
                       </a:r>
                       <a:endParaRPr lang="en-US" sz="1050" dirty="0"/>
                     </a:p>
@@ -19006,7 +12414,7 @@
                       <a:noFill/>
                     </a:lnB>
                     <a:solidFill>
-                      <a:srgbClr val="E3E4EB"/>
+                      <a:schemeClr val="accent4"/>
                     </a:solidFill>
                   </a:tcPr>
                 </a:tc>
@@ -19019,12 +12427,12 @@
                         <a:buNone/>
                       </a:pPr>
                       <a:r>
-                        <a:rPr lang="en-US" sz="1050" i="1" dirty="0">
-                          <a:solidFill>
-                            <a:schemeClr val="accent3"/>
-                          </a:solidFill>
-                        </a:rPr>
-                        <a:t>[замер]</a:t>
+                        <a:rPr lang="en-US" sz="1050" dirty="0">
+                          <a:solidFill>
+                            <a:schemeClr val="tx1"/>
+                          </a:solidFill>
+                        </a:rPr>
+                        <a:t>16 действий, 1,0 мин</a:t>
                       </a:r>
                       <a:endParaRPr lang="en-US" sz="1050" dirty="0"/>
                     </a:p>
@@ -19043,7 +12451,7 @@
                       <a:noFill/>
                     </a:lnB>
                     <a:solidFill>
-                      <a:srgbClr val="E3E4EB"/>
+                      <a:schemeClr val="accent4"/>
                     </a:solidFill>
                   </a:tcPr>
                 </a:tc>
@@ -19056,12 +12464,12 @@
                         <a:buNone/>
                       </a:pPr>
                       <a:r>
-                        <a:rPr lang="en-US" sz="1050" i="1" dirty="0">
-                          <a:solidFill>
-                            <a:schemeClr val="accent3"/>
-                          </a:solidFill>
-                        </a:rPr>
-                        <a:t>[замер]</a:t>
+                        <a:rPr lang="en-US" sz="1050" dirty="0">
+                          <a:solidFill>
+                            <a:schemeClr val="tx1"/>
+                          </a:solidFill>
+                        </a:rPr>
+                        <a:t>2</a:t>
                       </a:r>
                       <a:endParaRPr lang="en-US" sz="1050" dirty="0"/>
                     </a:p>
@@ -19080,7 +12488,7 @@
                       <a:noFill/>
                     </a:lnB>
                     <a:solidFill>
-                      <a:srgbClr val="E3E4EB"/>
+                      <a:schemeClr val="accent4"/>
                     </a:solidFill>
                   </a:tcPr>
                 </a:tc>
@@ -19093,12 +12501,12 @@
                         <a:buNone/>
                       </a:pPr>
                       <a:r>
-                        <a:rPr lang="en-US" sz="1050" i="1" dirty="0">
-                          <a:solidFill>
-                            <a:schemeClr val="accent3"/>
-                          </a:solidFill>
-                        </a:rPr>
-                        <a:t>[да или частично]</a:t>
+                        <a:rPr lang="en-US" sz="1050" dirty="0">
+                          <a:solidFill>
+                            <a:schemeClr val="tx1"/>
+                          </a:solidFill>
+                        </a:rPr>
+                        <a:t>частично (нет партий)</a:t>
                       </a:r>
                       <a:endParaRPr lang="en-US" sz="1050" dirty="0"/>
                     </a:p>
@@ -19117,7 +12525,7 @@
                       <a:noFill/>
                     </a:lnB>
                     <a:solidFill>
-                      <a:srgbClr val="E3E4EB"/>
+                      <a:schemeClr val="accent5"/>
                     </a:solidFill>
                   </a:tcPr>
                 </a:tc>
@@ -19135,7 +12543,7 @@
                             <a:schemeClr val="tx1"/>
                           </a:solidFill>
                         </a:rPr>
-                        <a:t>частично (интеграции не завершены)</a:t>
+                        <a:t>да</a:t>
                       </a:r>
                       <a:endParaRPr lang="en-US" sz="1050" dirty="0"/>
                     </a:p>
@@ -19154,7 +12562,7 @@
                       <a:noFill/>
                     </a:lnB>
                     <a:solidFill>
-                      <a:schemeClr val="accent5"/>
+                      <a:schemeClr val="accent4"/>
                     </a:solidFill>
                   </a:tcPr>
                 </a:tc>
@@ -19167,12 +12575,12 @@
                         <a:buNone/>
                       </a:pPr>
                       <a:r>
-                        <a:rPr lang="en-US" sz="1050" i="1" dirty="0">
-                          <a:solidFill>
-                            <a:schemeClr val="accent3"/>
-                          </a:solidFill>
-                        </a:rPr>
-                        <a:t>[из 5]</a:t>
+                        <a:rPr lang="en-US" sz="1050" b="1" dirty="0">
+                          <a:solidFill>
+                            <a:schemeClr val="tx1"/>
+                          </a:solidFill>
+                        </a:rPr>
+                        <a:t>5</a:t>
                       </a:r>
                       <a:endParaRPr lang="en-US" sz="1050" dirty="0"/>
                     </a:p>
@@ -19191,7 +12599,7 @@
                       <a:noFill/>
                     </a:lnB>
                     <a:solidFill>
-                      <a:srgbClr val="E3E4EB"/>
+                      <a:schemeClr val="bg1"/>
                     </a:solidFill>
                   </a:tcPr>
                 </a:tc>
@@ -19211,7 +12619,7 @@
                             <a:schemeClr val="tx1"/>
                           </a:solidFill>
                         </a:rPr>
-                        <a:t>1С-Битрикс</a:t>
+                        <a:t>Своя система</a:t>
                       </a:r>
                       <a:endParaRPr lang="en-US" sz="1050" dirty="0"/>
                     </a:p>
@@ -19230,7 +12638,7 @@
                       <a:noFill/>
                     </a:lnB>
                     <a:solidFill>
-                      <a:schemeClr val="bg1"/>
+                      <a:srgbClr val="E3E4EB"/>
                     </a:solidFill>
                   </a:tcPr>
                 </a:tc>
@@ -19248,7 +12656,7 @@
                             <a:schemeClr val="tx1"/>
                           </a:solidFill>
                         </a:rPr>
-                        <a:t>4 из 4 через свойства**</a:t>
+                        <a:t>2 из 4 (вид и регион)</a:t>
                       </a:r>
                       <a:endParaRPr lang="en-US" sz="1050" dirty="0"/>
                     </a:p>
@@ -19267,6 +12675,43 @@
                       <a:noFill/>
                     </a:lnB>
                     <a:solidFill>
+                      <a:schemeClr val="accent5"/>
+                    </a:solidFill>
+                  </a:tcPr>
+                </a:tc>
+                <a:tc>
+                  <a:txBody>
+                    <a:bodyPr/>
+                    <a:lstStyle/>
+                    <a:p>
+                      <a:pPr algn="ctr" indent="0" marL="0">
+                        <a:buNone/>
+                      </a:pPr>
+                      <a:r>
+                        <a:rPr lang="en-US" sz="1050" dirty="0">
+                          <a:solidFill>
+                            <a:schemeClr val="tx1"/>
+                          </a:solidFill>
+                        </a:rPr>
+                        <a:t>15 действий, 0,9 мин</a:t>
+                      </a:r>
+                      <a:endParaRPr lang="en-US" sz="1050" dirty="0"/>
+                    </a:p>
+                  </a:txBody>
+                  <a:tcPr marL="101600" marR="76200" marT="25400" marB="25400" anchor="ctr">
+                    <a:lnL w="0" cap="flat" cmpd="sng" algn="ctr">
+                      <a:noFill/>
+                    </a:lnL>
+                    <a:lnR w="0" cap="flat" cmpd="sng" algn="ctr">
+                      <a:noFill/>
+                    </a:lnR>
+                    <a:lnT w="0" cap="flat" cmpd="sng" algn="ctr">
+                      <a:noFill/>
+                    </a:lnT>
+                    <a:lnB w="0" cap="flat" cmpd="sng" algn="ctr">
+                      <a:noFill/>
+                    </a:lnB>
+                    <a:solidFill>
                       <a:schemeClr val="accent4"/>
                     </a:solidFill>
                   </a:tcPr>
@@ -19280,12 +12725,12 @@
                         <a:buNone/>
                       </a:pPr>
                       <a:r>
-                        <a:rPr lang="en-US" sz="1050" i="1" dirty="0">
-                          <a:solidFill>
-                            <a:schemeClr val="accent3"/>
-                          </a:solidFill>
-                        </a:rPr>
-                        <a:t>[замер]</a:t>
+                        <a:rPr lang="en-US" sz="1050" dirty="0">
+                          <a:solidFill>
+                            <a:schemeClr val="tx1"/>
+                          </a:solidFill>
+                        </a:rPr>
+                        <a:t>5 (по проекту 2)</a:t>
                       </a:r>
                       <a:endParaRPr lang="en-US" sz="1050" dirty="0"/>
                     </a:p>
@@ -19304,7 +12749,7 @@
                       <a:noFill/>
                     </a:lnB>
                     <a:solidFill>
-                      <a:schemeClr val="bg1"/>
+                      <a:schemeClr val="accent5"/>
                     </a:solidFill>
                   </a:tcPr>
                 </a:tc>
@@ -19317,12 +12762,12 @@
                         <a:buNone/>
                       </a:pPr>
                       <a:r>
-                        <a:rPr lang="en-US" sz="1050" i="1" dirty="0">
-                          <a:solidFill>
-                            <a:schemeClr val="accent3"/>
-                          </a:solidFill>
-                        </a:rPr>
-                        <a:t>[замер]</a:t>
+                        <a:rPr lang="en-US" sz="1050" dirty="0">
+                          <a:solidFill>
+                            <a:schemeClr val="tx1"/>
+                          </a:solidFill>
+                        </a:rPr>
+                        <a:t>частично (нет партий)</a:t>
                       </a:r>
                       <a:endParaRPr lang="en-US" sz="1050" dirty="0"/>
                     </a:p>
@@ -19341,7 +12786,7 @@
                       <a:noFill/>
                     </a:lnB>
                     <a:solidFill>
-                      <a:schemeClr val="bg1"/>
+                      <a:schemeClr val="accent5"/>
                     </a:solidFill>
                   </a:tcPr>
                 </a:tc>
@@ -19359,7 +12804,7 @@
                             <a:schemeClr val="tx1"/>
                           </a:solidFill>
                         </a:rPr>
-                        <a:t>частично (нет партий)</a:t>
+                        <a:t>частично (интеграции не завершены)</a:t>
                       </a:r>
                       <a:endParaRPr lang="en-US" sz="1050" dirty="0"/>
                     </a:p>
@@ -19391,12 +12836,12 @@
                         <a:buNone/>
                       </a:pPr>
                       <a:r>
-                        <a:rPr lang="en-US" sz="1050" dirty="0">
-                          <a:solidFill>
-                            <a:schemeClr val="tx1"/>
-                          </a:solidFill>
-                        </a:rPr>
-                        <a:t>да</a:t>
+                        <a:rPr lang="en-US" sz="1050" b="1" dirty="0">
+                          <a:solidFill>
+                            <a:schemeClr val="tx1"/>
+                          </a:solidFill>
+                        </a:rPr>
+                        <a:t>2</a:t>
                       </a:r>
                       <a:endParaRPr lang="en-US" sz="1050" dirty="0"/>
                     </a:p>
@@ -19415,44 +12860,7 @@
                       <a:noFill/>
                     </a:lnB>
                     <a:solidFill>
-                      <a:schemeClr val="accent4"/>
-                    </a:solidFill>
-                  </a:tcPr>
-                </a:tc>
-                <a:tc>
-                  <a:txBody>
-                    <a:bodyPr/>
-                    <a:lstStyle/>
-                    <a:p>
-                      <a:pPr algn="ctr" indent="0" marL="0">
-                        <a:buNone/>
-                      </a:pPr>
-                      <a:r>
-                        <a:rPr lang="en-US" sz="1050" i="1" dirty="0">
-                          <a:solidFill>
-                            <a:schemeClr val="accent3"/>
-                          </a:solidFill>
-                        </a:rPr>
-                        <a:t>[из 5]</a:t>
-                      </a:r>
-                      <a:endParaRPr lang="en-US" sz="1050" dirty="0"/>
-                    </a:p>
-                  </a:txBody>
-                  <a:tcPr marL="101600" marR="76200" marT="25400" marB="25400" anchor="ctr">
-                    <a:lnL w="0" cap="flat" cmpd="sng" algn="ctr">
-                      <a:noFill/>
-                    </a:lnL>
-                    <a:lnR w="0" cap="flat" cmpd="sng" algn="ctr">
-                      <a:noFill/>
-                    </a:lnR>
-                    <a:lnT w="0" cap="flat" cmpd="sng" algn="ctr">
-                      <a:noFill/>
-                    </a:lnT>
-                    <a:lnB w="0" cap="flat" cmpd="sng" algn="ctr">
-                      <a:noFill/>
-                    </a:lnB>
-                    <a:solidFill>
-                      <a:schemeClr val="bg1"/>
+                      <a:srgbClr val="E3E4EB"/>
                     </a:solidFill>
                   </a:tcPr>
                 </a:tc>
@@ -19541,12 +12949,12 @@
                         <a:buNone/>
                       </a:pPr>
                       <a:r>
-                        <a:rPr lang="en-US" sz="1050" i="1" dirty="0">
-                          <a:solidFill>
-                            <a:schemeClr val="accent3"/>
-                          </a:solidFill>
-                        </a:rPr>
-                        <a:t>[замер]</a:t>
+                        <a:rPr lang="en-US" sz="1050" dirty="0">
+                          <a:solidFill>
+                            <a:schemeClr val="tx1"/>
+                          </a:solidFill>
+                        </a:rPr>
+                        <a:t>16 действий, 1,0 мин</a:t>
                       </a:r>
                       <a:endParaRPr lang="en-US" sz="1050" dirty="0"/>
                     </a:p>
@@ -19565,7 +12973,7 @@
                       <a:noFill/>
                     </a:lnB>
                     <a:solidFill>
-                      <a:schemeClr val="bg1"/>
+                      <a:schemeClr val="accent4"/>
                     </a:solidFill>
                   </a:tcPr>
                 </a:tc>
@@ -19578,12 +12986,12 @@
                         <a:buNone/>
                       </a:pPr>
                       <a:r>
-                        <a:rPr lang="en-US" sz="1050" i="1" dirty="0">
-                          <a:solidFill>
-                            <a:schemeClr val="accent3"/>
-                          </a:solidFill>
-                        </a:rPr>
-                        <a:t>[замер]</a:t>
+                        <a:rPr lang="en-US" sz="1050" dirty="0">
+                          <a:solidFill>
+                            <a:schemeClr val="tx1"/>
+                          </a:solidFill>
+                        </a:rPr>
+                        <a:t>3</a:t>
                       </a:r>
                       <a:endParaRPr lang="en-US" sz="1050" dirty="0"/>
                     </a:p>
@@ -19602,7 +13010,7 @@
                       <a:noFill/>
                     </a:lnB>
                     <a:solidFill>
-                      <a:schemeClr val="bg1"/>
+                      <a:schemeClr val="accent5"/>
                     </a:solidFill>
                   </a:tcPr>
                 </a:tc>
@@ -19689,12 +13097,12 @@
                         <a:buNone/>
                       </a:pPr>
                       <a:r>
-                        <a:rPr lang="en-US" sz="1050" i="1" dirty="0">
-                          <a:solidFill>
-                            <a:schemeClr val="accent3"/>
-                          </a:solidFill>
-                        </a:rPr>
-                        <a:t>[из 5]</a:t>
+                        <a:rPr lang="en-US" sz="1050" b="1" dirty="0">
+                          <a:solidFill>
+                            <a:schemeClr val="tx1"/>
+                          </a:solidFill>
+                        </a:rPr>
+                        <a:t>2</a:t>
                       </a:r>
                       <a:endParaRPr lang="en-US" sz="1050" dirty="0"/>
                     </a:p>
@@ -19802,12 +13210,12 @@
                         <a:buNone/>
                       </a:pPr>
                       <a:r>
-                        <a:rPr lang="en-US" sz="1050" i="1" dirty="0">
-                          <a:solidFill>
-                            <a:schemeClr val="accent3"/>
-                          </a:solidFill>
-                        </a:rPr>
-                        <a:t>[замер]</a:t>
+                        <a:rPr lang="en-US" sz="1050" dirty="0">
+                          <a:solidFill>
+                            <a:schemeClr val="tx1"/>
+                          </a:solidFill>
+                        </a:rPr>
+                        <a:t>6 действий и ожидание ответа</a:t>
                       </a:r>
                       <a:endParaRPr lang="en-US" sz="1050" dirty="0"/>
                     </a:p>
@@ -19826,7 +13234,7 @@
                       <a:noFill/>
                     </a:lnB>
                     <a:solidFill>
-                      <a:schemeClr val="bg1"/>
+                      <a:schemeClr val="accent6"/>
                     </a:solidFill>
                   </a:tcPr>
                 </a:tc>
@@ -19863,7 +13271,7 @@
                       <a:noFill/>
                     </a:lnB>
                     <a:solidFill>
-                      <a:schemeClr val="bg1"/>
+                      <a:schemeClr val="accent6"/>
                     </a:solidFill>
                   </a:tcPr>
                 </a:tc>
@@ -19950,12 +13358,12 @@
                         <a:buNone/>
                       </a:pPr>
                       <a:r>
-                        <a:rPr lang="en-US" sz="1050" i="1" dirty="0">
-                          <a:solidFill>
-                            <a:schemeClr val="accent3"/>
-                          </a:solidFill>
-                        </a:rPr>
-                        <a:t>[из 5]</a:t>
+                        <a:rPr lang="en-US" sz="1050" b="1" dirty="0">
+                          <a:solidFill>
+                            <a:schemeClr val="tx1"/>
+                          </a:solidFill>
+                        </a:rPr>
+                        <a:t>0</a:t>
                       </a:r>
                       <a:endParaRPr lang="en-US" sz="1050" dirty="0"/>
                     </a:p>
@@ -20012,7 +13420,7 @@
         <p:spPr>
           <a:xfrm>
             <a:off x="797560" y="4419600"/>
-            <a:ext cx="762000" cy="177800"/>
+            <a:ext cx="1270000" cy="177800"/>
           </a:xfrm>
           <a:prstGeom prst="rect">
             <a:avLst/>
@@ -20033,7 +13441,7 @@
                   <a:schemeClr val="accent2"/>
                 </a:solidFill>
               </a:rPr>
-              <a:t>да</a:t>
+              <a:t>лучший результат</a:t>
             </a:r>
             <a:endParaRPr lang="en-US" sz="950" dirty="0"/>
           </a:p>
@@ -20047,7 +13455,7 @@
         </p:nvSpPr>
         <p:spPr>
           <a:xfrm>
-            <a:off x="1635760" y="4445000"/>
+            <a:off x="2219960" y="4445000"/>
             <a:ext cx="139700" cy="139700"/>
           </a:xfrm>
           <a:prstGeom prst="rect">
@@ -20067,8 +13475,8 @@
         </p:nvSpPr>
         <p:spPr>
           <a:xfrm>
-            <a:off x="1838960" y="4419600"/>
-            <a:ext cx="762000" cy="177800"/>
+            <a:off x="2423160" y="4419600"/>
+            <a:ext cx="1270000" cy="177800"/>
           </a:xfrm>
           <a:prstGeom prst="rect">
             <a:avLst/>
@@ -20103,7 +13511,7 @@
         </p:nvSpPr>
         <p:spPr>
           <a:xfrm>
-            <a:off x="2677160" y="4445000"/>
+            <a:off x="3413760" y="4445000"/>
             <a:ext cx="139700" cy="139700"/>
           </a:xfrm>
           <a:prstGeom prst="rect">
@@ -20123,8 +13531,8 @@
         </p:nvSpPr>
         <p:spPr>
           <a:xfrm>
-            <a:off x="2880360" y="4419600"/>
-            <a:ext cx="762000" cy="177800"/>
+            <a:off x="3616960" y="4419600"/>
+            <a:ext cx="1270000" cy="177800"/>
           </a:xfrm>
           <a:prstGeom prst="rect">
             <a:avLst/>
@@ -20159,8 +13567,8 @@
         </p:nvSpPr>
         <p:spPr>
           <a:xfrm>
-            <a:off x="3810000" y="4419600"/>
-            <a:ext cx="7757160" cy="177800"/>
+            <a:off x="4191000" y="4419600"/>
+            <a:ext cx="7376160" cy="177800"/>
           </a:xfrm>
           <a:prstGeom prst="rect">
             <a:avLst/>
@@ -20181,7 +13589,7 @@
                   <a:schemeClr val="accent3"/>
                 </a:solidFill>
               </a:rPr>
-              <a:t>* Среднее по 5 прогонам (слайд 4). ** Проверить в демоверсии. В скобках данные после замеров.</a:t>
+              <a:t>* Расчёт по модели KLM, условия на слайде 4. ** По описанию процессов, у аналогов по документации.</a:t>
             </a:r>
             <a:endParaRPr lang="en-US" sz="950" dirty="0"/>
           </a:p>
@@ -20275,7 +13683,7 @@
                   <a:schemeClr val="bg1"/>
                 </a:solidFill>
               </a:rPr>
-              <a:t>Поиск по атрибутам чая, резерв при оформлении и партии работают вместе только в собственной системе. На один заказ приходится [N] ручных операций, без системы их 7.</a:t>
+              <a:t>Покупателю везде нужно около минуты и 15–16 действий. По остальным критериям прототип пока уступает 1С-Битрикс: в фильтре два атрибута из четырёх, интеграции не доделаны, учёта по партиям нет.</a:t>
             </a:r>
             <a:endParaRPr lang="en-US" sz="1100" dirty="0"/>
           </a:p>
@@ -20369,7 +13777,7 @@
                   <a:schemeClr val="tx1"/>
                 </a:solidFill>
               </a:rPr>
-              <a:t>Готовые решения выполняют требования РФ (54-ФЗ, «Мир», СБП) без доработки. В прототипе оплата и доставка подключены через адаптеры не полностью.</a:t>
+              <a:t>Это расчёт, а не замер на пользователях. Шаги аналогов взяты из документации, их нужно сверить в демоверсии 1С-Битрикс, шаги прототипа сверить на самом прототипе.</a:t>
             </a:r>
             <a:endParaRPr lang="en-US" sz="1100" dirty="0"/>
           </a:p>
@@ -20744,7 +14152,7 @@
                             <a:schemeClr val="bg1"/>
                           </a:solidFill>
                         </a:rPr>
-                        <a:t>Не реализуется в своей системе</a:t>
+                        <a:t>Что своя система не делает</a:t>
                       </a:r>
                       <a:endParaRPr lang="en-US" sz="1100" dirty="0"/>
                     </a:p>
@@ -20820,7 +14228,7 @@
                             <a:schemeClr val="tx1"/>
                           </a:solidFill>
                         </a:rPr>
-                        <a:t>Чеки по 54-ФЗ, резерв, фильтр по свойствам, журнал событий и службы доставки есть из коробки. Итог 4,7</a:t>
+                        <a:t>Чеки по 54-ФЗ, резерв, фильтр по свойствам, журнал событий и службы доставки работают без доработки. Выполнено 18,5 пункта из 20</a:t>
                       </a:r>
                       <a:endParaRPr lang="en-US" sz="1050" dirty="0"/>
                     </a:p>
@@ -20970,7 +14378,7 @@
                             <a:schemeClr val="tx1"/>
                           </a:solidFill>
                         </a:rPr>
-                        <a:t>Запускается без разработки за 2 295 ₽ в месяц, оплата и доставка подключаются в настройках, хостинг на стороне платформы</a:t>
+                        <a:t>Магазин запускается без разработки за 2 295 ₽ в месяц, оплата и доставка подключаются в настройках, сервер обслуживает платформа</a:t>
                       </a:r>
                       <a:endParaRPr lang="en-US" sz="1050" dirty="0"/>
                     </a:p>
@@ -21194,7 +14602,7 @@
                             <a:schemeClr val="tx1"/>
                           </a:solidFill>
                         </a:rPr>
-                        <a:t>Бухучёт и фискализация остаются в 1С и ОФД, обмен через CommerceML 2</a:t>
+                        <a:t>Бухучёт и чеки: их ведут 1С и ОФД, обмен через CommerceML 2</a:t>
                       </a:r>
                       <a:endParaRPr lang="en-US" sz="1050" dirty="0"/>
                     </a:p>
@@ -21270,7 +14678,7 @@
                             <a:schemeClr val="tx1"/>
                           </a:solidFill>
                         </a:rPr>
-                        <a:t>Бесплатно и сразу. При небольшом потоке заказов быстрее</a:t>
+                        <a:t>Ничего не стоит и не требует подготовки. При небольшом числе заказов работает быстрее</a:t>
                       </a:r>
                       <a:endParaRPr lang="en-US" sz="1050" dirty="0"/>
                     </a:p>
@@ -21460,7 +14868,7 @@
                   <a:schemeClr val="bg1"/>
                 </a:solidFill>
               </a:rPr>
-              <a:t>Готовые решения закрывают витрину, оплату и чеки, но ни одно не учитывает партию чая вместе с резервом в момент заказа. Поэтому система разработана под эту задачу, а оплату, доставку и фискализацию получает от внешних сервисов через адаптеры.</a:t>
+              <a:t>Готовые решения дают витрину, оплату и чеки. Но ни одно из них не ведёт учёт по партиям вместе с резервом в момент заказа. Под эту задачу и разработана система, а оплату, доставку и фискализацию она получает от внешних сервисов через адаптеры.</a:t>
             </a:r>
             <a:endParaRPr lang="en-US" sz="1150" dirty="0"/>
           </a:p>
@@ -21637,7 +15045,7 @@
                   <a:schemeClr val="accent3"/>
                 </a:solidFill>
               </a:rPr>
-              <a:t>Сравнение с работой без системы. Готовые платформы в этих сценариях не проверялись</a:t>
+              <a:t>Своя система сравнивается с работой без системы. Готовые платформы в этих сценариях не тестировались</a:t>
             </a:r>
             <a:endParaRPr lang="en-US" sz="1300" dirty="0"/>
           </a:p>
@@ -21704,10 +15112,10 @@
             <a:tbl>
               <a:tblPr/>
               <a:tblGrid>
-                <a:gridCol w="2921000"/>
-                <a:gridCol w="2489200"/>
-                <a:gridCol w="3606800"/>
-                <a:gridCol w="1955800"/>
+                <a:gridCol w="2768600"/>
+                <a:gridCol w="2362200"/>
+                <a:gridCol w="3429000"/>
+                <a:gridCol w="2413000"/>
               </a:tblGrid>
               <a:tr h="365760">
                 <a:tc>
@@ -21835,7 +15243,7 @@
                             <a:schemeClr val="bg1"/>
                           </a:solidFill>
                         </a:rPr>
-                        <a:t>Подтверждение</a:t>
+                        <a:t>Чем подтверждено</a:t>
                       </a:r>
                       <a:endParaRPr lang="en-US" sz="1100" dirty="0"/>
                     </a:p>
@@ -21980,12 +15388,12 @@
                         <a:buNone/>
                       </a:pPr>
                       <a:r>
-                        <a:rPr lang="en-US" sz="1050" i="1" dirty="0">
-                          <a:solidFill>
-                            <a:schemeClr val="accent3"/>
-                          </a:solidFill>
-                        </a:rPr>
-                        <a:t>[провести тест]</a:t>
+                        <a:rPr lang="en-US" sz="1050" dirty="0">
+                          <a:solidFill>
+                            <a:schemeClr val="tx1"/>
+                          </a:solidFill>
+                        </a:rPr>
+                        <a:t>только спецификация, тест не проводился</a:t>
                       </a:r>
                       <a:endParaRPr lang="en-US" sz="1050" dirty="0"/>
                     </a:p>
@@ -22004,7 +15412,7 @@
                       <a:noFill/>
                     </a:lnB>
                     <a:solidFill>
-                      <a:schemeClr val="bg2"/>
+                      <a:schemeClr val="accent5"/>
                     </a:solidFill>
                   </a:tcPr>
                 </a:tc>
@@ -22130,12 +15538,12 @@
                         <a:buNone/>
                       </a:pPr>
                       <a:r>
-                        <a:rPr lang="en-US" sz="1050" i="1" dirty="0">
-                          <a:solidFill>
-                            <a:schemeClr val="accent3"/>
-                          </a:solidFill>
-                        </a:rPr>
-                        <a:t>[провести тест]</a:t>
+                        <a:rPr lang="en-US" sz="1050" dirty="0">
+                          <a:solidFill>
+                            <a:schemeClr val="tx1"/>
+                          </a:solidFill>
+                        </a:rPr>
+                        <a:t>отчёт, табл. 6: обработку отказа нужно доработать</a:t>
                       </a:r>
                       <a:endParaRPr lang="en-US" sz="1050" dirty="0"/>
                     </a:p>
@@ -22154,7 +15562,7 @@
                       <a:noFill/>
                     </a:lnB>
                     <a:solidFill>
-                      <a:schemeClr val="bg1"/>
+                      <a:schemeClr val="accent5"/>
                     </a:solidFill>
                   </a:tcPr>
                 </a:tc>
@@ -22248,7 +15656,7 @@
                             <a:schemeClr val="tx1"/>
                           </a:solidFill>
                         </a:rPr>
-                        <a:t>данные проверяются, выводится сообщение (UC-02, п. 3а)</a:t>
+                        <a:t>система проверяет данные и показывает ошибку (UC-02, п. 3а)</a:t>
                       </a:r>
                       <a:endParaRPr lang="en-US" sz="1050" dirty="0"/>
                     </a:p>
@@ -22280,12 +15688,12 @@
                         <a:buNone/>
                       </a:pPr>
                       <a:r>
-                        <a:rPr lang="en-US" sz="1050" i="1" dirty="0">
-                          <a:solidFill>
-                            <a:schemeClr val="accent3"/>
-                          </a:solidFill>
-                        </a:rPr>
-                        <a:t>[провести тест]</a:t>
+                        <a:rPr lang="en-US" sz="1050" dirty="0">
+                          <a:solidFill>
+                            <a:schemeClr val="tx1"/>
+                          </a:solidFill>
+                        </a:rPr>
+                        <a:t>только спецификация, тест не проводился</a:t>
                       </a:r>
                       <a:endParaRPr lang="en-US" sz="1050" dirty="0"/>
                     </a:p>
@@ -22304,7 +15712,7 @@
                       <a:noFill/>
                     </a:lnB>
                     <a:solidFill>
-                      <a:schemeClr val="bg2"/>
+                      <a:schemeClr val="accent5"/>
                     </a:solidFill>
                   </a:tcPr>
                 </a:tc>
@@ -22398,7 +15806,7 @@
                             <a:schemeClr val="tx1"/>
                           </a:solidFill>
                         </a:rPr>
-                        <a:t>доступ запрещён ролевой моделью (F-15)</a:t>
+                        <a:t>доступ закрыт настройками ролей (F-15)</a:t>
                       </a:r>
                       <a:endParaRPr lang="en-US" sz="1050" dirty="0"/>
                     </a:p>
@@ -22430,12 +15838,12 @@
                         <a:buNone/>
                       </a:pPr>
                       <a:r>
-                        <a:rPr lang="en-US" sz="1050" i="1" dirty="0">
-                          <a:solidFill>
-                            <a:schemeClr val="accent3"/>
-                          </a:solidFill>
-                        </a:rPr>
-                        <a:t>[провести тест]</a:t>
+                        <a:rPr lang="en-US" sz="1050" dirty="0">
+                          <a:solidFill>
+                            <a:schemeClr val="tx1"/>
+                          </a:solidFill>
+                        </a:rPr>
+                        <a:t>отчёт, разд. 2.7: роли внедрены, отдельного теста не было</a:t>
                       </a:r>
                       <a:endParaRPr lang="en-US" sz="1050" dirty="0"/>
                     </a:p>
@@ -22454,7 +15862,7 @@
                       <a:noFill/>
                     </a:lnB>
                     <a:solidFill>
-                      <a:schemeClr val="bg1"/>
+                      <a:schemeClr val="accent5"/>
                     </a:solidFill>
                   </a:tcPr>
                 </a:tc>
@@ -22585,7 +15993,7 @@
                             <a:schemeClr val="tx1"/>
                           </a:solidFill>
                         </a:rPr>
-                        <a:t>отчёт, разд. 2.6–2.7</a:t>
+                        <a:t>тест, отчёт, разд. 2.6</a:t>
                       </a:r>
                       <a:endParaRPr lang="en-US" sz="1050" dirty="0"/>
                     </a:p>
@@ -22604,7 +16012,7 @@
                       <a:noFill/>
                     </a:lnB>
                     <a:solidFill>
-                      <a:schemeClr val="bg2"/>
+                      <a:schemeClr val="accent4"/>
                     </a:solidFill>
                   </a:tcPr>
                 </a:tc>
@@ -22698,7 +16106,7 @@
                             <a:schemeClr val="tx1"/>
                           </a:solidFill>
                         </a:rPr>
-                        <a:t>заказ сохраняется в статусе «Ожидает оплату»*</a:t>
+                        <a:t>по проекту заказ сохраняется в статусе «Ожидает оплату»</a:t>
                       </a:r>
                       <a:endParaRPr lang="en-US" sz="1050" dirty="0"/>
                     </a:p>
@@ -22730,12 +16138,12 @@
                         <a:buNone/>
                       </a:pPr>
                       <a:r>
-                        <a:rPr lang="en-US" sz="1050" i="1" dirty="0">
-                          <a:solidFill>
-                            <a:schemeClr val="accent3"/>
-                          </a:solidFill>
-                        </a:rPr>
-                        <a:t>[провести тест]</a:t>
+                        <a:rPr lang="en-US" sz="1050" dirty="0">
+                          <a:solidFill>
+                            <a:schemeClr val="tx1"/>
+                          </a:solidFill>
+                        </a:rPr>
+                        <a:t>не проверялось</a:t>
                       </a:r>
                       <a:endParaRPr lang="en-US" sz="1050" dirty="0"/>
                     </a:p>
@@ -22754,7 +16162,7 @@
                       <a:noFill/>
                     </a:lnB>
                     <a:solidFill>
-                      <a:schemeClr val="bg1"/>
+                      <a:schemeClr val="accent5"/>
                     </a:solidFill>
                   </a:tcPr>
                 </a:tc>
@@ -22885,7 +16293,7 @@
                             <a:schemeClr val="tx1"/>
                           </a:solidFill>
                         </a:rPr>
-                        <a:t>Apache Benchmark, отчёт, табл. 5</a:t>
+                        <a:t>тест Apache Benchmark, отчёт, табл. 5</a:t>
                       </a:r>
                       <a:endParaRPr lang="en-US" sz="1050" dirty="0"/>
                     </a:p>
@@ -22904,7 +16312,7 @@
                       <a:noFill/>
                     </a:lnB>
                     <a:solidFill>
-                      <a:schemeClr val="bg2"/>
+                      <a:schemeClr val="accent4"/>
                     </a:solidFill>
                   </a:tcPr>
                 </a:tc>
@@ -22915,14 +16323,34 @@
       </p:graphicFrame>
       <p:sp>
         <p:nvSpPr>
-          <p:cNvPr id="8" name="text-112"/>
+          <p:cNvPr id="8" name="legend-112"/>
+          <p:cNvSpPr/>
+          <p:nvPr/>
+        </p:nvSpPr>
+        <p:spPr>
+          <a:xfrm>
+            <a:off x="594360" y="5511800"/>
+            <a:ext cx="139700" cy="139700"/>
+          </a:xfrm>
+          <a:prstGeom prst="rect">
+            <a:avLst/>
+          </a:prstGeom>
+          <a:solidFill>
+            <a:schemeClr val="accent4"/>
+          </a:solidFill>
+          <a:ln/>
+        </p:spPr>
+      </p:sp>
+      <p:sp>
+        <p:nvSpPr>
+          <p:cNvPr id="9" name="text-113"/>
           <p:cNvSpPr txBox="1"/>
           <p:nvPr/>
         </p:nvSpPr>
         <p:spPr>
           <a:xfrm>
-            <a:off x="594360" y="5486400"/>
-            <a:ext cx="10972800" cy="177800"/>
+            <a:off x="797560" y="5486400"/>
+            <a:ext cx="3810000" cy="177800"/>
           </a:xfrm>
           <a:prstGeom prst="rect">
             <a:avLst/>
@@ -22940,10 +16368,66 @@
             <a:r>
               <a:rPr lang="en-US" sz="950" dirty="0">
                 <a:solidFill>
-                  <a:schemeClr val="accent3"/>
+                  <a:schemeClr val="accent2"/>
                 </a:solidFill>
               </a:rPr>
-              <a:t>* Проверить с отключённым адаптером. В скобках проверки, которые нужно провести до показа.</a:t>
+              <a:t>проверено тестом</a:t>
+            </a:r>
+            <a:endParaRPr lang="en-US" sz="950" dirty="0"/>
+          </a:p>
+        </p:txBody>
+      </p:sp>
+      <p:sp>
+        <p:nvSpPr>
+          <p:cNvPr id="10" name="legend-114"/>
+          <p:cNvSpPr/>
+          <p:nvPr/>
+        </p:nvSpPr>
+        <p:spPr>
+          <a:xfrm>
+            <a:off x="2372360" y="5511800"/>
+            <a:ext cx="139700" cy="139700"/>
+          </a:xfrm>
+          <a:prstGeom prst="rect">
+            <a:avLst/>
+          </a:prstGeom>
+          <a:solidFill>
+            <a:schemeClr val="accent5"/>
+          </a:solidFill>
+          <a:ln/>
+        </p:spPr>
+      </p:sp>
+      <p:sp>
+        <p:nvSpPr>
+          <p:cNvPr id="11" name="text-115"/>
+          <p:cNvSpPr txBox="1"/>
+          <p:nvPr/>
+        </p:nvSpPr>
+        <p:spPr>
+          <a:xfrm>
+            <a:off x="2575560" y="5486400"/>
+            <a:ext cx="3810000" cy="177800"/>
+          </a:xfrm>
+          <a:prstGeom prst="rect">
+            <a:avLst/>
+          </a:prstGeom>
+          <a:noFill/>
+          <a:ln/>
+        </p:spPr>
+        <p:txBody>
+          <a:bodyPr wrap="square" lIns="0" tIns="0" rIns="0" bIns="0" rtlCol="0" anchor="t"/>
+          <a:lstStyle/>
+          <a:p>
+            <a:pPr indent="0" marL="0">
+              <a:buNone/>
+            </a:pPr>
+            <a:r>
+              <a:rPr lang="en-US" sz="950" dirty="0">
+                <a:solidFill>
+                  <a:schemeClr val="accent2"/>
+                </a:solidFill>
+              </a:rPr>
+              <a:t>только по документам или не проверялось</a:t>
             </a:r>
             <a:endParaRPr lang="en-US" sz="950" dirty="0"/>
           </a:p>
@@ -23166,7 +16650,7 @@
       </p:sp>
       <p:sp>
         <p:nvSpPr>
-          <p:cNvPr id="7" name="card-113"/>
+          <p:cNvPr id="7" name="card-116"/>
           <p:cNvSpPr/>
           <p:nvPr/>
         </p:nvSpPr>
@@ -23188,7 +16672,7 @@
       </p:sp>
       <p:sp>
         <p:nvSpPr>
-          <p:cNvPr id="8" name="text-114"/>
+          <p:cNvPr id="8" name="text-117"/>
           <p:cNvSpPr txBox="1"/>
           <p:nvPr/>
         </p:nvSpPr>
@@ -23224,7 +16708,7 @@
       </p:sp>
       <p:sp>
         <p:nvSpPr>
-          <p:cNvPr id="9" name="badge-115"/>
+          <p:cNvPr id="9" name="badge-118"/>
           <p:cNvSpPr/>
           <p:nvPr/>
         </p:nvSpPr>
@@ -23244,7 +16728,7 @@
       </p:sp>
       <p:sp>
         <p:nvSpPr>
-          <p:cNvPr id="10" name="text-116"/>
+          <p:cNvPr id="10" name="text-119"/>
           <p:cNvSpPr txBox="1"/>
           <p:nvPr/>
         </p:nvSpPr>
@@ -23280,7 +16764,7 @@
       </p:sp>
       <p:sp>
         <p:nvSpPr>
-          <p:cNvPr id="11" name="text-117"/>
+          <p:cNvPr id="11" name="text-120"/>
           <p:cNvSpPr txBox="1"/>
           <p:nvPr/>
         </p:nvSpPr>
@@ -23308,7 +16792,7 @@
                   <a:schemeClr val="tx1"/>
                 </a:solidFill>
               </a:rPr>
-              <a:t>По сумме баллов готовые решения выше: у 1С-Битрикс 4,7, у прототипа 3,1–3,9</a:t>
+              <a:t>По числу выполненных пунктов готовые решения впереди: у 1С-Битрикс 18,5 из 20, у прототипа 10,5–14,5</a:t>
             </a:r>
             <a:endParaRPr lang="en-US" sz="1100" dirty="0"/>
           </a:p>
@@ -23316,7 +16800,7 @@
       </p:sp>
       <p:sp>
         <p:nvSpPr>
-          <p:cNvPr id="12" name="badge-118"/>
+          <p:cNvPr id="12" name="badge-121"/>
           <p:cNvSpPr/>
           <p:nvPr/>
         </p:nvSpPr>
@@ -23336,7 +16820,7 @@
       </p:sp>
       <p:sp>
         <p:nvSpPr>
-          <p:cNvPr id="13" name="text-119"/>
+          <p:cNvPr id="13" name="text-122"/>
           <p:cNvSpPr txBox="1"/>
           <p:nvPr/>
         </p:nvSpPr>
@@ -23372,7 +16856,7 @@
       </p:sp>
       <p:sp>
         <p:nvSpPr>
-          <p:cNvPr id="14" name="text-120"/>
+          <p:cNvPr id="14" name="text-123"/>
           <p:cNvSpPr txBox="1"/>
           <p:nvPr/>
         </p:nvSpPr>
@@ -23408,7 +16892,7 @@
       </p:sp>
       <p:sp>
         <p:nvSpPr>
-          <p:cNvPr id="15" name="badge-121"/>
+          <p:cNvPr id="15" name="badge-124"/>
           <p:cNvSpPr/>
           <p:nvPr/>
         </p:nvSpPr>
@@ -23428,7 +16912,7 @@
       </p:sp>
       <p:sp>
         <p:nvSpPr>
-          <p:cNvPr id="16" name="text-122"/>
+          <p:cNvPr id="16" name="text-125"/>
           <p:cNvSpPr txBox="1"/>
           <p:nvPr/>
         </p:nvSpPr>
@@ -23464,7 +16948,7 @@
       </p:sp>
       <p:sp>
         <p:nvSpPr>
-          <p:cNvPr id="17" name="text-123"/>
+          <p:cNvPr id="17" name="text-126"/>
           <p:cNvSpPr txBox="1"/>
           <p:nvPr/>
         </p:nvSpPr>
@@ -23500,7 +16984,7 @@
       </p:sp>
       <p:sp>
         <p:nvSpPr>
-          <p:cNvPr id="18" name="badge-124"/>
+          <p:cNvPr id="18" name="badge-127"/>
           <p:cNvSpPr/>
           <p:nvPr/>
         </p:nvSpPr>
@@ -23520,7 +17004,7 @@
       </p:sp>
       <p:sp>
         <p:nvSpPr>
-          <p:cNvPr id="19" name="text-125"/>
+          <p:cNvPr id="19" name="text-128"/>
           <p:cNvSpPr txBox="1"/>
           <p:nvPr/>
         </p:nvSpPr>
@@ -23556,7 +17040,7 @@
       </p:sp>
       <p:sp>
         <p:nvSpPr>
-          <p:cNvPr id="20" name="text-126"/>
+          <p:cNvPr id="20" name="text-129"/>
           <p:cNvSpPr txBox="1"/>
           <p:nvPr/>
         </p:nvSpPr>
@@ -23592,7 +17076,7 @@
       </p:sp>
       <p:sp>
         <p:nvSpPr>
-          <p:cNvPr id="21" name="badge-127"/>
+          <p:cNvPr id="21" name="badge-130"/>
           <p:cNvSpPr/>
           <p:nvPr/>
         </p:nvSpPr>
@@ -23612,7 +17096,7 @@
       </p:sp>
       <p:sp>
         <p:nvSpPr>
-          <p:cNvPr id="22" name="text-128"/>
+          <p:cNvPr id="22" name="text-131"/>
           <p:cNvSpPr txBox="1"/>
           <p:nvPr/>
         </p:nvSpPr>
@@ -23648,7 +17132,7 @@
       </p:sp>
       <p:sp>
         <p:nvSpPr>
-          <p:cNvPr id="23" name="text-129"/>
+          <p:cNvPr id="23" name="text-132"/>
           <p:cNvSpPr txBox="1"/>
           <p:nvPr/>
         </p:nvSpPr>
@@ -23676,7 +17160,7 @@
                   <a:schemeClr val="tx1"/>
                 </a:solidFill>
               </a:rPr>
-              <a:t>Аналоги проверялись на демоверсиях, результат привязан к дате и версии</a:t>
+              <a:t>В прототипе нет учёта по партиям, в фильтре два атрибута из четырёх</a:t>
             </a:r>
             <a:endParaRPr lang="en-US" sz="1100" dirty="0"/>
           </a:p>
@@ -23684,7 +17168,7 @@
       </p:sp>
       <p:sp>
         <p:nvSpPr>
-          <p:cNvPr id="24" name="badge-130"/>
+          <p:cNvPr id="24" name="badge-133"/>
           <p:cNvSpPr/>
           <p:nvPr/>
         </p:nvSpPr>
@@ -23704,7 +17188,7 @@
       </p:sp>
       <p:sp>
         <p:nvSpPr>
-          <p:cNvPr id="25" name="text-131"/>
+          <p:cNvPr id="25" name="text-134"/>
           <p:cNvSpPr txBox="1"/>
           <p:nvPr/>
         </p:nvSpPr>
@@ -23740,7 +17224,7 @@
       </p:sp>
       <p:sp>
         <p:nvSpPr>
-          <p:cNvPr id="26" name="text-132"/>
+          <p:cNvPr id="26" name="text-135"/>
           <p:cNvSpPr txBox="1"/>
           <p:nvPr/>
         </p:nvSpPr>
@@ -23776,7 +17260,7 @@
       </p:sp>
       <p:graphicFrame>
         <p:nvGraphicFramePr>
-          <p:cNvPr id="10" name="table-133"/>
+          <p:cNvPr id="10" name="table-136"/>
           <p:cNvGraphicFramePr>
             <a:graphicFrameLocks noGrp="1"/>
           </p:cNvGraphicFramePr>
@@ -24262,7 +17746,7 @@
       </p:graphicFrame>
       <p:sp>
         <p:nvSpPr>
-          <p:cNvPr id="28" name="text-134"/>
+          <p:cNvPr id="28" name="text-137"/>
           <p:cNvSpPr txBox="1"/>
           <p:nvPr/>
         </p:nvSpPr>
